--- a/기획/SPACE ROBBER_기획서.pptx
+++ b/기획/SPACE ROBBER_기획서.pptx
@@ -5,23 +5,24 @@
     <p:sldMasterId id="2147483648" r:id="rId1"/>
   </p:sldMasterIdLst>
   <p:notesMasterIdLst>
-    <p:notesMasterId r:id="rId16"/>
+    <p:notesMasterId r:id="rId17"/>
   </p:notesMasterIdLst>
   <p:sldIdLst>
     <p:sldId id="256" r:id="rId2"/>
     <p:sldId id="277" r:id="rId3"/>
     <p:sldId id="278" r:id="rId4"/>
     <p:sldId id="279" r:id="rId5"/>
-    <p:sldId id="281" r:id="rId6"/>
-    <p:sldId id="274" r:id="rId7"/>
-    <p:sldId id="270" r:id="rId8"/>
-    <p:sldId id="271" r:id="rId9"/>
-    <p:sldId id="272" r:id="rId10"/>
-    <p:sldId id="273" r:id="rId11"/>
-    <p:sldId id="275" r:id="rId12"/>
-    <p:sldId id="276" r:id="rId13"/>
-    <p:sldId id="282" r:id="rId14"/>
-    <p:sldId id="280" r:id="rId15"/>
+    <p:sldId id="283" r:id="rId6"/>
+    <p:sldId id="281" r:id="rId7"/>
+    <p:sldId id="274" r:id="rId8"/>
+    <p:sldId id="270" r:id="rId9"/>
+    <p:sldId id="271" r:id="rId10"/>
+    <p:sldId id="272" r:id="rId11"/>
+    <p:sldId id="273" r:id="rId12"/>
+    <p:sldId id="275" r:id="rId13"/>
+    <p:sldId id="276" r:id="rId14"/>
+    <p:sldId id="282" r:id="rId15"/>
+    <p:sldId id="280" r:id="rId16"/>
   </p:sldIdLst>
   <p:sldSz cx="12192000" cy="6858000"/>
   <p:notesSz cx="6858000" cy="9144000"/>
@@ -882,7 +883,7 @@
           <a:p>
             <a:fld id="{FC7D8850-8826-4FCE-AEB7-6CFF3287BE1E}" type="datetimeFigureOut">
               <a:rPr lang="ko-KR" altLang="en-US" smtClean="0"/>
-              <a:t>2025-11-05</a:t>
+              <a:t>2025-11-07</a:t>
             </a:fld>
             <a:endParaRPr lang="ko-KR" altLang="en-US"/>
           </a:p>
@@ -1380,7 +1381,7 @@
           <a:p>
             <a:fld id="{14842228-062C-4EDD-A77B-B07B3B8A579C}" type="datetime1">
               <a:rPr lang="ko-KR" altLang="en-US" smtClean="0"/>
-              <a:t>2025-11-05</a:t>
+              <a:t>2025-11-07</a:t>
             </a:fld>
             <a:endParaRPr lang="ko-KR" altLang="en-US"/>
           </a:p>
@@ -1578,7 +1579,7 @@
           <a:p>
             <a:fld id="{26A685F8-59F3-4A43-89FC-0577DFBCC6D7}" type="datetime1">
               <a:rPr lang="ko-KR" altLang="en-US" smtClean="0"/>
-              <a:t>2025-11-05</a:t>
+              <a:t>2025-11-07</a:t>
             </a:fld>
             <a:endParaRPr lang="ko-KR" altLang="en-US"/>
           </a:p>
@@ -1786,7 +1787,7 @@
           <a:p>
             <a:fld id="{9B2EAD45-FB6B-48A3-9244-60043185CB83}" type="datetime1">
               <a:rPr lang="ko-KR" altLang="en-US" smtClean="0"/>
-              <a:t>2025-11-05</a:t>
+              <a:t>2025-11-07</a:t>
             </a:fld>
             <a:endParaRPr lang="ko-KR" altLang="en-US"/>
           </a:p>
@@ -1984,7 +1985,7 @@
           <a:p>
             <a:fld id="{89A6D206-0A43-4A81-BD76-9B86C975423A}" type="datetime1">
               <a:rPr lang="ko-KR" altLang="en-US" smtClean="0"/>
-              <a:t>2025-11-05</a:t>
+              <a:t>2025-11-07</a:t>
             </a:fld>
             <a:endParaRPr lang="ko-KR" altLang="en-US"/>
           </a:p>
@@ -2259,7 +2260,7 @@
           <a:p>
             <a:fld id="{AC93C00E-B4FF-439E-8FAF-C83B045C2F0C}" type="datetime1">
               <a:rPr lang="ko-KR" altLang="en-US" smtClean="0"/>
-              <a:t>2025-11-05</a:t>
+              <a:t>2025-11-07</a:t>
             </a:fld>
             <a:endParaRPr lang="ko-KR" altLang="en-US"/>
           </a:p>
@@ -2524,7 +2525,7 @@
           <a:p>
             <a:fld id="{782566C5-B4D2-448D-AAF6-9C2DEFE80D1C}" type="datetime1">
               <a:rPr lang="ko-KR" altLang="en-US" smtClean="0"/>
-              <a:t>2025-11-05</a:t>
+              <a:t>2025-11-07</a:t>
             </a:fld>
             <a:endParaRPr lang="ko-KR" altLang="en-US"/>
           </a:p>
@@ -2936,7 +2937,7 @@
           <a:p>
             <a:fld id="{9717C296-44F7-4BE7-B376-480499877D73}" type="datetime1">
               <a:rPr lang="ko-KR" altLang="en-US" smtClean="0"/>
-              <a:t>2025-11-05</a:t>
+              <a:t>2025-11-07</a:t>
             </a:fld>
             <a:endParaRPr lang="ko-KR" altLang="en-US"/>
           </a:p>
@@ -3077,7 +3078,7 @@
           <a:p>
             <a:fld id="{E6619BE8-F293-40B6-8D93-83AFB17EE8F6}" type="datetime1">
               <a:rPr lang="ko-KR" altLang="en-US" smtClean="0"/>
-              <a:t>2025-11-05</a:t>
+              <a:t>2025-11-07</a:t>
             </a:fld>
             <a:endParaRPr lang="ko-KR" altLang="en-US"/>
           </a:p>
@@ -3190,7 +3191,7 @@
           <a:p>
             <a:fld id="{47662FD7-D91E-46BF-BF9C-3AD41E51EB4D}" type="datetime1">
               <a:rPr lang="ko-KR" altLang="en-US" smtClean="0"/>
-              <a:t>2025-11-05</a:t>
+              <a:t>2025-11-07</a:t>
             </a:fld>
             <a:endParaRPr lang="ko-KR" altLang="en-US"/>
           </a:p>
@@ -3501,7 +3502,7 @@
           <a:p>
             <a:fld id="{911DC4CE-C275-4099-BBDF-0C56F81D271D}" type="datetime1">
               <a:rPr lang="ko-KR" altLang="en-US" smtClean="0"/>
-              <a:t>2025-11-05</a:t>
+              <a:t>2025-11-07</a:t>
             </a:fld>
             <a:endParaRPr lang="ko-KR" altLang="en-US"/>
           </a:p>
@@ -3792,7 +3793,7 @@
           <a:p>
             <a:fld id="{EE3471FB-7383-4F1C-A42C-E68CEC12F0D2}" type="datetime1">
               <a:rPr lang="ko-KR" altLang="en-US" smtClean="0"/>
-              <a:t>2025-11-05</a:t>
+              <a:t>2025-11-07</a:t>
             </a:fld>
             <a:endParaRPr lang="ko-KR" altLang="en-US"/>
           </a:p>
@@ -4033,7 +4034,7 @@
           <a:p>
             <a:fld id="{313347F6-7B41-4084-9EC2-A3B9F64C65D7}" type="datetime1">
               <a:rPr lang="ko-KR" altLang="en-US" smtClean="0"/>
-              <a:t>2025-11-05</a:t>
+              <a:t>2025-11-07</a:t>
             </a:fld>
             <a:endParaRPr lang="ko-KR" altLang="en-US"/>
           </a:p>
@@ -4666,6 +4667,568 @@
           <p:cNvPr id="2" name="제목 1">
             <a:extLst>
               <a:ext uri="{FF2B5EF4-FFF2-40B4-BE49-F238E27FC236}">
+                <a16:creationId xmlns:a16="http://schemas.microsoft.com/office/drawing/2014/main" id="{52BCFE61-56FB-9FD5-7B08-AC06F639CB19}"/>
+              </a:ext>
+            </a:extLst>
+          </p:cNvPr>
+          <p:cNvSpPr>
+            <a:spLocks noGrp="1"/>
+          </p:cNvSpPr>
+          <p:nvPr>
+            <p:ph type="title"/>
+          </p:nvPr>
+        </p:nvSpPr>
+        <p:spPr/>
+        <p:txBody>
+          <a:bodyPr/>
+          <a:lstStyle/>
+          <a:p>
+            <a:r>
+              <a:rPr lang="ko-KR" altLang="en-US" dirty="0"/>
+              <a:t>파워 레벨 시스템</a:t>
+            </a:r>
+            <a:r>
+              <a:rPr lang="en-US" altLang="ko-KR" dirty="0"/>
+              <a:t>		_</a:t>
+            </a:r>
+            <a:r>
+              <a:rPr lang="ko-KR" altLang="en-US" dirty="0"/>
+              <a:t>몬스터 </a:t>
+            </a:r>
+            <a:r>
+              <a:rPr lang="ko-KR" altLang="en-US" dirty="0" err="1"/>
+              <a:t>스폰</a:t>
+            </a:r>
+            <a:endParaRPr lang="ko-KR" altLang="en-US" dirty="0"/>
+          </a:p>
+        </p:txBody>
+      </p:sp>
+      <p:sp>
+        <p:nvSpPr>
+          <p:cNvPr id="3" name="내용 개체 틀 2">
+            <a:extLst>
+              <a:ext uri="{FF2B5EF4-FFF2-40B4-BE49-F238E27FC236}">
+                <a16:creationId xmlns:a16="http://schemas.microsoft.com/office/drawing/2014/main" id="{8F3AA84A-B3CE-27B5-E10C-1B665E6A1335}"/>
+              </a:ext>
+            </a:extLst>
+          </p:cNvPr>
+          <p:cNvSpPr>
+            <a:spLocks noGrp="1"/>
+          </p:cNvSpPr>
+          <p:nvPr>
+            <p:ph idx="1"/>
+          </p:nvPr>
+        </p:nvSpPr>
+        <p:spPr>
+          <a:xfrm>
+            <a:off x="177188" y="953655"/>
+            <a:ext cx="11809164" cy="5468797"/>
+          </a:xfrm>
+        </p:spPr>
+        <p:txBody>
+          <a:bodyPr>
+            <a:noAutofit/>
+          </a:bodyPr>
+          <a:lstStyle/>
+          <a:p>
+            <a:r>
+              <a:rPr lang="ko-KR" altLang="en-US" dirty="0" err="1"/>
+              <a:t>리썰</a:t>
+            </a:r>
+            <a:r>
+              <a:rPr lang="ko-KR" altLang="en-US" dirty="0"/>
+              <a:t> 컴퍼니의 </a:t>
+            </a:r>
+            <a:r>
+              <a:rPr lang="en-US" altLang="ko-KR" dirty="0"/>
+              <a:t>‘</a:t>
+            </a:r>
+            <a:r>
+              <a:rPr lang="ko-KR" altLang="en-US" dirty="0"/>
+              <a:t>파워 레벨 시스템</a:t>
+            </a:r>
+            <a:r>
+              <a:rPr lang="en-US" altLang="ko-KR" dirty="0"/>
+              <a:t>’</a:t>
+            </a:r>
+            <a:r>
+              <a:rPr lang="ko-KR" altLang="en-US" dirty="0"/>
+              <a:t>을 이용하여</a:t>
+            </a:r>
+            <a:r>
+              <a:rPr lang="en-US" altLang="ko-KR" dirty="0"/>
+              <a:t> </a:t>
+            </a:r>
+            <a:r>
+              <a:rPr lang="ko-KR" altLang="en-US" dirty="0"/>
+              <a:t>몬스터의 난이도 조절</a:t>
+            </a:r>
+            <a:endParaRPr lang="en-US" altLang="ko-KR" dirty="0"/>
+          </a:p>
+          <a:p>
+            <a:endParaRPr lang="en-US" altLang="ko-KR" dirty="0"/>
+          </a:p>
+          <a:p>
+            <a:r>
+              <a:rPr lang="ko-KR" altLang="en-US" dirty="0"/>
+              <a:t>행성별로 고유한 </a:t>
+            </a:r>
+            <a:r>
+              <a:rPr lang="en-US" altLang="ko-KR" dirty="0"/>
+              <a:t>‘</a:t>
+            </a:r>
+            <a:r>
+              <a:rPr lang="ko-KR" altLang="en-US" dirty="0"/>
+              <a:t>총 파워 레벨</a:t>
+            </a:r>
+            <a:r>
+              <a:rPr lang="en-US" altLang="ko-KR" dirty="0"/>
+              <a:t>’</a:t>
+            </a:r>
+            <a:r>
+              <a:rPr lang="ko-KR" altLang="en-US" dirty="0"/>
+              <a:t>을 갖는다</a:t>
+            </a:r>
+            <a:r>
+              <a:rPr lang="en-US" altLang="ko-KR" dirty="0"/>
+              <a:t>.</a:t>
+            </a:r>
+          </a:p>
+          <a:p>
+            <a:r>
+              <a:rPr lang="ko-KR" altLang="en-US" dirty="0"/>
+              <a:t>몬스터는 종류별로 고유한 </a:t>
+            </a:r>
+            <a:r>
+              <a:rPr lang="en-US" altLang="ko-KR" dirty="0"/>
+              <a:t>‘</a:t>
+            </a:r>
+            <a:r>
+              <a:rPr lang="ko-KR" altLang="en-US" dirty="0"/>
+              <a:t>파워 레벨</a:t>
+            </a:r>
+            <a:r>
+              <a:rPr lang="en-US" altLang="ko-KR" dirty="0"/>
+              <a:t>‘</a:t>
+            </a:r>
+            <a:r>
+              <a:rPr lang="ko-KR" altLang="en-US" dirty="0"/>
+              <a:t>을 갖는다</a:t>
+            </a:r>
+            <a:r>
+              <a:rPr lang="en-US" altLang="ko-KR" dirty="0"/>
+              <a:t>.</a:t>
+            </a:r>
+          </a:p>
+          <a:p>
+            <a:endParaRPr lang="en-US" altLang="ko-KR" dirty="0"/>
+          </a:p>
+          <a:p>
+            <a:r>
+              <a:rPr lang="ko-KR" altLang="en-US" dirty="0"/>
+              <a:t>두 수치 모두 높을 수록 더 위협적임</a:t>
+            </a:r>
+            <a:r>
+              <a:rPr lang="en-US" altLang="ko-KR" dirty="0"/>
+              <a:t>.</a:t>
+            </a:r>
+          </a:p>
+          <a:p>
+            <a:endParaRPr lang="en-US" altLang="ko-KR" dirty="0"/>
+          </a:p>
+          <a:p>
+            <a:r>
+              <a:rPr lang="ko-KR" altLang="en-US" dirty="0"/>
+              <a:t>행성에 플레이어가 도착해 </a:t>
+            </a:r>
+            <a:r>
+              <a:rPr lang="ko-KR" altLang="en-US" dirty="0" err="1"/>
+              <a:t>몬스터들이</a:t>
+            </a:r>
+            <a:r>
+              <a:rPr lang="ko-KR" altLang="en-US" dirty="0"/>
+              <a:t> </a:t>
+            </a:r>
+            <a:r>
+              <a:rPr lang="ko-KR" altLang="en-US" dirty="0" err="1"/>
+              <a:t>스폰될</a:t>
+            </a:r>
+            <a:r>
+              <a:rPr lang="ko-KR" altLang="en-US" dirty="0"/>
+              <a:t> 때</a:t>
+            </a:r>
+            <a:r>
+              <a:rPr lang="en-US" altLang="ko-KR" dirty="0"/>
+              <a:t>, </a:t>
+            </a:r>
+            <a:r>
+              <a:rPr lang="ko-KR" altLang="en-US" dirty="0" err="1"/>
+              <a:t>몬스터들은</a:t>
+            </a:r>
+            <a:r>
+              <a:rPr lang="ko-KR" altLang="en-US" dirty="0"/>
+              <a:t> 행성의 </a:t>
+            </a:r>
+            <a:r>
+              <a:rPr lang="en-US" altLang="ko-KR" dirty="0"/>
+              <a:t>‘</a:t>
+            </a:r>
+            <a:r>
+              <a:rPr lang="ko-KR" altLang="en-US" dirty="0"/>
+              <a:t>총 파워 레벨</a:t>
+            </a:r>
+            <a:r>
+              <a:rPr lang="en-US" altLang="ko-KR" dirty="0"/>
+              <a:t>‘</a:t>
+            </a:r>
+            <a:r>
+              <a:rPr lang="ko-KR" altLang="en-US" dirty="0"/>
+              <a:t>에 맞춰 생성된다</a:t>
+            </a:r>
+            <a:r>
+              <a:rPr lang="en-US" altLang="ko-KR" dirty="0"/>
+              <a:t>.</a:t>
+            </a:r>
+          </a:p>
+          <a:p>
+            <a:pPr marL="0" indent="0">
+              <a:buNone/>
+            </a:pPr>
+            <a:r>
+              <a:rPr lang="en-US" altLang="ko-KR" dirty="0"/>
+              <a:t>Ex.</a:t>
+            </a:r>
+            <a:r>
+              <a:rPr lang="ko-KR" altLang="en-US" dirty="0"/>
+              <a:t> 가장 쉬운 행성</a:t>
+            </a:r>
+            <a:r>
+              <a:rPr lang="en-US" altLang="ko-KR" dirty="0"/>
+              <a:t>1</a:t>
+            </a:r>
+            <a:r>
+              <a:rPr lang="ko-KR" altLang="en-US" dirty="0"/>
+              <a:t>의 </a:t>
+            </a:r>
+            <a:r>
+              <a:rPr lang="en-US" altLang="ko-KR" dirty="0"/>
+              <a:t>‘</a:t>
+            </a:r>
+            <a:r>
+              <a:rPr lang="ko-KR" altLang="en-US" dirty="0"/>
+              <a:t>총 파워 레벨</a:t>
+            </a:r>
+            <a:r>
+              <a:rPr lang="en-US" altLang="ko-KR" dirty="0"/>
+              <a:t>‘</a:t>
+            </a:r>
+            <a:r>
+              <a:rPr lang="ko-KR" altLang="en-US" dirty="0"/>
+              <a:t>은 </a:t>
+            </a:r>
+            <a:r>
+              <a:rPr lang="en-US" altLang="ko-KR" dirty="0"/>
+              <a:t>20</a:t>
+            </a:r>
+            <a:r>
+              <a:rPr lang="ko-KR" altLang="en-US" dirty="0"/>
+              <a:t>이라고 가정한다</a:t>
+            </a:r>
+            <a:r>
+              <a:rPr lang="en-US" altLang="ko-KR" dirty="0"/>
+              <a:t>. </a:t>
+            </a:r>
+            <a:r>
+              <a:rPr lang="ko-KR" altLang="en-US" dirty="0"/>
+              <a:t>몬스터</a:t>
+            </a:r>
+            <a:r>
+              <a:rPr lang="en-US" altLang="ko-KR" dirty="0"/>
+              <a:t> a</a:t>
+            </a:r>
+            <a:r>
+              <a:rPr lang="ko-KR" altLang="en-US" dirty="0"/>
+              <a:t>의 </a:t>
+            </a:r>
+            <a:r>
+              <a:rPr lang="en-US" altLang="ko-KR" dirty="0"/>
+              <a:t>‘</a:t>
+            </a:r>
+            <a:r>
+              <a:rPr lang="ko-KR" altLang="en-US" dirty="0"/>
+              <a:t>파워 레벨</a:t>
+            </a:r>
+            <a:r>
+              <a:rPr lang="en-US" altLang="ko-KR" dirty="0"/>
+              <a:t>‘</a:t>
+            </a:r>
+            <a:r>
+              <a:rPr lang="ko-KR" altLang="en-US" dirty="0"/>
+              <a:t>은 </a:t>
+            </a:r>
+            <a:r>
+              <a:rPr lang="en-US" altLang="ko-KR" dirty="0"/>
+              <a:t>2, </a:t>
+            </a:r>
+            <a:r>
+              <a:rPr lang="ko-KR" altLang="en-US" dirty="0"/>
+              <a:t>몬스터 </a:t>
+            </a:r>
+            <a:r>
+              <a:rPr lang="en-US" altLang="ko-KR" dirty="0"/>
+              <a:t>b</a:t>
+            </a:r>
+            <a:r>
+              <a:rPr lang="ko-KR" altLang="en-US" dirty="0"/>
+              <a:t>의 </a:t>
+            </a:r>
+            <a:r>
+              <a:rPr lang="en-US" altLang="ko-KR" dirty="0"/>
+              <a:t>‘</a:t>
+            </a:r>
+            <a:r>
+              <a:rPr lang="ko-KR" altLang="en-US" dirty="0"/>
+              <a:t>파워 레벨</a:t>
+            </a:r>
+            <a:r>
+              <a:rPr lang="en-US" altLang="ko-KR" dirty="0"/>
+              <a:t>‘</a:t>
+            </a:r>
+            <a:r>
+              <a:rPr lang="ko-KR" altLang="en-US" dirty="0"/>
+              <a:t>은 </a:t>
+            </a:r>
+            <a:r>
+              <a:rPr lang="en-US" altLang="ko-KR" dirty="0"/>
+              <a:t>4</a:t>
+            </a:r>
+            <a:r>
+              <a:rPr lang="ko-KR" altLang="en-US" dirty="0"/>
+              <a:t>이라고 가정한다</a:t>
+            </a:r>
+            <a:r>
+              <a:rPr lang="en-US" altLang="ko-KR" dirty="0"/>
+              <a:t>.</a:t>
+            </a:r>
+            <a:r>
+              <a:rPr lang="ko-KR" altLang="en-US" dirty="0"/>
+              <a:t> 행성</a:t>
+            </a:r>
+            <a:r>
+              <a:rPr lang="en-US" altLang="ko-KR" dirty="0"/>
+              <a:t>1</a:t>
+            </a:r>
+            <a:r>
+              <a:rPr lang="ko-KR" altLang="en-US" dirty="0"/>
+              <a:t>의 총 파워 레벨은 </a:t>
+            </a:r>
+            <a:r>
+              <a:rPr lang="en-US" altLang="ko-KR" dirty="0"/>
+              <a:t>20</a:t>
+            </a:r>
+            <a:r>
+              <a:rPr lang="ko-KR" altLang="en-US" dirty="0"/>
+              <a:t>이므로</a:t>
+            </a:r>
+            <a:r>
+              <a:rPr lang="en-US" altLang="ko-KR" dirty="0"/>
+              <a:t>, </a:t>
+            </a:r>
+            <a:r>
+              <a:rPr lang="ko-KR" altLang="en-US" dirty="0"/>
+              <a:t>몬스터 </a:t>
+            </a:r>
+            <a:r>
+              <a:rPr lang="en-US" altLang="ko-KR" dirty="0"/>
+              <a:t>a</a:t>
+            </a:r>
+            <a:r>
+              <a:rPr lang="ko-KR" altLang="en-US" dirty="0"/>
+              <a:t>가 </a:t>
+            </a:r>
+            <a:r>
+              <a:rPr lang="en-US" altLang="ko-KR" dirty="0"/>
+              <a:t>6</a:t>
+            </a:r>
+            <a:r>
+              <a:rPr lang="ko-KR" altLang="en-US" dirty="0"/>
+              <a:t>마리</a:t>
+            </a:r>
+            <a:r>
+              <a:rPr lang="en-US" altLang="ko-KR" dirty="0"/>
+              <a:t>(12), </a:t>
+            </a:r>
+            <a:r>
+              <a:rPr lang="ko-KR" altLang="en-US" dirty="0"/>
+              <a:t>몬스터 </a:t>
+            </a:r>
+            <a:r>
+              <a:rPr lang="en-US" altLang="ko-KR" dirty="0"/>
+              <a:t>b</a:t>
+            </a:r>
+            <a:r>
+              <a:rPr lang="ko-KR" altLang="en-US" dirty="0"/>
+              <a:t>가 </a:t>
+            </a:r>
+            <a:r>
+              <a:rPr lang="en-US" altLang="ko-KR" dirty="0"/>
+              <a:t>2</a:t>
+            </a:r>
+            <a:r>
+              <a:rPr lang="ko-KR" altLang="en-US" dirty="0"/>
+              <a:t>마리</a:t>
+            </a:r>
+            <a:r>
+              <a:rPr lang="en-US" altLang="ko-KR" dirty="0"/>
+              <a:t>(8)</a:t>
+            </a:r>
+            <a:r>
+              <a:rPr lang="ko-KR" altLang="en-US" dirty="0"/>
+              <a:t> </a:t>
+            </a:r>
+            <a:r>
+              <a:rPr lang="ko-KR" altLang="en-US" dirty="0" err="1"/>
+              <a:t>스폰된다</a:t>
+            </a:r>
+            <a:r>
+              <a:rPr lang="en-US" altLang="ko-KR" dirty="0"/>
+              <a:t>.</a:t>
+            </a:r>
+          </a:p>
+          <a:p>
+            <a:pPr marL="0" indent="0">
+              <a:buNone/>
+            </a:pPr>
+            <a:endParaRPr lang="en-US" altLang="ko-KR" dirty="0"/>
+          </a:p>
+          <a:p>
+            <a:r>
+              <a:rPr lang="ko-KR" altLang="en-US" dirty="0"/>
+              <a:t>행성별로 몬스터의 </a:t>
+            </a:r>
+            <a:r>
+              <a:rPr lang="en-US" altLang="ko-KR" dirty="0"/>
+              <a:t>‘</a:t>
+            </a:r>
+            <a:r>
+              <a:rPr lang="ko-KR" altLang="en-US" dirty="0" err="1"/>
+              <a:t>스폰</a:t>
+            </a:r>
+            <a:r>
+              <a:rPr lang="ko-KR" altLang="en-US" dirty="0"/>
+              <a:t> 확률</a:t>
+            </a:r>
+            <a:r>
+              <a:rPr lang="en-US" altLang="ko-KR" dirty="0"/>
+              <a:t>’</a:t>
+            </a:r>
+            <a:r>
+              <a:rPr lang="ko-KR" altLang="en-US" dirty="0"/>
+              <a:t>이 다르기 때문에</a:t>
+            </a:r>
+            <a:r>
+              <a:rPr lang="en-US" altLang="ko-KR" dirty="0"/>
+              <a:t>, </a:t>
+            </a:r>
+            <a:r>
+              <a:rPr lang="ko-KR" altLang="en-US" dirty="0"/>
+              <a:t>총 파워 레벨은 같지만 좀 더 어려운 행성으로 만들고 싶다면</a:t>
+            </a:r>
+            <a:r>
+              <a:rPr lang="en-US" altLang="ko-KR" dirty="0"/>
+              <a:t>, </a:t>
+            </a:r>
+            <a:r>
+              <a:rPr lang="ko-KR" altLang="en-US" dirty="0"/>
+              <a:t>몬스터 </a:t>
+            </a:r>
+            <a:r>
+              <a:rPr lang="en-US" altLang="ko-KR" dirty="0"/>
+              <a:t>b</a:t>
+            </a:r>
+            <a:r>
+              <a:rPr lang="ko-KR" altLang="en-US" dirty="0"/>
+              <a:t>의 </a:t>
+            </a:r>
+            <a:r>
+              <a:rPr lang="ko-KR" altLang="en-US" dirty="0" err="1"/>
+              <a:t>스폰</a:t>
+            </a:r>
+            <a:r>
+              <a:rPr lang="ko-KR" altLang="en-US" dirty="0"/>
+              <a:t> 확률을 높이면 됨</a:t>
+            </a:r>
+            <a:r>
+              <a:rPr lang="en-US" altLang="ko-KR" dirty="0"/>
+              <a:t>.</a:t>
+            </a:r>
+          </a:p>
+        </p:txBody>
+      </p:sp>
+      <p:sp>
+        <p:nvSpPr>
+          <p:cNvPr id="4" name="슬라이드 번호 개체 틀 3">
+            <a:extLst>
+              <a:ext uri="{FF2B5EF4-FFF2-40B4-BE49-F238E27FC236}">
+                <a16:creationId xmlns:a16="http://schemas.microsoft.com/office/drawing/2014/main" id="{B277B7AD-A094-47CB-3668-56483F224A8D}"/>
+              </a:ext>
+            </a:extLst>
+          </p:cNvPr>
+          <p:cNvSpPr>
+            <a:spLocks noGrp="1"/>
+          </p:cNvSpPr>
+          <p:nvPr>
+            <p:ph type="sldNum" sz="quarter" idx="12"/>
+          </p:nvPr>
+        </p:nvSpPr>
+        <p:spPr/>
+        <p:txBody>
+          <a:bodyPr/>
+          <a:lstStyle/>
+          <a:p>
+            <a:fld id="{5413EFF4-4F73-4713-85F9-663DD6DC3937}" type="slidenum">
+              <a:rPr lang="ko-KR" altLang="en-US" smtClean="0"/>
+              <a:t>10</a:t>
+            </a:fld>
+            <a:endParaRPr lang="ko-KR" altLang="en-US"/>
+          </a:p>
+        </p:txBody>
+      </p:sp>
+    </p:spTree>
+    <p:extLst>
+      <p:ext uri="{BB962C8B-B14F-4D97-AF65-F5344CB8AC3E}">
+        <p14:creationId xmlns:p14="http://schemas.microsoft.com/office/powerpoint/2010/main" val="741989920"/>
+      </p:ext>
+    </p:extLst>
+  </p:cSld>
+  <p:clrMapOvr>
+    <a:masterClrMapping/>
+  </p:clrMapOvr>
+</p:sld>
+</file>
+
+<file path=ppt/slides/slide11.xml><?xml version="1.0" encoding="utf-8"?>
+<p:sld xmlns:a="http://schemas.openxmlformats.org/drawingml/2006/main" xmlns:r="http://schemas.openxmlformats.org/officeDocument/2006/relationships" xmlns:p="http://schemas.openxmlformats.org/presentationml/2006/main">
+  <p:cSld>
+    <p:spTree>
+      <p:nvGrpSpPr>
+        <p:cNvPr id="1" name=""/>
+        <p:cNvGrpSpPr/>
+        <p:nvPr/>
+      </p:nvGrpSpPr>
+      <p:grpSpPr>
+        <a:xfrm>
+          <a:off x="0" y="0"/>
+          <a:ext cx="0" cy="0"/>
+          <a:chOff x="0" y="0"/>
+          <a:chExt cx="0" cy="0"/>
+        </a:xfrm>
+      </p:grpSpPr>
+      <p:sp>
+        <p:nvSpPr>
+          <p:cNvPr id="2" name="제목 1">
+            <a:extLst>
+              <a:ext uri="{FF2B5EF4-FFF2-40B4-BE49-F238E27FC236}">
                 <a16:creationId xmlns:a16="http://schemas.microsoft.com/office/drawing/2014/main" id="{9FA60381-4C82-8B02-1CF0-6084E4A6D33D}"/>
               </a:ext>
             </a:extLst>
@@ -4787,7 +5350,7 @@
           <a:p>
             <a:fld id="{5413EFF4-4F73-4713-85F9-663DD6DC3937}" type="slidenum">
               <a:rPr lang="ko-KR" altLang="en-US" smtClean="0"/>
-              <a:t>10</a:t>
+              <a:t>11</a:t>
             </a:fld>
             <a:endParaRPr lang="ko-KR" altLang="en-US"/>
           </a:p>
@@ -4806,7 +5369,7 @@
 </p:sld>
 </file>
 
-<file path=ppt/slides/slide11.xml><?xml version="1.0" encoding="utf-8"?>
+<file path=ppt/slides/slide12.xml><?xml version="1.0" encoding="utf-8"?>
 <p:sld xmlns:a="http://schemas.openxmlformats.org/drawingml/2006/main" xmlns:r="http://schemas.openxmlformats.org/officeDocument/2006/relationships" xmlns:p="http://schemas.openxmlformats.org/presentationml/2006/main">
   <p:cSld>
     <p:spTree>
@@ -4968,7 +5531,7 @@
           <a:p>
             <a:fld id="{5413EFF4-4F73-4713-85F9-663DD6DC3937}" type="slidenum">
               <a:rPr lang="ko-KR" altLang="en-US" smtClean="0"/>
-              <a:t>11</a:t>
+              <a:t>12</a:t>
             </a:fld>
             <a:endParaRPr lang="ko-KR" altLang="en-US"/>
           </a:p>
@@ -4987,7 +5550,7 @@
 </p:sld>
 </file>
 
-<file path=ppt/slides/slide12.xml><?xml version="1.0" encoding="utf-8"?>
+<file path=ppt/slides/slide13.xml><?xml version="1.0" encoding="utf-8"?>
 <p:sld xmlns:a="http://schemas.openxmlformats.org/drawingml/2006/main" xmlns:r="http://schemas.openxmlformats.org/officeDocument/2006/relationships" xmlns:p="http://schemas.openxmlformats.org/presentationml/2006/main">
   <p:cSld>
     <p:spTree>
@@ -5207,7 +5770,7 @@
           <a:p>
             <a:fld id="{5413EFF4-4F73-4713-85F9-663DD6DC3937}" type="slidenum">
               <a:rPr lang="ko-KR" altLang="en-US" smtClean="0"/>
-              <a:t>12</a:t>
+              <a:t>13</a:t>
             </a:fld>
             <a:endParaRPr lang="ko-KR" altLang="en-US"/>
           </a:p>
@@ -5226,7 +5789,7 @@
 </p:sld>
 </file>
 
-<file path=ppt/slides/slide13.xml><?xml version="1.0" encoding="utf-8"?>
+<file path=ppt/slides/slide14.xml><?xml version="1.0" encoding="utf-8"?>
 <p:sld xmlns:a="http://schemas.openxmlformats.org/drawingml/2006/main" xmlns:r="http://schemas.openxmlformats.org/officeDocument/2006/relationships" xmlns:p="http://schemas.openxmlformats.org/presentationml/2006/main">
   <p:cSld>
     <p:spTree>
@@ -5485,7 +6048,7 @@
           <a:p>
             <a:fld id="{5413EFF4-4F73-4713-85F9-663DD6DC3937}" type="slidenum">
               <a:rPr lang="ko-KR" altLang="en-US" smtClean="0"/>
-              <a:t>13</a:t>
+              <a:t>14</a:t>
             </a:fld>
             <a:endParaRPr lang="ko-KR" altLang="en-US"/>
           </a:p>
@@ -5504,7 +6067,7 @@
 </p:sld>
 </file>
 
-<file path=ppt/slides/slide14.xml><?xml version="1.0" encoding="utf-8"?>
+<file path=ppt/slides/slide15.xml><?xml version="1.0" encoding="utf-8"?>
 <p:sld xmlns:a="http://schemas.openxmlformats.org/drawingml/2006/main" xmlns:r="http://schemas.openxmlformats.org/officeDocument/2006/relationships" xmlns:p="http://schemas.openxmlformats.org/presentationml/2006/main">
   <p:cSld>
     <p:spTree>
@@ -5726,6 +6289,73 @@
               <a:rPr lang="ko-KR" altLang="en-US" sz="1600" dirty="0"/>
               <a:t>내용은 아직 추가 안함</a:t>
             </a:r>
+            <a:endParaRPr lang="en-US" altLang="ko-KR" sz="1600" dirty="0"/>
+          </a:p>
+          <a:p>
+            <a:r>
+              <a:rPr lang="en-US" altLang="ko-KR" sz="1600" dirty="0"/>
+              <a:t>1107: </a:t>
+            </a:r>
+            <a:r>
+              <a:rPr lang="ko-KR" altLang="en-US" sz="1600" dirty="0"/>
+              <a:t>조작 키</a:t>
+            </a:r>
+            <a:r>
+              <a:rPr lang="en-US" altLang="ko-KR" sz="1600" dirty="0"/>
+              <a:t> C, V, G </a:t>
+            </a:r>
+            <a:r>
+              <a:rPr lang="ko-KR" altLang="en-US" sz="1600" dirty="0"/>
+              <a:t>내용 변경 </a:t>
+            </a:r>
+            <a:r>
+              <a:rPr lang="en-US" altLang="ko-KR" sz="1600" dirty="0"/>
+              <a:t>-&gt; G </a:t>
+            </a:r>
+            <a:r>
+              <a:rPr lang="ko-KR" altLang="en-US" sz="1600" dirty="0"/>
+              <a:t>키 빼고</a:t>
+            </a:r>
+            <a:r>
+              <a:rPr lang="en-US" altLang="ko-KR" sz="1600" dirty="0"/>
+              <a:t>, C</a:t>
+            </a:r>
+            <a:r>
+              <a:rPr lang="ko-KR" altLang="en-US" sz="1600" dirty="0"/>
+              <a:t>키를 옆 칸 이동</a:t>
+            </a:r>
+            <a:r>
+              <a:rPr lang="en-US" altLang="ko-KR" sz="1600" dirty="0"/>
+              <a:t>, V</a:t>
+            </a:r>
+            <a:r>
+              <a:rPr lang="ko-KR" altLang="en-US" sz="1600" dirty="0"/>
+              <a:t>를 버리기로 할당</a:t>
+            </a:r>
+            <a:br>
+              <a:rPr lang="en-US" altLang="ko-KR" sz="1600" dirty="0"/>
+            </a:br>
+            <a:r>
+              <a:rPr lang="ko-KR" altLang="en-US" sz="1600" dirty="0"/>
+              <a:t>웅크리기 </a:t>
+            </a:r>
+            <a:r>
+              <a:rPr lang="en-US" altLang="ko-KR" sz="1600" dirty="0"/>
+              <a:t>Ctrl</a:t>
+            </a:r>
+            <a:r>
+              <a:rPr lang="ko-KR" altLang="en-US" sz="1600" dirty="0"/>
+              <a:t> 키 </a:t>
+            </a:r>
+            <a:r>
+              <a:rPr lang="ko-KR" altLang="en-US" sz="1600" dirty="0" err="1"/>
+              <a:t>토글</a:t>
+            </a:r>
+            <a:r>
+              <a:rPr lang="ko-KR" altLang="en-US" sz="1600" dirty="0"/>
+              <a:t> 키로 변경</a:t>
+            </a:r>
+            <a:endParaRPr lang="en-US" altLang="ko-KR" sz="1600" dirty="0"/>
           </a:p>
         </p:txBody>
       </p:sp>
@@ -5752,7 +6382,7 @@
           <a:p>
             <a:fld id="{5413EFF4-4F73-4713-85F9-663DD6DC3937}" type="slidenum">
               <a:rPr lang="ko-KR" altLang="en-US" smtClean="0"/>
-              <a:t>14</a:t>
+              <a:t>15</a:t>
             </a:fld>
             <a:endParaRPr lang="ko-KR" altLang="en-US"/>
           </a:p>
@@ -6486,14 +7116,14 @@
           <p:nvPr>
             <p:extLst>
               <p:ext uri="{D42A27DB-BD31-4B8C-83A1-F6EECF244321}">
-                <p14:modId xmlns:p14="http://schemas.microsoft.com/office/powerpoint/2010/main" val="1445216540"/>
+                <p14:modId xmlns:p14="http://schemas.microsoft.com/office/powerpoint/2010/main" val="901463774"/>
               </p:ext>
             </p:extLst>
           </p:nvPr>
         </p:nvGraphicFramePr>
         <p:xfrm>
           <a:off x="2830729" y="81440"/>
-          <a:ext cx="8908732" cy="7995920"/>
+          <a:ext cx="8908732" cy="7620000"/>
         </p:xfrm>
         <a:graphic>
           <a:graphicData uri="http://schemas.openxmlformats.org/drawingml/2006/table">
@@ -7349,7 +7979,7 @@
                             <a:schemeClr val="tx1"/>
                           </a:solidFill>
                         </a:rPr>
-                        <a:t>숙이기</a:t>
+                        <a:t>웅크리기</a:t>
                       </a:r>
                       <a:r>
                         <a:rPr lang="en-US" altLang="ko-KR" dirty="0">
@@ -7373,7 +8003,15 @@
                             <a:schemeClr val="tx1"/>
                           </a:solidFill>
                         </a:rPr>
-                        <a:t>)</a:t>
+                        <a:t>) </a:t>
+                      </a:r>
+                      <a:r>
+                        <a:rPr lang="ko-KR" altLang="en-US" dirty="0" err="1">
+                          <a:solidFill>
+                            <a:schemeClr val="tx1"/>
+                          </a:solidFill>
+                        </a:rPr>
+                        <a:t>토글</a:t>
                       </a:r>
                       <a:endParaRPr lang="ko-KR" altLang="en-US" dirty="0">
                         <a:solidFill>
@@ -7557,7 +8195,7 @@
                             <a:schemeClr val="tx1"/>
                           </a:solidFill>
                         </a:rPr>
-                        <a:t>숙인 채 걷기</a:t>
+                        <a:t>웅크린 채 걷기</a:t>
                       </a:r>
                       <a:r>
                         <a:rPr lang="en-US" altLang="ko-KR" dirty="0">
@@ -7779,6 +8417,22 @@
                         </a:rPr>
                         <a:t>인벤토리 열기</a:t>
                       </a:r>
+                      <a:r>
+                        <a:rPr lang="en-US" altLang="ko-KR" dirty="0">
+                          <a:solidFill>
+                            <a:schemeClr val="tx1"/>
+                          </a:solidFill>
+                        </a:rPr>
+                        <a:t>/</a:t>
+                      </a:r>
+                      <a:r>
+                        <a:rPr lang="ko-KR" altLang="en-US" dirty="0">
+                          <a:solidFill>
+                            <a:schemeClr val="tx1"/>
+                          </a:solidFill>
+                        </a:rPr>
+                        <a:t>닫기</a:t>
+                      </a:r>
                     </a:p>
                   </a:txBody>
                   <a:tcPr anchor="ctr">
@@ -7971,7 +8625,7 @@
                             <a:schemeClr val="tx1"/>
                           </a:solidFill>
                         </a:rPr>
-                        <a:t>인벤토리 열린 상태에서 열 이동</a:t>
+                        <a:t>인벤토리 열린 상태에서 옆으로 한 칸 이동</a:t>
                       </a:r>
                     </a:p>
                   </a:txBody>
@@ -8155,17 +8809,49 @@
                     <a:bodyPr/>
                     <a:lstStyle/>
                     <a:p>
-                      <a:pPr marL="0" indent="0" algn="ctr" latinLnBrk="0">
-                        <a:buFontTx/>
-                        <a:buNone/>
-                      </a:pPr>
+                      <a:pPr algn="ctr" latinLnBrk="0"/>
                       <a:r>
                         <a:rPr lang="ko-KR" altLang="en-US" dirty="0">
                           <a:solidFill>
                             <a:schemeClr val="tx1"/>
                           </a:solidFill>
                         </a:rPr>
-                        <a:t>인벤토리 열린 상태에서 행 이동</a:t>
+                        <a:t>들고 있는 아이템</a:t>
+                      </a:r>
+                      <a:r>
+                        <a:rPr lang="en-US" altLang="ko-KR" dirty="0">
+                          <a:solidFill>
+                            <a:schemeClr val="tx1"/>
+                          </a:solidFill>
+                        </a:rPr>
+                        <a:t>/</a:t>
+                      </a:r>
+                    </a:p>
+                    <a:p>
+                      <a:pPr algn="ctr" latinLnBrk="0"/>
+                      <a:r>
+                        <a:rPr lang="ko-KR" altLang="en-US" dirty="0">
+                          <a:solidFill>
+                            <a:schemeClr val="tx1"/>
+                          </a:solidFill>
+                        </a:rPr>
+                        <a:t>인벤토리에서 선택된 아이템</a:t>
+                      </a:r>
+                      <a:r>
+                        <a:rPr lang="en-US" altLang="ko-KR" dirty="0">
+                          <a:solidFill>
+                            <a:schemeClr val="tx1"/>
+                          </a:solidFill>
+                        </a:rPr>
+                        <a:t> </a:t>
+                      </a:r>
+                      <a:r>
+                        <a:rPr lang="ko-KR" altLang="en-US" dirty="0">
+                          <a:solidFill>
+                            <a:schemeClr val="tx1"/>
+                          </a:solidFill>
+                        </a:rPr>
+                        <a:t>버리기</a:t>
                       </a:r>
                     </a:p>
                   </a:txBody>
@@ -8443,232 +9129,6 @@
                             <a:schemeClr val="tx1"/>
                           </a:solidFill>
                         </a:rPr>
-                        <a:t>G</a:t>
-                      </a:r>
-                      <a:endParaRPr lang="ko-KR" altLang="en-US" dirty="0">
-                        <a:solidFill>
-                          <a:schemeClr val="tx1"/>
-                        </a:solidFill>
-                      </a:endParaRPr>
-                    </a:p>
-                  </a:txBody>
-                  <a:tcPr anchor="ctr">
-                    <a:lnL w="12700" cap="flat" cmpd="sng" algn="ctr">
-                      <a:solidFill>
-                        <a:schemeClr val="tx1"/>
-                      </a:solidFill>
-                      <a:prstDash val="solid"/>
-                      <a:round/>
-                      <a:headEnd type="none" w="med" len="med"/>
-                      <a:tailEnd type="none" w="med" len="med"/>
-                    </a:lnL>
-                    <a:lnR w="12700" cap="flat" cmpd="sng" algn="ctr">
-                      <a:solidFill>
-                        <a:schemeClr val="tx1"/>
-                      </a:solidFill>
-                      <a:prstDash val="solid"/>
-                      <a:round/>
-                      <a:headEnd type="none" w="med" len="med"/>
-                      <a:tailEnd type="none" w="med" len="med"/>
-                    </a:lnR>
-                    <a:lnT w="12700" cap="flat" cmpd="sng" algn="ctr">
-                      <a:solidFill>
-                        <a:schemeClr val="tx1"/>
-                      </a:solidFill>
-                      <a:prstDash val="solid"/>
-                      <a:round/>
-                      <a:headEnd type="none" w="med" len="med"/>
-                      <a:tailEnd type="none" w="med" len="med"/>
-                    </a:lnT>
-                    <a:lnB w="12700" cap="flat" cmpd="sng" algn="ctr">
-                      <a:solidFill>
-                        <a:schemeClr val="tx1"/>
-                      </a:solidFill>
-                      <a:prstDash val="solid"/>
-                      <a:round/>
-                      <a:headEnd type="none" w="med" len="med"/>
-                      <a:tailEnd type="none" w="med" len="med"/>
-                    </a:lnB>
-                    <a:solidFill>
-                      <a:schemeClr val="bg1"/>
-                    </a:solidFill>
-                  </a:tcPr>
-                </a:tc>
-                <a:tc>
-                  <a:txBody>
-                    <a:bodyPr/>
-                    <a:lstStyle/>
-                    <a:p>
-                      <a:pPr algn="ctr" latinLnBrk="0"/>
-                      <a:r>
-                        <a:rPr lang="en-US" altLang="ko-KR" dirty="0">
-                          <a:solidFill>
-                            <a:schemeClr val="tx1"/>
-                          </a:solidFill>
-                        </a:rPr>
-                        <a:t>[G]</a:t>
-                      </a:r>
-                      <a:endParaRPr lang="ko-KR" altLang="en-US" dirty="0">
-                        <a:solidFill>
-                          <a:schemeClr val="tx1"/>
-                        </a:solidFill>
-                      </a:endParaRPr>
-                    </a:p>
-                  </a:txBody>
-                  <a:tcPr anchor="ctr">
-                    <a:lnL w="12700" cap="flat" cmpd="sng" algn="ctr">
-                      <a:solidFill>
-                        <a:schemeClr val="tx1"/>
-                      </a:solidFill>
-                      <a:prstDash val="solid"/>
-                      <a:round/>
-                      <a:headEnd type="none" w="med" len="med"/>
-                      <a:tailEnd type="none" w="med" len="med"/>
-                    </a:lnL>
-                    <a:lnR w="12700" cap="flat" cmpd="sng" algn="ctr">
-                      <a:solidFill>
-                        <a:schemeClr val="tx1"/>
-                      </a:solidFill>
-                      <a:prstDash val="solid"/>
-                      <a:round/>
-                      <a:headEnd type="none" w="med" len="med"/>
-                      <a:tailEnd type="none" w="med" len="med"/>
-                    </a:lnR>
-                    <a:lnT w="12700" cap="flat" cmpd="sng" algn="ctr">
-                      <a:solidFill>
-                        <a:schemeClr val="tx1"/>
-                      </a:solidFill>
-                      <a:prstDash val="solid"/>
-                      <a:round/>
-                      <a:headEnd type="none" w="med" len="med"/>
-                      <a:tailEnd type="none" w="med" len="med"/>
-                    </a:lnT>
-                    <a:lnB w="12700" cap="flat" cmpd="sng" algn="ctr">
-                      <a:solidFill>
-                        <a:schemeClr val="tx1"/>
-                      </a:solidFill>
-                      <a:prstDash val="solid"/>
-                      <a:round/>
-                      <a:headEnd type="none" w="med" len="med"/>
-                      <a:tailEnd type="none" w="med" len="med"/>
-                    </a:lnB>
-                    <a:solidFill>
-                      <a:schemeClr val="bg1"/>
-                    </a:solidFill>
-                  </a:tcPr>
-                </a:tc>
-                <a:tc>
-                  <a:txBody>
-                    <a:bodyPr/>
-                    <a:lstStyle/>
-                    <a:p>
-                      <a:pPr algn="ctr" latinLnBrk="0"/>
-                      <a:r>
-                        <a:rPr lang="ko-KR" altLang="en-US" dirty="0">
-                          <a:solidFill>
-                            <a:schemeClr val="tx1"/>
-                          </a:solidFill>
-                        </a:rPr>
-                        <a:t>들고 있는 아이템</a:t>
-                      </a:r>
-                      <a:r>
-                        <a:rPr lang="en-US" altLang="ko-KR" dirty="0">
-                          <a:solidFill>
-                            <a:schemeClr val="tx1"/>
-                          </a:solidFill>
-                        </a:rPr>
-                        <a:t>/</a:t>
-                      </a:r>
-                    </a:p>
-                    <a:p>
-                      <a:pPr algn="ctr" latinLnBrk="0"/>
-                      <a:r>
-                        <a:rPr lang="ko-KR" altLang="en-US" dirty="0">
-                          <a:solidFill>
-                            <a:schemeClr val="tx1"/>
-                          </a:solidFill>
-                        </a:rPr>
-                        <a:t>인벤토리에서 선택된 아이템</a:t>
-                      </a:r>
-                      <a:endParaRPr lang="en-US" altLang="ko-KR" dirty="0">
-                        <a:solidFill>
-                          <a:schemeClr val="tx1"/>
-                        </a:solidFill>
-                      </a:endParaRPr>
-                    </a:p>
-                    <a:p>
-                      <a:pPr algn="ctr" latinLnBrk="0"/>
-                      <a:r>
-                        <a:rPr lang="ko-KR" altLang="en-US" dirty="0">
-                          <a:solidFill>
-                            <a:schemeClr val="tx1"/>
-                          </a:solidFill>
-                        </a:rPr>
-                        <a:t>버리기</a:t>
-                      </a:r>
-                    </a:p>
-                  </a:txBody>
-                  <a:tcPr anchor="ctr">
-                    <a:lnL w="12700" cap="flat" cmpd="sng" algn="ctr">
-                      <a:solidFill>
-                        <a:schemeClr val="tx1"/>
-                      </a:solidFill>
-                      <a:prstDash val="solid"/>
-                      <a:round/>
-                      <a:headEnd type="none" w="med" len="med"/>
-                      <a:tailEnd type="none" w="med" len="med"/>
-                    </a:lnL>
-                    <a:lnR w="12700" cap="flat" cmpd="sng" algn="ctr">
-                      <a:solidFill>
-                        <a:schemeClr val="tx1"/>
-                      </a:solidFill>
-                      <a:prstDash val="solid"/>
-                      <a:round/>
-                      <a:headEnd type="none" w="med" len="med"/>
-                      <a:tailEnd type="none" w="med" len="med"/>
-                    </a:lnR>
-                    <a:lnT w="12700" cap="flat" cmpd="sng" algn="ctr">
-                      <a:solidFill>
-                        <a:schemeClr val="tx1"/>
-                      </a:solidFill>
-                      <a:prstDash val="solid"/>
-                      <a:round/>
-                      <a:headEnd type="none" w="med" len="med"/>
-                      <a:tailEnd type="none" w="med" len="med"/>
-                    </a:lnT>
-                    <a:lnB w="12700" cap="flat" cmpd="sng" algn="ctr">
-                      <a:solidFill>
-                        <a:schemeClr val="tx1"/>
-                      </a:solidFill>
-                      <a:prstDash val="solid"/>
-                      <a:round/>
-                      <a:headEnd type="none" w="med" len="med"/>
-                      <a:tailEnd type="none" w="med" len="med"/>
-                    </a:lnB>
-                    <a:solidFill>
-                      <a:schemeClr val="bg1"/>
-                    </a:solidFill>
-                  </a:tcPr>
-                </a:tc>
-                <a:extLst>
-                  <a:ext uri="{0D108BD9-81ED-4DB2-BD59-A6C34878D82A}">
-                    <a16:rowId xmlns:a16="http://schemas.microsoft.com/office/drawing/2014/main" val="1325614508"/>
-                  </a:ext>
-                </a:extLst>
-              </a:tr>
-              <a:tr h="370840">
-                <a:tc>
-                  <a:txBody>
-                    <a:bodyPr/>
-                    <a:lstStyle/>
-                    <a:p>
-                      <a:pPr algn="ctr" latinLnBrk="0"/>
-                      <a:r>
-                        <a:rPr lang="en-US" altLang="ko-KR" dirty="0">
-                          <a:solidFill>
-                            <a:schemeClr val="tx1"/>
-                          </a:solidFill>
-                        </a:rPr>
                         <a:t>T</a:t>
                       </a:r>
                       <a:endParaRPr lang="ko-KR" altLang="en-US" dirty="0">
@@ -8804,6 +9264,22 @@
                           </a:solidFill>
                         </a:rPr>
                         <a:t>온오프</a:t>
+                      </a:r>
+                      <a:r>
+                        <a:rPr lang="ko-KR" altLang="en-US" dirty="0">
+                          <a:solidFill>
+                            <a:schemeClr val="tx1"/>
+                          </a:solidFill>
+                        </a:rPr>
+                        <a:t> </a:t>
+                      </a:r>
+                      <a:r>
+                        <a:rPr lang="ko-KR" altLang="en-US" dirty="0" err="1">
+                          <a:solidFill>
+                            <a:schemeClr val="tx1"/>
+                          </a:solidFill>
+                        </a:rPr>
+                        <a:t>토글</a:t>
                       </a:r>
                       <a:endParaRPr lang="ko-KR" altLang="en-US" dirty="0">
                         <a:solidFill>
@@ -9964,6 +10440,1275 @@
   <p:cSld>
     <p:spTree>
       <p:nvGrpSpPr>
+        <p:cNvPr id="1" name="">
+          <a:extLst>
+            <a:ext uri="{FF2B5EF4-FFF2-40B4-BE49-F238E27FC236}">
+              <a16:creationId xmlns:a16="http://schemas.microsoft.com/office/drawing/2014/main" id="{EA169490-34CA-42D8-920F-88BBC8922637}"/>
+            </a:ext>
+          </a:extLst>
+        </p:cNvPr>
+        <p:cNvGrpSpPr/>
+        <p:nvPr/>
+      </p:nvGrpSpPr>
+      <p:grpSpPr>
+        <a:xfrm>
+          <a:off x="0" y="0"/>
+          <a:ext cx="0" cy="0"/>
+          <a:chOff x="0" y="0"/>
+          <a:chExt cx="0" cy="0"/>
+        </a:xfrm>
+      </p:grpSpPr>
+      <p:sp>
+        <p:nvSpPr>
+          <p:cNvPr id="2" name="제목 1">
+            <a:extLst>
+              <a:ext uri="{FF2B5EF4-FFF2-40B4-BE49-F238E27FC236}">
+                <a16:creationId xmlns:a16="http://schemas.microsoft.com/office/drawing/2014/main" id="{E7D9DA29-05C3-4A71-19FA-2107FA37550D}"/>
+              </a:ext>
+            </a:extLst>
+          </p:cNvPr>
+          <p:cNvSpPr>
+            <a:spLocks noGrp="1"/>
+          </p:cNvSpPr>
+          <p:nvPr>
+            <p:ph type="title"/>
+          </p:nvPr>
+        </p:nvSpPr>
+        <p:spPr/>
+        <p:txBody>
+          <a:bodyPr/>
+          <a:lstStyle/>
+          <a:p>
+            <a:r>
+              <a:rPr lang="ko-KR" altLang="en-US" dirty="0"/>
+              <a:t>조작</a:t>
+            </a:r>
+            <a:r>
+              <a:rPr lang="en-US" altLang="ko-KR" dirty="0"/>
+              <a:t>_</a:t>
+            </a:r>
+            <a:r>
+              <a:rPr lang="ko-KR" altLang="en-US" dirty="0" err="1"/>
+              <a:t>인게임</a:t>
+            </a:r>
+            <a:endParaRPr lang="ko-KR" altLang="en-US" dirty="0"/>
+          </a:p>
+        </p:txBody>
+      </p:sp>
+      <p:sp>
+        <p:nvSpPr>
+          <p:cNvPr id="3" name="내용 개체 틀 2">
+            <a:extLst>
+              <a:ext uri="{FF2B5EF4-FFF2-40B4-BE49-F238E27FC236}">
+                <a16:creationId xmlns:a16="http://schemas.microsoft.com/office/drawing/2014/main" id="{B306703F-6AD5-C901-DC89-E4AB289F00C8}"/>
+              </a:ext>
+            </a:extLst>
+          </p:cNvPr>
+          <p:cNvSpPr>
+            <a:spLocks noGrp="1"/>
+          </p:cNvSpPr>
+          <p:nvPr>
+            <p:ph idx="1"/>
+          </p:nvPr>
+        </p:nvSpPr>
+        <p:spPr>
+          <a:xfrm>
+            <a:off x="177188" y="953655"/>
+            <a:ext cx="11809164" cy="4994707"/>
+          </a:xfrm>
+        </p:spPr>
+        <p:txBody>
+          <a:bodyPr/>
+          <a:lstStyle/>
+          <a:p>
+            <a:r>
+              <a:rPr lang="ko-KR" altLang="en-US" dirty="0"/>
+              <a:t>키보드</a:t>
+            </a:r>
+            <a:r>
+              <a:rPr lang="en-US" altLang="ko-KR" dirty="0"/>
+              <a:t>, </a:t>
+            </a:r>
+            <a:r>
+              <a:rPr lang="ko-KR" altLang="en-US" dirty="0"/>
+              <a:t>마우스</a:t>
+            </a:r>
+            <a:endParaRPr lang="en-US" altLang="ko-KR" dirty="0"/>
+          </a:p>
+          <a:p>
+            <a:endParaRPr lang="ko-KR" altLang="en-US" dirty="0"/>
+          </a:p>
+        </p:txBody>
+      </p:sp>
+      <p:sp>
+        <p:nvSpPr>
+          <p:cNvPr id="4" name="슬라이드 번호 개체 틀 3">
+            <a:extLst>
+              <a:ext uri="{FF2B5EF4-FFF2-40B4-BE49-F238E27FC236}">
+                <a16:creationId xmlns:a16="http://schemas.microsoft.com/office/drawing/2014/main" id="{E0522C9C-AE56-EDFE-49A5-7D2C5C61B9B8}"/>
+              </a:ext>
+            </a:extLst>
+          </p:cNvPr>
+          <p:cNvSpPr>
+            <a:spLocks noGrp="1"/>
+          </p:cNvSpPr>
+          <p:nvPr>
+            <p:ph type="sldNum" sz="quarter" idx="12"/>
+          </p:nvPr>
+        </p:nvSpPr>
+        <p:spPr/>
+        <p:txBody>
+          <a:bodyPr/>
+          <a:lstStyle/>
+          <a:p>
+            <a:fld id="{5413EFF4-4F73-4713-85F9-663DD6DC3937}" type="slidenum">
+              <a:rPr lang="ko-KR" altLang="en-US" smtClean="0"/>
+              <a:t>5</a:t>
+            </a:fld>
+            <a:endParaRPr lang="ko-KR" altLang="en-US"/>
+          </a:p>
+        </p:txBody>
+      </p:sp>
+      <p:graphicFrame>
+        <p:nvGraphicFramePr>
+          <p:cNvPr id="25" name="표 24">
+            <a:extLst>
+              <a:ext uri="{FF2B5EF4-FFF2-40B4-BE49-F238E27FC236}">
+                <a16:creationId xmlns:a16="http://schemas.microsoft.com/office/drawing/2014/main" id="{E62A4170-4C33-5B46-98A4-C70510BD207A}"/>
+              </a:ext>
+            </a:extLst>
+          </p:cNvPr>
+          <p:cNvGraphicFramePr>
+            <a:graphicFrameLocks noGrp="1"/>
+          </p:cNvGraphicFramePr>
+          <p:nvPr>
+            <p:extLst>
+              <p:ext uri="{D42A27DB-BD31-4B8C-83A1-F6EECF244321}">
+                <p14:modId xmlns:p14="http://schemas.microsoft.com/office/powerpoint/2010/main" val="3107600363"/>
+              </p:ext>
+            </p:extLst>
+          </p:nvPr>
+        </p:nvGraphicFramePr>
+        <p:xfrm>
+          <a:off x="2830729" y="81440"/>
+          <a:ext cx="8908732" cy="2301240"/>
+        </p:xfrm>
+        <a:graphic>
+          <a:graphicData uri="http://schemas.openxmlformats.org/drawingml/2006/table">
+            <a:tbl>
+              <a:tblPr firstRow="1" bandRow="1">
+                <a:tableStyleId>{5C22544A-7EE6-4342-B048-85BDC9FD1C3A}</a:tableStyleId>
+              </a:tblPr>
+              <a:tblGrid>
+                <a:gridCol w="2203767">
+                  <a:extLst>
+                    <a:ext uri="{9D8B030D-6E8A-4147-A177-3AD203B41FA5}">
+                      <a16:colId xmlns:a16="http://schemas.microsoft.com/office/drawing/2014/main" val="2213432409"/>
+                    </a:ext>
+                  </a:extLst>
+                </a:gridCol>
+                <a:gridCol w="2803525">
+                  <a:extLst>
+                    <a:ext uri="{9D8B030D-6E8A-4147-A177-3AD203B41FA5}">
+                      <a16:colId xmlns:a16="http://schemas.microsoft.com/office/drawing/2014/main" val="776345817"/>
+                    </a:ext>
+                  </a:extLst>
+                </a:gridCol>
+                <a:gridCol w="3901440">
+                  <a:extLst>
+                    <a:ext uri="{9D8B030D-6E8A-4147-A177-3AD203B41FA5}">
+                      <a16:colId xmlns:a16="http://schemas.microsoft.com/office/drawing/2014/main" val="3629389943"/>
+                    </a:ext>
+                  </a:extLst>
+                </a:gridCol>
+              </a:tblGrid>
+              <a:tr h="370840">
+                <a:tc>
+                  <a:txBody>
+                    <a:bodyPr/>
+                    <a:lstStyle/>
+                    <a:p>
+                      <a:pPr algn="ctr" latinLnBrk="0"/>
+                      <a:r>
+                        <a:rPr lang="ko-KR" altLang="en-US" dirty="0">
+                          <a:solidFill>
+                            <a:schemeClr val="tx1"/>
+                          </a:solidFill>
+                        </a:rPr>
+                        <a:t>키</a:t>
+                      </a:r>
+                    </a:p>
+                  </a:txBody>
+                  <a:tcPr anchor="ctr">
+                    <a:lnL w="12700" cap="flat" cmpd="sng" algn="ctr">
+                      <a:solidFill>
+                        <a:schemeClr val="tx1"/>
+                      </a:solidFill>
+                      <a:prstDash val="solid"/>
+                      <a:round/>
+                      <a:headEnd type="none" w="med" len="med"/>
+                      <a:tailEnd type="none" w="med" len="med"/>
+                    </a:lnL>
+                    <a:lnR w="12700" cap="flat" cmpd="sng" algn="ctr">
+                      <a:solidFill>
+                        <a:schemeClr val="tx1"/>
+                      </a:solidFill>
+                      <a:prstDash val="solid"/>
+                      <a:round/>
+                      <a:headEnd type="none" w="med" len="med"/>
+                      <a:tailEnd type="none" w="med" len="med"/>
+                    </a:lnR>
+                    <a:lnT w="12700" cap="flat" cmpd="sng" algn="ctr">
+                      <a:solidFill>
+                        <a:schemeClr val="tx1"/>
+                      </a:solidFill>
+                      <a:prstDash val="solid"/>
+                      <a:round/>
+                      <a:headEnd type="none" w="med" len="med"/>
+                      <a:tailEnd type="none" w="med" len="med"/>
+                    </a:lnT>
+                    <a:lnB w="12700" cap="flat" cmpd="sng" algn="ctr">
+                      <a:solidFill>
+                        <a:schemeClr val="tx1"/>
+                      </a:solidFill>
+                      <a:prstDash val="solid"/>
+                      <a:round/>
+                      <a:headEnd type="none" w="med" len="med"/>
+                      <a:tailEnd type="none" w="med" len="med"/>
+                    </a:lnB>
+                    <a:solidFill>
+                      <a:schemeClr val="bg1">
+                        <a:lumMod val="75000"/>
+                      </a:schemeClr>
+                    </a:solidFill>
+                  </a:tcPr>
+                </a:tc>
+                <a:tc>
+                  <a:txBody>
+                    <a:bodyPr/>
+                    <a:lstStyle/>
+                    <a:p>
+                      <a:pPr algn="ctr" latinLnBrk="0"/>
+                      <a:r>
+                        <a:rPr lang="ko-KR" altLang="en-US" dirty="0">
+                          <a:solidFill>
+                            <a:schemeClr val="tx1"/>
+                          </a:solidFill>
+                        </a:rPr>
+                        <a:t>입력</a:t>
+                      </a:r>
+                    </a:p>
+                  </a:txBody>
+                  <a:tcPr anchor="ctr">
+                    <a:lnL w="12700" cap="flat" cmpd="sng" algn="ctr">
+                      <a:solidFill>
+                        <a:schemeClr val="tx1"/>
+                      </a:solidFill>
+                      <a:prstDash val="solid"/>
+                      <a:round/>
+                      <a:headEnd type="none" w="med" len="med"/>
+                      <a:tailEnd type="none" w="med" len="med"/>
+                    </a:lnL>
+                    <a:lnR w="12700" cap="flat" cmpd="sng" algn="ctr">
+                      <a:solidFill>
+                        <a:schemeClr val="tx1"/>
+                      </a:solidFill>
+                      <a:prstDash val="solid"/>
+                      <a:round/>
+                      <a:headEnd type="none" w="med" len="med"/>
+                      <a:tailEnd type="none" w="med" len="med"/>
+                    </a:lnR>
+                    <a:lnT w="12700" cap="flat" cmpd="sng" algn="ctr">
+                      <a:solidFill>
+                        <a:schemeClr val="tx1"/>
+                      </a:solidFill>
+                      <a:prstDash val="solid"/>
+                      <a:round/>
+                      <a:headEnd type="none" w="med" len="med"/>
+                      <a:tailEnd type="none" w="med" len="med"/>
+                    </a:lnT>
+                    <a:lnB w="12700" cap="flat" cmpd="sng" algn="ctr">
+                      <a:solidFill>
+                        <a:schemeClr val="tx1"/>
+                      </a:solidFill>
+                      <a:prstDash val="solid"/>
+                      <a:round/>
+                      <a:headEnd type="none" w="med" len="med"/>
+                      <a:tailEnd type="none" w="med" len="med"/>
+                    </a:lnB>
+                    <a:solidFill>
+                      <a:schemeClr val="bg1">
+                        <a:lumMod val="75000"/>
+                      </a:schemeClr>
+                    </a:solidFill>
+                  </a:tcPr>
+                </a:tc>
+                <a:tc>
+                  <a:txBody>
+                    <a:bodyPr/>
+                    <a:lstStyle/>
+                    <a:p>
+                      <a:pPr algn="ctr" latinLnBrk="0"/>
+                      <a:r>
+                        <a:rPr lang="ko-KR" altLang="en-US" dirty="0">
+                          <a:solidFill>
+                            <a:schemeClr val="tx1"/>
+                          </a:solidFill>
+                        </a:rPr>
+                        <a:t>설명</a:t>
+                      </a:r>
+                    </a:p>
+                  </a:txBody>
+                  <a:tcPr anchor="ctr">
+                    <a:lnL w="12700" cap="flat" cmpd="sng" algn="ctr">
+                      <a:solidFill>
+                        <a:schemeClr val="tx1"/>
+                      </a:solidFill>
+                      <a:prstDash val="solid"/>
+                      <a:round/>
+                      <a:headEnd type="none" w="med" len="med"/>
+                      <a:tailEnd type="none" w="med" len="med"/>
+                    </a:lnL>
+                    <a:lnR w="12700" cap="flat" cmpd="sng" algn="ctr">
+                      <a:solidFill>
+                        <a:schemeClr val="tx1"/>
+                      </a:solidFill>
+                      <a:prstDash val="solid"/>
+                      <a:round/>
+                      <a:headEnd type="none" w="med" len="med"/>
+                      <a:tailEnd type="none" w="med" len="med"/>
+                    </a:lnR>
+                    <a:lnT w="12700" cap="flat" cmpd="sng" algn="ctr">
+                      <a:solidFill>
+                        <a:schemeClr val="tx1"/>
+                      </a:solidFill>
+                      <a:prstDash val="solid"/>
+                      <a:round/>
+                      <a:headEnd type="none" w="med" len="med"/>
+                      <a:tailEnd type="none" w="med" len="med"/>
+                    </a:lnT>
+                    <a:lnB w="12700" cap="flat" cmpd="sng" algn="ctr">
+                      <a:solidFill>
+                        <a:schemeClr val="tx1"/>
+                      </a:solidFill>
+                      <a:prstDash val="solid"/>
+                      <a:round/>
+                      <a:headEnd type="none" w="med" len="med"/>
+                      <a:tailEnd type="none" w="med" len="med"/>
+                    </a:lnB>
+                    <a:solidFill>
+                      <a:schemeClr val="bg1">
+                        <a:lumMod val="75000"/>
+                      </a:schemeClr>
+                    </a:solidFill>
+                  </a:tcPr>
+                </a:tc>
+                <a:extLst>
+                  <a:ext uri="{0D108BD9-81ED-4DB2-BD59-A6C34878D82A}">
+                    <a16:rowId xmlns:a16="http://schemas.microsoft.com/office/drawing/2014/main" val="960405748"/>
+                  </a:ext>
+                </a:extLst>
+              </a:tr>
+              <a:tr h="370840">
+                <a:tc>
+                  <a:txBody>
+                    <a:bodyPr/>
+                    <a:lstStyle/>
+                    <a:p>
+                      <a:pPr algn="ctr" latinLnBrk="0"/>
+                      <a:r>
+                        <a:rPr lang="en-US" altLang="ko-KR" dirty="0" err="1">
+                          <a:solidFill>
+                            <a:schemeClr val="tx1"/>
+                          </a:solidFill>
+                        </a:rPr>
+                        <a:t>mouseLeft</a:t>
+                      </a:r>
+                      <a:endParaRPr lang="ko-KR" altLang="en-US" dirty="0">
+                        <a:solidFill>
+                          <a:schemeClr val="tx1"/>
+                        </a:solidFill>
+                      </a:endParaRPr>
+                    </a:p>
+                  </a:txBody>
+                  <a:tcPr anchor="ctr">
+                    <a:lnL w="12700" cap="flat" cmpd="sng" algn="ctr">
+                      <a:solidFill>
+                        <a:schemeClr val="tx1"/>
+                      </a:solidFill>
+                      <a:prstDash val="solid"/>
+                      <a:round/>
+                      <a:headEnd type="none" w="med" len="med"/>
+                      <a:tailEnd type="none" w="med" len="med"/>
+                    </a:lnL>
+                    <a:lnR w="12700" cap="flat" cmpd="sng" algn="ctr">
+                      <a:solidFill>
+                        <a:schemeClr val="tx1"/>
+                      </a:solidFill>
+                      <a:prstDash val="solid"/>
+                      <a:round/>
+                      <a:headEnd type="none" w="med" len="med"/>
+                      <a:tailEnd type="none" w="med" len="med"/>
+                    </a:lnR>
+                    <a:lnT w="12700" cap="flat" cmpd="sng" algn="ctr">
+                      <a:solidFill>
+                        <a:schemeClr val="tx1"/>
+                      </a:solidFill>
+                      <a:prstDash val="solid"/>
+                      <a:round/>
+                      <a:headEnd type="none" w="med" len="med"/>
+                      <a:tailEnd type="none" w="med" len="med"/>
+                    </a:lnT>
+                    <a:lnB w="12700" cap="flat" cmpd="sng" algn="ctr">
+                      <a:solidFill>
+                        <a:schemeClr val="tx1"/>
+                      </a:solidFill>
+                      <a:prstDash val="solid"/>
+                      <a:round/>
+                      <a:headEnd type="none" w="med" len="med"/>
+                      <a:tailEnd type="none" w="med" len="med"/>
+                    </a:lnB>
+                    <a:solidFill>
+                      <a:schemeClr val="bg1"/>
+                    </a:solidFill>
+                  </a:tcPr>
+                </a:tc>
+                <a:tc>
+                  <a:txBody>
+                    <a:bodyPr/>
+                    <a:lstStyle/>
+                    <a:p>
+                      <a:pPr algn="ctr" latinLnBrk="0"/>
+                      <a:r>
+                        <a:rPr lang="en-US" altLang="ko-KR" dirty="0">
+                          <a:solidFill>
+                            <a:schemeClr val="tx1"/>
+                          </a:solidFill>
+                        </a:rPr>
+                        <a:t>[</a:t>
+                      </a:r>
+                      <a:r>
+                        <a:rPr lang="en-US" altLang="ko-KR" dirty="0" err="1">
+                          <a:solidFill>
+                            <a:schemeClr val="tx1"/>
+                          </a:solidFill>
+                        </a:rPr>
+                        <a:t>mouseLeft</a:t>
+                      </a:r>
+                      <a:r>
+                        <a:rPr lang="en-US" altLang="ko-KR" dirty="0">
+                          <a:solidFill>
+                            <a:schemeClr val="tx1"/>
+                          </a:solidFill>
+                        </a:rPr>
+                        <a:t>]</a:t>
+                      </a:r>
+                      <a:endParaRPr lang="ko-KR" altLang="en-US" dirty="0">
+                        <a:solidFill>
+                          <a:schemeClr val="tx1"/>
+                        </a:solidFill>
+                      </a:endParaRPr>
+                    </a:p>
+                  </a:txBody>
+                  <a:tcPr anchor="ctr">
+                    <a:lnL w="12700" cap="flat" cmpd="sng" algn="ctr">
+                      <a:solidFill>
+                        <a:schemeClr val="tx1"/>
+                      </a:solidFill>
+                      <a:prstDash val="solid"/>
+                      <a:round/>
+                      <a:headEnd type="none" w="med" len="med"/>
+                      <a:tailEnd type="none" w="med" len="med"/>
+                    </a:lnL>
+                    <a:lnR w="12700" cap="flat" cmpd="sng" algn="ctr">
+                      <a:solidFill>
+                        <a:schemeClr val="tx1"/>
+                      </a:solidFill>
+                      <a:prstDash val="solid"/>
+                      <a:round/>
+                      <a:headEnd type="none" w="med" len="med"/>
+                      <a:tailEnd type="none" w="med" len="med"/>
+                    </a:lnR>
+                    <a:lnT w="12700" cap="flat" cmpd="sng" algn="ctr">
+                      <a:solidFill>
+                        <a:schemeClr val="tx1"/>
+                      </a:solidFill>
+                      <a:prstDash val="solid"/>
+                      <a:round/>
+                      <a:headEnd type="none" w="med" len="med"/>
+                      <a:tailEnd type="none" w="med" len="med"/>
+                    </a:lnT>
+                    <a:lnB w="12700" cap="flat" cmpd="sng" algn="ctr">
+                      <a:solidFill>
+                        <a:schemeClr val="tx1"/>
+                      </a:solidFill>
+                      <a:prstDash val="solid"/>
+                      <a:round/>
+                      <a:headEnd type="none" w="med" len="med"/>
+                      <a:tailEnd type="none" w="med" len="med"/>
+                    </a:lnB>
+                    <a:solidFill>
+                      <a:schemeClr val="bg1"/>
+                    </a:solidFill>
+                  </a:tcPr>
+                </a:tc>
+                <a:tc>
+                  <a:txBody>
+                    <a:bodyPr/>
+                    <a:lstStyle/>
+                    <a:p>
+                      <a:pPr algn="ctr" latinLnBrk="0"/>
+                      <a:r>
+                        <a:rPr lang="ko-KR" altLang="en-US" dirty="0">
+                          <a:solidFill>
+                            <a:schemeClr val="tx1"/>
+                          </a:solidFill>
+                        </a:rPr>
+                        <a:t>손에 든 아이템 사용</a:t>
+                      </a:r>
+                    </a:p>
+                  </a:txBody>
+                  <a:tcPr anchor="ctr">
+                    <a:lnL w="12700" cap="flat" cmpd="sng" algn="ctr">
+                      <a:solidFill>
+                        <a:schemeClr val="tx1"/>
+                      </a:solidFill>
+                      <a:prstDash val="solid"/>
+                      <a:round/>
+                      <a:headEnd type="none" w="med" len="med"/>
+                      <a:tailEnd type="none" w="med" len="med"/>
+                    </a:lnL>
+                    <a:lnR w="12700" cap="flat" cmpd="sng" algn="ctr">
+                      <a:solidFill>
+                        <a:schemeClr val="tx1"/>
+                      </a:solidFill>
+                      <a:prstDash val="solid"/>
+                      <a:round/>
+                      <a:headEnd type="none" w="med" len="med"/>
+                      <a:tailEnd type="none" w="med" len="med"/>
+                    </a:lnR>
+                    <a:lnT w="12700" cap="flat" cmpd="sng" algn="ctr">
+                      <a:solidFill>
+                        <a:schemeClr val="tx1"/>
+                      </a:solidFill>
+                      <a:prstDash val="solid"/>
+                      <a:round/>
+                      <a:headEnd type="none" w="med" len="med"/>
+                      <a:tailEnd type="none" w="med" len="med"/>
+                    </a:lnT>
+                    <a:lnB w="12700" cap="flat" cmpd="sng" algn="ctr">
+                      <a:solidFill>
+                        <a:schemeClr val="tx1"/>
+                      </a:solidFill>
+                      <a:prstDash val="solid"/>
+                      <a:round/>
+                      <a:headEnd type="none" w="med" len="med"/>
+                      <a:tailEnd type="none" w="med" len="med"/>
+                    </a:lnB>
+                    <a:solidFill>
+                      <a:schemeClr val="bg1"/>
+                    </a:solidFill>
+                  </a:tcPr>
+                </a:tc>
+                <a:extLst>
+                  <a:ext uri="{0D108BD9-81ED-4DB2-BD59-A6C34878D82A}">
+                    <a16:rowId xmlns:a16="http://schemas.microsoft.com/office/drawing/2014/main" val="1322295288"/>
+                  </a:ext>
+                </a:extLst>
+              </a:tr>
+              <a:tr h="370840">
+                <a:tc>
+                  <a:txBody>
+                    <a:bodyPr/>
+                    <a:lstStyle/>
+                    <a:p>
+                      <a:pPr algn="ctr" latinLnBrk="0"/>
+                      <a:r>
+                        <a:rPr lang="en-US" altLang="ko-KR" dirty="0" err="1">
+                          <a:solidFill>
+                            <a:schemeClr val="tx1"/>
+                          </a:solidFill>
+                        </a:rPr>
+                        <a:t>mouseRight</a:t>
+                      </a:r>
+                      <a:endParaRPr lang="ko-KR" altLang="en-US" dirty="0">
+                        <a:solidFill>
+                          <a:schemeClr val="tx1"/>
+                        </a:solidFill>
+                      </a:endParaRPr>
+                    </a:p>
+                  </a:txBody>
+                  <a:tcPr anchor="ctr">
+                    <a:lnL w="12700" cap="flat" cmpd="sng" algn="ctr">
+                      <a:solidFill>
+                        <a:schemeClr val="tx1"/>
+                      </a:solidFill>
+                      <a:prstDash val="solid"/>
+                      <a:round/>
+                      <a:headEnd type="none" w="med" len="med"/>
+                      <a:tailEnd type="none" w="med" len="med"/>
+                    </a:lnL>
+                    <a:lnR w="12700" cap="flat" cmpd="sng" algn="ctr">
+                      <a:solidFill>
+                        <a:schemeClr val="tx1"/>
+                      </a:solidFill>
+                      <a:prstDash val="solid"/>
+                      <a:round/>
+                      <a:headEnd type="none" w="med" len="med"/>
+                      <a:tailEnd type="none" w="med" len="med"/>
+                    </a:lnR>
+                    <a:lnT w="12700" cap="flat" cmpd="sng" algn="ctr">
+                      <a:solidFill>
+                        <a:schemeClr val="tx1"/>
+                      </a:solidFill>
+                      <a:prstDash val="solid"/>
+                      <a:round/>
+                      <a:headEnd type="none" w="med" len="med"/>
+                      <a:tailEnd type="none" w="med" len="med"/>
+                    </a:lnT>
+                    <a:lnB w="12700" cap="flat" cmpd="sng" algn="ctr">
+                      <a:solidFill>
+                        <a:schemeClr val="tx1"/>
+                      </a:solidFill>
+                      <a:prstDash val="solid"/>
+                      <a:round/>
+                      <a:headEnd type="none" w="med" len="med"/>
+                      <a:tailEnd type="none" w="med" len="med"/>
+                    </a:lnB>
+                    <a:solidFill>
+                      <a:schemeClr val="bg1"/>
+                    </a:solidFill>
+                  </a:tcPr>
+                </a:tc>
+                <a:tc>
+                  <a:txBody>
+                    <a:bodyPr/>
+                    <a:lstStyle/>
+                    <a:p>
+                      <a:pPr algn="ctr" latinLnBrk="0"/>
+                      <a:endParaRPr lang="ko-KR" altLang="en-US" dirty="0">
+                        <a:solidFill>
+                          <a:schemeClr val="tx1"/>
+                        </a:solidFill>
+                      </a:endParaRPr>
+                    </a:p>
+                  </a:txBody>
+                  <a:tcPr anchor="ctr">
+                    <a:lnL w="12700" cap="flat" cmpd="sng" algn="ctr">
+                      <a:solidFill>
+                        <a:schemeClr val="tx1"/>
+                      </a:solidFill>
+                      <a:prstDash val="solid"/>
+                      <a:round/>
+                      <a:headEnd type="none" w="med" len="med"/>
+                      <a:tailEnd type="none" w="med" len="med"/>
+                    </a:lnL>
+                    <a:lnR w="12700" cap="flat" cmpd="sng" algn="ctr">
+                      <a:solidFill>
+                        <a:schemeClr val="tx1"/>
+                      </a:solidFill>
+                      <a:prstDash val="solid"/>
+                      <a:round/>
+                      <a:headEnd type="none" w="med" len="med"/>
+                      <a:tailEnd type="none" w="med" len="med"/>
+                    </a:lnR>
+                    <a:lnT w="12700" cap="flat" cmpd="sng" algn="ctr">
+                      <a:solidFill>
+                        <a:schemeClr val="tx1"/>
+                      </a:solidFill>
+                      <a:prstDash val="solid"/>
+                      <a:round/>
+                      <a:headEnd type="none" w="med" len="med"/>
+                      <a:tailEnd type="none" w="med" len="med"/>
+                    </a:lnT>
+                    <a:lnB w="12700" cap="flat" cmpd="sng" algn="ctr">
+                      <a:solidFill>
+                        <a:schemeClr val="tx1"/>
+                      </a:solidFill>
+                      <a:prstDash val="solid"/>
+                      <a:round/>
+                      <a:headEnd type="none" w="med" len="med"/>
+                      <a:tailEnd type="none" w="med" len="med"/>
+                    </a:lnB>
+                    <a:solidFill>
+                      <a:schemeClr val="bg1"/>
+                    </a:solidFill>
+                  </a:tcPr>
+                </a:tc>
+                <a:tc>
+                  <a:txBody>
+                    <a:bodyPr/>
+                    <a:lstStyle/>
+                    <a:p>
+                      <a:pPr algn="ctr" latinLnBrk="0"/>
+                      <a:r>
+                        <a:rPr lang="en-US" altLang="ko-KR" dirty="0">
+                          <a:solidFill>
+                            <a:schemeClr val="tx1"/>
+                          </a:solidFill>
+                        </a:rPr>
+                        <a:t>?</a:t>
+                      </a:r>
+                      <a:endParaRPr lang="ko-KR" altLang="en-US" dirty="0">
+                        <a:solidFill>
+                          <a:schemeClr val="tx1"/>
+                        </a:solidFill>
+                      </a:endParaRPr>
+                    </a:p>
+                  </a:txBody>
+                  <a:tcPr anchor="ctr">
+                    <a:lnL w="12700" cap="flat" cmpd="sng" algn="ctr">
+                      <a:solidFill>
+                        <a:schemeClr val="tx1"/>
+                      </a:solidFill>
+                      <a:prstDash val="solid"/>
+                      <a:round/>
+                      <a:headEnd type="none" w="med" len="med"/>
+                      <a:tailEnd type="none" w="med" len="med"/>
+                    </a:lnL>
+                    <a:lnR w="12700" cap="flat" cmpd="sng" algn="ctr">
+                      <a:solidFill>
+                        <a:schemeClr val="tx1"/>
+                      </a:solidFill>
+                      <a:prstDash val="solid"/>
+                      <a:round/>
+                      <a:headEnd type="none" w="med" len="med"/>
+                      <a:tailEnd type="none" w="med" len="med"/>
+                    </a:lnR>
+                    <a:lnT w="12700" cap="flat" cmpd="sng" algn="ctr">
+                      <a:solidFill>
+                        <a:schemeClr val="tx1"/>
+                      </a:solidFill>
+                      <a:prstDash val="solid"/>
+                      <a:round/>
+                      <a:headEnd type="none" w="med" len="med"/>
+                      <a:tailEnd type="none" w="med" len="med"/>
+                    </a:lnT>
+                    <a:lnB w="12700" cap="flat" cmpd="sng" algn="ctr">
+                      <a:solidFill>
+                        <a:schemeClr val="tx1"/>
+                      </a:solidFill>
+                      <a:prstDash val="solid"/>
+                      <a:round/>
+                      <a:headEnd type="none" w="med" len="med"/>
+                      <a:tailEnd type="none" w="med" len="med"/>
+                    </a:lnB>
+                    <a:solidFill>
+                      <a:schemeClr val="bg1"/>
+                    </a:solidFill>
+                  </a:tcPr>
+                </a:tc>
+                <a:extLst>
+                  <a:ext uri="{0D108BD9-81ED-4DB2-BD59-A6C34878D82A}">
+                    <a16:rowId xmlns:a16="http://schemas.microsoft.com/office/drawing/2014/main" val="2039416045"/>
+                  </a:ext>
+                </a:extLst>
+              </a:tr>
+              <a:tr h="594360">
+                <a:tc>
+                  <a:txBody>
+                    <a:bodyPr/>
+                    <a:lstStyle/>
+                    <a:p>
+                      <a:pPr algn="ctr" latinLnBrk="0"/>
+                      <a:r>
+                        <a:rPr lang="en-US" altLang="ko-KR" dirty="0" err="1">
+                          <a:solidFill>
+                            <a:schemeClr val="tx1"/>
+                          </a:solidFill>
+                        </a:rPr>
+                        <a:t>mouseWheelUp</a:t>
+                      </a:r>
+                      <a:endParaRPr lang="ko-KR" altLang="en-US" dirty="0">
+                        <a:solidFill>
+                          <a:schemeClr val="tx1"/>
+                        </a:solidFill>
+                      </a:endParaRPr>
+                    </a:p>
+                  </a:txBody>
+                  <a:tcPr anchor="ctr">
+                    <a:lnL w="12700" cap="flat" cmpd="sng" algn="ctr">
+                      <a:solidFill>
+                        <a:schemeClr val="tx1"/>
+                      </a:solidFill>
+                      <a:prstDash val="solid"/>
+                      <a:round/>
+                      <a:headEnd type="none" w="med" len="med"/>
+                      <a:tailEnd type="none" w="med" len="med"/>
+                    </a:lnL>
+                    <a:lnR w="12700" cap="flat" cmpd="sng" algn="ctr">
+                      <a:solidFill>
+                        <a:schemeClr val="tx1"/>
+                      </a:solidFill>
+                      <a:prstDash val="solid"/>
+                      <a:round/>
+                      <a:headEnd type="none" w="med" len="med"/>
+                      <a:tailEnd type="none" w="med" len="med"/>
+                    </a:lnR>
+                    <a:lnT w="12700" cap="flat" cmpd="sng" algn="ctr">
+                      <a:solidFill>
+                        <a:schemeClr val="tx1"/>
+                      </a:solidFill>
+                      <a:prstDash val="solid"/>
+                      <a:round/>
+                      <a:headEnd type="none" w="med" len="med"/>
+                      <a:tailEnd type="none" w="med" len="med"/>
+                    </a:lnT>
+                    <a:lnB w="12700" cap="flat" cmpd="sng" algn="ctr">
+                      <a:solidFill>
+                        <a:schemeClr val="tx1"/>
+                      </a:solidFill>
+                      <a:prstDash val="solid"/>
+                      <a:round/>
+                      <a:headEnd type="none" w="med" len="med"/>
+                      <a:tailEnd type="none" w="med" len="med"/>
+                    </a:lnB>
+                    <a:solidFill>
+                      <a:schemeClr val="bg1"/>
+                    </a:solidFill>
+                  </a:tcPr>
+                </a:tc>
+                <a:tc>
+                  <a:txBody>
+                    <a:bodyPr/>
+                    <a:lstStyle/>
+                    <a:p>
+                      <a:pPr algn="ctr" latinLnBrk="0"/>
+                      <a:r>
+                        <a:rPr lang="en-US" altLang="ko-KR" dirty="0">
+                          <a:solidFill>
+                            <a:schemeClr val="tx1"/>
+                          </a:solidFill>
+                        </a:rPr>
+                        <a:t>[</a:t>
+                      </a:r>
+                      <a:r>
+                        <a:rPr lang="en-US" altLang="ko-KR" dirty="0" err="1">
+                          <a:solidFill>
+                            <a:schemeClr val="tx1"/>
+                          </a:solidFill>
+                        </a:rPr>
+                        <a:t>mouseWheelUp</a:t>
+                      </a:r>
+                      <a:r>
+                        <a:rPr lang="en-US" altLang="ko-KR" dirty="0">
+                          <a:solidFill>
+                            <a:schemeClr val="tx1"/>
+                          </a:solidFill>
+                        </a:rPr>
+                        <a:t>]</a:t>
+                      </a:r>
+                      <a:endParaRPr lang="ko-KR" altLang="en-US" dirty="0">
+                        <a:solidFill>
+                          <a:schemeClr val="tx1"/>
+                        </a:solidFill>
+                      </a:endParaRPr>
+                    </a:p>
+                  </a:txBody>
+                  <a:tcPr anchor="ctr">
+                    <a:lnL w="12700" cap="flat" cmpd="sng" algn="ctr">
+                      <a:solidFill>
+                        <a:schemeClr val="tx1"/>
+                      </a:solidFill>
+                      <a:prstDash val="solid"/>
+                      <a:round/>
+                      <a:headEnd type="none" w="med" len="med"/>
+                      <a:tailEnd type="none" w="med" len="med"/>
+                    </a:lnL>
+                    <a:lnR w="12700" cap="flat" cmpd="sng" algn="ctr">
+                      <a:solidFill>
+                        <a:schemeClr val="tx1"/>
+                      </a:solidFill>
+                      <a:prstDash val="solid"/>
+                      <a:round/>
+                      <a:headEnd type="none" w="med" len="med"/>
+                      <a:tailEnd type="none" w="med" len="med"/>
+                    </a:lnR>
+                    <a:lnT w="12700" cap="flat" cmpd="sng" algn="ctr">
+                      <a:solidFill>
+                        <a:schemeClr val="tx1"/>
+                      </a:solidFill>
+                      <a:prstDash val="solid"/>
+                      <a:round/>
+                      <a:headEnd type="none" w="med" len="med"/>
+                      <a:tailEnd type="none" w="med" len="med"/>
+                    </a:lnT>
+                    <a:lnB w="12700" cap="flat" cmpd="sng" algn="ctr">
+                      <a:solidFill>
+                        <a:schemeClr val="tx1"/>
+                      </a:solidFill>
+                      <a:prstDash val="solid"/>
+                      <a:round/>
+                      <a:headEnd type="none" w="med" len="med"/>
+                      <a:tailEnd type="none" w="med" len="med"/>
+                    </a:lnB>
+                    <a:solidFill>
+                      <a:schemeClr val="bg1"/>
+                    </a:solidFill>
+                  </a:tcPr>
+                </a:tc>
+                <a:tc rowSpan="2">
+                  <a:txBody>
+                    <a:bodyPr/>
+                    <a:lstStyle/>
+                    <a:p>
+                      <a:pPr algn="ctr" latinLnBrk="0"/>
+                      <a:r>
+                        <a:rPr lang="ko-KR" altLang="en-US" dirty="0" err="1">
+                          <a:solidFill>
+                            <a:schemeClr val="tx1"/>
+                          </a:solidFill>
+                        </a:rPr>
+                        <a:t>퀵슬롯에서</a:t>
+                      </a:r>
+                      <a:r>
+                        <a:rPr lang="ko-KR" altLang="en-US" dirty="0">
+                          <a:solidFill>
+                            <a:schemeClr val="tx1"/>
+                          </a:solidFill>
+                        </a:rPr>
+                        <a:t> 한 칸 위</a:t>
+                      </a:r>
+                      <a:r>
+                        <a:rPr lang="en-US" altLang="ko-KR" dirty="0">
+                          <a:solidFill>
+                            <a:schemeClr val="tx1"/>
+                          </a:solidFill>
+                        </a:rPr>
+                        <a:t>/</a:t>
+                      </a:r>
+                      <a:r>
+                        <a:rPr lang="ko-KR" altLang="en-US" dirty="0">
+                          <a:solidFill>
+                            <a:schemeClr val="tx1"/>
+                          </a:solidFill>
+                        </a:rPr>
+                        <a:t>아래</a:t>
+                      </a:r>
+                      <a:r>
+                        <a:rPr lang="en-US" altLang="ko-KR" dirty="0">
+                          <a:solidFill>
+                            <a:schemeClr val="tx1"/>
+                          </a:solidFill>
+                        </a:rPr>
+                        <a:t>(Up/Down)</a:t>
+                      </a:r>
+                      <a:r>
+                        <a:rPr lang="ko-KR" altLang="en-US" dirty="0">
+                          <a:solidFill>
+                            <a:schemeClr val="tx1"/>
+                          </a:solidFill>
+                        </a:rPr>
+                        <a:t>의 슬롯이 선택됨</a:t>
+                      </a:r>
+                      <a:r>
+                        <a:rPr lang="en-US" altLang="ko-KR" dirty="0">
+                          <a:solidFill>
+                            <a:schemeClr val="tx1"/>
+                          </a:solidFill>
+                        </a:rPr>
+                        <a:t>.</a:t>
+                      </a:r>
+                    </a:p>
+                    <a:p>
+                      <a:pPr algn="ctr" latinLnBrk="0"/>
+                      <a:r>
+                        <a:rPr lang="ko-KR" altLang="en-US" dirty="0">
+                          <a:solidFill>
+                            <a:schemeClr val="tx1"/>
+                          </a:solidFill>
+                        </a:rPr>
+                        <a:t>해당 칸의 아이템 손에 들기</a:t>
+                      </a:r>
+                      <a:r>
+                        <a:rPr lang="en-US" altLang="ko-KR" dirty="0">
+                          <a:solidFill>
+                            <a:schemeClr val="tx1"/>
+                          </a:solidFill>
+                        </a:rPr>
+                        <a:t>.</a:t>
+                      </a:r>
+                      <a:endParaRPr lang="ko-KR" altLang="en-US" dirty="0">
+                        <a:solidFill>
+                          <a:schemeClr val="tx1"/>
+                        </a:solidFill>
+                      </a:endParaRPr>
+                    </a:p>
+                  </a:txBody>
+                  <a:tcPr anchor="ctr">
+                    <a:lnL w="12700" cap="flat" cmpd="sng" algn="ctr">
+                      <a:solidFill>
+                        <a:schemeClr val="tx1"/>
+                      </a:solidFill>
+                      <a:prstDash val="solid"/>
+                      <a:round/>
+                      <a:headEnd type="none" w="med" len="med"/>
+                      <a:tailEnd type="none" w="med" len="med"/>
+                    </a:lnL>
+                    <a:lnR w="12700" cap="flat" cmpd="sng" algn="ctr">
+                      <a:solidFill>
+                        <a:schemeClr val="tx1"/>
+                      </a:solidFill>
+                      <a:prstDash val="solid"/>
+                      <a:round/>
+                      <a:headEnd type="none" w="med" len="med"/>
+                      <a:tailEnd type="none" w="med" len="med"/>
+                    </a:lnR>
+                    <a:lnT w="12700" cap="flat" cmpd="sng" algn="ctr">
+                      <a:solidFill>
+                        <a:schemeClr val="tx1"/>
+                      </a:solidFill>
+                      <a:prstDash val="solid"/>
+                      <a:round/>
+                      <a:headEnd type="none" w="med" len="med"/>
+                      <a:tailEnd type="none" w="med" len="med"/>
+                    </a:lnT>
+                    <a:lnB w="12700" cap="flat" cmpd="sng" algn="ctr">
+                      <a:solidFill>
+                        <a:schemeClr val="tx1"/>
+                      </a:solidFill>
+                      <a:prstDash val="solid"/>
+                      <a:round/>
+                      <a:headEnd type="none" w="med" len="med"/>
+                      <a:tailEnd type="none" w="med" len="med"/>
+                    </a:lnB>
+                    <a:solidFill>
+                      <a:schemeClr val="bg1"/>
+                    </a:solidFill>
+                  </a:tcPr>
+                </a:tc>
+                <a:extLst>
+                  <a:ext uri="{0D108BD9-81ED-4DB2-BD59-A6C34878D82A}">
+                    <a16:rowId xmlns:a16="http://schemas.microsoft.com/office/drawing/2014/main" val="841332267"/>
+                  </a:ext>
+                </a:extLst>
+              </a:tr>
+              <a:tr h="594360">
+                <a:tc>
+                  <a:txBody>
+                    <a:bodyPr/>
+                    <a:lstStyle/>
+                    <a:p>
+                      <a:pPr algn="ctr" latinLnBrk="0"/>
+                      <a:r>
+                        <a:rPr lang="en-US" altLang="ko-KR" dirty="0" err="1">
+                          <a:solidFill>
+                            <a:schemeClr val="tx1"/>
+                          </a:solidFill>
+                        </a:rPr>
+                        <a:t>mouseWheelDown</a:t>
+                      </a:r>
+                      <a:endParaRPr lang="ko-KR" altLang="en-US" dirty="0">
+                        <a:solidFill>
+                          <a:schemeClr val="tx1"/>
+                        </a:solidFill>
+                      </a:endParaRPr>
+                    </a:p>
+                  </a:txBody>
+                  <a:tcPr anchor="ctr">
+                    <a:lnL w="12700" cap="flat" cmpd="sng" algn="ctr">
+                      <a:solidFill>
+                        <a:schemeClr val="tx1"/>
+                      </a:solidFill>
+                      <a:prstDash val="solid"/>
+                      <a:round/>
+                      <a:headEnd type="none" w="med" len="med"/>
+                      <a:tailEnd type="none" w="med" len="med"/>
+                    </a:lnL>
+                    <a:lnR w="12700" cap="flat" cmpd="sng" algn="ctr">
+                      <a:solidFill>
+                        <a:schemeClr val="tx1"/>
+                      </a:solidFill>
+                      <a:prstDash val="solid"/>
+                      <a:round/>
+                      <a:headEnd type="none" w="med" len="med"/>
+                      <a:tailEnd type="none" w="med" len="med"/>
+                    </a:lnR>
+                    <a:lnT w="12700" cap="flat" cmpd="sng" algn="ctr">
+                      <a:solidFill>
+                        <a:schemeClr val="tx1"/>
+                      </a:solidFill>
+                      <a:prstDash val="solid"/>
+                      <a:round/>
+                      <a:headEnd type="none" w="med" len="med"/>
+                      <a:tailEnd type="none" w="med" len="med"/>
+                    </a:lnT>
+                    <a:lnB w="12700" cap="flat" cmpd="sng" algn="ctr">
+                      <a:solidFill>
+                        <a:schemeClr val="tx1"/>
+                      </a:solidFill>
+                      <a:prstDash val="solid"/>
+                      <a:round/>
+                      <a:headEnd type="none" w="med" len="med"/>
+                      <a:tailEnd type="none" w="med" len="med"/>
+                    </a:lnB>
+                    <a:solidFill>
+                      <a:schemeClr val="bg1"/>
+                    </a:solidFill>
+                  </a:tcPr>
+                </a:tc>
+                <a:tc>
+                  <a:txBody>
+                    <a:bodyPr/>
+                    <a:lstStyle/>
+                    <a:p>
+                      <a:pPr algn="ctr" latinLnBrk="0"/>
+                      <a:r>
+                        <a:rPr lang="en-US" altLang="ko-KR" dirty="0">
+                          <a:solidFill>
+                            <a:schemeClr val="tx1"/>
+                          </a:solidFill>
+                        </a:rPr>
+                        <a:t>[</a:t>
+                      </a:r>
+                      <a:r>
+                        <a:rPr lang="en-US" altLang="ko-KR" dirty="0" err="1">
+                          <a:solidFill>
+                            <a:schemeClr val="tx1"/>
+                          </a:solidFill>
+                        </a:rPr>
+                        <a:t>mouseWheelDown</a:t>
+                      </a:r>
+                      <a:r>
+                        <a:rPr lang="en-US" altLang="ko-KR" dirty="0">
+                          <a:solidFill>
+                            <a:schemeClr val="tx1"/>
+                          </a:solidFill>
+                        </a:rPr>
+                        <a:t>]</a:t>
+                      </a:r>
+                      <a:endParaRPr lang="ko-KR" altLang="en-US" dirty="0">
+                        <a:solidFill>
+                          <a:schemeClr val="tx1"/>
+                        </a:solidFill>
+                      </a:endParaRPr>
+                    </a:p>
+                  </a:txBody>
+                  <a:tcPr anchor="ctr">
+                    <a:lnL w="12700" cap="flat" cmpd="sng" algn="ctr">
+                      <a:solidFill>
+                        <a:schemeClr val="tx1"/>
+                      </a:solidFill>
+                      <a:prstDash val="solid"/>
+                      <a:round/>
+                      <a:headEnd type="none" w="med" len="med"/>
+                      <a:tailEnd type="none" w="med" len="med"/>
+                    </a:lnL>
+                    <a:lnR w="12700" cap="flat" cmpd="sng" algn="ctr">
+                      <a:solidFill>
+                        <a:schemeClr val="tx1"/>
+                      </a:solidFill>
+                      <a:prstDash val="solid"/>
+                      <a:round/>
+                      <a:headEnd type="none" w="med" len="med"/>
+                      <a:tailEnd type="none" w="med" len="med"/>
+                    </a:lnR>
+                    <a:lnT w="12700" cap="flat" cmpd="sng" algn="ctr">
+                      <a:solidFill>
+                        <a:schemeClr val="tx1"/>
+                      </a:solidFill>
+                      <a:prstDash val="solid"/>
+                      <a:round/>
+                      <a:headEnd type="none" w="med" len="med"/>
+                      <a:tailEnd type="none" w="med" len="med"/>
+                    </a:lnT>
+                    <a:lnB w="12700" cap="flat" cmpd="sng" algn="ctr">
+                      <a:solidFill>
+                        <a:schemeClr val="tx1"/>
+                      </a:solidFill>
+                      <a:prstDash val="solid"/>
+                      <a:round/>
+                      <a:headEnd type="none" w="med" len="med"/>
+                      <a:tailEnd type="none" w="med" len="med"/>
+                    </a:lnB>
+                    <a:solidFill>
+                      <a:schemeClr val="bg1"/>
+                    </a:solidFill>
+                  </a:tcPr>
+                </a:tc>
+                <a:tc vMerge="1">
+                  <a:txBody>
+                    <a:bodyPr/>
+                    <a:lstStyle/>
+                    <a:p>
+                      <a:pPr algn="ctr" latinLnBrk="0"/>
+                      <a:endParaRPr lang="ko-KR" altLang="en-US" dirty="0">
+                        <a:solidFill>
+                          <a:schemeClr val="tx1"/>
+                        </a:solidFill>
+                      </a:endParaRPr>
+                    </a:p>
+                  </a:txBody>
+                  <a:tcPr anchor="ctr">
+                    <a:lnL w="12700" cap="flat" cmpd="sng" algn="ctr">
+                      <a:solidFill>
+                        <a:schemeClr val="tx1"/>
+                      </a:solidFill>
+                      <a:prstDash val="solid"/>
+                      <a:round/>
+                      <a:headEnd type="none" w="med" len="med"/>
+                      <a:tailEnd type="none" w="med" len="med"/>
+                    </a:lnL>
+                    <a:lnR w="12700" cap="flat" cmpd="sng" algn="ctr">
+                      <a:solidFill>
+                        <a:schemeClr val="tx1"/>
+                      </a:solidFill>
+                      <a:prstDash val="solid"/>
+                      <a:round/>
+                      <a:headEnd type="none" w="med" len="med"/>
+                      <a:tailEnd type="none" w="med" len="med"/>
+                    </a:lnR>
+                    <a:lnT w="12700" cap="flat" cmpd="sng" algn="ctr">
+                      <a:solidFill>
+                        <a:schemeClr val="tx1"/>
+                      </a:solidFill>
+                      <a:prstDash val="solid"/>
+                      <a:round/>
+                      <a:headEnd type="none" w="med" len="med"/>
+                      <a:tailEnd type="none" w="med" len="med"/>
+                    </a:lnT>
+                    <a:lnB w="12700" cap="flat" cmpd="sng" algn="ctr">
+                      <a:solidFill>
+                        <a:schemeClr val="tx1"/>
+                      </a:solidFill>
+                      <a:prstDash val="solid"/>
+                      <a:round/>
+                      <a:headEnd type="none" w="med" len="med"/>
+                      <a:tailEnd type="none" w="med" len="med"/>
+                    </a:lnB>
+                    <a:solidFill>
+                      <a:schemeClr val="bg1"/>
+                    </a:solidFill>
+                  </a:tcPr>
+                </a:tc>
+                <a:extLst>
+                  <a:ext uri="{0D108BD9-81ED-4DB2-BD59-A6C34878D82A}">
+                    <a16:rowId xmlns:a16="http://schemas.microsoft.com/office/drawing/2014/main" val="82424116"/>
+                  </a:ext>
+                </a:extLst>
+              </a:tr>
+            </a:tbl>
+          </a:graphicData>
+        </a:graphic>
+      </p:graphicFrame>
+    </p:spTree>
+    <p:extLst>
+      <p:ext uri="{BB962C8B-B14F-4D97-AF65-F5344CB8AC3E}">
+        <p14:creationId xmlns:p14="http://schemas.microsoft.com/office/powerpoint/2010/main" val="2776122359"/>
+      </p:ext>
+    </p:extLst>
+  </p:cSld>
+  <p:clrMapOvr>
+    <a:masterClrMapping/>
+  </p:clrMapOvr>
+</p:sld>
+</file>
+
+<file path=ppt/slides/slide6.xml><?xml version="1.0" encoding="utf-8"?>
+<p:sld xmlns:a="http://schemas.openxmlformats.org/drawingml/2006/main" xmlns:r="http://schemas.openxmlformats.org/officeDocument/2006/relationships" xmlns:p="http://schemas.openxmlformats.org/presentationml/2006/main">
+  <p:cSld>
+    <p:spTree>
+      <p:nvGrpSpPr>
         <p:cNvPr id="1" name=""/>
         <p:cNvGrpSpPr/>
         <p:nvPr/>
@@ -10045,7 +11790,15 @@
           <a:p>
             <a:r>
               <a:rPr lang="en-US" altLang="ko-KR" dirty="0"/>
-              <a:t>(state.........)</a:t>
+              <a:t>(state </a:t>
+            </a:r>
+            <a:r>
+              <a:rPr lang="ko-KR" altLang="en-US" dirty="0"/>
+              <a:t>그냥 쭉 정리하기</a:t>
+            </a:r>
+            <a:r>
+              <a:rPr lang="en-US" altLang="ko-KR" dirty="0"/>
+              <a:t>)</a:t>
             </a:r>
             <a:endParaRPr lang="ko-KR" altLang="en-US" dirty="0"/>
           </a:p>
@@ -10074,7 +11827,7 @@
           <a:p>
             <a:fld id="{5413EFF4-4F73-4713-85F9-663DD6DC3937}" type="slidenum">
               <a:rPr lang="ko-KR" altLang="en-US" smtClean="0"/>
-              <a:t>5</a:t>
+              <a:t>6</a:t>
             </a:fld>
             <a:endParaRPr lang="ko-KR" altLang="en-US"/>
           </a:p>
@@ -10093,7 +11846,7 @@
 </p:sld>
 </file>
 
-<file path=ppt/slides/slide6.xml><?xml version="1.0" encoding="utf-8"?>
+<file path=ppt/slides/slide7.xml><?xml version="1.0" encoding="utf-8"?>
 <p:sld xmlns:a="http://schemas.openxmlformats.org/drawingml/2006/main" xmlns:r="http://schemas.openxmlformats.org/officeDocument/2006/relationships" xmlns:p="http://schemas.openxmlformats.org/presentationml/2006/main">
   <p:cSld>
     <p:spTree>
@@ -10206,7 +11959,7 @@
           <a:p>
             <a:fld id="{5413EFF4-4F73-4713-85F9-663DD6DC3937}" type="slidenum">
               <a:rPr lang="ko-KR" altLang="en-US" smtClean="0"/>
-              <a:t>6</a:t>
+              <a:t>7</a:t>
             </a:fld>
             <a:endParaRPr lang="ko-KR" altLang="en-US"/>
           </a:p>
@@ -10929,7 +12682,7 @@
 </p:sld>
 </file>
 
-<file path=ppt/slides/slide7.xml><?xml version="1.0" encoding="utf-8"?>
+<file path=ppt/slides/slide8.xml><?xml version="1.0" encoding="utf-8"?>
 <p:sld xmlns:a="http://schemas.openxmlformats.org/drawingml/2006/main" xmlns:r="http://schemas.openxmlformats.org/officeDocument/2006/relationships" xmlns:p="http://schemas.openxmlformats.org/presentationml/2006/main">
   <p:cSld>
     <p:spTree>
@@ -11089,7 +12842,7 @@
 </p:sld>
 </file>
 
-<file path=ppt/slides/slide8.xml><?xml version="1.0" encoding="utf-8"?>
+<file path=ppt/slides/slide9.xml><?xml version="1.0" encoding="utf-8"?>
 <p:sld xmlns:a="http://schemas.openxmlformats.org/drawingml/2006/main" xmlns:r="http://schemas.openxmlformats.org/officeDocument/2006/relationships" xmlns:p="http://schemas.openxmlformats.org/presentationml/2006/main">
   <p:cSld>
     <p:spTree>
@@ -11252,7 +13005,7 @@
           <a:p>
             <a:fld id="{5413EFF4-4F73-4713-85F9-663DD6DC3937}" type="slidenum">
               <a:rPr lang="ko-KR" altLang="en-US" smtClean="0"/>
-              <a:t>8</a:t>
+              <a:t>9</a:t>
             </a:fld>
             <a:endParaRPr lang="ko-KR" altLang="en-US"/>
           </a:p>
@@ -11262,568 +13015,6 @@
     <p:extLst>
       <p:ext uri="{BB962C8B-B14F-4D97-AF65-F5344CB8AC3E}">
         <p14:creationId xmlns:p14="http://schemas.microsoft.com/office/powerpoint/2010/main" val="1612175918"/>
-      </p:ext>
-    </p:extLst>
-  </p:cSld>
-  <p:clrMapOvr>
-    <a:masterClrMapping/>
-  </p:clrMapOvr>
-</p:sld>
-</file>
-
-<file path=ppt/slides/slide9.xml><?xml version="1.0" encoding="utf-8"?>
-<p:sld xmlns:a="http://schemas.openxmlformats.org/drawingml/2006/main" xmlns:r="http://schemas.openxmlformats.org/officeDocument/2006/relationships" xmlns:p="http://schemas.openxmlformats.org/presentationml/2006/main">
-  <p:cSld>
-    <p:spTree>
-      <p:nvGrpSpPr>
-        <p:cNvPr id="1" name=""/>
-        <p:cNvGrpSpPr/>
-        <p:nvPr/>
-      </p:nvGrpSpPr>
-      <p:grpSpPr>
-        <a:xfrm>
-          <a:off x="0" y="0"/>
-          <a:ext cx="0" cy="0"/>
-          <a:chOff x="0" y="0"/>
-          <a:chExt cx="0" cy="0"/>
-        </a:xfrm>
-      </p:grpSpPr>
-      <p:sp>
-        <p:nvSpPr>
-          <p:cNvPr id="2" name="제목 1">
-            <a:extLst>
-              <a:ext uri="{FF2B5EF4-FFF2-40B4-BE49-F238E27FC236}">
-                <a16:creationId xmlns:a16="http://schemas.microsoft.com/office/drawing/2014/main" id="{52BCFE61-56FB-9FD5-7B08-AC06F639CB19}"/>
-              </a:ext>
-            </a:extLst>
-          </p:cNvPr>
-          <p:cNvSpPr>
-            <a:spLocks noGrp="1"/>
-          </p:cNvSpPr>
-          <p:nvPr>
-            <p:ph type="title"/>
-          </p:nvPr>
-        </p:nvSpPr>
-        <p:spPr/>
-        <p:txBody>
-          <a:bodyPr/>
-          <a:lstStyle/>
-          <a:p>
-            <a:r>
-              <a:rPr lang="ko-KR" altLang="en-US" dirty="0"/>
-              <a:t>파워 레벨 시스템</a:t>
-            </a:r>
-            <a:r>
-              <a:rPr lang="en-US" altLang="ko-KR" dirty="0"/>
-              <a:t>		_</a:t>
-            </a:r>
-            <a:r>
-              <a:rPr lang="ko-KR" altLang="en-US" dirty="0"/>
-              <a:t>몬스터 </a:t>
-            </a:r>
-            <a:r>
-              <a:rPr lang="ko-KR" altLang="en-US" dirty="0" err="1"/>
-              <a:t>스폰</a:t>
-            </a:r>
-            <a:endParaRPr lang="ko-KR" altLang="en-US" dirty="0"/>
-          </a:p>
-        </p:txBody>
-      </p:sp>
-      <p:sp>
-        <p:nvSpPr>
-          <p:cNvPr id="3" name="내용 개체 틀 2">
-            <a:extLst>
-              <a:ext uri="{FF2B5EF4-FFF2-40B4-BE49-F238E27FC236}">
-                <a16:creationId xmlns:a16="http://schemas.microsoft.com/office/drawing/2014/main" id="{8F3AA84A-B3CE-27B5-E10C-1B665E6A1335}"/>
-              </a:ext>
-            </a:extLst>
-          </p:cNvPr>
-          <p:cNvSpPr>
-            <a:spLocks noGrp="1"/>
-          </p:cNvSpPr>
-          <p:nvPr>
-            <p:ph idx="1"/>
-          </p:nvPr>
-        </p:nvSpPr>
-        <p:spPr>
-          <a:xfrm>
-            <a:off x="177188" y="953655"/>
-            <a:ext cx="11809164" cy="5468797"/>
-          </a:xfrm>
-        </p:spPr>
-        <p:txBody>
-          <a:bodyPr>
-            <a:noAutofit/>
-          </a:bodyPr>
-          <a:lstStyle/>
-          <a:p>
-            <a:r>
-              <a:rPr lang="ko-KR" altLang="en-US" dirty="0" err="1"/>
-              <a:t>리썰</a:t>
-            </a:r>
-            <a:r>
-              <a:rPr lang="ko-KR" altLang="en-US" dirty="0"/>
-              <a:t> 컴퍼니의 </a:t>
-            </a:r>
-            <a:r>
-              <a:rPr lang="en-US" altLang="ko-KR" dirty="0"/>
-              <a:t>‘</a:t>
-            </a:r>
-            <a:r>
-              <a:rPr lang="ko-KR" altLang="en-US" dirty="0"/>
-              <a:t>파워 레벨 시스템</a:t>
-            </a:r>
-            <a:r>
-              <a:rPr lang="en-US" altLang="ko-KR" dirty="0"/>
-              <a:t>’</a:t>
-            </a:r>
-            <a:r>
-              <a:rPr lang="ko-KR" altLang="en-US" dirty="0"/>
-              <a:t>을 이용하여</a:t>
-            </a:r>
-            <a:r>
-              <a:rPr lang="en-US" altLang="ko-KR" dirty="0"/>
-              <a:t> </a:t>
-            </a:r>
-            <a:r>
-              <a:rPr lang="ko-KR" altLang="en-US" dirty="0"/>
-              <a:t>몬스터의 난이도 조절</a:t>
-            </a:r>
-            <a:endParaRPr lang="en-US" altLang="ko-KR" dirty="0"/>
-          </a:p>
-          <a:p>
-            <a:endParaRPr lang="en-US" altLang="ko-KR" dirty="0"/>
-          </a:p>
-          <a:p>
-            <a:r>
-              <a:rPr lang="ko-KR" altLang="en-US" dirty="0"/>
-              <a:t>행성별로 고유한 </a:t>
-            </a:r>
-            <a:r>
-              <a:rPr lang="en-US" altLang="ko-KR" dirty="0"/>
-              <a:t>‘</a:t>
-            </a:r>
-            <a:r>
-              <a:rPr lang="ko-KR" altLang="en-US" dirty="0"/>
-              <a:t>총 파워 레벨</a:t>
-            </a:r>
-            <a:r>
-              <a:rPr lang="en-US" altLang="ko-KR" dirty="0"/>
-              <a:t>’</a:t>
-            </a:r>
-            <a:r>
-              <a:rPr lang="ko-KR" altLang="en-US" dirty="0"/>
-              <a:t>을 갖는다</a:t>
-            </a:r>
-            <a:r>
-              <a:rPr lang="en-US" altLang="ko-KR" dirty="0"/>
-              <a:t>.</a:t>
-            </a:r>
-          </a:p>
-          <a:p>
-            <a:r>
-              <a:rPr lang="ko-KR" altLang="en-US" dirty="0"/>
-              <a:t>몬스터는 종류별로 고유한 </a:t>
-            </a:r>
-            <a:r>
-              <a:rPr lang="en-US" altLang="ko-KR" dirty="0"/>
-              <a:t>‘</a:t>
-            </a:r>
-            <a:r>
-              <a:rPr lang="ko-KR" altLang="en-US" dirty="0"/>
-              <a:t>파워 레벨</a:t>
-            </a:r>
-            <a:r>
-              <a:rPr lang="en-US" altLang="ko-KR" dirty="0"/>
-              <a:t>‘</a:t>
-            </a:r>
-            <a:r>
-              <a:rPr lang="ko-KR" altLang="en-US" dirty="0"/>
-              <a:t>을 갖는다</a:t>
-            </a:r>
-            <a:r>
-              <a:rPr lang="en-US" altLang="ko-KR" dirty="0"/>
-              <a:t>.</a:t>
-            </a:r>
-          </a:p>
-          <a:p>
-            <a:endParaRPr lang="en-US" altLang="ko-KR" dirty="0"/>
-          </a:p>
-          <a:p>
-            <a:r>
-              <a:rPr lang="ko-KR" altLang="en-US" dirty="0"/>
-              <a:t>두 수치 모두 높을 수록 더 위협적임</a:t>
-            </a:r>
-            <a:r>
-              <a:rPr lang="en-US" altLang="ko-KR" dirty="0"/>
-              <a:t>.</a:t>
-            </a:r>
-          </a:p>
-          <a:p>
-            <a:endParaRPr lang="en-US" altLang="ko-KR" dirty="0"/>
-          </a:p>
-          <a:p>
-            <a:r>
-              <a:rPr lang="ko-KR" altLang="en-US" dirty="0"/>
-              <a:t>행성에 플레이어가 도착해 </a:t>
-            </a:r>
-            <a:r>
-              <a:rPr lang="ko-KR" altLang="en-US" dirty="0" err="1"/>
-              <a:t>몬스터들이</a:t>
-            </a:r>
-            <a:r>
-              <a:rPr lang="ko-KR" altLang="en-US" dirty="0"/>
-              <a:t> </a:t>
-            </a:r>
-            <a:r>
-              <a:rPr lang="ko-KR" altLang="en-US" dirty="0" err="1"/>
-              <a:t>스폰될</a:t>
-            </a:r>
-            <a:r>
-              <a:rPr lang="ko-KR" altLang="en-US" dirty="0"/>
-              <a:t> 때</a:t>
-            </a:r>
-            <a:r>
-              <a:rPr lang="en-US" altLang="ko-KR" dirty="0"/>
-              <a:t>, </a:t>
-            </a:r>
-            <a:r>
-              <a:rPr lang="ko-KR" altLang="en-US" dirty="0" err="1"/>
-              <a:t>몬스터들은</a:t>
-            </a:r>
-            <a:r>
-              <a:rPr lang="ko-KR" altLang="en-US" dirty="0"/>
-              <a:t> 행성의 </a:t>
-            </a:r>
-            <a:r>
-              <a:rPr lang="en-US" altLang="ko-KR" dirty="0"/>
-              <a:t>‘</a:t>
-            </a:r>
-            <a:r>
-              <a:rPr lang="ko-KR" altLang="en-US" dirty="0"/>
-              <a:t>총 파워 레벨</a:t>
-            </a:r>
-            <a:r>
-              <a:rPr lang="en-US" altLang="ko-KR" dirty="0"/>
-              <a:t>‘</a:t>
-            </a:r>
-            <a:r>
-              <a:rPr lang="ko-KR" altLang="en-US" dirty="0"/>
-              <a:t>에 맞춰 생성된다</a:t>
-            </a:r>
-            <a:r>
-              <a:rPr lang="en-US" altLang="ko-KR" dirty="0"/>
-              <a:t>.</a:t>
-            </a:r>
-          </a:p>
-          <a:p>
-            <a:pPr marL="0" indent="0">
-              <a:buNone/>
-            </a:pPr>
-            <a:r>
-              <a:rPr lang="en-US" altLang="ko-KR" dirty="0"/>
-              <a:t>Ex.</a:t>
-            </a:r>
-            <a:r>
-              <a:rPr lang="ko-KR" altLang="en-US" dirty="0"/>
-              <a:t> 가장 쉬운 행성</a:t>
-            </a:r>
-            <a:r>
-              <a:rPr lang="en-US" altLang="ko-KR" dirty="0"/>
-              <a:t>1</a:t>
-            </a:r>
-            <a:r>
-              <a:rPr lang="ko-KR" altLang="en-US" dirty="0"/>
-              <a:t>의 </a:t>
-            </a:r>
-            <a:r>
-              <a:rPr lang="en-US" altLang="ko-KR" dirty="0"/>
-              <a:t>‘</a:t>
-            </a:r>
-            <a:r>
-              <a:rPr lang="ko-KR" altLang="en-US" dirty="0"/>
-              <a:t>총 파워 레벨</a:t>
-            </a:r>
-            <a:r>
-              <a:rPr lang="en-US" altLang="ko-KR" dirty="0"/>
-              <a:t>‘</a:t>
-            </a:r>
-            <a:r>
-              <a:rPr lang="ko-KR" altLang="en-US" dirty="0"/>
-              <a:t>은 </a:t>
-            </a:r>
-            <a:r>
-              <a:rPr lang="en-US" altLang="ko-KR" dirty="0"/>
-              <a:t>20</a:t>
-            </a:r>
-            <a:r>
-              <a:rPr lang="ko-KR" altLang="en-US" dirty="0"/>
-              <a:t>이라고 가정한다</a:t>
-            </a:r>
-            <a:r>
-              <a:rPr lang="en-US" altLang="ko-KR" dirty="0"/>
-              <a:t>. </a:t>
-            </a:r>
-            <a:r>
-              <a:rPr lang="ko-KR" altLang="en-US" dirty="0"/>
-              <a:t>몬스터</a:t>
-            </a:r>
-            <a:r>
-              <a:rPr lang="en-US" altLang="ko-KR" dirty="0"/>
-              <a:t> a</a:t>
-            </a:r>
-            <a:r>
-              <a:rPr lang="ko-KR" altLang="en-US" dirty="0"/>
-              <a:t>의 </a:t>
-            </a:r>
-            <a:r>
-              <a:rPr lang="en-US" altLang="ko-KR" dirty="0"/>
-              <a:t>‘</a:t>
-            </a:r>
-            <a:r>
-              <a:rPr lang="ko-KR" altLang="en-US" dirty="0"/>
-              <a:t>파워 레벨</a:t>
-            </a:r>
-            <a:r>
-              <a:rPr lang="en-US" altLang="ko-KR" dirty="0"/>
-              <a:t>‘</a:t>
-            </a:r>
-            <a:r>
-              <a:rPr lang="ko-KR" altLang="en-US" dirty="0"/>
-              <a:t>은 </a:t>
-            </a:r>
-            <a:r>
-              <a:rPr lang="en-US" altLang="ko-KR" dirty="0"/>
-              <a:t>2, </a:t>
-            </a:r>
-            <a:r>
-              <a:rPr lang="ko-KR" altLang="en-US" dirty="0"/>
-              <a:t>몬스터 </a:t>
-            </a:r>
-            <a:r>
-              <a:rPr lang="en-US" altLang="ko-KR" dirty="0"/>
-              <a:t>b</a:t>
-            </a:r>
-            <a:r>
-              <a:rPr lang="ko-KR" altLang="en-US" dirty="0"/>
-              <a:t>의 </a:t>
-            </a:r>
-            <a:r>
-              <a:rPr lang="en-US" altLang="ko-KR" dirty="0"/>
-              <a:t>‘</a:t>
-            </a:r>
-            <a:r>
-              <a:rPr lang="ko-KR" altLang="en-US" dirty="0"/>
-              <a:t>파워 레벨</a:t>
-            </a:r>
-            <a:r>
-              <a:rPr lang="en-US" altLang="ko-KR" dirty="0"/>
-              <a:t>‘</a:t>
-            </a:r>
-            <a:r>
-              <a:rPr lang="ko-KR" altLang="en-US" dirty="0"/>
-              <a:t>은 </a:t>
-            </a:r>
-            <a:r>
-              <a:rPr lang="en-US" altLang="ko-KR" dirty="0"/>
-              <a:t>4</a:t>
-            </a:r>
-            <a:r>
-              <a:rPr lang="ko-KR" altLang="en-US" dirty="0"/>
-              <a:t>이라고 가정한다</a:t>
-            </a:r>
-            <a:r>
-              <a:rPr lang="en-US" altLang="ko-KR" dirty="0"/>
-              <a:t>.</a:t>
-            </a:r>
-            <a:r>
-              <a:rPr lang="ko-KR" altLang="en-US" dirty="0"/>
-              <a:t> 행성</a:t>
-            </a:r>
-            <a:r>
-              <a:rPr lang="en-US" altLang="ko-KR" dirty="0"/>
-              <a:t>1</a:t>
-            </a:r>
-            <a:r>
-              <a:rPr lang="ko-KR" altLang="en-US" dirty="0"/>
-              <a:t>의 총 파워 레벨은 </a:t>
-            </a:r>
-            <a:r>
-              <a:rPr lang="en-US" altLang="ko-KR" dirty="0"/>
-              <a:t>20</a:t>
-            </a:r>
-            <a:r>
-              <a:rPr lang="ko-KR" altLang="en-US" dirty="0"/>
-              <a:t>이므로</a:t>
-            </a:r>
-            <a:r>
-              <a:rPr lang="en-US" altLang="ko-KR" dirty="0"/>
-              <a:t>, </a:t>
-            </a:r>
-            <a:r>
-              <a:rPr lang="ko-KR" altLang="en-US" dirty="0"/>
-              <a:t>몬스터 </a:t>
-            </a:r>
-            <a:r>
-              <a:rPr lang="en-US" altLang="ko-KR" dirty="0"/>
-              <a:t>a</a:t>
-            </a:r>
-            <a:r>
-              <a:rPr lang="ko-KR" altLang="en-US" dirty="0"/>
-              <a:t>가 </a:t>
-            </a:r>
-            <a:r>
-              <a:rPr lang="en-US" altLang="ko-KR" dirty="0"/>
-              <a:t>6</a:t>
-            </a:r>
-            <a:r>
-              <a:rPr lang="ko-KR" altLang="en-US" dirty="0"/>
-              <a:t>마리</a:t>
-            </a:r>
-            <a:r>
-              <a:rPr lang="en-US" altLang="ko-KR" dirty="0"/>
-              <a:t>(12), </a:t>
-            </a:r>
-            <a:r>
-              <a:rPr lang="ko-KR" altLang="en-US" dirty="0"/>
-              <a:t>몬스터 </a:t>
-            </a:r>
-            <a:r>
-              <a:rPr lang="en-US" altLang="ko-KR" dirty="0"/>
-              <a:t>b</a:t>
-            </a:r>
-            <a:r>
-              <a:rPr lang="ko-KR" altLang="en-US" dirty="0"/>
-              <a:t>가 </a:t>
-            </a:r>
-            <a:r>
-              <a:rPr lang="en-US" altLang="ko-KR" dirty="0"/>
-              <a:t>2</a:t>
-            </a:r>
-            <a:r>
-              <a:rPr lang="ko-KR" altLang="en-US" dirty="0"/>
-              <a:t>마리</a:t>
-            </a:r>
-            <a:r>
-              <a:rPr lang="en-US" altLang="ko-KR" dirty="0"/>
-              <a:t>(8)</a:t>
-            </a:r>
-            <a:r>
-              <a:rPr lang="ko-KR" altLang="en-US" dirty="0"/>
-              <a:t> </a:t>
-            </a:r>
-            <a:r>
-              <a:rPr lang="ko-KR" altLang="en-US" dirty="0" err="1"/>
-              <a:t>스폰된다</a:t>
-            </a:r>
-            <a:r>
-              <a:rPr lang="en-US" altLang="ko-KR" dirty="0"/>
-              <a:t>.</a:t>
-            </a:r>
-          </a:p>
-          <a:p>
-            <a:pPr marL="0" indent="0">
-              <a:buNone/>
-            </a:pPr>
-            <a:endParaRPr lang="en-US" altLang="ko-KR" dirty="0"/>
-          </a:p>
-          <a:p>
-            <a:r>
-              <a:rPr lang="ko-KR" altLang="en-US" dirty="0"/>
-              <a:t>행성별로 몬스터의 </a:t>
-            </a:r>
-            <a:r>
-              <a:rPr lang="en-US" altLang="ko-KR" dirty="0"/>
-              <a:t>‘</a:t>
-            </a:r>
-            <a:r>
-              <a:rPr lang="ko-KR" altLang="en-US" dirty="0" err="1"/>
-              <a:t>스폰</a:t>
-            </a:r>
-            <a:r>
-              <a:rPr lang="ko-KR" altLang="en-US" dirty="0"/>
-              <a:t> 확률</a:t>
-            </a:r>
-            <a:r>
-              <a:rPr lang="en-US" altLang="ko-KR" dirty="0"/>
-              <a:t>’</a:t>
-            </a:r>
-            <a:r>
-              <a:rPr lang="ko-KR" altLang="en-US" dirty="0"/>
-              <a:t>이 다르기 때문에</a:t>
-            </a:r>
-            <a:r>
-              <a:rPr lang="en-US" altLang="ko-KR" dirty="0"/>
-              <a:t>, </a:t>
-            </a:r>
-            <a:r>
-              <a:rPr lang="ko-KR" altLang="en-US" dirty="0"/>
-              <a:t>총 파워 레벨은 같지만 좀 더 어려운 행성으로 만들고 싶다면</a:t>
-            </a:r>
-            <a:r>
-              <a:rPr lang="en-US" altLang="ko-KR" dirty="0"/>
-              <a:t>, </a:t>
-            </a:r>
-            <a:r>
-              <a:rPr lang="ko-KR" altLang="en-US" dirty="0"/>
-              <a:t>몬스터 </a:t>
-            </a:r>
-            <a:r>
-              <a:rPr lang="en-US" altLang="ko-KR" dirty="0"/>
-              <a:t>b</a:t>
-            </a:r>
-            <a:r>
-              <a:rPr lang="ko-KR" altLang="en-US" dirty="0"/>
-              <a:t>의 </a:t>
-            </a:r>
-            <a:r>
-              <a:rPr lang="ko-KR" altLang="en-US" dirty="0" err="1"/>
-              <a:t>스폰</a:t>
-            </a:r>
-            <a:r>
-              <a:rPr lang="ko-KR" altLang="en-US" dirty="0"/>
-              <a:t> 확률을 높이면 됨</a:t>
-            </a:r>
-            <a:r>
-              <a:rPr lang="en-US" altLang="ko-KR" dirty="0"/>
-              <a:t>.</a:t>
-            </a:r>
-          </a:p>
-        </p:txBody>
-      </p:sp>
-      <p:sp>
-        <p:nvSpPr>
-          <p:cNvPr id="4" name="슬라이드 번호 개체 틀 3">
-            <a:extLst>
-              <a:ext uri="{FF2B5EF4-FFF2-40B4-BE49-F238E27FC236}">
-                <a16:creationId xmlns:a16="http://schemas.microsoft.com/office/drawing/2014/main" id="{B277B7AD-A094-47CB-3668-56483F224A8D}"/>
-              </a:ext>
-            </a:extLst>
-          </p:cNvPr>
-          <p:cNvSpPr>
-            <a:spLocks noGrp="1"/>
-          </p:cNvSpPr>
-          <p:nvPr>
-            <p:ph type="sldNum" sz="quarter" idx="12"/>
-          </p:nvPr>
-        </p:nvSpPr>
-        <p:spPr/>
-        <p:txBody>
-          <a:bodyPr/>
-          <a:lstStyle/>
-          <a:p>
-            <a:fld id="{5413EFF4-4F73-4713-85F9-663DD6DC3937}" type="slidenum">
-              <a:rPr lang="ko-KR" altLang="en-US" smtClean="0"/>
-              <a:t>9</a:t>
-            </a:fld>
-            <a:endParaRPr lang="ko-KR" altLang="en-US"/>
-          </a:p>
-        </p:txBody>
-      </p:sp>
-    </p:spTree>
-    <p:extLst>
-      <p:ext uri="{BB962C8B-B14F-4D97-AF65-F5344CB8AC3E}">
-        <p14:creationId xmlns:p14="http://schemas.microsoft.com/office/powerpoint/2010/main" val="741989920"/>
       </p:ext>
     </p:extLst>
   </p:cSld>

--- a/기획/SPACE ROBBER_기획서.pptx
+++ b/기획/SPACE ROBBER_기획서.pptx
@@ -5,7 +5,7 @@
     <p:sldMasterId id="2147483648" r:id="rId1"/>
   </p:sldMasterIdLst>
   <p:notesMasterIdLst>
-    <p:notesMasterId r:id="rId17"/>
+    <p:notesMasterId r:id="rId20"/>
   </p:notesMasterIdLst>
   <p:sldIdLst>
     <p:sldId id="256" r:id="rId2"/>
@@ -13,16 +13,19 @@
     <p:sldId id="278" r:id="rId4"/>
     <p:sldId id="279" r:id="rId5"/>
     <p:sldId id="283" r:id="rId6"/>
-    <p:sldId id="281" r:id="rId7"/>
-    <p:sldId id="274" r:id="rId8"/>
-    <p:sldId id="270" r:id="rId9"/>
-    <p:sldId id="271" r:id="rId10"/>
-    <p:sldId id="272" r:id="rId11"/>
-    <p:sldId id="273" r:id="rId12"/>
-    <p:sldId id="275" r:id="rId13"/>
-    <p:sldId id="276" r:id="rId14"/>
-    <p:sldId id="282" r:id="rId15"/>
-    <p:sldId id="280" r:id="rId16"/>
+    <p:sldId id="274" r:id="rId7"/>
+    <p:sldId id="286" r:id="rId8"/>
+    <p:sldId id="281" r:id="rId9"/>
+    <p:sldId id="284" r:id="rId10"/>
+    <p:sldId id="270" r:id="rId11"/>
+    <p:sldId id="271" r:id="rId12"/>
+    <p:sldId id="272" r:id="rId13"/>
+    <p:sldId id="273" r:id="rId14"/>
+    <p:sldId id="275" r:id="rId15"/>
+    <p:sldId id="276" r:id="rId16"/>
+    <p:sldId id="282" r:id="rId17"/>
+    <p:sldId id="280" r:id="rId18"/>
+    <p:sldId id="285" r:id="rId19"/>
   </p:sldIdLst>
   <p:sldSz cx="12192000" cy="6858000"/>
   <p:notesSz cx="6858000" cy="9144000"/>
@@ -883,7 +886,7 @@
           <a:p>
             <a:fld id="{FC7D8850-8826-4FCE-AEB7-6CFF3287BE1E}" type="datetimeFigureOut">
               <a:rPr lang="ko-KR" altLang="en-US" smtClean="0"/>
-              <a:t>2025-11-07</a:t>
+              <a:t>2025-11-12</a:t>
             </a:fld>
             <a:endParaRPr lang="ko-KR" altLang="en-US"/>
           </a:p>
@@ -1381,7 +1384,7 @@
           <a:p>
             <a:fld id="{14842228-062C-4EDD-A77B-B07B3B8A579C}" type="datetime1">
               <a:rPr lang="ko-KR" altLang="en-US" smtClean="0"/>
-              <a:t>2025-11-07</a:t>
+              <a:t>2025-11-12</a:t>
             </a:fld>
             <a:endParaRPr lang="ko-KR" altLang="en-US"/>
           </a:p>
@@ -1579,7 +1582,7 @@
           <a:p>
             <a:fld id="{26A685F8-59F3-4A43-89FC-0577DFBCC6D7}" type="datetime1">
               <a:rPr lang="ko-KR" altLang="en-US" smtClean="0"/>
-              <a:t>2025-11-07</a:t>
+              <a:t>2025-11-12</a:t>
             </a:fld>
             <a:endParaRPr lang="ko-KR" altLang="en-US"/>
           </a:p>
@@ -1787,7 +1790,7 @@
           <a:p>
             <a:fld id="{9B2EAD45-FB6B-48A3-9244-60043185CB83}" type="datetime1">
               <a:rPr lang="ko-KR" altLang="en-US" smtClean="0"/>
-              <a:t>2025-11-07</a:t>
+              <a:t>2025-11-12</a:t>
             </a:fld>
             <a:endParaRPr lang="ko-KR" altLang="en-US"/>
           </a:p>
@@ -1985,7 +1988,7 @@
           <a:p>
             <a:fld id="{89A6D206-0A43-4A81-BD76-9B86C975423A}" type="datetime1">
               <a:rPr lang="ko-KR" altLang="en-US" smtClean="0"/>
-              <a:t>2025-11-07</a:t>
+              <a:t>2025-11-12</a:t>
             </a:fld>
             <a:endParaRPr lang="ko-KR" altLang="en-US"/>
           </a:p>
@@ -2260,7 +2263,7 @@
           <a:p>
             <a:fld id="{AC93C00E-B4FF-439E-8FAF-C83B045C2F0C}" type="datetime1">
               <a:rPr lang="ko-KR" altLang="en-US" smtClean="0"/>
-              <a:t>2025-11-07</a:t>
+              <a:t>2025-11-12</a:t>
             </a:fld>
             <a:endParaRPr lang="ko-KR" altLang="en-US"/>
           </a:p>
@@ -2525,7 +2528,7 @@
           <a:p>
             <a:fld id="{782566C5-B4D2-448D-AAF6-9C2DEFE80D1C}" type="datetime1">
               <a:rPr lang="ko-KR" altLang="en-US" smtClean="0"/>
-              <a:t>2025-11-07</a:t>
+              <a:t>2025-11-12</a:t>
             </a:fld>
             <a:endParaRPr lang="ko-KR" altLang="en-US"/>
           </a:p>
@@ -2937,7 +2940,7 @@
           <a:p>
             <a:fld id="{9717C296-44F7-4BE7-B376-480499877D73}" type="datetime1">
               <a:rPr lang="ko-KR" altLang="en-US" smtClean="0"/>
-              <a:t>2025-11-07</a:t>
+              <a:t>2025-11-12</a:t>
             </a:fld>
             <a:endParaRPr lang="ko-KR" altLang="en-US"/>
           </a:p>
@@ -3078,7 +3081,7 @@
           <a:p>
             <a:fld id="{E6619BE8-F293-40B6-8D93-83AFB17EE8F6}" type="datetime1">
               <a:rPr lang="ko-KR" altLang="en-US" smtClean="0"/>
-              <a:t>2025-11-07</a:t>
+              <a:t>2025-11-12</a:t>
             </a:fld>
             <a:endParaRPr lang="ko-KR" altLang="en-US"/>
           </a:p>
@@ -3191,7 +3194,7 @@
           <a:p>
             <a:fld id="{47662FD7-D91E-46BF-BF9C-3AD41E51EB4D}" type="datetime1">
               <a:rPr lang="ko-KR" altLang="en-US" smtClean="0"/>
-              <a:t>2025-11-07</a:t>
+              <a:t>2025-11-12</a:t>
             </a:fld>
             <a:endParaRPr lang="ko-KR" altLang="en-US"/>
           </a:p>
@@ -3502,7 +3505,7 @@
           <a:p>
             <a:fld id="{911DC4CE-C275-4099-BBDF-0C56F81D271D}" type="datetime1">
               <a:rPr lang="ko-KR" altLang="en-US" smtClean="0"/>
-              <a:t>2025-11-07</a:t>
+              <a:t>2025-11-12</a:t>
             </a:fld>
             <a:endParaRPr lang="ko-KR" altLang="en-US"/>
           </a:p>
@@ -3793,7 +3796,7 @@
           <a:p>
             <a:fld id="{EE3471FB-7383-4F1C-A42C-E68CEC12F0D2}" type="datetime1">
               <a:rPr lang="ko-KR" altLang="en-US" smtClean="0"/>
-              <a:t>2025-11-07</a:t>
+              <a:t>2025-11-12</a:t>
             </a:fld>
             <a:endParaRPr lang="ko-KR" altLang="en-US"/>
           </a:p>
@@ -4034,7 +4037,7 @@
           <a:p>
             <a:fld id="{313347F6-7B41-4084-9EC2-A3B9F64C65D7}" type="datetime1">
               <a:rPr lang="ko-KR" altLang="en-US" smtClean="0"/>
-              <a:t>2025-11-07</a:t>
+              <a:t>2025-11-12</a:t>
             </a:fld>
             <a:endParaRPr lang="ko-KR" altLang="en-US"/>
           </a:p>
@@ -4182,7 +4185,7 @@
         </a:spcBef>
         <a:buFont typeface="Arial" panose="020B0604020202020204" pitchFamily="34" charset="0"/>
         <a:buChar char="•"/>
-        <a:defRPr sz="2000" kern="1200">
+        <a:defRPr sz="1800" kern="1200">
           <a:solidFill>
             <a:schemeClr val="tx1"/>
           </a:solidFill>
@@ -4200,7 +4203,7 @@
         </a:spcBef>
         <a:buFont typeface="Arial" panose="020B0604020202020204" pitchFamily="34" charset="0"/>
         <a:buChar char="•"/>
-        <a:defRPr sz="1800" kern="1200">
+        <a:defRPr sz="1600" kern="1200">
           <a:solidFill>
             <a:schemeClr val="tx1"/>
           </a:solidFill>
@@ -4218,7 +4221,7 @@
         </a:spcBef>
         <a:buFont typeface="Arial" panose="020B0604020202020204" pitchFamily="34" charset="0"/>
         <a:buChar char="•"/>
-        <a:defRPr sz="1600" kern="1200">
+        <a:defRPr sz="1400" kern="1200">
           <a:solidFill>
             <a:schemeClr val="tx1"/>
           </a:solidFill>
@@ -4236,7 +4239,7 @@
         </a:spcBef>
         <a:buFont typeface="Arial" panose="020B0604020202020204" pitchFamily="34" charset="0"/>
         <a:buChar char="•"/>
-        <a:defRPr sz="1400" kern="1200">
+        <a:defRPr sz="1200" kern="1200">
           <a:solidFill>
             <a:schemeClr val="tx1"/>
           </a:solidFill>
@@ -4254,7 +4257,7 @@
         </a:spcBef>
         <a:buFont typeface="Arial" panose="020B0604020202020204" pitchFamily="34" charset="0"/>
         <a:buChar char="•"/>
-        <a:defRPr sz="1400" kern="1200">
+        <a:defRPr sz="1200" kern="1200">
           <a:solidFill>
             <a:schemeClr val="tx1"/>
           </a:solidFill>
@@ -4626,7 +4629,7 @@
             <a:pPr algn="r"/>
             <a:r>
               <a:rPr lang="en-US" altLang="ko-KR" dirty="0"/>
-              <a:t>25.11.04</a:t>
+              <a:t>25.11.11</a:t>
             </a:r>
             <a:endParaRPr lang="ko-KR" altLang="en-US" dirty="0"/>
           </a:p>
@@ -4667,6 +4670,348 @@
           <p:cNvPr id="2" name="제목 1">
             <a:extLst>
               <a:ext uri="{FF2B5EF4-FFF2-40B4-BE49-F238E27FC236}">
+                <a16:creationId xmlns:a16="http://schemas.microsoft.com/office/drawing/2014/main" id="{4E573E6E-A449-DD2B-8901-D789B166587D}"/>
+              </a:ext>
+            </a:extLst>
+          </p:cNvPr>
+          <p:cNvSpPr>
+            <a:spLocks noGrp="1"/>
+          </p:cNvSpPr>
+          <p:nvPr>
+            <p:ph type="title"/>
+          </p:nvPr>
+        </p:nvSpPr>
+        <p:spPr/>
+        <p:txBody>
+          <a:bodyPr/>
+          <a:lstStyle/>
+          <a:p>
+            <a:r>
+              <a:rPr lang="ko-KR" altLang="en-US" dirty="0"/>
+              <a:t>맵 생성 규칙</a:t>
+            </a:r>
+          </a:p>
+        </p:txBody>
+      </p:sp>
+      <p:sp>
+        <p:nvSpPr>
+          <p:cNvPr id="3" name="내용 개체 틀 2">
+            <a:extLst>
+              <a:ext uri="{FF2B5EF4-FFF2-40B4-BE49-F238E27FC236}">
+                <a16:creationId xmlns:a16="http://schemas.microsoft.com/office/drawing/2014/main" id="{9AD7A719-2FED-FB60-36C7-6583B5F5AD60}"/>
+              </a:ext>
+            </a:extLst>
+          </p:cNvPr>
+          <p:cNvSpPr>
+            <a:spLocks noGrp="1"/>
+          </p:cNvSpPr>
+          <p:nvPr>
+            <p:ph idx="1"/>
+          </p:nvPr>
+        </p:nvSpPr>
+        <p:spPr/>
+        <p:txBody>
+          <a:bodyPr/>
+          <a:lstStyle/>
+          <a:p>
+            <a:r>
+              <a:rPr lang="ko-KR" altLang="en-US" dirty="0"/>
+              <a:t>절차적 생성 규칙 </a:t>
+            </a:r>
+            <a:r>
+              <a:rPr lang="en-US" altLang="ko-KR" dirty="0"/>
+              <a:t>2</a:t>
+            </a:r>
+            <a:r>
+              <a:rPr lang="ko-KR" altLang="en-US" dirty="0"/>
+              <a:t>종 </a:t>
+            </a:r>
+            <a:r>
+              <a:rPr lang="en-US" altLang="ko-KR" dirty="0"/>
+              <a:t>(</a:t>
+            </a:r>
+            <a:r>
+              <a:rPr lang="ko-KR" altLang="en-US" dirty="0"/>
+              <a:t>공장</a:t>
+            </a:r>
+            <a:r>
+              <a:rPr lang="en-US" altLang="ko-KR" dirty="0"/>
+              <a:t>/</a:t>
+            </a:r>
+            <a:r>
+              <a:rPr lang="ko-KR" altLang="en-US" dirty="0"/>
+              <a:t>임시</a:t>
+            </a:r>
+            <a:r>
+              <a:rPr lang="en-US" altLang="ko-KR" dirty="0"/>
+              <a:t>)</a:t>
+            </a:r>
+          </a:p>
+          <a:p>
+            <a:endParaRPr lang="en-US" altLang="ko-KR" dirty="0"/>
+          </a:p>
+          <a:p>
+            <a:r>
+              <a:rPr lang="ko-KR" altLang="en-US" dirty="0"/>
+              <a:t>방 구조</a:t>
+            </a:r>
+            <a:r>
+              <a:rPr lang="en-US" altLang="ko-KR" dirty="0"/>
+              <a:t>, </a:t>
+            </a:r>
+            <a:r>
+              <a:rPr lang="ko-KR" altLang="en-US" dirty="0"/>
+              <a:t>연결 가능한 방</a:t>
+            </a:r>
+            <a:r>
+              <a:rPr lang="en-US" altLang="ko-KR" dirty="0"/>
+              <a:t>, </a:t>
+            </a:r>
+            <a:r>
+              <a:rPr lang="ko-KR" altLang="en-US" dirty="0"/>
+              <a:t>방 내부에 있는 문</a:t>
+            </a:r>
+            <a:r>
+              <a:rPr lang="en-US" altLang="ko-KR" dirty="0"/>
+              <a:t> </a:t>
+            </a:r>
+            <a:r>
+              <a:rPr lang="ko-KR" altLang="en-US" dirty="0"/>
+              <a:t>개수</a:t>
+            </a:r>
+            <a:r>
+              <a:rPr lang="en-US" altLang="ko-KR" dirty="0"/>
+              <a:t>, </a:t>
+            </a:r>
+            <a:r>
+              <a:rPr lang="ko-KR" altLang="en-US" dirty="0"/>
+              <a:t>선반 등 특수한 오브젝트 개수 </a:t>
+            </a:r>
+            <a:r>
+              <a:rPr lang="ko-KR" altLang="en-US"/>
+              <a:t>등 기재</a:t>
+            </a:r>
+            <a:endParaRPr lang="en-US" altLang="ko-KR" dirty="0"/>
+          </a:p>
+        </p:txBody>
+      </p:sp>
+    </p:spTree>
+    <p:extLst>
+      <p:ext uri="{BB962C8B-B14F-4D97-AF65-F5344CB8AC3E}">
+        <p14:creationId xmlns:p14="http://schemas.microsoft.com/office/powerpoint/2010/main" val="1600899775"/>
+      </p:ext>
+    </p:extLst>
+  </p:cSld>
+  <p:clrMapOvr>
+    <a:masterClrMapping/>
+  </p:clrMapOvr>
+</p:sld>
+</file>
+
+<file path=ppt/slides/slide11.xml><?xml version="1.0" encoding="utf-8"?>
+<p:sld xmlns:a="http://schemas.openxmlformats.org/drawingml/2006/main" xmlns:r="http://schemas.openxmlformats.org/officeDocument/2006/relationships" xmlns:p="http://schemas.openxmlformats.org/presentationml/2006/main">
+  <p:cSld>
+    <p:spTree>
+      <p:nvGrpSpPr>
+        <p:cNvPr id="1" name="">
+          <a:extLst>
+            <a:ext uri="{FF2B5EF4-FFF2-40B4-BE49-F238E27FC236}">
+              <a16:creationId xmlns:a16="http://schemas.microsoft.com/office/drawing/2014/main" id="{845BA530-2F7B-CE13-976C-74C179E84083}"/>
+            </a:ext>
+          </a:extLst>
+        </p:cNvPr>
+        <p:cNvGrpSpPr/>
+        <p:nvPr/>
+      </p:nvGrpSpPr>
+      <p:grpSpPr>
+        <a:xfrm>
+          <a:off x="0" y="0"/>
+          <a:ext cx="0" cy="0"/>
+          <a:chOff x="0" y="0"/>
+          <a:chExt cx="0" cy="0"/>
+        </a:xfrm>
+      </p:grpSpPr>
+      <p:sp>
+        <p:nvSpPr>
+          <p:cNvPr id="2" name="제목 1">
+            <a:extLst>
+              <a:ext uri="{FF2B5EF4-FFF2-40B4-BE49-F238E27FC236}">
+                <a16:creationId xmlns:a16="http://schemas.microsoft.com/office/drawing/2014/main" id="{125735C3-7D66-E446-1EFD-6B86904D8694}"/>
+              </a:ext>
+            </a:extLst>
+          </p:cNvPr>
+          <p:cNvSpPr>
+            <a:spLocks noGrp="1"/>
+          </p:cNvSpPr>
+          <p:nvPr>
+            <p:ph type="title"/>
+          </p:nvPr>
+        </p:nvSpPr>
+        <p:spPr/>
+        <p:txBody>
+          <a:bodyPr/>
+          <a:lstStyle/>
+          <a:p>
+            <a:r>
+              <a:rPr lang="ko-KR" altLang="en-US" dirty="0"/>
+              <a:t>자원 배치 규칙</a:t>
+            </a:r>
+          </a:p>
+        </p:txBody>
+      </p:sp>
+      <p:sp>
+        <p:nvSpPr>
+          <p:cNvPr id="3" name="내용 개체 틀 2">
+            <a:extLst>
+              <a:ext uri="{FF2B5EF4-FFF2-40B4-BE49-F238E27FC236}">
+                <a16:creationId xmlns:a16="http://schemas.microsoft.com/office/drawing/2014/main" id="{77FE5B80-9288-E492-19F5-2D4C2C0B9699}"/>
+              </a:ext>
+            </a:extLst>
+          </p:cNvPr>
+          <p:cNvSpPr>
+            <a:spLocks noGrp="1"/>
+          </p:cNvSpPr>
+          <p:nvPr>
+            <p:ph idx="1"/>
+          </p:nvPr>
+        </p:nvSpPr>
+        <p:spPr/>
+        <p:txBody>
+          <a:bodyPr/>
+          <a:lstStyle/>
+          <a:p>
+            <a:r>
+              <a:rPr lang="ko-KR" altLang="en-US" dirty="0"/>
+              <a:t>맵 종류</a:t>
+            </a:r>
+            <a:r>
+              <a:rPr lang="en-US" altLang="ko-KR" dirty="0"/>
+              <a:t>(</a:t>
+            </a:r>
+            <a:r>
+              <a:rPr lang="ko-KR" altLang="en-US" dirty="0"/>
+              <a:t>공장</a:t>
+            </a:r>
+            <a:r>
+              <a:rPr lang="en-US" altLang="ko-KR" dirty="0"/>
+              <a:t>/</a:t>
+            </a:r>
+            <a:r>
+              <a:rPr lang="ko-KR" altLang="en-US" dirty="0"/>
+              <a:t>임시</a:t>
+            </a:r>
+            <a:r>
+              <a:rPr lang="en-US" altLang="ko-KR" dirty="0"/>
+              <a:t>)</a:t>
+            </a:r>
+            <a:r>
+              <a:rPr lang="ko-KR" altLang="en-US" dirty="0"/>
+              <a:t>별 자원 배치 규칙</a:t>
+            </a:r>
+            <a:endParaRPr lang="en-US" altLang="ko-KR" dirty="0"/>
+          </a:p>
+          <a:p>
+            <a:pPr marL="0" indent="0">
+              <a:buNone/>
+            </a:pPr>
+            <a:endParaRPr lang="en-US" altLang="ko-KR" dirty="0"/>
+          </a:p>
+          <a:p>
+            <a:r>
+              <a:rPr lang="ko-KR" altLang="en-US" dirty="0"/>
+              <a:t>자원</a:t>
+            </a:r>
+            <a:r>
+              <a:rPr lang="en-US" altLang="ko-KR" dirty="0"/>
+              <a:t>(</a:t>
+            </a:r>
+            <a:r>
+              <a:rPr lang="ko-KR" altLang="en-US" dirty="0"/>
+              <a:t>아이템</a:t>
+            </a:r>
+            <a:r>
+              <a:rPr lang="en-US" altLang="ko-KR" dirty="0"/>
+              <a:t>)</a:t>
+            </a:r>
+            <a:r>
+              <a:rPr lang="ko-KR" altLang="en-US" dirty="0"/>
+              <a:t>이 배치될 수 있는 위치</a:t>
+            </a:r>
+            <a:r>
+              <a:rPr lang="en-US" altLang="ko-KR" dirty="0"/>
+              <a:t>, </a:t>
+            </a:r>
+            <a:r>
+              <a:rPr lang="ko-KR" altLang="en-US" dirty="0"/>
+              <a:t>난이도에 따른 차이를 느낄 수 있게끔 작성</a:t>
+            </a:r>
+          </a:p>
+        </p:txBody>
+      </p:sp>
+      <p:sp>
+        <p:nvSpPr>
+          <p:cNvPr id="4" name="슬라이드 번호 개체 틀 3">
+            <a:extLst>
+              <a:ext uri="{FF2B5EF4-FFF2-40B4-BE49-F238E27FC236}">
+                <a16:creationId xmlns:a16="http://schemas.microsoft.com/office/drawing/2014/main" id="{FE076476-714C-9D4A-081F-549F125D3A5E}"/>
+              </a:ext>
+            </a:extLst>
+          </p:cNvPr>
+          <p:cNvSpPr>
+            <a:spLocks noGrp="1"/>
+          </p:cNvSpPr>
+          <p:nvPr>
+            <p:ph type="sldNum" sz="quarter" idx="12"/>
+          </p:nvPr>
+        </p:nvSpPr>
+        <p:spPr/>
+        <p:txBody>
+          <a:bodyPr/>
+          <a:lstStyle/>
+          <a:p>
+            <a:fld id="{5413EFF4-4F73-4713-85F9-663DD6DC3937}" type="slidenum">
+              <a:rPr lang="ko-KR" altLang="en-US" smtClean="0"/>
+              <a:t>11</a:t>
+            </a:fld>
+            <a:endParaRPr lang="ko-KR" altLang="en-US"/>
+          </a:p>
+        </p:txBody>
+      </p:sp>
+    </p:spTree>
+    <p:extLst>
+      <p:ext uri="{BB962C8B-B14F-4D97-AF65-F5344CB8AC3E}">
+        <p14:creationId xmlns:p14="http://schemas.microsoft.com/office/powerpoint/2010/main" val="1612175918"/>
+      </p:ext>
+    </p:extLst>
+  </p:cSld>
+  <p:clrMapOvr>
+    <a:masterClrMapping/>
+  </p:clrMapOvr>
+</p:sld>
+</file>
+
+<file path=ppt/slides/slide12.xml><?xml version="1.0" encoding="utf-8"?>
+<p:sld xmlns:a="http://schemas.openxmlformats.org/drawingml/2006/main" xmlns:r="http://schemas.openxmlformats.org/officeDocument/2006/relationships" xmlns:p="http://schemas.openxmlformats.org/presentationml/2006/main">
+  <p:cSld>
+    <p:spTree>
+      <p:nvGrpSpPr>
+        <p:cNvPr id="1" name=""/>
+        <p:cNvGrpSpPr/>
+        <p:nvPr/>
+      </p:nvGrpSpPr>
+      <p:grpSpPr>
+        <a:xfrm>
+          <a:off x="0" y="0"/>
+          <a:ext cx="0" cy="0"/>
+          <a:chOff x="0" y="0"/>
+          <a:chExt cx="0" cy="0"/>
+        </a:xfrm>
+      </p:grpSpPr>
+      <p:sp>
+        <p:nvSpPr>
+          <p:cNvPr id="2" name="제목 1">
+            <a:extLst>
+              <a:ext uri="{FF2B5EF4-FFF2-40B4-BE49-F238E27FC236}">
                 <a16:creationId xmlns:a16="http://schemas.microsoft.com/office/drawing/2014/main" id="{52BCFE61-56FB-9FD5-7B08-AC06F639CB19}"/>
               </a:ext>
             </a:extLst>
@@ -5188,7 +5533,7 @@
           <a:p>
             <a:fld id="{5413EFF4-4F73-4713-85F9-663DD6DC3937}" type="slidenum">
               <a:rPr lang="ko-KR" altLang="en-US" smtClean="0"/>
-              <a:t>10</a:t>
+              <a:t>12</a:t>
             </a:fld>
             <a:endParaRPr lang="ko-KR" altLang="en-US"/>
           </a:p>
@@ -5207,7 +5552,7 @@
 </p:sld>
 </file>
 
-<file path=ppt/slides/slide11.xml><?xml version="1.0" encoding="utf-8"?>
+<file path=ppt/slides/slide13.xml><?xml version="1.0" encoding="utf-8"?>
 <p:sld xmlns:a="http://schemas.openxmlformats.org/drawingml/2006/main" xmlns:r="http://schemas.openxmlformats.org/officeDocument/2006/relationships" xmlns:p="http://schemas.openxmlformats.org/presentationml/2006/main">
   <p:cSld>
     <p:spTree>
@@ -5350,7 +5695,7 @@
           <a:p>
             <a:fld id="{5413EFF4-4F73-4713-85F9-663DD6DC3937}" type="slidenum">
               <a:rPr lang="ko-KR" altLang="en-US" smtClean="0"/>
-              <a:t>11</a:t>
+              <a:t>13</a:t>
             </a:fld>
             <a:endParaRPr lang="ko-KR" altLang="en-US"/>
           </a:p>
@@ -5369,7 +5714,7 @@
 </p:sld>
 </file>
 
-<file path=ppt/slides/slide12.xml><?xml version="1.0" encoding="utf-8"?>
+<file path=ppt/slides/slide14.xml><?xml version="1.0" encoding="utf-8"?>
 <p:sld xmlns:a="http://schemas.openxmlformats.org/drawingml/2006/main" xmlns:r="http://schemas.openxmlformats.org/officeDocument/2006/relationships" xmlns:p="http://schemas.openxmlformats.org/presentationml/2006/main">
   <p:cSld>
     <p:spTree>
@@ -5531,7 +5876,7 @@
           <a:p>
             <a:fld id="{5413EFF4-4F73-4713-85F9-663DD6DC3937}" type="slidenum">
               <a:rPr lang="ko-KR" altLang="en-US" smtClean="0"/>
-              <a:t>12</a:t>
+              <a:t>14</a:t>
             </a:fld>
             <a:endParaRPr lang="ko-KR" altLang="en-US"/>
           </a:p>
@@ -5550,7 +5895,7 @@
 </p:sld>
 </file>
 
-<file path=ppt/slides/slide13.xml><?xml version="1.0" encoding="utf-8"?>
+<file path=ppt/slides/slide15.xml><?xml version="1.0" encoding="utf-8"?>
 <p:sld xmlns:a="http://schemas.openxmlformats.org/drawingml/2006/main" xmlns:r="http://schemas.openxmlformats.org/officeDocument/2006/relationships" xmlns:p="http://schemas.openxmlformats.org/presentationml/2006/main">
   <p:cSld>
     <p:spTree>
@@ -5770,7 +6115,7 @@
           <a:p>
             <a:fld id="{5413EFF4-4F73-4713-85F9-663DD6DC3937}" type="slidenum">
               <a:rPr lang="ko-KR" altLang="en-US" smtClean="0"/>
-              <a:t>13</a:t>
+              <a:t>15</a:t>
             </a:fld>
             <a:endParaRPr lang="ko-KR" altLang="en-US"/>
           </a:p>
@@ -5789,7 +6134,7 @@
 </p:sld>
 </file>
 
-<file path=ppt/slides/slide14.xml><?xml version="1.0" encoding="utf-8"?>
+<file path=ppt/slides/slide16.xml><?xml version="1.0" encoding="utf-8"?>
 <p:sld xmlns:a="http://schemas.openxmlformats.org/drawingml/2006/main" xmlns:r="http://schemas.openxmlformats.org/officeDocument/2006/relationships" xmlns:p="http://schemas.openxmlformats.org/presentationml/2006/main">
   <p:cSld>
     <p:spTree>
@@ -5951,12 +6296,8 @@
               <a:t>. </a:t>
             </a:r>
             <a:r>
-              <a:rPr lang="ko-KR" altLang="en-US" sz="1600" dirty="0" err="1"/>
-              <a:t>인벤</a:t>
-            </a:r>
-            <a:r>
               <a:rPr lang="ko-KR" altLang="en-US" sz="1600" dirty="0"/>
-              <a:t> 내에서 칸 이동하는 법 포함되어야 함</a:t>
+              <a:t>친구 가방 열기 기능</a:t>
             </a:r>
             <a:endParaRPr lang="en-US" altLang="ko-KR" sz="1600" dirty="0"/>
           </a:p>
@@ -6048,7 +6389,7 @@
           <a:p>
             <a:fld id="{5413EFF4-4F73-4713-85F9-663DD6DC3937}" type="slidenum">
               <a:rPr lang="ko-KR" altLang="en-US" smtClean="0"/>
-              <a:t>14</a:t>
+              <a:t>16</a:t>
             </a:fld>
             <a:endParaRPr lang="ko-KR" altLang="en-US"/>
           </a:p>
@@ -6067,7 +6408,7 @@
 </p:sld>
 </file>
 
-<file path=ppt/slides/slide15.xml><?xml version="1.0" encoding="utf-8"?>
+<file path=ppt/slides/slide17.xml><?xml version="1.0" encoding="utf-8"?>
 <p:sld xmlns:a="http://schemas.openxmlformats.org/drawingml/2006/main" xmlns:r="http://schemas.openxmlformats.org/officeDocument/2006/relationships" xmlns:p="http://schemas.openxmlformats.org/presentationml/2006/main">
   <p:cSld>
     <p:spTree>
@@ -6137,79 +6478,41 @@
           <a:p>
             <a:r>
               <a:rPr lang="en-US" altLang="ko-KR" sz="1600" dirty="0"/>
-              <a:t>1104: &lt;SPACE ROBBER&gt; </a:t>
-            </a:r>
-            <a:r>
-              <a:rPr lang="ko-KR" altLang="en-US" sz="1600" dirty="0"/>
-              <a:t>플레이 제안서를 이 문서로 바꿈</a:t>
-            </a:r>
-            <a:r>
-              <a:rPr lang="en-US" altLang="ko-KR" sz="1600" dirty="0"/>
-              <a:t>.</a:t>
+              <a:t>11.04: </a:t>
             </a:r>
             <a:br>
               <a:rPr lang="en-US" altLang="ko-KR" sz="1600" dirty="0"/>
             </a:br>
             <a:r>
+              <a:rPr lang="en-US" altLang="ko-KR" sz="1600" dirty="0"/>
+              <a:t>- &lt;SPACE ROBBER&gt; </a:t>
+            </a:r>
+            <a:r>
               <a:rPr lang="ko-KR" altLang="en-US" sz="1600" dirty="0"/>
-              <a:t>게임 정보에 내용 추가함</a:t>
+              <a:t>플레이 제안서를 이 문서로 바꿈</a:t>
             </a:r>
             <a:r>
               <a:rPr lang="en-US" altLang="ko-KR" sz="1600" dirty="0"/>
-              <a:t>, (</a:t>
-            </a:r>
-            <a:r>
-              <a:rPr lang="ko-KR" altLang="en-US" sz="1600" dirty="0"/>
-              <a:t>플랫폼</a:t>
-            </a:r>
-            <a:r>
-              <a:rPr lang="en-US" altLang="ko-KR" sz="1600" dirty="0"/>
-              <a:t>, </a:t>
-            </a:r>
-            <a:r>
-              <a:rPr lang="ko-KR" altLang="en-US" sz="1600" dirty="0"/>
-              <a:t>조작</a:t>
-            </a:r>
-            <a:r>
-              <a:rPr lang="en-US" altLang="ko-KR" sz="1600" dirty="0"/>
-              <a:t>). </a:t>
+              <a:t>.</a:t>
             </a:r>
             <a:br>
               <a:rPr lang="en-US" altLang="ko-KR" sz="1600" dirty="0"/>
             </a:br>
             <a:r>
+              <a:rPr lang="en-US" altLang="ko-KR" sz="1600" dirty="0"/>
+              <a:t>- </a:t>
+            </a:r>
+            <a:r>
               <a:rPr lang="ko-KR" altLang="en-US" sz="1600" dirty="0"/>
-              <a:t>조작키 관련 페이지 넣고 일부 작성</a:t>
+              <a:t>게임 정보에 내용 추가함</a:t>
             </a:r>
             <a:r>
               <a:rPr lang="en-US" altLang="ko-KR" sz="1600" dirty="0"/>
-              <a:t>. </a:t>
+              <a:t>, (</a:t>
             </a:r>
             <a:r>
               <a:rPr lang="ko-KR" altLang="en-US" sz="1600" dirty="0"/>
-              <a:t>지금 </a:t>
-            </a:r>
-            <a:r>
-              <a:rPr lang="ko-KR" altLang="en-US" sz="1600" dirty="0" err="1"/>
-              <a:t>설정해놓은</a:t>
-            </a:r>
-            <a:r>
-              <a:rPr lang="ko-KR" altLang="en-US" sz="1600" dirty="0"/>
-              <a:t> 키는 우선 임시</a:t>
-            </a:r>
-            <a:r>
-              <a:rPr lang="en-US" altLang="ko-KR" sz="1600" dirty="0"/>
-              <a:t>...</a:t>
-            </a:r>
-          </a:p>
-          <a:p>
-            <a:r>
-              <a:rPr lang="en-US" altLang="ko-KR" sz="1600" dirty="0"/>
-              <a:t>1105: </a:t>
-            </a:r>
-            <a:r>
-              <a:rPr lang="ko-KR" altLang="en-US" sz="1600" dirty="0"/>
-              <a:t>조작키 내용 추가</a:t>
+              <a:t>플랫폼</a:t>
             </a:r>
             <a:r>
               <a:rPr lang="en-US" altLang="ko-KR" sz="1600" dirty="0"/>
@@ -6217,69 +6520,59 @@
             </a:r>
             <a:r>
               <a:rPr lang="ko-KR" altLang="en-US" sz="1600" dirty="0"/>
-              <a:t>사망 시</a:t>
+              <a:t>조작</a:t>
             </a:r>
             <a:r>
               <a:rPr lang="en-US" altLang="ko-KR" sz="1600" dirty="0"/>
-              <a:t>/</a:t>
-            </a:r>
-            <a:r>
-              <a:rPr lang="ko-KR" altLang="en-US" sz="1600" dirty="0" err="1"/>
-              <a:t>설정창</a:t>
-            </a:r>
-            <a:r>
-              <a:rPr lang="ko-KR" altLang="en-US" sz="1600" dirty="0"/>
-              <a:t> 들어갔을 때 조작키 내용이 없는데</a:t>
-            </a:r>
-            <a:r>
-              <a:rPr lang="en-US" altLang="ko-KR" sz="1600" dirty="0"/>
-              <a:t>... </a:t>
-            </a:r>
-            <a:r>
-              <a:rPr lang="ko-KR" altLang="en-US" sz="1600" dirty="0"/>
-              <a:t>나중에 추가하기로</a:t>
-            </a:r>
-            <a:r>
-              <a:rPr lang="en-US" altLang="ko-KR" sz="1600" dirty="0"/>
-              <a:t>.</a:t>
+              <a:t>). </a:t>
             </a:r>
             <a:br>
               <a:rPr lang="en-US" altLang="ko-KR" sz="1600" dirty="0"/>
             </a:br>
             <a:r>
+              <a:rPr lang="en-US" altLang="ko-KR" sz="1600" dirty="0"/>
+              <a:t>- </a:t>
+            </a:r>
+            <a:r>
               <a:rPr lang="ko-KR" altLang="en-US" sz="1600" dirty="0"/>
-              <a:t>조작 중에 </a:t>
+              <a:t>조작키 관련 페이지 넣고 일부 작성</a:t>
             </a:r>
             <a:r>
               <a:rPr lang="en-US" altLang="ko-KR" sz="1600" dirty="0"/>
-              <a:t>Scan </a:t>
+              <a:t>. </a:t>
             </a:r>
             <a:r>
               <a:rPr lang="ko-KR" altLang="en-US" sz="1600" dirty="0"/>
-              <a:t>기능 어떻게 </a:t>
+              <a:t>지금 </a:t>
             </a:r>
             <a:r>
               <a:rPr lang="ko-KR" altLang="en-US" sz="1600" dirty="0" err="1"/>
-              <a:t>할깎</a:t>
+              <a:t>설정해놓은</a:t>
+            </a:r>
+            <a:r>
+              <a:rPr lang="ko-KR" altLang="en-US" sz="1600" dirty="0"/>
+              <a:t> 키는 우선 임시</a:t>
+            </a:r>
+            <a:r>
+              <a:rPr lang="en-US" altLang="ko-KR" sz="1600" dirty="0"/>
+              <a:t>...</a:t>
+            </a:r>
+          </a:p>
+          <a:p>
+            <a:r>
+              <a:rPr lang="en-US" altLang="ko-KR" sz="1600" dirty="0"/>
+              <a:t>11.05: </a:t>
             </a:r>
             <a:br>
               <a:rPr lang="en-US" altLang="ko-KR" sz="1600" dirty="0"/>
             </a:br>
             <a:r>
               <a:rPr lang="en-US" altLang="ko-KR" sz="1600" dirty="0"/>
-              <a:t>‘</a:t>
+              <a:t>- </a:t>
             </a:r>
             <a:r>
               <a:rPr lang="ko-KR" altLang="en-US" sz="1600" dirty="0"/>
-              <a:t>플레이어 정보</a:t>
-            </a:r>
-            <a:r>
-              <a:rPr lang="en-US" altLang="ko-KR" sz="1600" dirty="0"/>
-              <a:t>‘ </a:t>
-            </a:r>
-            <a:r>
-              <a:rPr lang="ko-KR" altLang="en-US" sz="1600" dirty="0"/>
-              <a:t>페이지 추가</a:t>
+              <a:t>조작키 내용 추가</a:t>
             </a:r>
             <a:r>
               <a:rPr lang="en-US" altLang="ko-KR" sz="1600" dirty="0"/>
@@ -6287,55 +6580,140 @@
             </a:r>
             <a:r>
               <a:rPr lang="ko-KR" altLang="en-US" sz="1600" dirty="0"/>
-              <a:t>내용은 아직 추가 안함</a:t>
-            </a:r>
-            <a:endParaRPr lang="en-US" altLang="ko-KR" sz="1600" dirty="0"/>
-          </a:p>
-          <a:p>
+              <a:t>사망 시</a:t>
+            </a:r>
             <a:r>
               <a:rPr lang="en-US" altLang="ko-KR" sz="1600" dirty="0"/>
-              <a:t>1107: </a:t>
+              <a:t>/</a:t>
+            </a:r>
+            <a:r>
+              <a:rPr lang="ko-KR" altLang="en-US" sz="1600" dirty="0" err="1"/>
+              <a:t>설정창</a:t>
             </a:r>
             <a:r>
               <a:rPr lang="ko-KR" altLang="en-US" sz="1600" dirty="0"/>
-              <a:t>조작 키</a:t>
+              <a:t> 들어갔을 때 조작키 내용이 없는데</a:t>
             </a:r>
             <a:r>
               <a:rPr lang="en-US" altLang="ko-KR" sz="1600" dirty="0"/>
-              <a:t> C, V, G </a:t>
+              <a:t>... </a:t>
             </a:r>
             <a:r>
               <a:rPr lang="ko-KR" altLang="en-US" sz="1600" dirty="0"/>
-              <a:t>내용 변경 </a:t>
+              <a:t>나중에 추가하기로</a:t>
             </a:r>
             <a:r>
               <a:rPr lang="en-US" altLang="ko-KR" sz="1600" dirty="0"/>
-              <a:t>-&gt; G </a:t>
-            </a:r>
-            <a:r>
-              <a:rPr lang="ko-KR" altLang="en-US" sz="1600" dirty="0"/>
-              <a:t>키 빼고</a:t>
-            </a:r>
-            <a:r>
-              <a:rPr lang="en-US" altLang="ko-KR" sz="1600" dirty="0"/>
-              <a:t>, C</a:t>
-            </a:r>
-            <a:r>
-              <a:rPr lang="ko-KR" altLang="en-US" sz="1600" dirty="0"/>
-              <a:t>키를 옆 칸 이동</a:t>
-            </a:r>
-            <a:r>
-              <a:rPr lang="en-US" altLang="ko-KR" sz="1600" dirty="0"/>
-              <a:t>, V</a:t>
-            </a:r>
-            <a:r>
-              <a:rPr lang="ko-KR" altLang="en-US" sz="1600" dirty="0"/>
-              <a:t>를 버리기로 할당</a:t>
+              <a:t>.</a:t>
             </a:r>
             <a:br>
               <a:rPr lang="en-US" altLang="ko-KR" sz="1600" dirty="0"/>
             </a:br>
             <a:r>
+              <a:rPr lang="en-US" altLang="ko-KR" sz="1600" dirty="0"/>
+              <a:t>- </a:t>
+            </a:r>
+            <a:r>
+              <a:rPr lang="ko-KR" altLang="en-US" sz="1600" dirty="0"/>
+              <a:t>조작 중에 </a:t>
+            </a:r>
+            <a:r>
+              <a:rPr lang="en-US" altLang="ko-KR" sz="1600" dirty="0"/>
+              <a:t>Scan </a:t>
+            </a:r>
+            <a:r>
+              <a:rPr lang="ko-KR" altLang="en-US" sz="1600" dirty="0"/>
+              <a:t>기능 어떻게 </a:t>
+            </a:r>
+            <a:r>
+              <a:rPr lang="ko-KR" altLang="en-US" sz="1600" dirty="0" err="1"/>
+              <a:t>할깎</a:t>
+            </a:r>
+            <a:br>
+              <a:rPr lang="en-US" altLang="ko-KR" sz="1600" dirty="0"/>
+            </a:br>
+            <a:r>
+              <a:rPr lang="en-US" altLang="ko-KR" sz="1600" dirty="0"/>
+              <a:t>- ‘</a:t>
+            </a:r>
+            <a:r>
+              <a:rPr lang="ko-KR" altLang="en-US" sz="1600" dirty="0"/>
+              <a:t>플레이어 정보</a:t>
+            </a:r>
+            <a:r>
+              <a:rPr lang="en-US" altLang="ko-KR" sz="1600" dirty="0"/>
+              <a:t>‘ </a:t>
+            </a:r>
+            <a:r>
+              <a:rPr lang="ko-KR" altLang="en-US" sz="1600" dirty="0"/>
+              <a:t>페이지 추가</a:t>
+            </a:r>
+            <a:r>
+              <a:rPr lang="en-US" altLang="ko-KR" sz="1600" dirty="0"/>
+              <a:t>, </a:t>
+            </a:r>
+            <a:r>
+              <a:rPr lang="ko-KR" altLang="en-US" sz="1600" dirty="0"/>
+              <a:t>내용은 아직 추가 안함</a:t>
+            </a:r>
+            <a:endParaRPr lang="en-US" altLang="ko-KR" sz="1600" dirty="0"/>
+          </a:p>
+          <a:p>
+            <a:r>
+              <a:rPr lang="en-US" altLang="ko-KR" sz="1600" dirty="0"/>
+              <a:t>11.07:</a:t>
+            </a:r>
+            <a:br>
+              <a:rPr lang="en-US" altLang="ko-KR" sz="1600" dirty="0"/>
+            </a:br>
+            <a:r>
+              <a:rPr lang="en-US" altLang="ko-KR" sz="1600" dirty="0"/>
+              <a:t>- </a:t>
+            </a:r>
+            <a:r>
+              <a:rPr lang="ko-KR" altLang="en-US" sz="1600" dirty="0"/>
+              <a:t>조작 키</a:t>
+            </a:r>
+            <a:r>
+              <a:rPr lang="en-US" altLang="ko-KR" sz="1600" dirty="0"/>
+              <a:t> C, V, G </a:t>
+            </a:r>
+            <a:r>
+              <a:rPr lang="ko-KR" altLang="en-US" sz="1600" dirty="0"/>
+              <a:t>내용 변경 </a:t>
+            </a:r>
+            <a:r>
+              <a:rPr lang="en-US" altLang="ko-KR" sz="1600" dirty="0"/>
+              <a:t>-&gt; G </a:t>
+            </a:r>
+            <a:r>
+              <a:rPr lang="ko-KR" altLang="en-US" sz="1600" dirty="0"/>
+              <a:t>키 빼고</a:t>
+            </a:r>
+            <a:r>
+              <a:rPr lang="en-US" altLang="ko-KR" sz="1600" dirty="0"/>
+              <a:t>, C</a:t>
+            </a:r>
+            <a:r>
+              <a:rPr lang="ko-KR" altLang="en-US" sz="1600" dirty="0"/>
+              <a:t>키를 옆 칸 이동</a:t>
+            </a:r>
+            <a:r>
+              <a:rPr lang="en-US" altLang="ko-KR" sz="1600" dirty="0"/>
+              <a:t>, V</a:t>
+            </a:r>
+            <a:r>
+              <a:rPr lang="ko-KR" altLang="en-US" sz="1600" dirty="0"/>
+              <a:t>를 버리기로 할당</a:t>
+            </a:r>
+            <a:br>
+              <a:rPr lang="en-US" altLang="ko-KR" sz="1600" dirty="0"/>
+            </a:br>
+            <a:r>
+              <a:rPr lang="en-US" altLang="ko-KR" sz="1600" dirty="0"/>
+              <a:t>- </a:t>
+            </a:r>
+            <a:r>
               <a:rPr lang="ko-KR" altLang="en-US" sz="1600" dirty="0"/>
               <a:t>웅크리기 </a:t>
             </a:r>
@@ -6356,6 +6734,78 @@
               <a:t> 키로 변경</a:t>
             </a:r>
             <a:endParaRPr lang="en-US" altLang="ko-KR" sz="1600" dirty="0"/>
+          </a:p>
+          <a:p>
+            <a:r>
+              <a:rPr lang="en-US" altLang="ko-KR" sz="1600" dirty="0"/>
+              <a:t>11.11:</a:t>
+            </a:r>
+            <a:br>
+              <a:rPr lang="en-US" altLang="ko-KR" sz="1600" dirty="0"/>
+            </a:br>
+            <a:r>
+              <a:rPr lang="en-US" altLang="ko-KR" sz="1600" dirty="0"/>
+              <a:t>- </a:t>
+            </a:r>
+            <a:r>
+              <a:rPr lang="ko-KR" altLang="en-US" sz="1600" dirty="0"/>
+              <a:t>플레이어 </a:t>
+            </a:r>
+            <a:r>
+              <a:rPr lang="ko-KR" altLang="en-US" sz="1600" dirty="0" err="1"/>
+              <a:t>스탯</a:t>
+            </a:r>
+            <a:r>
+              <a:rPr lang="ko-KR" altLang="en-US" sz="1600" dirty="0"/>
+              <a:t> 간략하게 추가</a:t>
+            </a:r>
+            <a:r>
+              <a:rPr lang="en-US" altLang="ko-KR" sz="1600" dirty="0"/>
+              <a:t>. </a:t>
+            </a:r>
+            <a:r>
+              <a:rPr lang="ko-KR" altLang="en-US" sz="1600" dirty="0"/>
+              <a:t>값은 아직 </a:t>
+            </a:r>
+            <a:r>
+              <a:rPr lang="ko-KR" altLang="en-US" sz="1600" dirty="0" err="1"/>
+              <a:t>안넣었음</a:t>
+            </a:r>
+            <a:r>
+              <a:rPr lang="en-US" altLang="ko-KR" sz="1600" dirty="0"/>
+              <a:t>. </a:t>
+            </a:r>
+            <a:br>
+              <a:rPr lang="en-US" altLang="ko-KR" sz="1600" dirty="0"/>
+            </a:br>
+            <a:r>
+              <a:rPr lang="en-US" altLang="ko-KR" sz="1600" dirty="0"/>
+              <a:t>- </a:t>
+            </a:r>
+            <a:r>
+              <a:rPr lang="ko-KR" altLang="en-US" sz="1600" dirty="0"/>
+              <a:t>플레이어 </a:t>
+            </a:r>
+            <a:r>
+              <a:rPr lang="ko-KR" altLang="en-US" sz="1600" dirty="0" err="1"/>
+              <a:t>스테이트</a:t>
+            </a:r>
+            <a:r>
+              <a:rPr lang="ko-KR" altLang="en-US" sz="1600" dirty="0"/>
+              <a:t> 추가</a:t>
+            </a:r>
+            <a:r>
+              <a:rPr lang="en-US" altLang="ko-KR" sz="1600" dirty="0"/>
+              <a:t>.</a:t>
+            </a:r>
+            <a:r>
+              <a:rPr lang="ko-KR" altLang="en-US" sz="1600" dirty="0"/>
+              <a:t> 수정해야 함</a:t>
+            </a:r>
+            <a:r>
+              <a:rPr lang="en-US" altLang="ko-KR" sz="1600" dirty="0"/>
+              <a:t>.</a:t>
+            </a:r>
           </a:p>
         </p:txBody>
       </p:sp>
@@ -6382,7 +6832,7 @@
           <a:p>
             <a:fld id="{5413EFF4-4F73-4713-85F9-663DD6DC3937}" type="slidenum">
               <a:rPr lang="ko-KR" altLang="en-US" smtClean="0"/>
-              <a:t>15</a:t>
+              <a:t>17</a:t>
             </a:fld>
             <a:endParaRPr lang="ko-KR" altLang="en-US"/>
           </a:p>
@@ -6392,6 +6842,327 @@
     <p:extLst>
       <p:ext uri="{BB962C8B-B14F-4D97-AF65-F5344CB8AC3E}">
         <p14:creationId xmlns:p14="http://schemas.microsoft.com/office/powerpoint/2010/main" val="450624528"/>
+      </p:ext>
+    </p:extLst>
+  </p:cSld>
+  <p:clrMapOvr>
+    <a:masterClrMapping/>
+  </p:clrMapOvr>
+</p:sld>
+</file>
+
+<file path=ppt/slides/slide18.xml><?xml version="1.0" encoding="utf-8"?>
+<p:sld xmlns:a="http://schemas.openxmlformats.org/drawingml/2006/main" xmlns:r="http://schemas.openxmlformats.org/officeDocument/2006/relationships" xmlns:p="http://schemas.openxmlformats.org/presentationml/2006/main">
+  <p:cSld>
+    <p:spTree>
+      <p:nvGrpSpPr>
+        <p:cNvPr id="1" name=""/>
+        <p:cNvGrpSpPr/>
+        <p:nvPr/>
+      </p:nvGrpSpPr>
+      <p:grpSpPr>
+        <a:xfrm>
+          <a:off x="0" y="0"/>
+          <a:ext cx="0" cy="0"/>
+          <a:chOff x="0" y="0"/>
+          <a:chExt cx="0" cy="0"/>
+        </a:xfrm>
+      </p:grpSpPr>
+      <p:sp>
+        <p:nvSpPr>
+          <p:cNvPr id="2" name="제목 1">
+            <a:extLst>
+              <a:ext uri="{FF2B5EF4-FFF2-40B4-BE49-F238E27FC236}">
+                <a16:creationId xmlns:a16="http://schemas.microsoft.com/office/drawing/2014/main" id="{053309AA-071C-90D0-ECCA-EFBFE8CE833B}"/>
+              </a:ext>
+            </a:extLst>
+          </p:cNvPr>
+          <p:cNvSpPr>
+            <a:spLocks noGrp="1"/>
+          </p:cNvSpPr>
+          <p:nvPr>
+            <p:ph type="title"/>
+          </p:nvPr>
+        </p:nvSpPr>
+        <p:spPr/>
+        <p:txBody>
+          <a:bodyPr/>
+          <a:lstStyle/>
+          <a:p>
+            <a:r>
+              <a:rPr lang="ko-KR" altLang="en-US" dirty="0"/>
+              <a:t>질문사항</a:t>
+            </a:r>
+          </a:p>
+        </p:txBody>
+      </p:sp>
+      <p:sp>
+        <p:nvSpPr>
+          <p:cNvPr id="3" name="내용 개체 틀 2">
+            <a:extLst>
+              <a:ext uri="{FF2B5EF4-FFF2-40B4-BE49-F238E27FC236}">
+                <a16:creationId xmlns:a16="http://schemas.microsoft.com/office/drawing/2014/main" id="{C9339F00-572F-2F2F-62CF-8E4ECCF125D0}"/>
+              </a:ext>
+            </a:extLst>
+          </p:cNvPr>
+          <p:cNvSpPr>
+            <a:spLocks noGrp="1"/>
+          </p:cNvSpPr>
+          <p:nvPr>
+            <p:ph idx="1"/>
+          </p:nvPr>
+        </p:nvSpPr>
+        <p:spPr/>
+        <p:txBody>
+          <a:bodyPr/>
+          <a:lstStyle/>
+          <a:p>
+            <a:pPr>
+              <a:lnSpc>
+                <a:spcPct val="100000"/>
+              </a:lnSpc>
+            </a:pPr>
+            <a:r>
+              <a:rPr lang="en-US" altLang="ko-KR" dirty="0"/>
+              <a:t>11.11:</a:t>
+            </a:r>
+            <a:br>
+              <a:rPr lang="en-US" altLang="ko-KR" dirty="0"/>
+            </a:br>
+            <a:r>
+              <a:rPr lang="en-US" altLang="ko-KR" dirty="0"/>
+              <a:t>- </a:t>
+            </a:r>
+            <a:r>
+              <a:rPr lang="ko-KR" altLang="en-US" dirty="0"/>
+              <a:t>플레이어 </a:t>
+            </a:r>
+            <a:r>
+              <a:rPr lang="ko-KR" altLang="en-US" dirty="0" err="1"/>
+              <a:t>스탯</a:t>
+            </a:r>
+            <a:r>
+              <a:rPr lang="ko-KR" altLang="en-US" dirty="0"/>
+              <a:t> 간략하게 추가</a:t>
+            </a:r>
+            <a:r>
+              <a:rPr lang="en-US" altLang="ko-KR" dirty="0"/>
+              <a:t>. </a:t>
+            </a:r>
+            <a:r>
+              <a:rPr lang="ko-KR" altLang="en-US" dirty="0"/>
+              <a:t>값은 아직 </a:t>
+            </a:r>
+            <a:r>
+              <a:rPr lang="ko-KR" altLang="en-US" dirty="0" err="1"/>
+              <a:t>안넣었음</a:t>
+            </a:r>
+            <a:r>
+              <a:rPr lang="en-US" altLang="ko-KR" dirty="0"/>
+              <a:t>. ‘</a:t>
+            </a:r>
+            <a:r>
+              <a:rPr lang="ko-KR" altLang="en-US" dirty="0"/>
+              <a:t>최대 가방 무게</a:t>
+            </a:r>
+            <a:r>
+              <a:rPr lang="en-US" altLang="ko-KR" dirty="0"/>
+              <a:t>’ </a:t>
+            </a:r>
+            <a:r>
+              <a:rPr lang="ko-KR" altLang="en-US" dirty="0"/>
+              <a:t>말인데</a:t>
+            </a:r>
+            <a:r>
+              <a:rPr lang="en-US" altLang="ko-KR" dirty="0"/>
+              <a:t>... </a:t>
+            </a:r>
+            <a:r>
+              <a:rPr lang="ko-KR" altLang="en-US" dirty="0"/>
+              <a:t>딱히 그게 늘거나 줄진 않을 텐데 </a:t>
+            </a:r>
+            <a:r>
+              <a:rPr lang="ko-KR" altLang="en-US" dirty="0" err="1"/>
+              <a:t>스탯에</a:t>
+            </a:r>
+            <a:r>
+              <a:rPr lang="ko-KR" altLang="en-US" dirty="0"/>
+              <a:t> 넣어야 하나 싶기도 하고</a:t>
+            </a:r>
+            <a:r>
+              <a:rPr lang="en-US" altLang="ko-KR" dirty="0"/>
+              <a:t>...? </a:t>
+            </a:r>
+            <a:r>
+              <a:rPr lang="ko-KR" altLang="en-US" dirty="0"/>
+              <a:t>무게에 따른 스태미나 소모량</a:t>
+            </a:r>
+            <a:r>
+              <a:rPr lang="en-US" altLang="ko-KR" dirty="0"/>
+              <a:t>... </a:t>
+            </a:r>
+            <a:r>
+              <a:rPr lang="ko-KR" altLang="en-US" dirty="0"/>
+              <a:t>때문에 넣어야 하나 싶기도 하고</a:t>
+            </a:r>
+            <a:r>
+              <a:rPr lang="en-US" altLang="ko-KR" dirty="0"/>
+              <a:t>...? </a:t>
+            </a:r>
+            <a:r>
+              <a:rPr lang="ko-KR" altLang="en-US" dirty="0"/>
+              <a:t>아니면 그냥 </a:t>
+            </a:r>
+            <a:r>
+              <a:rPr lang="en-US" altLang="ko-KR" dirty="0"/>
+              <a:t>n.00kg,</a:t>
+            </a:r>
+            <a:r>
+              <a:rPr lang="ko-KR" altLang="en-US" dirty="0"/>
+              <a:t> </a:t>
+            </a:r>
+            <a:r>
+              <a:rPr lang="en-US" altLang="ko-KR" dirty="0"/>
+              <a:t>n+5.00kg,... </a:t>
+            </a:r>
+            <a:r>
+              <a:rPr lang="ko-KR" altLang="en-US" dirty="0"/>
+              <a:t>이라고 딱 정하면 상관없나</a:t>
+            </a:r>
+            <a:r>
+              <a:rPr lang="en-US" altLang="ko-KR" dirty="0"/>
+              <a:t>..?</a:t>
+            </a:r>
+            <a:br>
+              <a:rPr lang="en-US" altLang="ko-KR" dirty="0"/>
+            </a:br>
+            <a:r>
+              <a:rPr lang="en-US" altLang="ko-KR" dirty="0"/>
+              <a:t>- </a:t>
+            </a:r>
+            <a:r>
+              <a:rPr lang="en-US" altLang="ko-KR" dirty="0" err="1"/>
+              <a:t>MaSu</a:t>
+            </a:r>
+            <a:r>
+              <a:rPr lang="en-US" altLang="ko-KR" dirty="0"/>
+              <a:t> </a:t>
+            </a:r>
+            <a:r>
+              <a:rPr lang="ko-KR" altLang="en-US" dirty="0"/>
+              <a:t>때는 </a:t>
+            </a:r>
+            <a:r>
+              <a:rPr lang="en-US" altLang="ko-KR" dirty="0"/>
+              <a:t>‘</a:t>
+            </a:r>
+            <a:r>
+              <a:rPr lang="ko-KR" altLang="en-US" dirty="0"/>
+              <a:t>점프 속도</a:t>
+            </a:r>
+            <a:r>
+              <a:rPr lang="en-US" altLang="ko-KR" dirty="0"/>
+              <a:t>‘</a:t>
+            </a:r>
+            <a:r>
+              <a:rPr lang="ko-KR" altLang="en-US" dirty="0"/>
+              <a:t>라는 </a:t>
+            </a:r>
+            <a:r>
+              <a:rPr lang="ko-KR" altLang="en-US" dirty="0" err="1"/>
+              <a:t>스탯이</a:t>
+            </a:r>
+            <a:r>
+              <a:rPr lang="ko-KR" altLang="en-US" dirty="0"/>
+              <a:t> 있었는데</a:t>
+            </a:r>
+            <a:r>
+              <a:rPr lang="en-US" altLang="ko-KR" dirty="0"/>
+              <a:t>, </a:t>
+            </a:r>
+            <a:r>
+              <a:rPr lang="ko-KR" altLang="en-US" dirty="0"/>
+              <a:t>여기도 똑같이 필요한지</a:t>
+            </a:r>
+            <a:r>
+              <a:rPr lang="en-US" altLang="ko-KR" dirty="0"/>
+              <a:t>..? </a:t>
+            </a:r>
+            <a:r>
+              <a:rPr lang="ko-KR" altLang="en-US" dirty="0"/>
+              <a:t>아니면 </a:t>
+            </a:r>
+            <a:r>
+              <a:rPr lang="en-US" altLang="ko-KR" dirty="0"/>
+              <a:t>‘</a:t>
+            </a:r>
+            <a:r>
+              <a:rPr lang="ko-KR" altLang="en-US" dirty="0"/>
+              <a:t>점프 높이</a:t>
+            </a:r>
+            <a:r>
+              <a:rPr lang="en-US" altLang="ko-KR" dirty="0"/>
+              <a:t>’</a:t>
+            </a:r>
+            <a:r>
+              <a:rPr lang="ko-KR" altLang="en-US" dirty="0"/>
+              <a:t>로 바꿔도</a:t>
+            </a:r>
+            <a:r>
+              <a:rPr lang="en-US" altLang="ko-KR" dirty="0"/>
+              <a:t>..?</a:t>
+            </a:r>
+            <a:br>
+              <a:rPr lang="en-US" altLang="ko-KR" dirty="0"/>
+            </a:br>
+            <a:r>
+              <a:rPr lang="en-US" altLang="ko-KR" dirty="0"/>
+              <a:t>- </a:t>
+            </a:r>
+            <a:r>
+              <a:rPr lang="ko-KR" altLang="en-US" dirty="0"/>
+              <a:t>자료형 어떻게 할까</a:t>
+            </a:r>
+            <a:endParaRPr lang="en-US" altLang="ko-KR" dirty="0"/>
+          </a:p>
+          <a:p>
+            <a:endParaRPr lang="ko-KR" altLang="en-US" dirty="0"/>
+          </a:p>
+        </p:txBody>
+      </p:sp>
+      <p:sp>
+        <p:nvSpPr>
+          <p:cNvPr id="4" name="슬라이드 번호 개체 틀 3">
+            <a:extLst>
+              <a:ext uri="{FF2B5EF4-FFF2-40B4-BE49-F238E27FC236}">
+                <a16:creationId xmlns:a16="http://schemas.microsoft.com/office/drawing/2014/main" id="{05E4046D-F139-A7E1-C4D3-0A3170020382}"/>
+              </a:ext>
+            </a:extLst>
+          </p:cNvPr>
+          <p:cNvSpPr>
+            <a:spLocks noGrp="1"/>
+          </p:cNvSpPr>
+          <p:nvPr>
+            <p:ph type="sldNum" sz="quarter" idx="12"/>
+          </p:nvPr>
+        </p:nvSpPr>
+        <p:spPr/>
+        <p:txBody>
+          <a:bodyPr/>
+          <a:lstStyle/>
+          <a:p>
+            <a:fld id="{5413EFF4-4F73-4713-85F9-663DD6DC3937}" type="slidenum">
+              <a:rPr lang="ko-KR" altLang="en-US" smtClean="0"/>
+              <a:t>18</a:t>
+            </a:fld>
+            <a:endParaRPr lang="ko-KR" altLang="en-US"/>
+          </a:p>
+        </p:txBody>
+      </p:sp>
+    </p:spTree>
+    <p:extLst>
+      <p:ext uri="{BB962C8B-B14F-4D97-AF65-F5344CB8AC3E}">
+        <p14:creationId xmlns:p14="http://schemas.microsoft.com/office/powerpoint/2010/main" val="755682812"/>
       </p:ext>
     </p:extLst>
   </p:cSld>
@@ -6493,14 +7264,40 @@
           <a:p>
             <a:r>
               <a:rPr lang="ko-KR" altLang="en-US" dirty="0"/>
+              <a:t>게임 진행</a:t>
+            </a:r>
+            <a:endParaRPr lang="en-US" altLang="ko-KR" dirty="0"/>
+          </a:p>
+          <a:p>
+            <a:r>
+              <a:rPr lang="ko-KR" altLang="en-US" dirty="0"/>
               <a:t>플레이어 정보</a:t>
             </a:r>
             <a:endParaRPr lang="en-US" altLang="ko-KR" dirty="0"/>
           </a:p>
           <a:p>
+            <a:pPr lvl="1"/>
+            <a:r>
+              <a:rPr lang="ko-KR" altLang="en-US" dirty="0" err="1"/>
+              <a:t>스탯</a:t>
+            </a:r>
+            <a:endParaRPr lang="en-US" altLang="ko-KR" dirty="0"/>
+          </a:p>
+          <a:p>
+            <a:pPr lvl="1"/>
             <a:r>
               <a:rPr lang="ko-KR" altLang="en-US" dirty="0"/>
-              <a:t>게임 진행</a:t>
+              <a:t>상태</a:t>
+            </a:r>
+            <a:r>
+              <a:rPr lang="en-US" altLang="ko-KR" dirty="0"/>
+              <a:t>(State)</a:t>
+            </a:r>
+          </a:p>
+          <a:p>
+            <a:r>
+              <a:rPr lang="ko-KR" altLang="en-US" dirty="0"/>
+              <a:t>인벤토리</a:t>
             </a:r>
             <a:endParaRPr lang="en-US" altLang="ko-KR" dirty="0"/>
           </a:p>
@@ -11726,148 +12523,6 @@
           <p:cNvPr id="2" name="제목 1">
             <a:extLst>
               <a:ext uri="{FF2B5EF4-FFF2-40B4-BE49-F238E27FC236}">
-                <a16:creationId xmlns:a16="http://schemas.microsoft.com/office/drawing/2014/main" id="{D3A1413C-AF46-EC38-7699-9C736170B055}"/>
-              </a:ext>
-            </a:extLst>
-          </p:cNvPr>
-          <p:cNvSpPr>
-            <a:spLocks noGrp="1"/>
-          </p:cNvSpPr>
-          <p:nvPr>
-            <p:ph type="title"/>
-          </p:nvPr>
-        </p:nvSpPr>
-        <p:spPr/>
-        <p:txBody>
-          <a:bodyPr/>
-          <a:lstStyle/>
-          <a:p>
-            <a:r>
-              <a:rPr lang="ko-KR" altLang="en-US" dirty="0"/>
-              <a:t>플레이어 정보</a:t>
-            </a:r>
-          </a:p>
-        </p:txBody>
-      </p:sp>
-      <p:sp>
-        <p:nvSpPr>
-          <p:cNvPr id="3" name="내용 개체 틀 2">
-            <a:extLst>
-              <a:ext uri="{FF2B5EF4-FFF2-40B4-BE49-F238E27FC236}">
-                <a16:creationId xmlns:a16="http://schemas.microsoft.com/office/drawing/2014/main" id="{D551DD6E-6000-C9A3-897A-A0C57B7BEB81}"/>
-              </a:ext>
-            </a:extLst>
-          </p:cNvPr>
-          <p:cNvSpPr>
-            <a:spLocks noGrp="1"/>
-          </p:cNvSpPr>
-          <p:nvPr>
-            <p:ph idx="1"/>
-          </p:nvPr>
-        </p:nvSpPr>
-        <p:spPr/>
-        <p:txBody>
-          <a:bodyPr/>
-          <a:lstStyle/>
-          <a:p>
-            <a:r>
-              <a:rPr lang="en-US" altLang="ko-KR" dirty="0"/>
-              <a:t>(</a:t>
-            </a:r>
-            <a:r>
-              <a:rPr lang="ko-KR" altLang="en-US" dirty="0" err="1"/>
-              <a:t>스탯</a:t>
-            </a:r>
-            <a:r>
-              <a:rPr lang="ko-KR" altLang="en-US" dirty="0"/>
-              <a:t> 넣기</a:t>
-            </a:r>
-            <a:r>
-              <a:rPr lang="en-US" altLang="ko-KR" dirty="0"/>
-              <a:t>)</a:t>
-            </a:r>
-          </a:p>
-          <a:p>
-            <a:r>
-              <a:rPr lang="en-US" altLang="ko-KR" dirty="0"/>
-              <a:t>(state </a:t>
-            </a:r>
-            <a:r>
-              <a:rPr lang="ko-KR" altLang="en-US" dirty="0"/>
-              <a:t>그냥 쭉 정리하기</a:t>
-            </a:r>
-            <a:r>
-              <a:rPr lang="en-US" altLang="ko-KR" dirty="0"/>
-              <a:t>)</a:t>
-            </a:r>
-            <a:endParaRPr lang="ko-KR" altLang="en-US" dirty="0"/>
-          </a:p>
-        </p:txBody>
-      </p:sp>
-      <p:sp>
-        <p:nvSpPr>
-          <p:cNvPr id="4" name="슬라이드 번호 개체 틀 3">
-            <a:extLst>
-              <a:ext uri="{FF2B5EF4-FFF2-40B4-BE49-F238E27FC236}">
-                <a16:creationId xmlns:a16="http://schemas.microsoft.com/office/drawing/2014/main" id="{A637D255-F094-8FC4-AD27-E1ED2060D599}"/>
-              </a:ext>
-            </a:extLst>
-          </p:cNvPr>
-          <p:cNvSpPr>
-            <a:spLocks noGrp="1"/>
-          </p:cNvSpPr>
-          <p:nvPr>
-            <p:ph type="sldNum" sz="quarter" idx="12"/>
-          </p:nvPr>
-        </p:nvSpPr>
-        <p:spPr/>
-        <p:txBody>
-          <a:bodyPr/>
-          <a:lstStyle/>
-          <a:p>
-            <a:fld id="{5413EFF4-4F73-4713-85F9-663DD6DC3937}" type="slidenum">
-              <a:rPr lang="ko-KR" altLang="en-US" smtClean="0"/>
-              <a:t>6</a:t>
-            </a:fld>
-            <a:endParaRPr lang="ko-KR" altLang="en-US"/>
-          </a:p>
-        </p:txBody>
-      </p:sp>
-    </p:spTree>
-    <p:extLst>
-      <p:ext uri="{BB962C8B-B14F-4D97-AF65-F5344CB8AC3E}">
-        <p14:creationId xmlns:p14="http://schemas.microsoft.com/office/powerpoint/2010/main" val="1188156224"/>
-      </p:ext>
-    </p:extLst>
-  </p:cSld>
-  <p:clrMapOvr>
-    <a:masterClrMapping/>
-  </p:clrMapOvr>
-</p:sld>
-</file>
-
-<file path=ppt/slides/slide7.xml><?xml version="1.0" encoding="utf-8"?>
-<p:sld xmlns:a="http://schemas.openxmlformats.org/drawingml/2006/main" xmlns:r="http://schemas.openxmlformats.org/officeDocument/2006/relationships" xmlns:p="http://schemas.openxmlformats.org/presentationml/2006/main">
-  <p:cSld>
-    <p:spTree>
-      <p:nvGrpSpPr>
-        <p:cNvPr id="1" name=""/>
-        <p:cNvGrpSpPr/>
-        <p:nvPr/>
-      </p:nvGrpSpPr>
-      <p:grpSpPr>
-        <a:xfrm>
-          <a:off x="0" y="0"/>
-          <a:ext cx="0" cy="0"/>
-          <a:chOff x="0" y="0"/>
-          <a:chExt cx="0" cy="0"/>
-        </a:xfrm>
-      </p:grpSpPr>
-      <p:sp>
-        <p:nvSpPr>
-          <p:cNvPr id="2" name="제목 1">
-            <a:extLst>
-              <a:ext uri="{FF2B5EF4-FFF2-40B4-BE49-F238E27FC236}">
                 <a16:creationId xmlns:a16="http://schemas.microsoft.com/office/drawing/2014/main" id="{DE63F933-850B-81C5-73C9-A8EF841128A4}"/>
               </a:ext>
             </a:extLst>
@@ -11959,7 +12614,7 @@
           <a:p>
             <a:fld id="{5413EFF4-4F73-4713-85F9-663DD6DC3937}" type="slidenum">
               <a:rPr lang="ko-KR" altLang="en-US" smtClean="0"/>
-              <a:t>7</a:t>
+              <a:t>6</a:t>
             </a:fld>
             <a:endParaRPr lang="ko-KR" altLang="en-US"/>
           </a:p>
@@ -11979,7 +12634,7 @@
         </p:nvGrpSpPr>
         <p:grpSpPr>
           <a:xfrm>
-            <a:off x="3577964" y="3207990"/>
+            <a:off x="3577964" y="2755706"/>
             <a:ext cx="4770126" cy="2069584"/>
             <a:chOff x="692150" y="4325852"/>
             <a:chExt cx="4770126" cy="2069584"/>
@@ -12682,6 +13337,2348 @@
 </p:sld>
 </file>
 
+<file path=ppt/slides/slide7.xml><?xml version="1.0" encoding="utf-8"?>
+<p:sld xmlns:a="http://schemas.openxmlformats.org/drawingml/2006/main" xmlns:r="http://schemas.openxmlformats.org/officeDocument/2006/relationships" xmlns:p="http://schemas.openxmlformats.org/presentationml/2006/main">
+  <p:cSld>
+    <p:spTree>
+      <p:nvGrpSpPr>
+        <p:cNvPr id="1" name="">
+          <a:extLst>
+            <a:ext uri="{FF2B5EF4-FFF2-40B4-BE49-F238E27FC236}">
+              <a16:creationId xmlns:a16="http://schemas.microsoft.com/office/drawing/2014/main" id="{DC391F70-8BC4-B0D0-D19F-8F8EDEEA794F}"/>
+            </a:ext>
+          </a:extLst>
+        </p:cNvPr>
+        <p:cNvGrpSpPr/>
+        <p:nvPr/>
+      </p:nvGrpSpPr>
+      <p:grpSpPr>
+        <a:xfrm>
+          <a:off x="0" y="0"/>
+          <a:ext cx="0" cy="0"/>
+          <a:chOff x="0" y="0"/>
+          <a:chExt cx="0" cy="0"/>
+        </a:xfrm>
+      </p:grpSpPr>
+      <p:sp>
+        <p:nvSpPr>
+          <p:cNvPr id="2" name="제목 1">
+            <a:extLst>
+              <a:ext uri="{FF2B5EF4-FFF2-40B4-BE49-F238E27FC236}">
+                <a16:creationId xmlns:a16="http://schemas.microsoft.com/office/drawing/2014/main" id="{EED0D99F-7266-92C3-FFD6-D004AEB79D40}"/>
+              </a:ext>
+            </a:extLst>
+          </p:cNvPr>
+          <p:cNvSpPr>
+            <a:spLocks noGrp="1"/>
+          </p:cNvSpPr>
+          <p:nvPr>
+            <p:ph type="title"/>
+          </p:nvPr>
+        </p:nvSpPr>
+        <p:spPr/>
+        <p:txBody>
+          <a:bodyPr/>
+          <a:lstStyle/>
+          <a:p>
+            <a:r>
+              <a:rPr lang="ko-KR" altLang="en-US" dirty="0"/>
+              <a:t>플레이어 정보</a:t>
+            </a:r>
+            <a:r>
+              <a:rPr lang="en-US" altLang="ko-KR" dirty="0"/>
+              <a:t>	- </a:t>
+            </a:r>
+            <a:r>
+              <a:rPr lang="ko-KR" altLang="en-US" dirty="0" err="1"/>
+              <a:t>스탯</a:t>
+            </a:r>
+            <a:endParaRPr lang="ko-KR" altLang="en-US" dirty="0"/>
+          </a:p>
+        </p:txBody>
+      </p:sp>
+      <p:sp>
+        <p:nvSpPr>
+          <p:cNvPr id="3" name="내용 개체 틀 2">
+            <a:extLst>
+              <a:ext uri="{FF2B5EF4-FFF2-40B4-BE49-F238E27FC236}">
+                <a16:creationId xmlns:a16="http://schemas.microsoft.com/office/drawing/2014/main" id="{CB6B8DEA-1EDA-4110-C3B6-EF0477FF5085}"/>
+              </a:ext>
+            </a:extLst>
+          </p:cNvPr>
+          <p:cNvSpPr>
+            <a:spLocks noGrp="1"/>
+          </p:cNvSpPr>
+          <p:nvPr>
+            <p:ph idx="1"/>
+          </p:nvPr>
+        </p:nvSpPr>
+        <p:spPr/>
+        <p:txBody>
+          <a:bodyPr/>
+          <a:lstStyle/>
+          <a:p>
+            <a:endParaRPr lang="ko-KR" altLang="en-US" dirty="0"/>
+          </a:p>
+        </p:txBody>
+      </p:sp>
+      <p:sp>
+        <p:nvSpPr>
+          <p:cNvPr id="4" name="슬라이드 번호 개체 틀 3">
+            <a:extLst>
+              <a:ext uri="{FF2B5EF4-FFF2-40B4-BE49-F238E27FC236}">
+                <a16:creationId xmlns:a16="http://schemas.microsoft.com/office/drawing/2014/main" id="{D5274702-2844-0732-B077-BA01F8B9D2FA}"/>
+              </a:ext>
+            </a:extLst>
+          </p:cNvPr>
+          <p:cNvSpPr>
+            <a:spLocks noGrp="1"/>
+          </p:cNvSpPr>
+          <p:nvPr>
+            <p:ph type="sldNum" sz="quarter" idx="12"/>
+          </p:nvPr>
+        </p:nvSpPr>
+        <p:spPr/>
+        <p:txBody>
+          <a:bodyPr/>
+          <a:lstStyle/>
+          <a:p>
+            <a:fld id="{5413EFF4-4F73-4713-85F9-663DD6DC3937}" type="slidenum">
+              <a:rPr lang="ko-KR" altLang="en-US" smtClean="0"/>
+              <a:t>7</a:t>
+            </a:fld>
+            <a:endParaRPr lang="ko-KR" altLang="en-US"/>
+          </a:p>
+        </p:txBody>
+      </p:sp>
+      <p:graphicFrame>
+        <p:nvGraphicFramePr>
+          <p:cNvPr id="5" name="표 4">
+            <a:extLst>
+              <a:ext uri="{FF2B5EF4-FFF2-40B4-BE49-F238E27FC236}">
+                <a16:creationId xmlns:a16="http://schemas.microsoft.com/office/drawing/2014/main" id="{97FFD028-5528-7CBB-B261-3BD223067FF8}"/>
+              </a:ext>
+            </a:extLst>
+          </p:cNvPr>
+          <p:cNvGraphicFramePr>
+            <a:graphicFrameLocks noGrp="1"/>
+          </p:cNvGraphicFramePr>
+          <p:nvPr>
+            <p:extLst>
+              <p:ext uri="{D42A27DB-BD31-4B8C-83A1-F6EECF244321}">
+                <p14:modId xmlns:p14="http://schemas.microsoft.com/office/powerpoint/2010/main" val="604641788"/>
+              </p:ext>
+            </p:extLst>
+          </p:nvPr>
+        </p:nvGraphicFramePr>
+        <p:xfrm>
+          <a:off x="1585843" y="896991"/>
+          <a:ext cx="8918828" cy="4216400"/>
+        </p:xfrm>
+        <a:graphic>
+          <a:graphicData uri="http://schemas.openxmlformats.org/drawingml/2006/table">
+            <a:tbl>
+              <a:tblPr firstRow="1" bandRow="1">
+                <a:tableStyleId>{5C22544A-7EE6-4342-B048-85BDC9FD1C3A}</a:tableStyleId>
+              </a:tblPr>
+              <a:tblGrid>
+                <a:gridCol w="1797367">
+                  <a:extLst>
+                    <a:ext uri="{9D8B030D-6E8A-4147-A177-3AD203B41FA5}">
+                      <a16:colId xmlns:a16="http://schemas.microsoft.com/office/drawing/2014/main" val="1240864632"/>
+                    </a:ext>
+                  </a:extLst>
+                </a:gridCol>
+                <a:gridCol w="867429">
+                  <a:extLst>
+                    <a:ext uri="{9D8B030D-6E8A-4147-A177-3AD203B41FA5}">
+                      <a16:colId xmlns:a16="http://schemas.microsoft.com/office/drawing/2014/main" val="752755729"/>
+                    </a:ext>
+                  </a:extLst>
+                </a:gridCol>
+                <a:gridCol w="867429">
+                  <a:extLst>
+                    <a:ext uri="{9D8B030D-6E8A-4147-A177-3AD203B41FA5}">
+                      <a16:colId xmlns:a16="http://schemas.microsoft.com/office/drawing/2014/main" val="2669217487"/>
+                    </a:ext>
+                  </a:extLst>
+                </a:gridCol>
+                <a:gridCol w="5386603">
+                  <a:extLst>
+                    <a:ext uri="{9D8B030D-6E8A-4147-A177-3AD203B41FA5}">
+                      <a16:colId xmlns:a16="http://schemas.microsoft.com/office/drawing/2014/main" val="644144632"/>
+                    </a:ext>
+                  </a:extLst>
+                </a:gridCol>
+              </a:tblGrid>
+              <a:tr h="370840">
+                <a:tc>
+                  <a:txBody>
+                    <a:bodyPr/>
+                    <a:lstStyle/>
+                    <a:p>
+                      <a:pPr algn="ctr" latinLnBrk="0"/>
+                      <a:r>
+                        <a:rPr lang="ko-KR" altLang="en-US" sz="1600" dirty="0" err="1">
+                          <a:solidFill>
+                            <a:schemeClr val="tx1"/>
+                          </a:solidFill>
+                        </a:rPr>
+                        <a:t>스탯</a:t>
+                      </a:r>
+                      <a:endParaRPr lang="ko-KR" altLang="en-US" sz="1600" dirty="0">
+                        <a:solidFill>
+                          <a:schemeClr val="tx1"/>
+                        </a:solidFill>
+                      </a:endParaRPr>
+                    </a:p>
+                  </a:txBody>
+                  <a:tcPr anchor="ctr">
+                    <a:lnL w="12700" cap="flat" cmpd="sng" algn="ctr">
+                      <a:solidFill>
+                        <a:schemeClr val="tx1"/>
+                      </a:solidFill>
+                      <a:prstDash val="solid"/>
+                      <a:round/>
+                      <a:headEnd type="none" w="med" len="med"/>
+                      <a:tailEnd type="none" w="med" len="med"/>
+                    </a:lnL>
+                    <a:lnR w="12700" cap="flat" cmpd="sng" algn="ctr">
+                      <a:solidFill>
+                        <a:schemeClr val="tx1"/>
+                      </a:solidFill>
+                      <a:prstDash val="solid"/>
+                      <a:round/>
+                      <a:headEnd type="none" w="med" len="med"/>
+                      <a:tailEnd type="none" w="med" len="med"/>
+                    </a:lnR>
+                    <a:lnT w="12700" cap="flat" cmpd="sng" algn="ctr">
+                      <a:solidFill>
+                        <a:schemeClr val="tx1"/>
+                      </a:solidFill>
+                      <a:prstDash val="solid"/>
+                      <a:round/>
+                      <a:headEnd type="none" w="med" len="med"/>
+                      <a:tailEnd type="none" w="med" len="med"/>
+                    </a:lnT>
+                    <a:lnB w="12700" cap="flat" cmpd="sng" algn="ctr">
+                      <a:solidFill>
+                        <a:schemeClr val="tx1"/>
+                      </a:solidFill>
+                      <a:prstDash val="solid"/>
+                      <a:round/>
+                      <a:headEnd type="none" w="med" len="med"/>
+                      <a:tailEnd type="none" w="med" len="med"/>
+                    </a:lnB>
+                    <a:solidFill>
+                      <a:schemeClr val="bg2">
+                        <a:lumMod val="75000"/>
+                      </a:schemeClr>
+                    </a:solidFill>
+                  </a:tcPr>
+                </a:tc>
+                <a:tc>
+                  <a:txBody>
+                    <a:bodyPr/>
+                    <a:lstStyle/>
+                    <a:p>
+                      <a:pPr algn="ctr" latinLnBrk="0"/>
+                      <a:r>
+                        <a:rPr lang="en-US" altLang="ko-KR" sz="1600" dirty="0">
+                          <a:solidFill>
+                            <a:schemeClr val="tx1"/>
+                          </a:solidFill>
+                        </a:rPr>
+                        <a:t>type</a:t>
+                      </a:r>
+                      <a:endParaRPr lang="ko-KR" altLang="en-US" sz="1600" dirty="0">
+                        <a:solidFill>
+                          <a:schemeClr val="tx1"/>
+                        </a:solidFill>
+                      </a:endParaRPr>
+                    </a:p>
+                  </a:txBody>
+                  <a:tcPr anchor="ctr">
+                    <a:lnL w="12700" cap="flat" cmpd="sng" algn="ctr">
+                      <a:solidFill>
+                        <a:schemeClr val="tx1"/>
+                      </a:solidFill>
+                      <a:prstDash val="solid"/>
+                      <a:round/>
+                      <a:headEnd type="none" w="med" len="med"/>
+                      <a:tailEnd type="none" w="med" len="med"/>
+                    </a:lnL>
+                    <a:lnR w="12700" cap="flat" cmpd="sng" algn="ctr">
+                      <a:solidFill>
+                        <a:schemeClr val="tx1"/>
+                      </a:solidFill>
+                      <a:prstDash val="solid"/>
+                      <a:round/>
+                      <a:headEnd type="none" w="med" len="med"/>
+                      <a:tailEnd type="none" w="med" len="med"/>
+                    </a:lnR>
+                    <a:lnT w="12700" cap="flat" cmpd="sng" algn="ctr">
+                      <a:solidFill>
+                        <a:schemeClr val="tx1"/>
+                      </a:solidFill>
+                      <a:prstDash val="solid"/>
+                      <a:round/>
+                      <a:headEnd type="none" w="med" len="med"/>
+                      <a:tailEnd type="none" w="med" len="med"/>
+                    </a:lnT>
+                    <a:lnB w="12700" cap="flat" cmpd="sng" algn="ctr">
+                      <a:solidFill>
+                        <a:schemeClr val="tx1"/>
+                      </a:solidFill>
+                      <a:prstDash val="solid"/>
+                      <a:round/>
+                      <a:headEnd type="none" w="med" len="med"/>
+                      <a:tailEnd type="none" w="med" len="med"/>
+                    </a:lnB>
+                    <a:solidFill>
+                      <a:schemeClr val="bg2">
+                        <a:lumMod val="75000"/>
+                      </a:schemeClr>
+                    </a:solidFill>
+                  </a:tcPr>
+                </a:tc>
+                <a:tc>
+                  <a:txBody>
+                    <a:bodyPr/>
+                    <a:lstStyle/>
+                    <a:p>
+                      <a:pPr algn="ctr" latinLnBrk="0"/>
+                      <a:r>
+                        <a:rPr lang="ko-KR" altLang="en-US" sz="1600" dirty="0">
+                          <a:solidFill>
+                            <a:schemeClr val="tx1"/>
+                          </a:solidFill>
+                        </a:rPr>
+                        <a:t>값</a:t>
+                      </a:r>
+                    </a:p>
+                  </a:txBody>
+                  <a:tcPr anchor="ctr">
+                    <a:lnL w="12700" cap="flat" cmpd="sng" algn="ctr">
+                      <a:solidFill>
+                        <a:schemeClr val="tx1"/>
+                      </a:solidFill>
+                      <a:prstDash val="solid"/>
+                      <a:round/>
+                      <a:headEnd type="none" w="med" len="med"/>
+                      <a:tailEnd type="none" w="med" len="med"/>
+                    </a:lnL>
+                    <a:lnR w="12700" cap="flat" cmpd="sng" algn="ctr">
+                      <a:solidFill>
+                        <a:schemeClr val="tx1"/>
+                      </a:solidFill>
+                      <a:prstDash val="solid"/>
+                      <a:round/>
+                      <a:headEnd type="none" w="med" len="med"/>
+                      <a:tailEnd type="none" w="med" len="med"/>
+                    </a:lnR>
+                    <a:lnT w="12700" cap="flat" cmpd="sng" algn="ctr">
+                      <a:solidFill>
+                        <a:schemeClr val="tx1"/>
+                      </a:solidFill>
+                      <a:prstDash val="solid"/>
+                      <a:round/>
+                      <a:headEnd type="none" w="med" len="med"/>
+                      <a:tailEnd type="none" w="med" len="med"/>
+                    </a:lnT>
+                    <a:lnB w="12700" cap="flat" cmpd="sng" algn="ctr">
+                      <a:solidFill>
+                        <a:schemeClr val="tx1"/>
+                      </a:solidFill>
+                      <a:prstDash val="solid"/>
+                      <a:round/>
+                      <a:headEnd type="none" w="med" len="med"/>
+                      <a:tailEnd type="none" w="med" len="med"/>
+                    </a:lnB>
+                    <a:solidFill>
+                      <a:schemeClr val="bg2">
+                        <a:lumMod val="75000"/>
+                      </a:schemeClr>
+                    </a:solidFill>
+                  </a:tcPr>
+                </a:tc>
+                <a:tc>
+                  <a:txBody>
+                    <a:bodyPr/>
+                    <a:lstStyle/>
+                    <a:p>
+                      <a:pPr algn="ctr" latinLnBrk="0"/>
+                      <a:r>
+                        <a:rPr lang="ko-KR" altLang="en-US" sz="1600" dirty="0">
+                          <a:solidFill>
+                            <a:schemeClr val="tx1"/>
+                          </a:solidFill>
+                        </a:rPr>
+                        <a:t>설명</a:t>
+                      </a:r>
+                    </a:p>
+                  </a:txBody>
+                  <a:tcPr anchor="ctr">
+                    <a:lnL w="12700" cap="flat" cmpd="sng" algn="ctr">
+                      <a:solidFill>
+                        <a:schemeClr val="tx1"/>
+                      </a:solidFill>
+                      <a:prstDash val="solid"/>
+                      <a:round/>
+                      <a:headEnd type="none" w="med" len="med"/>
+                      <a:tailEnd type="none" w="med" len="med"/>
+                    </a:lnL>
+                    <a:lnR w="12700" cap="flat" cmpd="sng" algn="ctr">
+                      <a:solidFill>
+                        <a:schemeClr val="tx1"/>
+                      </a:solidFill>
+                      <a:prstDash val="solid"/>
+                      <a:round/>
+                      <a:headEnd type="none" w="med" len="med"/>
+                      <a:tailEnd type="none" w="med" len="med"/>
+                    </a:lnR>
+                    <a:lnT w="12700" cap="flat" cmpd="sng" algn="ctr">
+                      <a:solidFill>
+                        <a:schemeClr val="tx1"/>
+                      </a:solidFill>
+                      <a:prstDash val="solid"/>
+                      <a:round/>
+                      <a:headEnd type="none" w="med" len="med"/>
+                      <a:tailEnd type="none" w="med" len="med"/>
+                    </a:lnT>
+                    <a:lnB w="12700" cap="flat" cmpd="sng" algn="ctr">
+                      <a:solidFill>
+                        <a:schemeClr val="tx1"/>
+                      </a:solidFill>
+                      <a:prstDash val="solid"/>
+                      <a:round/>
+                      <a:headEnd type="none" w="med" len="med"/>
+                      <a:tailEnd type="none" w="med" len="med"/>
+                    </a:lnB>
+                    <a:solidFill>
+                      <a:schemeClr val="bg2">
+                        <a:lumMod val="75000"/>
+                      </a:schemeClr>
+                    </a:solidFill>
+                  </a:tcPr>
+                </a:tc>
+                <a:extLst>
+                  <a:ext uri="{0D108BD9-81ED-4DB2-BD59-A6C34878D82A}">
+                    <a16:rowId xmlns:a16="http://schemas.microsoft.com/office/drawing/2014/main" val="1862464088"/>
+                  </a:ext>
+                </a:extLst>
+              </a:tr>
+              <a:tr h="370840">
+                <a:tc>
+                  <a:txBody>
+                    <a:bodyPr/>
+                    <a:lstStyle/>
+                    <a:p>
+                      <a:pPr algn="ctr" latinLnBrk="0"/>
+                      <a:r>
+                        <a:rPr lang="en-US" altLang="ko-KR" sz="1600" b="1" dirty="0">
+                          <a:solidFill>
+                            <a:schemeClr val="tx1"/>
+                          </a:solidFill>
+                        </a:rPr>
+                        <a:t>HP</a:t>
+                      </a:r>
+                    </a:p>
+                  </a:txBody>
+                  <a:tcPr anchor="ctr">
+                    <a:lnL w="12700" cap="flat" cmpd="sng" algn="ctr">
+                      <a:solidFill>
+                        <a:schemeClr val="tx1"/>
+                      </a:solidFill>
+                      <a:prstDash val="solid"/>
+                      <a:round/>
+                      <a:headEnd type="none" w="med" len="med"/>
+                      <a:tailEnd type="none" w="med" len="med"/>
+                    </a:lnL>
+                    <a:lnR w="12700" cap="flat" cmpd="sng" algn="ctr">
+                      <a:solidFill>
+                        <a:schemeClr val="tx1"/>
+                      </a:solidFill>
+                      <a:prstDash val="solid"/>
+                      <a:round/>
+                      <a:headEnd type="none" w="med" len="med"/>
+                      <a:tailEnd type="none" w="med" len="med"/>
+                    </a:lnR>
+                    <a:lnT w="12700" cap="flat" cmpd="sng" algn="ctr">
+                      <a:solidFill>
+                        <a:schemeClr val="tx1"/>
+                      </a:solidFill>
+                      <a:prstDash val="solid"/>
+                      <a:round/>
+                      <a:headEnd type="none" w="med" len="med"/>
+                      <a:tailEnd type="none" w="med" len="med"/>
+                    </a:lnT>
+                    <a:lnB w="12700" cap="flat" cmpd="sng" algn="ctr">
+                      <a:solidFill>
+                        <a:schemeClr val="tx1"/>
+                      </a:solidFill>
+                      <a:prstDash val="solid"/>
+                      <a:round/>
+                      <a:headEnd type="none" w="med" len="med"/>
+                      <a:tailEnd type="none" w="med" len="med"/>
+                    </a:lnB>
+                    <a:solidFill>
+                      <a:schemeClr val="bg2">
+                        <a:lumMod val="90000"/>
+                      </a:schemeClr>
+                    </a:solidFill>
+                  </a:tcPr>
+                </a:tc>
+                <a:tc>
+                  <a:txBody>
+                    <a:bodyPr/>
+                    <a:lstStyle/>
+                    <a:p>
+                      <a:pPr algn="ctr" latinLnBrk="0"/>
+                      <a:endParaRPr lang="ko-KR" altLang="en-US" sz="1600" dirty="0">
+                        <a:solidFill>
+                          <a:schemeClr val="tx1"/>
+                        </a:solidFill>
+                      </a:endParaRPr>
+                    </a:p>
+                  </a:txBody>
+                  <a:tcPr anchor="ctr">
+                    <a:lnL w="12700" cap="flat" cmpd="sng" algn="ctr">
+                      <a:solidFill>
+                        <a:schemeClr val="tx1"/>
+                      </a:solidFill>
+                      <a:prstDash val="solid"/>
+                      <a:round/>
+                      <a:headEnd type="none" w="med" len="med"/>
+                      <a:tailEnd type="none" w="med" len="med"/>
+                    </a:lnL>
+                    <a:lnR w="12700" cap="flat" cmpd="sng" algn="ctr">
+                      <a:solidFill>
+                        <a:schemeClr val="tx1"/>
+                      </a:solidFill>
+                      <a:prstDash val="solid"/>
+                      <a:round/>
+                      <a:headEnd type="none" w="med" len="med"/>
+                      <a:tailEnd type="none" w="med" len="med"/>
+                    </a:lnR>
+                    <a:lnT w="12700" cap="flat" cmpd="sng" algn="ctr">
+                      <a:solidFill>
+                        <a:schemeClr val="tx1"/>
+                      </a:solidFill>
+                      <a:prstDash val="solid"/>
+                      <a:round/>
+                      <a:headEnd type="none" w="med" len="med"/>
+                      <a:tailEnd type="none" w="med" len="med"/>
+                    </a:lnT>
+                    <a:lnB w="12700" cap="flat" cmpd="sng" algn="ctr">
+                      <a:solidFill>
+                        <a:schemeClr val="tx1"/>
+                      </a:solidFill>
+                      <a:prstDash val="solid"/>
+                      <a:round/>
+                      <a:headEnd type="none" w="med" len="med"/>
+                      <a:tailEnd type="none" w="med" len="med"/>
+                    </a:lnB>
+                    <a:solidFill>
+                      <a:schemeClr val="bg1"/>
+                    </a:solidFill>
+                  </a:tcPr>
+                </a:tc>
+                <a:tc>
+                  <a:txBody>
+                    <a:bodyPr/>
+                    <a:lstStyle/>
+                    <a:p>
+                      <a:pPr algn="ctr" latinLnBrk="0"/>
+                      <a:r>
+                        <a:rPr lang="en-US" altLang="ko-KR" sz="1600" dirty="0">
+                          <a:solidFill>
+                            <a:schemeClr val="tx1"/>
+                          </a:solidFill>
+                        </a:rPr>
+                        <a:t>100</a:t>
+                      </a:r>
+                      <a:endParaRPr lang="ko-KR" altLang="en-US" sz="1600" dirty="0">
+                        <a:solidFill>
+                          <a:schemeClr val="tx1"/>
+                        </a:solidFill>
+                      </a:endParaRPr>
+                    </a:p>
+                  </a:txBody>
+                  <a:tcPr anchor="ctr">
+                    <a:lnL w="12700" cap="flat" cmpd="sng" algn="ctr">
+                      <a:solidFill>
+                        <a:schemeClr val="tx1"/>
+                      </a:solidFill>
+                      <a:prstDash val="solid"/>
+                      <a:round/>
+                      <a:headEnd type="none" w="med" len="med"/>
+                      <a:tailEnd type="none" w="med" len="med"/>
+                    </a:lnL>
+                    <a:lnR w="12700" cap="flat" cmpd="sng" algn="ctr">
+                      <a:solidFill>
+                        <a:schemeClr val="tx1"/>
+                      </a:solidFill>
+                      <a:prstDash val="solid"/>
+                      <a:round/>
+                      <a:headEnd type="none" w="med" len="med"/>
+                      <a:tailEnd type="none" w="med" len="med"/>
+                    </a:lnR>
+                    <a:lnT w="12700" cap="flat" cmpd="sng" algn="ctr">
+                      <a:solidFill>
+                        <a:schemeClr val="tx1"/>
+                      </a:solidFill>
+                      <a:prstDash val="solid"/>
+                      <a:round/>
+                      <a:headEnd type="none" w="med" len="med"/>
+                      <a:tailEnd type="none" w="med" len="med"/>
+                    </a:lnT>
+                    <a:lnB w="12700" cap="flat" cmpd="sng" algn="ctr">
+                      <a:solidFill>
+                        <a:schemeClr val="tx1"/>
+                      </a:solidFill>
+                      <a:prstDash val="solid"/>
+                      <a:round/>
+                      <a:headEnd type="none" w="med" len="med"/>
+                      <a:tailEnd type="none" w="med" len="med"/>
+                    </a:lnB>
+                    <a:solidFill>
+                      <a:schemeClr val="bg1"/>
+                    </a:solidFill>
+                  </a:tcPr>
+                </a:tc>
+                <a:tc>
+                  <a:txBody>
+                    <a:bodyPr/>
+                    <a:lstStyle/>
+                    <a:p>
+                      <a:pPr marL="285750" indent="-285750" algn="l" latinLnBrk="0">
+                        <a:buFontTx/>
+                        <a:buChar char="-"/>
+                      </a:pPr>
+                      <a:r>
+                        <a:rPr lang="en-US" altLang="ko-KR" sz="1600" dirty="0">
+                          <a:solidFill>
+                            <a:schemeClr val="tx1"/>
+                          </a:solidFill>
+                        </a:rPr>
+                        <a:t>HP</a:t>
+                      </a:r>
+                      <a:r>
+                        <a:rPr lang="ko-KR" altLang="en-US" sz="1600" dirty="0">
+                          <a:solidFill>
+                            <a:schemeClr val="tx1"/>
+                          </a:solidFill>
+                        </a:rPr>
+                        <a:t>≦</a:t>
+                      </a:r>
+                      <a:r>
+                        <a:rPr lang="en-US" altLang="ko-KR" sz="1600" dirty="0">
+                          <a:solidFill>
+                            <a:schemeClr val="tx1"/>
+                          </a:solidFill>
+                        </a:rPr>
+                        <a:t>0 : </a:t>
+                      </a:r>
+                      <a:r>
+                        <a:rPr lang="ko-KR" altLang="en-US" sz="1600" dirty="0">
+                          <a:solidFill>
+                            <a:schemeClr val="tx1"/>
+                          </a:solidFill>
+                        </a:rPr>
+                        <a:t>플레이어 사망</a:t>
+                      </a:r>
+                      <a:endParaRPr lang="en-US" altLang="ko-KR" sz="1600" dirty="0">
+                        <a:solidFill>
+                          <a:schemeClr val="tx1"/>
+                        </a:solidFill>
+                      </a:endParaRPr>
+                    </a:p>
+                    <a:p>
+                      <a:pPr marL="285750" indent="-285750" algn="l" latinLnBrk="0">
+                        <a:buFontTx/>
+                        <a:buChar char="-"/>
+                      </a:pPr>
+                      <a:r>
+                        <a:rPr lang="ko-KR" altLang="en-US" sz="1600" dirty="0">
+                          <a:solidFill>
+                            <a:schemeClr val="tx1"/>
+                          </a:solidFill>
+                        </a:rPr>
+                        <a:t>최대 </a:t>
+                      </a:r>
+                      <a:r>
+                        <a:rPr lang="en-US" altLang="ko-KR" sz="1600" dirty="0">
+                          <a:solidFill>
+                            <a:schemeClr val="tx1"/>
+                          </a:solidFill>
+                        </a:rPr>
+                        <a:t>100</a:t>
+                      </a:r>
+                      <a:endParaRPr lang="ko-KR" altLang="en-US" sz="1600" dirty="0">
+                        <a:solidFill>
+                          <a:schemeClr val="tx1"/>
+                        </a:solidFill>
+                      </a:endParaRPr>
+                    </a:p>
+                  </a:txBody>
+                  <a:tcPr anchor="ctr">
+                    <a:lnL w="12700" cap="flat" cmpd="sng" algn="ctr">
+                      <a:solidFill>
+                        <a:schemeClr val="tx1"/>
+                      </a:solidFill>
+                      <a:prstDash val="solid"/>
+                      <a:round/>
+                      <a:headEnd type="none" w="med" len="med"/>
+                      <a:tailEnd type="none" w="med" len="med"/>
+                    </a:lnL>
+                    <a:lnR w="12700" cap="flat" cmpd="sng" algn="ctr">
+                      <a:solidFill>
+                        <a:schemeClr val="tx1"/>
+                      </a:solidFill>
+                      <a:prstDash val="solid"/>
+                      <a:round/>
+                      <a:headEnd type="none" w="med" len="med"/>
+                      <a:tailEnd type="none" w="med" len="med"/>
+                    </a:lnR>
+                    <a:lnT w="12700" cap="flat" cmpd="sng" algn="ctr">
+                      <a:solidFill>
+                        <a:schemeClr val="tx1"/>
+                      </a:solidFill>
+                      <a:prstDash val="solid"/>
+                      <a:round/>
+                      <a:headEnd type="none" w="med" len="med"/>
+                      <a:tailEnd type="none" w="med" len="med"/>
+                    </a:lnT>
+                    <a:lnB w="12700" cap="flat" cmpd="sng" algn="ctr">
+                      <a:solidFill>
+                        <a:schemeClr val="tx1"/>
+                      </a:solidFill>
+                      <a:prstDash val="solid"/>
+                      <a:round/>
+                      <a:headEnd type="none" w="med" len="med"/>
+                      <a:tailEnd type="none" w="med" len="med"/>
+                    </a:lnB>
+                    <a:solidFill>
+                      <a:schemeClr val="bg1"/>
+                    </a:solidFill>
+                  </a:tcPr>
+                </a:tc>
+                <a:extLst>
+                  <a:ext uri="{0D108BD9-81ED-4DB2-BD59-A6C34878D82A}">
+                    <a16:rowId xmlns:a16="http://schemas.microsoft.com/office/drawing/2014/main" val="992783964"/>
+                  </a:ext>
+                </a:extLst>
+              </a:tr>
+              <a:tr h="370840">
+                <a:tc>
+                  <a:txBody>
+                    <a:bodyPr/>
+                    <a:lstStyle/>
+                    <a:p>
+                      <a:pPr algn="ctr" latinLnBrk="0"/>
+                      <a:r>
+                        <a:rPr lang="ko-KR" altLang="en-US" sz="1600" b="1" dirty="0" err="1">
+                          <a:solidFill>
+                            <a:schemeClr val="tx1"/>
+                          </a:solidFill>
+                        </a:rPr>
+                        <a:t>스테미나</a:t>
+                      </a:r>
+                      <a:endParaRPr lang="en-US" altLang="ko-KR" sz="1600" b="1" dirty="0">
+                        <a:solidFill>
+                          <a:schemeClr val="tx1"/>
+                        </a:solidFill>
+                      </a:endParaRPr>
+                    </a:p>
+                  </a:txBody>
+                  <a:tcPr anchor="ctr">
+                    <a:lnL w="12700" cap="flat" cmpd="sng" algn="ctr">
+                      <a:solidFill>
+                        <a:schemeClr val="tx1"/>
+                      </a:solidFill>
+                      <a:prstDash val="solid"/>
+                      <a:round/>
+                      <a:headEnd type="none" w="med" len="med"/>
+                      <a:tailEnd type="none" w="med" len="med"/>
+                    </a:lnL>
+                    <a:lnR w="12700" cap="flat" cmpd="sng" algn="ctr">
+                      <a:solidFill>
+                        <a:schemeClr val="tx1"/>
+                      </a:solidFill>
+                      <a:prstDash val="solid"/>
+                      <a:round/>
+                      <a:headEnd type="none" w="med" len="med"/>
+                      <a:tailEnd type="none" w="med" len="med"/>
+                    </a:lnR>
+                    <a:lnT w="12700" cap="flat" cmpd="sng" algn="ctr">
+                      <a:solidFill>
+                        <a:schemeClr val="tx1"/>
+                      </a:solidFill>
+                      <a:prstDash val="solid"/>
+                      <a:round/>
+                      <a:headEnd type="none" w="med" len="med"/>
+                      <a:tailEnd type="none" w="med" len="med"/>
+                    </a:lnT>
+                    <a:lnB w="12700" cap="flat" cmpd="sng" algn="ctr">
+                      <a:solidFill>
+                        <a:schemeClr val="tx1"/>
+                      </a:solidFill>
+                      <a:prstDash val="solid"/>
+                      <a:round/>
+                      <a:headEnd type="none" w="med" len="med"/>
+                      <a:tailEnd type="none" w="med" len="med"/>
+                    </a:lnB>
+                    <a:solidFill>
+                      <a:schemeClr val="bg2">
+                        <a:lumMod val="90000"/>
+                      </a:schemeClr>
+                    </a:solidFill>
+                  </a:tcPr>
+                </a:tc>
+                <a:tc>
+                  <a:txBody>
+                    <a:bodyPr/>
+                    <a:lstStyle/>
+                    <a:p>
+                      <a:pPr algn="ctr" latinLnBrk="0"/>
+                      <a:endParaRPr lang="ko-KR" altLang="en-US" sz="1600" dirty="0">
+                        <a:solidFill>
+                          <a:schemeClr val="tx1"/>
+                        </a:solidFill>
+                      </a:endParaRPr>
+                    </a:p>
+                  </a:txBody>
+                  <a:tcPr anchor="ctr">
+                    <a:lnL w="12700" cap="flat" cmpd="sng" algn="ctr">
+                      <a:solidFill>
+                        <a:schemeClr val="tx1"/>
+                      </a:solidFill>
+                      <a:prstDash val="solid"/>
+                      <a:round/>
+                      <a:headEnd type="none" w="med" len="med"/>
+                      <a:tailEnd type="none" w="med" len="med"/>
+                    </a:lnL>
+                    <a:lnR w="12700" cap="flat" cmpd="sng" algn="ctr">
+                      <a:solidFill>
+                        <a:schemeClr val="tx1"/>
+                      </a:solidFill>
+                      <a:prstDash val="solid"/>
+                      <a:round/>
+                      <a:headEnd type="none" w="med" len="med"/>
+                      <a:tailEnd type="none" w="med" len="med"/>
+                    </a:lnR>
+                    <a:lnT w="12700" cap="flat" cmpd="sng" algn="ctr">
+                      <a:solidFill>
+                        <a:schemeClr val="tx1"/>
+                      </a:solidFill>
+                      <a:prstDash val="solid"/>
+                      <a:round/>
+                      <a:headEnd type="none" w="med" len="med"/>
+                      <a:tailEnd type="none" w="med" len="med"/>
+                    </a:lnT>
+                    <a:lnB w="12700" cap="flat" cmpd="sng" algn="ctr">
+                      <a:solidFill>
+                        <a:schemeClr val="tx1"/>
+                      </a:solidFill>
+                      <a:prstDash val="solid"/>
+                      <a:round/>
+                      <a:headEnd type="none" w="med" len="med"/>
+                      <a:tailEnd type="none" w="med" len="med"/>
+                    </a:lnB>
+                    <a:solidFill>
+                      <a:schemeClr val="bg1"/>
+                    </a:solidFill>
+                  </a:tcPr>
+                </a:tc>
+                <a:tc>
+                  <a:txBody>
+                    <a:bodyPr/>
+                    <a:lstStyle/>
+                    <a:p>
+                      <a:pPr algn="ctr" latinLnBrk="0"/>
+                      <a:endParaRPr lang="ko-KR" altLang="en-US" sz="1600" dirty="0">
+                        <a:solidFill>
+                          <a:schemeClr val="tx1"/>
+                        </a:solidFill>
+                      </a:endParaRPr>
+                    </a:p>
+                  </a:txBody>
+                  <a:tcPr anchor="ctr">
+                    <a:lnL w="12700" cap="flat" cmpd="sng" algn="ctr">
+                      <a:solidFill>
+                        <a:schemeClr val="tx1"/>
+                      </a:solidFill>
+                      <a:prstDash val="solid"/>
+                      <a:round/>
+                      <a:headEnd type="none" w="med" len="med"/>
+                      <a:tailEnd type="none" w="med" len="med"/>
+                    </a:lnL>
+                    <a:lnR w="12700" cap="flat" cmpd="sng" algn="ctr">
+                      <a:solidFill>
+                        <a:schemeClr val="tx1"/>
+                      </a:solidFill>
+                      <a:prstDash val="solid"/>
+                      <a:round/>
+                      <a:headEnd type="none" w="med" len="med"/>
+                      <a:tailEnd type="none" w="med" len="med"/>
+                    </a:lnR>
+                    <a:lnT w="12700" cap="flat" cmpd="sng" algn="ctr">
+                      <a:solidFill>
+                        <a:schemeClr val="tx1"/>
+                      </a:solidFill>
+                      <a:prstDash val="solid"/>
+                      <a:round/>
+                      <a:headEnd type="none" w="med" len="med"/>
+                      <a:tailEnd type="none" w="med" len="med"/>
+                    </a:lnT>
+                    <a:lnB w="12700" cap="flat" cmpd="sng" algn="ctr">
+                      <a:solidFill>
+                        <a:schemeClr val="tx1"/>
+                      </a:solidFill>
+                      <a:prstDash val="solid"/>
+                      <a:round/>
+                      <a:headEnd type="none" w="med" len="med"/>
+                      <a:tailEnd type="none" w="med" len="med"/>
+                    </a:lnB>
+                    <a:solidFill>
+                      <a:schemeClr val="bg1"/>
+                    </a:solidFill>
+                  </a:tcPr>
+                </a:tc>
+                <a:tc>
+                  <a:txBody>
+                    <a:bodyPr/>
+                    <a:lstStyle/>
+                    <a:p>
+                      <a:pPr marL="285750" indent="-285750" algn="l" latinLnBrk="0">
+                        <a:buFontTx/>
+                        <a:buChar char="-"/>
+                      </a:pPr>
+                      <a:r>
+                        <a:rPr lang="ko-KR" altLang="en-US" sz="1600" dirty="0">
+                          <a:solidFill>
+                            <a:schemeClr val="tx1"/>
+                          </a:solidFill>
+                        </a:rPr>
+                        <a:t>달릴 때</a:t>
+                      </a:r>
+                      <a:r>
+                        <a:rPr lang="en-US" altLang="ko-KR" sz="1600" dirty="0">
+                          <a:solidFill>
+                            <a:schemeClr val="tx1"/>
+                          </a:solidFill>
+                        </a:rPr>
+                        <a:t>, </a:t>
+                      </a:r>
+                      <a:r>
+                        <a:rPr lang="ko-KR" altLang="en-US" sz="1600" dirty="0">
+                          <a:solidFill>
+                            <a:schemeClr val="tx1"/>
+                          </a:solidFill>
+                        </a:rPr>
+                        <a:t>점프할 때 소모</a:t>
+                      </a:r>
+                      <a:endParaRPr lang="en-US" altLang="ko-KR" sz="1600" dirty="0">
+                        <a:solidFill>
+                          <a:schemeClr val="tx1"/>
+                        </a:solidFill>
+                      </a:endParaRPr>
+                    </a:p>
+                    <a:p>
+                      <a:pPr marL="285750" indent="-285750" algn="l" latinLnBrk="0">
+                        <a:buFontTx/>
+                        <a:buChar char="-"/>
+                      </a:pPr>
+                      <a:r>
+                        <a:rPr lang="ko-KR" altLang="en-US" sz="1600" dirty="0">
+                          <a:solidFill>
+                            <a:schemeClr val="tx1"/>
+                          </a:solidFill>
+                        </a:rPr>
+                        <a:t>무게에 비례해 소모량이 증가함</a:t>
+                      </a:r>
+                      <a:r>
+                        <a:rPr lang="en-US" altLang="ko-KR" sz="1600" dirty="0">
+                          <a:solidFill>
+                            <a:schemeClr val="tx1"/>
+                          </a:solidFill>
+                        </a:rPr>
+                        <a:t>(</a:t>
+                      </a:r>
+                      <a:r>
+                        <a:rPr lang="ko-KR" altLang="en-US" sz="1600" dirty="0">
+                          <a:solidFill>
+                            <a:schemeClr val="tx1"/>
+                          </a:solidFill>
+                        </a:rPr>
+                        <a:t>나중에 추가 설명</a:t>
+                      </a:r>
+                      <a:r>
+                        <a:rPr lang="en-US" altLang="ko-KR" sz="1600" dirty="0">
+                          <a:solidFill>
+                            <a:schemeClr val="tx1"/>
+                          </a:solidFill>
+                        </a:rPr>
+                        <a:t>)</a:t>
+                      </a:r>
+                      <a:endParaRPr lang="ko-KR" altLang="en-US" sz="1600" dirty="0">
+                        <a:solidFill>
+                          <a:schemeClr val="tx1"/>
+                        </a:solidFill>
+                      </a:endParaRPr>
+                    </a:p>
+                  </a:txBody>
+                  <a:tcPr anchor="ctr">
+                    <a:lnL w="12700" cap="flat" cmpd="sng" algn="ctr">
+                      <a:solidFill>
+                        <a:schemeClr val="tx1"/>
+                      </a:solidFill>
+                      <a:prstDash val="solid"/>
+                      <a:round/>
+                      <a:headEnd type="none" w="med" len="med"/>
+                      <a:tailEnd type="none" w="med" len="med"/>
+                    </a:lnL>
+                    <a:lnR w="12700" cap="flat" cmpd="sng" algn="ctr">
+                      <a:solidFill>
+                        <a:schemeClr val="tx1"/>
+                      </a:solidFill>
+                      <a:prstDash val="solid"/>
+                      <a:round/>
+                      <a:headEnd type="none" w="med" len="med"/>
+                      <a:tailEnd type="none" w="med" len="med"/>
+                    </a:lnR>
+                    <a:lnT w="12700" cap="flat" cmpd="sng" algn="ctr">
+                      <a:solidFill>
+                        <a:schemeClr val="tx1"/>
+                      </a:solidFill>
+                      <a:prstDash val="solid"/>
+                      <a:round/>
+                      <a:headEnd type="none" w="med" len="med"/>
+                      <a:tailEnd type="none" w="med" len="med"/>
+                    </a:lnT>
+                    <a:lnB w="12700" cap="flat" cmpd="sng" algn="ctr">
+                      <a:solidFill>
+                        <a:schemeClr val="tx1"/>
+                      </a:solidFill>
+                      <a:prstDash val="solid"/>
+                      <a:round/>
+                      <a:headEnd type="none" w="med" len="med"/>
+                      <a:tailEnd type="none" w="med" len="med"/>
+                    </a:lnB>
+                    <a:solidFill>
+                      <a:schemeClr val="bg1"/>
+                    </a:solidFill>
+                  </a:tcPr>
+                </a:tc>
+                <a:extLst>
+                  <a:ext uri="{0D108BD9-81ED-4DB2-BD59-A6C34878D82A}">
+                    <a16:rowId xmlns:a16="http://schemas.microsoft.com/office/drawing/2014/main" val="3555715627"/>
+                  </a:ext>
+                </a:extLst>
+              </a:tr>
+              <a:tr h="370840">
+                <a:tc>
+                  <a:txBody>
+                    <a:bodyPr/>
+                    <a:lstStyle/>
+                    <a:p>
+                      <a:pPr algn="ctr" latinLnBrk="0"/>
+                      <a:r>
+                        <a:rPr lang="ko-KR" altLang="en-US" sz="1600" b="1" dirty="0">
+                          <a:solidFill>
+                            <a:schemeClr val="tx1"/>
+                          </a:solidFill>
+                        </a:rPr>
+                        <a:t>이동 속도</a:t>
+                      </a:r>
+                      <a:endParaRPr lang="en-US" altLang="ko-KR" sz="1600" b="1" dirty="0">
+                        <a:solidFill>
+                          <a:schemeClr val="tx1"/>
+                        </a:solidFill>
+                      </a:endParaRPr>
+                    </a:p>
+                    <a:p>
+                      <a:pPr algn="ctr" latinLnBrk="0"/>
+                      <a:r>
+                        <a:rPr lang="en-US" altLang="ko-KR" sz="1600" b="1" dirty="0">
+                          <a:solidFill>
+                            <a:schemeClr val="tx1"/>
+                          </a:solidFill>
+                        </a:rPr>
+                        <a:t>(m/s)</a:t>
+                      </a:r>
+                      <a:endParaRPr lang="ko-KR" altLang="en-US" sz="1600" b="1" dirty="0">
+                        <a:solidFill>
+                          <a:schemeClr val="tx1"/>
+                        </a:solidFill>
+                      </a:endParaRPr>
+                    </a:p>
+                  </a:txBody>
+                  <a:tcPr anchor="ctr">
+                    <a:lnL w="12700" cap="flat" cmpd="sng" algn="ctr">
+                      <a:solidFill>
+                        <a:schemeClr val="tx1"/>
+                      </a:solidFill>
+                      <a:prstDash val="solid"/>
+                      <a:round/>
+                      <a:headEnd type="none" w="med" len="med"/>
+                      <a:tailEnd type="none" w="med" len="med"/>
+                    </a:lnL>
+                    <a:lnR w="12700" cap="flat" cmpd="sng" algn="ctr">
+                      <a:solidFill>
+                        <a:schemeClr val="tx1"/>
+                      </a:solidFill>
+                      <a:prstDash val="solid"/>
+                      <a:round/>
+                      <a:headEnd type="none" w="med" len="med"/>
+                      <a:tailEnd type="none" w="med" len="med"/>
+                    </a:lnR>
+                    <a:lnT w="12700" cap="flat" cmpd="sng" algn="ctr">
+                      <a:solidFill>
+                        <a:schemeClr val="tx1"/>
+                      </a:solidFill>
+                      <a:prstDash val="solid"/>
+                      <a:round/>
+                      <a:headEnd type="none" w="med" len="med"/>
+                      <a:tailEnd type="none" w="med" len="med"/>
+                    </a:lnT>
+                    <a:lnB w="12700" cap="flat" cmpd="sng" algn="ctr">
+                      <a:solidFill>
+                        <a:schemeClr val="tx1"/>
+                      </a:solidFill>
+                      <a:prstDash val="solid"/>
+                      <a:round/>
+                      <a:headEnd type="none" w="med" len="med"/>
+                      <a:tailEnd type="none" w="med" len="med"/>
+                    </a:lnB>
+                    <a:solidFill>
+                      <a:schemeClr val="bg2">
+                        <a:lumMod val="90000"/>
+                      </a:schemeClr>
+                    </a:solidFill>
+                  </a:tcPr>
+                </a:tc>
+                <a:tc>
+                  <a:txBody>
+                    <a:bodyPr/>
+                    <a:lstStyle/>
+                    <a:p>
+                      <a:pPr algn="ctr" latinLnBrk="0"/>
+                      <a:endParaRPr lang="ko-KR" altLang="en-US" sz="1600" dirty="0">
+                        <a:solidFill>
+                          <a:schemeClr val="tx1"/>
+                        </a:solidFill>
+                      </a:endParaRPr>
+                    </a:p>
+                  </a:txBody>
+                  <a:tcPr anchor="ctr">
+                    <a:lnL w="12700" cap="flat" cmpd="sng" algn="ctr">
+                      <a:solidFill>
+                        <a:schemeClr val="tx1"/>
+                      </a:solidFill>
+                      <a:prstDash val="solid"/>
+                      <a:round/>
+                      <a:headEnd type="none" w="med" len="med"/>
+                      <a:tailEnd type="none" w="med" len="med"/>
+                    </a:lnL>
+                    <a:lnR w="12700" cap="flat" cmpd="sng" algn="ctr">
+                      <a:solidFill>
+                        <a:schemeClr val="tx1"/>
+                      </a:solidFill>
+                      <a:prstDash val="solid"/>
+                      <a:round/>
+                      <a:headEnd type="none" w="med" len="med"/>
+                      <a:tailEnd type="none" w="med" len="med"/>
+                    </a:lnR>
+                    <a:lnT w="12700" cap="flat" cmpd="sng" algn="ctr">
+                      <a:solidFill>
+                        <a:schemeClr val="tx1"/>
+                      </a:solidFill>
+                      <a:prstDash val="solid"/>
+                      <a:round/>
+                      <a:headEnd type="none" w="med" len="med"/>
+                      <a:tailEnd type="none" w="med" len="med"/>
+                    </a:lnT>
+                    <a:lnB w="12700" cap="flat" cmpd="sng" algn="ctr">
+                      <a:solidFill>
+                        <a:schemeClr val="tx1"/>
+                      </a:solidFill>
+                      <a:prstDash val="solid"/>
+                      <a:round/>
+                      <a:headEnd type="none" w="med" len="med"/>
+                      <a:tailEnd type="none" w="med" len="med"/>
+                    </a:lnB>
+                    <a:solidFill>
+                      <a:schemeClr val="bg1"/>
+                    </a:solidFill>
+                  </a:tcPr>
+                </a:tc>
+                <a:tc>
+                  <a:txBody>
+                    <a:bodyPr/>
+                    <a:lstStyle/>
+                    <a:p>
+                      <a:pPr algn="ctr" latinLnBrk="0"/>
+                      <a:r>
+                        <a:rPr lang="en-US" altLang="ko-KR" sz="1600" dirty="0">
+                          <a:solidFill>
+                            <a:schemeClr val="tx1"/>
+                          </a:solidFill>
+                        </a:rPr>
+                        <a:t>5</a:t>
+                      </a:r>
+                      <a:endParaRPr lang="ko-KR" altLang="en-US" sz="1600" dirty="0">
+                        <a:solidFill>
+                          <a:schemeClr val="tx1"/>
+                        </a:solidFill>
+                      </a:endParaRPr>
+                    </a:p>
+                  </a:txBody>
+                  <a:tcPr anchor="ctr">
+                    <a:lnL w="12700" cap="flat" cmpd="sng" algn="ctr">
+                      <a:solidFill>
+                        <a:schemeClr val="tx1"/>
+                      </a:solidFill>
+                      <a:prstDash val="solid"/>
+                      <a:round/>
+                      <a:headEnd type="none" w="med" len="med"/>
+                      <a:tailEnd type="none" w="med" len="med"/>
+                    </a:lnL>
+                    <a:lnR w="12700" cap="flat" cmpd="sng" algn="ctr">
+                      <a:solidFill>
+                        <a:schemeClr val="tx1"/>
+                      </a:solidFill>
+                      <a:prstDash val="solid"/>
+                      <a:round/>
+                      <a:headEnd type="none" w="med" len="med"/>
+                      <a:tailEnd type="none" w="med" len="med"/>
+                    </a:lnR>
+                    <a:lnT w="12700" cap="flat" cmpd="sng" algn="ctr">
+                      <a:solidFill>
+                        <a:schemeClr val="tx1"/>
+                      </a:solidFill>
+                      <a:prstDash val="solid"/>
+                      <a:round/>
+                      <a:headEnd type="none" w="med" len="med"/>
+                      <a:tailEnd type="none" w="med" len="med"/>
+                    </a:lnT>
+                    <a:lnB w="12700" cap="flat" cmpd="sng" algn="ctr">
+                      <a:solidFill>
+                        <a:schemeClr val="tx1"/>
+                      </a:solidFill>
+                      <a:prstDash val="solid"/>
+                      <a:round/>
+                      <a:headEnd type="none" w="med" len="med"/>
+                      <a:tailEnd type="none" w="med" len="med"/>
+                    </a:lnB>
+                    <a:solidFill>
+                      <a:schemeClr val="bg1"/>
+                    </a:solidFill>
+                  </a:tcPr>
+                </a:tc>
+                <a:tc>
+                  <a:txBody>
+                    <a:bodyPr/>
+                    <a:lstStyle/>
+                    <a:p>
+                      <a:pPr algn="l" latinLnBrk="0"/>
+                      <a:r>
+                        <a:rPr lang="ko-KR" altLang="en-US" sz="1600" dirty="0">
+                          <a:solidFill>
+                            <a:schemeClr val="tx1"/>
+                          </a:solidFill>
+                        </a:rPr>
+                        <a:t>그냥 이동할 때 속도</a:t>
+                      </a:r>
+                    </a:p>
+                  </a:txBody>
+                  <a:tcPr anchor="ctr">
+                    <a:lnL w="12700" cap="flat" cmpd="sng" algn="ctr">
+                      <a:solidFill>
+                        <a:schemeClr val="tx1"/>
+                      </a:solidFill>
+                      <a:prstDash val="solid"/>
+                      <a:round/>
+                      <a:headEnd type="none" w="med" len="med"/>
+                      <a:tailEnd type="none" w="med" len="med"/>
+                    </a:lnL>
+                    <a:lnR w="12700" cap="flat" cmpd="sng" algn="ctr">
+                      <a:solidFill>
+                        <a:schemeClr val="tx1"/>
+                      </a:solidFill>
+                      <a:prstDash val="solid"/>
+                      <a:round/>
+                      <a:headEnd type="none" w="med" len="med"/>
+                      <a:tailEnd type="none" w="med" len="med"/>
+                    </a:lnR>
+                    <a:lnT w="12700" cap="flat" cmpd="sng" algn="ctr">
+                      <a:solidFill>
+                        <a:schemeClr val="tx1"/>
+                      </a:solidFill>
+                      <a:prstDash val="solid"/>
+                      <a:round/>
+                      <a:headEnd type="none" w="med" len="med"/>
+                      <a:tailEnd type="none" w="med" len="med"/>
+                    </a:lnT>
+                    <a:lnB w="12700" cap="flat" cmpd="sng" algn="ctr">
+                      <a:solidFill>
+                        <a:schemeClr val="tx1"/>
+                      </a:solidFill>
+                      <a:prstDash val="solid"/>
+                      <a:round/>
+                      <a:headEnd type="none" w="med" len="med"/>
+                      <a:tailEnd type="none" w="med" len="med"/>
+                    </a:lnB>
+                    <a:solidFill>
+                      <a:schemeClr val="bg1"/>
+                    </a:solidFill>
+                  </a:tcPr>
+                </a:tc>
+                <a:extLst>
+                  <a:ext uri="{0D108BD9-81ED-4DB2-BD59-A6C34878D82A}">
+                    <a16:rowId xmlns:a16="http://schemas.microsoft.com/office/drawing/2014/main" val="4165556141"/>
+                  </a:ext>
+                </a:extLst>
+              </a:tr>
+              <a:tr h="370840">
+                <a:tc>
+                  <a:txBody>
+                    <a:bodyPr/>
+                    <a:lstStyle/>
+                    <a:p>
+                      <a:pPr algn="ctr" latinLnBrk="0"/>
+                      <a:r>
+                        <a:rPr lang="ko-KR" altLang="en-US" sz="1600" b="1" dirty="0">
+                          <a:solidFill>
+                            <a:schemeClr val="tx1"/>
+                          </a:solidFill>
+                        </a:rPr>
+                        <a:t>달리기 속도</a:t>
+                      </a:r>
+                      <a:endParaRPr lang="en-US" altLang="ko-KR" sz="1600" b="1" dirty="0">
+                        <a:solidFill>
+                          <a:schemeClr val="tx1"/>
+                        </a:solidFill>
+                      </a:endParaRPr>
+                    </a:p>
+                    <a:p>
+                      <a:pPr algn="ctr" latinLnBrk="0"/>
+                      <a:r>
+                        <a:rPr lang="en-US" altLang="ko-KR" sz="1600" b="1" dirty="0">
+                          <a:solidFill>
+                            <a:schemeClr val="tx1"/>
+                          </a:solidFill>
+                        </a:rPr>
+                        <a:t>(m/s)</a:t>
+                      </a:r>
+                      <a:endParaRPr lang="ko-KR" altLang="en-US" sz="1600" b="1" dirty="0">
+                        <a:solidFill>
+                          <a:schemeClr val="tx1"/>
+                        </a:solidFill>
+                      </a:endParaRPr>
+                    </a:p>
+                  </a:txBody>
+                  <a:tcPr anchor="ctr">
+                    <a:lnL w="12700" cap="flat" cmpd="sng" algn="ctr">
+                      <a:solidFill>
+                        <a:schemeClr val="tx1"/>
+                      </a:solidFill>
+                      <a:prstDash val="solid"/>
+                      <a:round/>
+                      <a:headEnd type="none" w="med" len="med"/>
+                      <a:tailEnd type="none" w="med" len="med"/>
+                    </a:lnL>
+                    <a:lnR w="12700" cap="flat" cmpd="sng" algn="ctr">
+                      <a:solidFill>
+                        <a:schemeClr val="tx1"/>
+                      </a:solidFill>
+                      <a:prstDash val="solid"/>
+                      <a:round/>
+                      <a:headEnd type="none" w="med" len="med"/>
+                      <a:tailEnd type="none" w="med" len="med"/>
+                    </a:lnR>
+                    <a:lnT w="12700" cap="flat" cmpd="sng" algn="ctr">
+                      <a:solidFill>
+                        <a:schemeClr val="tx1"/>
+                      </a:solidFill>
+                      <a:prstDash val="solid"/>
+                      <a:round/>
+                      <a:headEnd type="none" w="med" len="med"/>
+                      <a:tailEnd type="none" w="med" len="med"/>
+                    </a:lnT>
+                    <a:lnB w="12700" cap="flat" cmpd="sng" algn="ctr">
+                      <a:solidFill>
+                        <a:schemeClr val="tx1"/>
+                      </a:solidFill>
+                      <a:prstDash val="solid"/>
+                      <a:round/>
+                      <a:headEnd type="none" w="med" len="med"/>
+                      <a:tailEnd type="none" w="med" len="med"/>
+                    </a:lnB>
+                    <a:solidFill>
+                      <a:schemeClr val="bg2">
+                        <a:lumMod val="90000"/>
+                      </a:schemeClr>
+                    </a:solidFill>
+                  </a:tcPr>
+                </a:tc>
+                <a:tc>
+                  <a:txBody>
+                    <a:bodyPr/>
+                    <a:lstStyle/>
+                    <a:p>
+                      <a:pPr algn="ctr" latinLnBrk="0"/>
+                      <a:endParaRPr lang="ko-KR" altLang="en-US" sz="1600" dirty="0">
+                        <a:solidFill>
+                          <a:schemeClr val="tx1"/>
+                        </a:solidFill>
+                      </a:endParaRPr>
+                    </a:p>
+                  </a:txBody>
+                  <a:tcPr anchor="ctr">
+                    <a:lnL w="12700" cap="flat" cmpd="sng" algn="ctr">
+                      <a:solidFill>
+                        <a:schemeClr val="tx1"/>
+                      </a:solidFill>
+                      <a:prstDash val="solid"/>
+                      <a:round/>
+                      <a:headEnd type="none" w="med" len="med"/>
+                      <a:tailEnd type="none" w="med" len="med"/>
+                    </a:lnL>
+                    <a:lnR w="12700" cap="flat" cmpd="sng" algn="ctr">
+                      <a:solidFill>
+                        <a:schemeClr val="tx1"/>
+                      </a:solidFill>
+                      <a:prstDash val="solid"/>
+                      <a:round/>
+                      <a:headEnd type="none" w="med" len="med"/>
+                      <a:tailEnd type="none" w="med" len="med"/>
+                    </a:lnR>
+                    <a:lnT w="12700" cap="flat" cmpd="sng" algn="ctr">
+                      <a:solidFill>
+                        <a:schemeClr val="tx1"/>
+                      </a:solidFill>
+                      <a:prstDash val="solid"/>
+                      <a:round/>
+                      <a:headEnd type="none" w="med" len="med"/>
+                      <a:tailEnd type="none" w="med" len="med"/>
+                    </a:lnT>
+                    <a:lnB w="12700" cap="flat" cmpd="sng" algn="ctr">
+                      <a:solidFill>
+                        <a:schemeClr val="tx1"/>
+                      </a:solidFill>
+                      <a:prstDash val="solid"/>
+                      <a:round/>
+                      <a:headEnd type="none" w="med" len="med"/>
+                      <a:tailEnd type="none" w="med" len="med"/>
+                    </a:lnB>
+                    <a:solidFill>
+                      <a:schemeClr val="bg1"/>
+                    </a:solidFill>
+                  </a:tcPr>
+                </a:tc>
+                <a:tc>
+                  <a:txBody>
+                    <a:bodyPr/>
+                    <a:lstStyle/>
+                    <a:p>
+                      <a:pPr algn="ctr" latinLnBrk="0"/>
+                      <a:endParaRPr lang="ko-KR" altLang="en-US" sz="1600" dirty="0">
+                        <a:solidFill>
+                          <a:schemeClr val="tx1"/>
+                        </a:solidFill>
+                      </a:endParaRPr>
+                    </a:p>
+                  </a:txBody>
+                  <a:tcPr anchor="ctr">
+                    <a:lnL w="12700" cap="flat" cmpd="sng" algn="ctr">
+                      <a:solidFill>
+                        <a:schemeClr val="tx1"/>
+                      </a:solidFill>
+                      <a:prstDash val="solid"/>
+                      <a:round/>
+                      <a:headEnd type="none" w="med" len="med"/>
+                      <a:tailEnd type="none" w="med" len="med"/>
+                    </a:lnL>
+                    <a:lnR w="12700" cap="flat" cmpd="sng" algn="ctr">
+                      <a:solidFill>
+                        <a:schemeClr val="tx1"/>
+                      </a:solidFill>
+                      <a:prstDash val="solid"/>
+                      <a:round/>
+                      <a:headEnd type="none" w="med" len="med"/>
+                      <a:tailEnd type="none" w="med" len="med"/>
+                    </a:lnR>
+                    <a:lnT w="12700" cap="flat" cmpd="sng" algn="ctr">
+                      <a:solidFill>
+                        <a:schemeClr val="tx1"/>
+                      </a:solidFill>
+                      <a:prstDash val="solid"/>
+                      <a:round/>
+                      <a:headEnd type="none" w="med" len="med"/>
+                      <a:tailEnd type="none" w="med" len="med"/>
+                    </a:lnT>
+                    <a:lnB w="12700" cap="flat" cmpd="sng" algn="ctr">
+                      <a:solidFill>
+                        <a:schemeClr val="tx1"/>
+                      </a:solidFill>
+                      <a:prstDash val="solid"/>
+                      <a:round/>
+                      <a:headEnd type="none" w="med" len="med"/>
+                      <a:tailEnd type="none" w="med" len="med"/>
+                    </a:lnB>
+                    <a:solidFill>
+                      <a:schemeClr val="bg1"/>
+                    </a:solidFill>
+                  </a:tcPr>
+                </a:tc>
+                <a:tc>
+                  <a:txBody>
+                    <a:bodyPr/>
+                    <a:lstStyle/>
+                    <a:p>
+                      <a:pPr algn="l" latinLnBrk="0"/>
+                      <a:r>
+                        <a:rPr lang="en-US" altLang="ko-KR" sz="1600" dirty="0">
+                          <a:solidFill>
+                            <a:schemeClr val="tx1"/>
+                          </a:solidFill>
+                        </a:rPr>
+                        <a:t>Shift </a:t>
+                      </a:r>
+                      <a:r>
+                        <a:rPr lang="ko-KR" altLang="en-US" sz="1600" dirty="0">
+                          <a:solidFill>
+                            <a:schemeClr val="tx1"/>
+                          </a:solidFill>
+                        </a:rPr>
+                        <a:t>누르고 달릴 때 속도</a:t>
+                      </a:r>
+                    </a:p>
+                  </a:txBody>
+                  <a:tcPr anchor="ctr">
+                    <a:lnL w="12700" cap="flat" cmpd="sng" algn="ctr">
+                      <a:solidFill>
+                        <a:schemeClr val="tx1"/>
+                      </a:solidFill>
+                      <a:prstDash val="solid"/>
+                      <a:round/>
+                      <a:headEnd type="none" w="med" len="med"/>
+                      <a:tailEnd type="none" w="med" len="med"/>
+                    </a:lnL>
+                    <a:lnR w="12700" cap="flat" cmpd="sng" algn="ctr">
+                      <a:solidFill>
+                        <a:schemeClr val="tx1"/>
+                      </a:solidFill>
+                      <a:prstDash val="solid"/>
+                      <a:round/>
+                      <a:headEnd type="none" w="med" len="med"/>
+                      <a:tailEnd type="none" w="med" len="med"/>
+                    </a:lnR>
+                    <a:lnT w="12700" cap="flat" cmpd="sng" algn="ctr">
+                      <a:solidFill>
+                        <a:schemeClr val="tx1"/>
+                      </a:solidFill>
+                      <a:prstDash val="solid"/>
+                      <a:round/>
+                      <a:headEnd type="none" w="med" len="med"/>
+                      <a:tailEnd type="none" w="med" len="med"/>
+                    </a:lnT>
+                    <a:lnB w="12700" cap="flat" cmpd="sng" algn="ctr">
+                      <a:solidFill>
+                        <a:schemeClr val="tx1"/>
+                      </a:solidFill>
+                      <a:prstDash val="solid"/>
+                      <a:round/>
+                      <a:headEnd type="none" w="med" len="med"/>
+                      <a:tailEnd type="none" w="med" len="med"/>
+                    </a:lnB>
+                    <a:solidFill>
+                      <a:schemeClr val="bg1"/>
+                    </a:solidFill>
+                  </a:tcPr>
+                </a:tc>
+                <a:extLst>
+                  <a:ext uri="{0D108BD9-81ED-4DB2-BD59-A6C34878D82A}">
+                    <a16:rowId xmlns:a16="http://schemas.microsoft.com/office/drawing/2014/main" val="3635075054"/>
+                  </a:ext>
+                </a:extLst>
+              </a:tr>
+              <a:tr h="370840">
+                <a:tc>
+                  <a:txBody>
+                    <a:bodyPr/>
+                    <a:lstStyle/>
+                    <a:p>
+                      <a:pPr algn="ctr" latinLnBrk="0"/>
+                      <a:r>
+                        <a:rPr lang="ko-KR" altLang="en-US" sz="1600" b="1" dirty="0">
+                          <a:solidFill>
+                            <a:schemeClr val="tx1"/>
+                          </a:solidFill>
+                        </a:rPr>
+                        <a:t>최대 가방 무게</a:t>
+                      </a:r>
+                      <a:endParaRPr lang="en-US" altLang="ko-KR" sz="1600" b="1" dirty="0">
+                        <a:solidFill>
+                          <a:schemeClr val="tx1"/>
+                        </a:solidFill>
+                      </a:endParaRPr>
+                    </a:p>
+                    <a:p>
+                      <a:pPr algn="ctr" latinLnBrk="0"/>
+                      <a:r>
+                        <a:rPr lang="en-US" altLang="ko-KR" sz="1600" b="1" dirty="0">
+                          <a:solidFill>
+                            <a:schemeClr val="tx1"/>
+                          </a:solidFill>
+                        </a:rPr>
+                        <a:t>(kg)</a:t>
+                      </a:r>
+                      <a:endParaRPr lang="ko-KR" altLang="en-US" sz="1600" b="1" dirty="0">
+                        <a:solidFill>
+                          <a:schemeClr val="tx1"/>
+                        </a:solidFill>
+                      </a:endParaRPr>
+                    </a:p>
+                  </a:txBody>
+                  <a:tcPr anchor="ctr">
+                    <a:lnL w="12700" cap="flat" cmpd="sng" algn="ctr">
+                      <a:solidFill>
+                        <a:schemeClr val="tx1"/>
+                      </a:solidFill>
+                      <a:prstDash val="solid"/>
+                      <a:round/>
+                      <a:headEnd type="none" w="med" len="med"/>
+                      <a:tailEnd type="none" w="med" len="med"/>
+                    </a:lnL>
+                    <a:lnR w="12700" cap="flat" cmpd="sng" algn="ctr">
+                      <a:solidFill>
+                        <a:schemeClr val="tx1"/>
+                      </a:solidFill>
+                      <a:prstDash val="solid"/>
+                      <a:round/>
+                      <a:headEnd type="none" w="med" len="med"/>
+                      <a:tailEnd type="none" w="med" len="med"/>
+                    </a:lnR>
+                    <a:lnT w="12700" cap="flat" cmpd="sng" algn="ctr">
+                      <a:solidFill>
+                        <a:schemeClr val="tx1"/>
+                      </a:solidFill>
+                      <a:prstDash val="solid"/>
+                      <a:round/>
+                      <a:headEnd type="none" w="med" len="med"/>
+                      <a:tailEnd type="none" w="med" len="med"/>
+                    </a:lnT>
+                    <a:lnB w="12700" cap="flat" cmpd="sng" algn="ctr">
+                      <a:solidFill>
+                        <a:schemeClr val="tx1"/>
+                      </a:solidFill>
+                      <a:prstDash val="solid"/>
+                      <a:round/>
+                      <a:headEnd type="none" w="med" len="med"/>
+                      <a:tailEnd type="none" w="med" len="med"/>
+                    </a:lnB>
+                    <a:solidFill>
+                      <a:schemeClr val="bg2">
+                        <a:lumMod val="90000"/>
+                      </a:schemeClr>
+                    </a:solidFill>
+                  </a:tcPr>
+                </a:tc>
+                <a:tc>
+                  <a:txBody>
+                    <a:bodyPr/>
+                    <a:lstStyle/>
+                    <a:p>
+                      <a:pPr algn="ctr" latinLnBrk="0"/>
+                      <a:endParaRPr lang="ko-KR" altLang="en-US" sz="1600" dirty="0">
+                        <a:solidFill>
+                          <a:schemeClr val="tx1"/>
+                        </a:solidFill>
+                      </a:endParaRPr>
+                    </a:p>
+                  </a:txBody>
+                  <a:tcPr anchor="ctr">
+                    <a:lnL w="12700" cap="flat" cmpd="sng" algn="ctr">
+                      <a:solidFill>
+                        <a:schemeClr val="tx1"/>
+                      </a:solidFill>
+                      <a:prstDash val="solid"/>
+                      <a:round/>
+                      <a:headEnd type="none" w="med" len="med"/>
+                      <a:tailEnd type="none" w="med" len="med"/>
+                    </a:lnL>
+                    <a:lnR w="12700" cap="flat" cmpd="sng" algn="ctr">
+                      <a:solidFill>
+                        <a:schemeClr val="tx1"/>
+                      </a:solidFill>
+                      <a:prstDash val="solid"/>
+                      <a:round/>
+                      <a:headEnd type="none" w="med" len="med"/>
+                      <a:tailEnd type="none" w="med" len="med"/>
+                    </a:lnR>
+                    <a:lnT w="12700" cap="flat" cmpd="sng" algn="ctr">
+                      <a:solidFill>
+                        <a:schemeClr val="tx1"/>
+                      </a:solidFill>
+                      <a:prstDash val="solid"/>
+                      <a:round/>
+                      <a:headEnd type="none" w="med" len="med"/>
+                      <a:tailEnd type="none" w="med" len="med"/>
+                    </a:lnT>
+                    <a:lnB w="12700" cap="flat" cmpd="sng" algn="ctr">
+                      <a:solidFill>
+                        <a:schemeClr val="tx1"/>
+                      </a:solidFill>
+                      <a:prstDash val="solid"/>
+                      <a:round/>
+                      <a:headEnd type="none" w="med" len="med"/>
+                      <a:tailEnd type="none" w="med" len="med"/>
+                    </a:lnB>
+                    <a:solidFill>
+                      <a:schemeClr val="bg1"/>
+                    </a:solidFill>
+                  </a:tcPr>
+                </a:tc>
+                <a:tc>
+                  <a:txBody>
+                    <a:bodyPr/>
+                    <a:lstStyle/>
+                    <a:p>
+                      <a:pPr algn="ctr" latinLnBrk="0"/>
+                      <a:endParaRPr lang="ko-KR" altLang="en-US" sz="1600" dirty="0">
+                        <a:solidFill>
+                          <a:schemeClr val="tx1"/>
+                        </a:solidFill>
+                      </a:endParaRPr>
+                    </a:p>
+                  </a:txBody>
+                  <a:tcPr anchor="ctr">
+                    <a:lnL w="12700" cap="flat" cmpd="sng" algn="ctr">
+                      <a:solidFill>
+                        <a:schemeClr val="tx1"/>
+                      </a:solidFill>
+                      <a:prstDash val="solid"/>
+                      <a:round/>
+                      <a:headEnd type="none" w="med" len="med"/>
+                      <a:tailEnd type="none" w="med" len="med"/>
+                    </a:lnL>
+                    <a:lnR w="12700" cap="flat" cmpd="sng" algn="ctr">
+                      <a:solidFill>
+                        <a:schemeClr val="tx1"/>
+                      </a:solidFill>
+                      <a:prstDash val="solid"/>
+                      <a:round/>
+                      <a:headEnd type="none" w="med" len="med"/>
+                      <a:tailEnd type="none" w="med" len="med"/>
+                    </a:lnR>
+                    <a:lnT w="12700" cap="flat" cmpd="sng" algn="ctr">
+                      <a:solidFill>
+                        <a:schemeClr val="tx1"/>
+                      </a:solidFill>
+                      <a:prstDash val="solid"/>
+                      <a:round/>
+                      <a:headEnd type="none" w="med" len="med"/>
+                      <a:tailEnd type="none" w="med" len="med"/>
+                    </a:lnT>
+                    <a:lnB w="12700" cap="flat" cmpd="sng" algn="ctr">
+                      <a:solidFill>
+                        <a:schemeClr val="tx1"/>
+                      </a:solidFill>
+                      <a:prstDash val="solid"/>
+                      <a:round/>
+                      <a:headEnd type="none" w="med" len="med"/>
+                      <a:tailEnd type="none" w="med" len="med"/>
+                    </a:lnB>
+                    <a:solidFill>
+                      <a:schemeClr val="bg1"/>
+                    </a:solidFill>
+                  </a:tcPr>
+                </a:tc>
+                <a:tc>
+                  <a:txBody>
+                    <a:bodyPr/>
+                    <a:lstStyle/>
+                    <a:p>
+                      <a:pPr algn="l" latinLnBrk="0"/>
+                      <a:endParaRPr lang="ko-KR" altLang="en-US" sz="1600" dirty="0">
+                        <a:solidFill>
+                          <a:schemeClr val="tx1"/>
+                        </a:solidFill>
+                      </a:endParaRPr>
+                    </a:p>
+                  </a:txBody>
+                  <a:tcPr anchor="ctr">
+                    <a:lnL w="12700" cap="flat" cmpd="sng" algn="ctr">
+                      <a:solidFill>
+                        <a:schemeClr val="tx1"/>
+                      </a:solidFill>
+                      <a:prstDash val="solid"/>
+                      <a:round/>
+                      <a:headEnd type="none" w="med" len="med"/>
+                      <a:tailEnd type="none" w="med" len="med"/>
+                    </a:lnL>
+                    <a:lnR w="12700" cap="flat" cmpd="sng" algn="ctr">
+                      <a:solidFill>
+                        <a:schemeClr val="tx1"/>
+                      </a:solidFill>
+                      <a:prstDash val="solid"/>
+                      <a:round/>
+                      <a:headEnd type="none" w="med" len="med"/>
+                      <a:tailEnd type="none" w="med" len="med"/>
+                    </a:lnR>
+                    <a:lnT w="12700" cap="flat" cmpd="sng" algn="ctr">
+                      <a:solidFill>
+                        <a:schemeClr val="tx1"/>
+                      </a:solidFill>
+                      <a:prstDash val="solid"/>
+                      <a:round/>
+                      <a:headEnd type="none" w="med" len="med"/>
+                      <a:tailEnd type="none" w="med" len="med"/>
+                    </a:lnT>
+                    <a:lnB w="12700" cap="flat" cmpd="sng" algn="ctr">
+                      <a:solidFill>
+                        <a:schemeClr val="tx1"/>
+                      </a:solidFill>
+                      <a:prstDash val="solid"/>
+                      <a:round/>
+                      <a:headEnd type="none" w="med" len="med"/>
+                      <a:tailEnd type="none" w="med" len="med"/>
+                    </a:lnB>
+                    <a:solidFill>
+                      <a:schemeClr val="bg1"/>
+                    </a:solidFill>
+                  </a:tcPr>
+                </a:tc>
+                <a:extLst>
+                  <a:ext uri="{0D108BD9-81ED-4DB2-BD59-A6C34878D82A}">
+                    <a16:rowId xmlns:a16="http://schemas.microsoft.com/office/drawing/2014/main" val="4094831631"/>
+                  </a:ext>
+                </a:extLst>
+              </a:tr>
+              <a:tr h="370840">
+                <a:tc>
+                  <a:txBody>
+                    <a:bodyPr/>
+                    <a:lstStyle/>
+                    <a:p>
+                      <a:pPr algn="ctr" latinLnBrk="0"/>
+                      <a:r>
+                        <a:rPr lang="ko-KR" altLang="en-US" sz="1600" b="1" dirty="0">
+                          <a:solidFill>
+                            <a:schemeClr val="tx1"/>
+                          </a:solidFill>
+                        </a:rPr>
+                        <a:t>현재 가방 무게</a:t>
+                      </a:r>
+                      <a:endParaRPr lang="en-US" altLang="ko-KR" sz="1600" b="1" dirty="0">
+                        <a:solidFill>
+                          <a:schemeClr val="tx1"/>
+                        </a:solidFill>
+                      </a:endParaRPr>
+                    </a:p>
+                    <a:p>
+                      <a:pPr algn="ctr" latinLnBrk="0"/>
+                      <a:r>
+                        <a:rPr lang="en-US" altLang="ko-KR" sz="1600" b="1" dirty="0">
+                          <a:solidFill>
+                            <a:schemeClr val="tx1"/>
+                          </a:solidFill>
+                        </a:rPr>
+                        <a:t>(kg)</a:t>
+                      </a:r>
+                      <a:endParaRPr lang="ko-KR" altLang="en-US" sz="1600" b="1" dirty="0">
+                        <a:solidFill>
+                          <a:schemeClr val="tx1"/>
+                        </a:solidFill>
+                      </a:endParaRPr>
+                    </a:p>
+                  </a:txBody>
+                  <a:tcPr anchor="ctr">
+                    <a:lnL w="12700" cap="flat" cmpd="sng" algn="ctr">
+                      <a:solidFill>
+                        <a:schemeClr val="tx1"/>
+                      </a:solidFill>
+                      <a:prstDash val="solid"/>
+                      <a:round/>
+                      <a:headEnd type="none" w="med" len="med"/>
+                      <a:tailEnd type="none" w="med" len="med"/>
+                    </a:lnL>
+                    <a:lnR w="12700" cap="flat" cmpd="sng" algn="ctr">
+                      <a:solidFill>
+                        <a:schemeClr val="tx1"/>
+                      </a:solidFill>
+                      <a:prstDash val="solid"/>
+                      <a:round/>
+                      <a:headEnd type="none" w="med" len="med"/>
+                      <a:tailEnd type="none" w="med" len="med"/>
+                    </a:lnR>
+                    <a:lnT w="12700" cap="flat" cmpd="sng" algn="ctr">
+                      <a:solidFill>
+                        <a:schemeClr val="tx1"/>
+                      </a:solidFill>
+                      <a:prstDash val="solid"/>
+                      <a:round/>
+                      <a:headEnd type="none" w="med" len="med"/>
+                      <a:tailEnd type="none" w="med" len="med"/>
+                    </a:lnT>
+                    <a:lnB w="12700" cap="flat" cmpd="sng" algn="ctr">
+                      <a:solidFill>
+                        <a:schemeClr val="tx1"/>
+                      </a:solidFill>
+                      <a:prstDash val="solid"/>
+                      <a:round/>
+                      <a:headEnd type="none" w="med" len="med"/>
+                      <a:tailEnd type="none" w="med" len="med"/>
+                    </a:lnB>
+                    <a:solidFill>
+                      <a:schemeClr val="bg2">
+                        <a:lumMod val="90000"/>
+                      </a:schemeClr>
+                    </a:solidFill>
+                  </a:tcPr>
+                </a:tc>
+                <a:tc>
+                  <a:txBody>
+                    <a:bodyPr/>
+                    <a:lstStyle/>
+                    <a:p>
+                      <a:pPr algn="ctr" latinLnBrk="0"/>
+                      <a:endParaRPr lang="ko-KR" altLang="en-US" sz="1600" dirty="0">
+                        <a:solidFill>
+                          <a:schemeClr val="tx1"/>
+                        </a:solidFill>
+                      </a:endParaRPr>
+                    </a:p>
+                  </a:txBody>
+                  <a:tcPr anchor="ctr">
+                    <a:lnL w="12700" cap="flat" cmpd="sng" algn="ctr">
+                      <a:solidFill>
+                        <a:schemeClr val="tx1"/>
+                      </a:solidFill>
+                      <a:prstDash val="solid"/>
+                      <a:round/>
+                      <a:headEnd type="none" w="med" len="med"/>
+                      <a:tailEnd type="none" w="med" len="med"/>
+                    </a:lnL>
+                    <a:lnR w="12700" cap="flat" cmpd="sng" algn="ctr">
+                      <a:solidFill>
+                        <a:schemeClr val="tx1"/>
+                      </a:solidFill>
+                      <a:prstDash val="solid"/>
+                      <a:round/>
+                      <a:headEnd type="none" w="med" len="med"/>
+                      <a:tailEnd type="none" w="med" len="med"/>
+                    </a:lnR>
+                    <a:lnT w="12700" cap="flat" cmpd="sng" algn="ctr">
+                      <a:solidFill>
+                        <a:schemeClr val="tx1"/>
+                      </a:solidFill>
+                      <a:prstDash val="solid"/>
+                      <a:round/>
+                      <a:headEnd type="none" w="med" len="med"/>
+                      <a:tailEnd type="none" w="med" len="med"/>
+                    </a:lnT>
+                    <a:lnB w="12700" cap="flat" cmpd="sng" algn="ctr">
+                      <a:solidFill>
+                        <a:schemeClr val="tx1"/>
+                      </a:solidFill>
+                      <a:prstDash val="solid"/>
+                      <a:round/>
+                      <a:headEnd type="none" w="med" len="med"/>
+                      <a:tailEnd type="none" w="med" len="med"/>
+                    </a:lnB>
+                    <a:solidFill>
+                      <a:schemeClr val="bg1"/>
+                    </a:solidFill>
+                  </a:tcPr>
+                </a:tc>
+                <a:tc>
+                  <a:txBody>
+                    <a:bodyPr/>
+                    <a:lstStyle/>
+                    <a:p>
+                      <a:pPr algn="ctr" latinLnBrk="0"/>
+                      <a:endParaRPr lang="ko-KR" altLang="en-US" sz="1600" dirty="0">
+                        <a:solidFill>
+                          <a:schemeClr val="tx1"/>
+                        </a:solidFill>
+                      </a:endParaRPr>
+                    </a:p>
+                  </a:txBody>
+                  <a:tcPr anchor="ctr">
+                    <a:lnL w="12700" cap="flat" cmpd="sng" algn="ctr">
+                      <a:solidFill>
+                        <a:schemeClr val="tx1"/>
+                      </a:solidFill>
+                      <a:prstDash val="solid"/>
+                      <a:round/>
+                      <a:headEnd type="none" w="med" len="med"/>
+                      <a:tailEnd type="none" w="med" len="med"/>
+                    </a:lnL>
+                    <a:lnR w="12700" cap="flat" cmpd="sng" algn="ctr">
+                      <a:solidFill>
+                        <a:schemeClr val="tx1"/>
+                      </a:solidFill>
+                      <a:prstDash val="solid"/>
+                      <a:round/>
+                      <a:headEnd type="none" w="med" len="med"/>
+                      <a:tailEnd type="none" w="med" len="med"/>
+                    </a:lnR>
+                    <a:lnT w="12700" cap="flat" cmpd="sng" algn="ctr">
+                      <a:solidFill>
+                        <a:schemeClr val="tx1"/>
+                      </a:solidFill>
+                      <a:prstDash val="solid"/>
+                      <a:round/>
+                      <a:headEnd type="none" w="med" len="med"/>
+                      <a:tailEnd type="none" w="med" len="med"/>
+                    </a:lnT>
+                    <a:lnB w="12700" cap="flat" cmpd="sng" algn="ctr">
+                      <a:solidFill>
+                        <a:schemeClr val="tx1"/>
+                      </a:solidFill>
+                      <a:prstDash val="solid"/>
+                      <a:round/>
+                      <a:headEnd type="none" w="med" len="med"/>
+                      <a:tailEnd type="none" w="med" len="med"/>
+                    </a:lnB>
+                    <a:solidFill>
+                      <a:schemeClr val="bg1"/>
+                    </a:solidFill>
+                  </a:tcPr>
+                </a:tc>
+                <a:tc>
+                  <a:txBody>
+                    <a:bodyPr/>
+                    <a:lstStyle/>
+                    <a:p>
+                      <a:pPr marL="285750" indent="-285750" algn="l" latinLnBrk="0">
+                        <a:buFontTx/>
+                        <a:buChar char="-"/>
+                      </a:pPr>
+                      <a:r>
+                        <a:rPr lang="ko-KR" altLang="en-US" sz="1600" dirty="0">
+                          <a:solidFill>
+                            <a:schemeClr val="tx1"/>
+                          </a:solidFill>
+                        </a:rPr>
+                        <a:t>플레이어의 현재 인벤토리 무게</a:t>
+                      </a:r>
+                      <a:endParaRPr lang="en-US" altLang="ko-KR" sz="1600" dirty="0">
+                        <a:solidFill>
+                          <a:schemeClr val="tx1"/>
+                        </a:solidFill>
+                      </a:endParaRPr>
+                    </a:p>
+                  </a:txBody>
+                  <a:tcPr anchor="ctr">
+                    <a:lnL w="12700" cap="flat" cmpd="sng" algn="ctr">
+                      <a:solidFill>
+                        <a:schemeClr val="tx1"/>
+                      </a:solidFill>
+                      <a:prstDash val="solid"/>
+                      <a:round/>
+                      <a:headEnd type="none" w="med" len="med"/>
+                      <a:tailEnd type="none" w="med" len="med"/>
+                    </a:lnL>
+                    <a:lnR w="12700" cap="flat" cmpd="sng" algn="ctr">
+                      <a:solidFill>
+                        <a:schemeClr val="tx1"/>
+                      </a:solidFill>
+                      <a:prstDash val="solid"/>
+                      <a:round/>
+                      <a:headEnd type="none" w="med" len="med"/>
+                      <a:tailEnd type="none" w="med" len="med"/>
+                    </a:lnR>
+                    <a:lnT w="12700" cap="flat" cmpd="sng" algn="ctr">
+                      <a:solidFill>
+                        <a:schemeClr val="tx1"/>
+                      </a:solidFill>
+                      <a:prstDash val="solid"/>
+                      <a:round/>
+                      <a:headEnd type="none" w="med" len="med"/>
+                      <a:tailEnd type="none" w="med" len="med"/>
+                    </a:lnT>
+                    <a:lnB w="12700" cap="flat" cmpd="sng" algn="ctr">
+                      <a:solidFill>
+                        <a:schemeClr val="tx1"/>
+                      </a:solidFill>
+                      <a:prstDash val="solid"/>
+                      <a:round/>
+                      <a:headEnd type="none" w="med" len="med"/>
+                      <a:tailEnd type="none" w="med" len="med"/>
+                    </a:lnB>
+                    <a:solidFill>
+                      <a:schemeClr val="bg1"/>
+                    </a:solidFill>
+                  </a:tcPr>
+                </a:tc>
+                <a:extLst>
+                  <a:ext uri="{0D108BD9-81ED-4DB2-BD59-A6C34878D82A}">
+                    <a16:rowId xmlns:a16="http://schemas.microsoft.com/office/drawing/2014/main" val="365149630"/>
+                  </a:ext>
+                </a:extLst>
+              </a:tr>
+              <a:tr h="370840">
+                <a:tc>
+                  <a:txBody>
+                    <a:bodyPr/>
+                    <a:lstStyle/>
+                    <a:p>
+                      <a:pPr algn="ctr" latinLnBrk="0"/>
+                      <a:r>
+                        <a:rPr lang="en-US" altLang="ko-KR" sz="1600" b="1" dirty="0">
+                          <a:solidFill>
+                            <a:schemeClr val="tx1"/>
+                          </a:solidFill>
+                        </a:rPr>
+                        <a:t>...</a:t>
+                      </a:r>
+                      <a:endParaRPr lang="ko-KR" altLang="en-US" sz="1600" b="1" dirty="0">
+                        <a:solidFill>
+                          <a:schemeClr val="tx1"/>
+                        </a:solidFill>
+                      </a:endParaRPr>
+                    </a:p>
+                  </a:txBody>
+                  <a:tcPr anchor="ctr">
+                    <a:lnL w="12700" cap="flat" cmpd="sng" algn="ctr">
+                      <a:solidFill>
+                        <a:schemeClr val="tx1"/>
+                      </a:solidFill>
+                      <a:prstDash val="solid"/>
+                      <a:round/>
+                      <a:headEnd type="none" w="med" len="med"/>
+                      <a:tailEnd type="none" w="med" len="med"/>
+                    </a:lnL>
+                    <a:lnR w="12700" cap="flat" cmpd="sng" algn="ctr">
+                      <a:solidFill>
+                        <a:schemeClr val="tx1"/>
+                      </a:solidFill>
+                      <a:prstDash val="solid"/>
+                      <a:round/>
+                      <a:headEnd type="none" w="med" len="med"/>
+                      <a:tailEnd type="none" w="med" len="med"/>
+                    </a:lnR>
+                    <a:lnT w="12700" cap="flat" cmpd="sng" algn="ctr">
+                      <a:solidFill>
+                        <a:schemeClr val="tx1"/>
+                      </a:solidFill>
+                      <a:prstDash val="solid"/>
+                      <a:round/>
+                      <a:headEnd type="none" w="med" len="med"/>
+                      <a:tailEnd type="none" w="med" len="med"/>
+                    </a:lnT>
+                    <a:lnB w="12700" cap="flat" cmpd="sng" algn="ctr">
+                      <a:solidFill>
+                        <a:schemeClr val="tx1"/>
+                      </a:solidFill>
+                      <a:prstDash val="solid"/>
+                      <a:round/>
+                      <a:headEnd type="none" w="med" len="med"/>
+                      <a:tailEnd type="none" w="med" len="med"/>
+                    </a:lnB>
+                    <a:solidFill>
+                      <a:schemeClr val="bg2">
+                        <a:lumMod val="90000"/>
+                      </a:schemeClr>
+                    </a:solidFill>
+                  </a:tcPr>
+                </a:tc>
+                <a:tc>
+                  <a:txBody>
+                    <a:bodyPr/>
+                    <a:lstStyle/>
+                    <a:p>
+                      <a:pPr algn="ctr" latinLnBrk="0"/>
+                      <a:endParaRPr lang="ko-KR" altLang="en-US" sz="1600" dirty="0">
+                        <a:solidFill>
+                          <a:schemeClr val="tx1"/>
+                        </a:solidFill>
+                      </a:endParaRPr>
+                    </a:p>
+                  </a:txBody>
+                  <a:tcPr anchor="ctr">
+                    <a:lnL w="12700" cap="flat" cmpd="sng" algn="ctr">
+                      <a:solidFill>
+                        <a:schemeClr val="tx1"/>
+                      </a:solidFill>
+                      <a:prstDash val="solid"/>
+                      <a:round/>
+                      <a:headEnd type="none" w="med" len="med"/>
+                      <a:tailEnd type="none" w="med" len="med"/>
+                    </a:lnL>
+                    <a:lnR w="12700" cap="flat" cmpd="sng" algn="ctr">
+                      <a:solidFill>
+                        <a:schemeClr val="tx1"/>
+                      </a:solidFill>
+                      <a:prstDash val="solid"/>
+                      <a:round/>
+                      <a:headEnd type="none" w="med" len="med"/>
+                      <a:tailEnd type="none" w="med" len="med"/>
+                    </a:lnR>
+                    <a:lnT w="12700" cap="flat" cmpd="sng" algn="ctr">
+                      <a:solidFill>
+                        <a:schemeClr val="tx1"/>
+                      </a:solidFill>
+                      <a:prstDash val="solid"/>
+                      <a:round/>
+                      <a:headEnd type="none" w="med" len="med"/>
+                      <a:tailEnd type="none" w="med" len="med"/>
+                    </a:lnT>
+                    <a:lnB w="12700" cap="flat" cmpd="sng" algn="ctr">
+                      <a:solidFill>
+                        <a:schemeClr val="tx1"/>
+                      </a:solidFill>
+                      <a:prstDash val="solid"/>
+                      <a:round/>
+                      <a:headEnd type="none" w="med" len="med"/>
+                      <a:tailEnd type="none" w="med" len="med"/>
+                    </a:lnB>
+                    <a:solidFill>
+                      <a:schemeClr val="bg1"/>
+                    </a:solidFill>
+                  </a:tcPr>
+                </a:tc>
+                <a:tc>
+                  <a:txBody>
+                    <a:bodyPr/>
+                    <a:lstStyle/>
+                    <a:p>
+                      <a:pPr algn="ctr" latinLnBrk="0"/>
+                      <a:endParaRPr lang="ko-KR" altLang="en-US" sz="1600" dirty="0">
+                        <a:solidFill>
+                          <a:schemeClr val="tx1"/>
+                        </a:solidFill>
+                      </a:endParaRPr>
+                    </a:p>
+                  </a:txBody>
+                  <a:tcPr anchor="ctr">
+                    <a:lnL w="12700" cap="flat" cmpd="sng" algn="ctr">
+                      <a:solidFill>
+                        <a:schemeClr val="tx1"/>
+                      </a:solidFill>
+                      <a:prstDash val="solid"/>
+                      <a:round/>
+                      <a:headEnd type="none" w="med" len="med"/>
+                      <a:tailEnd type="none" w="med" len="med"/>
+                    </a:lnL>
+                    <a:lnR w="12700" cap="flat" cmpd="sng" algn="ctr">
+                      <a:solidFill>
+                        <a:schemeClr val="tx1"/>
+                      </a:solidFill>
+                      <a:prstDash val="solid"/>
+                      <a:round/>
+                      <a:headEnd type="none" w="med" len="med"/>
+                      <a:tailEnd type="none" w="med" len="med"/>
+                    </a:lnR>
+                    <a:lnT w="12700" cap="flat" cmpd="sng" algn="ctr">
+                      <a:solidFill>
+                        <a:schemeClr val="tx1"/>
+                      </a:solidFill>
+                      <a:prstDash val="solid"/>
+                      <a:round/>
+                      <a:headEnd type="none" w="med" len="med"/>
+                      <a:tailEnd type="none" w="med" len="med"/>
+                    </a:lnT>
+                    <a:lnB w="12700" cap="flat" cmpd="sng" algn="ctr">
+                      <a:solidFill>
+                        <a:schemeClr val="tx1"/>
+                      </a:solidFill>
+                      <a:prstDash val="solid"/>
+                      <a:round/>
+                      <a:headEnd type="none" w="med" len="med"/>
+                      <a:tailEnd type="none" w="med" len="med"/>
+                    </a:lnB>
+                    <a:solidFill>
+                      <a:schemeClr val="bg1"/>
+                    </a:solidFill>
+                  </a:tcPr>
+                </a:tc>
+                <a:tc>
+                  <a:txBody>
+                    <a:bodyPr/>
+                    <a:lstStyle/>
+                    <a:p>
+                      <a:pPr marL="285750" indent="-285750" algn="l" latinLnBrk="0">
+                        <a:buFontTx/>
+                        <a:buChar char="-"/>
+                      </a:pPr>
+                      <a:endParaRPr lang="en-US" altLang="ko-KR" sz="1600" dirty="0">
+                        <a:solidFill>
+                          <a:schemeClr val="tx1"/>
+                        </a:solidFill>
+                      </a:endParaRPr>
+                    </a:p>
+                  </a:txBody>
+                  <a:tcPr anchor="ctr">
+                    <a:lnL w="12700" cap="flat" cmpd="sng" algn="ctr">
+                      <a:solidFill>
+                        <a:schemeClr val="tx1"/>
+                      </a:solidFill>
+                      <a:prstDash val="solid"/>
+                      <a:round/>
+                      <a:headEnd type="none" w="med" len="med"/>
+                      <a:tailEnd type="none" w="med" len="med"/>
+                    </a:lnL>
+                    <a:lnR w="12700" cap="flat" cmpd="sng" algn="ctr">
+                      <a:solidFill>
+                        <a:schemeClr val="tx1"/>
+                      </a:solidFill>
+                      <a:prstDash val="solid"/>
+                      <a:round/>
+                      <a:headEnd type="none" w="med" len="med"/>
+                      <a:tailEnd type="none" w="med" len="med"/>
+                    </a:lnR>
+                    <a:lnT w="12700" cap="flat" cmpd="sng" algn="ctr">
+                      <a:solidFill>
+                        <a:schemeClr val="tx1"/>
+                      </a:solidFill>
+                      <a:prstDash val="solid"/>
+                      <a:round/>
+                      <a:headEnd type="none" w="med" len="med"/>
+                      <a:tailEnd type="none" w="med" len="med"/>
+                    </a:lnT>
+                    <a:lnB w="12700" cap="flat" cmpd="sng" algn="ctr">
+                      <a:solidFill>
+                        <a:schemeClr val="tx1"/>
+                      </a:solidFill>
+                      <a:prstDash val="solid"/>
+                      <a:round/>
+                      <a:headEnd type="none" w="med" len="med"/>
+                      <a:tailEnd type="none" w="med" len="med"/>
+                    </a:lnB>
+                    <a:solidFill>
+                      <a:schemeClr val="bg1"/>
+                    </a:solidFill>
+                  </a:tcPr>
+                </a:tc>
+                <a:extLst>
+                  <a:ext uri="{0D108BD9-81ED-4DB2-BD59-A6C34878D82A}">
+                    <a16:rowId xmlns:a16="http://schemas.microsoft.com/office/drawing/2014/main" val="159619101"/>
+                  </a:ext>
+                </a:extLst>
+              </a:tr>
+            </a:tbl>
+          </a:graphicData>
+        </a:graphic>
+      </p:graphicFrame>
+    </p:spTree>
+    <p:extLst>
+      <p:ext uri="{BB962C8B-B14F-4D97-AF65-F5344CB8AC3E}">
+        <p14:creationId xmlns:p14="http://schemas.microsoft.com/office/powerpoint/2010/main" val="1342777478"/>
+      </p:ext>
+    </p:extLst>
+  </p:cSld>
+  <p:clrMapOvr>
+    <a:masterClrMapping/>
+  </p:clrMapOvr>
+</p:sld>
+</file>
+
 <file path=ppt/slides/slide8.xml><?xml version="1.0" encoding="utf-8"?>
 <p:sld xmlns:a="http://schemas.openxmlformats.org/drawingml/2006/main" xmlns:r="http://schemas.openxmlformats.org/officeDocument/2006/relationships" xmlns:p="http://schemas.openxmlformats.org/presentationml/2006/main">
   <p:cSld>
@@ -12704,7 +15701,7 @@
           <p:cNvPr id="2" name="제목 1">
             <a:extLst>
               <a:ext uri="{FF2B5EF4-FFF2-40B4-BE49-F238E27FC236}">
-                <a16:creationId xmlns:a16="http://schemas.microsoft.com/office/drawing/2014/main" id="{4E573E6E-A449-DD2B-8901-D789B166587D}"/>
+                <a16:creationId xmlns:a16="http://schemas.microsoft.com/office/drawing/2014/main" id="{D3A1413C-AF46-EC38-7699-9C736170B055}"/>
               </a:ext>
             </a:extLst>
           </p:cNvPr>
@@ -12722,7 +15719,15 @@
           <a:p>
             <a:r>
               <a:rPr lang="ko-KR" altLang="en-US" dirty="0"/>
-              <a:t>맵 생성 규칙</a:t>
+              <a:t>플레이어 정보</a:t>
+            </a:r>
+            <a:r>
+              <a:rPr lang="en-US" altLang="ko-KR" dirty="0"/>
+              <a:t>	- </a:t>
+            </a:r>
+            <a:r>
+              <a:rPr lang="ko-KR" altLang="en-US" dirty="0"/>
+              <a:t>상태</a:t>
             </a:r>
           </a:p>
         </p:txBody>
@@ -12732,7 +15737,7 @@
           <p:cNvPr id="3" name="내용 개체 틀 2">
             <a:extLst>
               <a:ext uri="{FF2B5EF4-FFF2-40B4-BE49-F238E27FC236}">
-                <a16:creationId xmlns:a16="http://schemas.microsoft.com/office/drawing/2014/main" id="{9AD7A719-2FED-FB60-36C7-6583B5F5AD60}"/>
+                <a16:creationId xmlns:a16="http://schemas.microsoft.com/office/drawing/2014/main" id="{D551DD6E-6000-C9A3-897A-A0C57B7BEB81}"/>
               </a:ext>
             </a:extLst>
           </p:cNvPr>
@@ -12745,94 +15750,2902 @@
         </p:nvSpPr>
         <p:spPr/>
         <p:txBody>
+          <a:bodyPr numCol="3"/>
+          <a:lstStyle/>
+          <a:p>
+            <a:r>
+              <a:rPr lang="en-US" altLang="ko-KR" dirty="0"/>
+              <a:t>Idle</a:t>
+            </a:r>
+          </a:p>
+          <a:p>
+            <a:r>
+              <a:rPr lang="en-US" altLang="ko-KR" dirty="0"/>
+              <a:t>Move</a:t>
+            </a:r>
+          </a:p>
+          <a:p>
+            <a:r>
+              <a:rPr lang="en-US" altLang="ko-KR" dirty="0"/>
+              <a:t>Run</a:t>
+            </a:r>
+          </a:p>
+          <a:p>
+            <a:r>
+              <a:rPr lang="en-US" altLang="ko-KR" dirty="0"/>
+              <a:t>Jump</a:t>
+            </a:r>
+          </a:p>
+          <a:p>
+            <a:r>
+              <a:rPr lang="en-US" altLang="ko-KR" dirty="0" err="1"/>
+              <a:t>DuckDown</a:t>
+            </a:r>
+            <a:endParaRPr lang="en-US" altLang="ko-KR" dirty="0"/>
+          </a:p>
+          <a:p>
+            <a:r>
+              <a:rPr lang="en-US" altLang="ko-KR" dirty="0" err="1"/>
+              <a:t>DuckDownMove</a:t>
+            </a:r>
+            <a:endParaRPr lang="en-US" altLang="ko-KR" dirty="0"/>
+          </a:p>
+          <a:p>
+            <a:r>
+              <a:rPr lang="en-US" altLang="ko-KR" dirty="0"/>
+              <a:t>Stun</a:t>
+            </a:r>
+          </a:p>
+          <a:p>
+            <a:r>
+              <a:rPr lang="en-US" altLang="ko-KR" dirty="0"/>
+              <a:t>Hit</a:t>
+            </a:r>
+          </a:p>
+          <a:p>
+            <a:r>
+              <a:rPr lang="en-US" altLang="ko-KR" dirty="0"/>
+              <a:t>Dead</a:t>
+            </a:r>
+          </a:p>
+          <a:p>
+            <a:r>
+              <a:rPr lang="en-US" altLang="ko-KR" dirty="0"/>
+              <a:t>Attack</a:t>
+            </a:r>
+          </a:p>
+          <a:p>
+            <a:r>
+              <a:rPr lang="en-US" altLang="ko-KR" dirty="0"/>
+              <a:t>Interaction</a:t>
+            </a:r>
+          </a:p>
+          <a:p>
+            <a:r>
+              <a:rPr lang="en-US" altLang="ko-KR" dirty="0" err="1"/>
+              <a:t>PickUp</a:t>
+            </a:r>
+            <a:endParaRPr lang="en-US" altLang="ko-KR" dirty="0"/>
+          </a:p>
+          <a:p>
+            <a:r>
+              <a:rPr lang="en-US" altLang="ko-KR" dirty="0"/>
+              <a:t>-----------------</a:t>
+            </a:r>
+          </a:p>
+          <a:p>
+            <a:r>
+              <a:rPr lang="ko-KR" altLang="en-US" dirty="0"/>
+              <a:t>친구 가방 열기</a:t>
+            </a:r>
+            <a:endParaRPr lang="en-US" altLang="ko-KR" dirty="0"/>
+          </a:p>
+        </p:txBody>
+      </p:sp>
+      <p:sp>
+        <p:nvSpPr>
+          <p:cNvPr id="4" name="슬라이드 번호 개체 틀 3">
+            <a:extLst>
+              <a:ext uri="{FF2B5EF4-FFF2-40B4-BE49-F238E27FC236}">
+                <a16:creationId xmlns:a16="http://schemas.microsoft.com/office/drawing/2014/main" id="{A637D255-F094-8FC4-AD27-E1ED2060D599}"/>
+              </a:ext>
+            </a:extLst>
+          </p:cNvPr>
+          <p:cNvSpPr>
+            <a:spLocks noGrp="1"/>
+          </p:cNvSpPr>
+          <p:nvPr>
+            <p:ph type="sldNum" sz="quarter" idx="12"/>
+          </p:nvPr>
+        </p:nvSpPr>
+        <p:spPr/>
+        <p:txBody>
           <a:bodyPr/>
           <a:lstStyle/>
           <a:p>
-            <a:r>
-              <a:rPr lang="ko-KR" altLang="en-US" dirty="0"/>
-              <a:t>절차적 생성 규칙 </a:t>
-            </a:r>
-            <a:r>
-              <a:rPr lang="en-US" altLang="ko-KR" dirty="0"/>
-              <a:t>2</a:t>
-            </a:r>
-            <a:r>
-              <a:rPr lang="ko-KR" altLang="en-US" dirty="0"/>
-              <a:t>종 </a:t>
-            </a:r>
-            <a:r>
-              <a:rPr lang="en-US" altLang="ko-KR" dirty="0"/>
-              <a:t>(</a:t>
-            </a:r>
-            <a:r>
-              <a:rPr lang="ko-KR" altLang="en-US" dirty="0"/>
-              <a:t>공장</a:t>
-            </a:r>
-            <a:r>
-              <a:rPr lang="en-US" altLang="ko-KR" dirty="0"/>
-              <a:t>/</a:t>
-            </a:r>
-            <a:r>
-              <a:rPr lang="ko-KR" altLang="en-US" dirty="0"/>
-              <a:t>임시</a:t>
-            </a:r>
-            <a:r>
-              <a:rPr lang="en-US" altLang="ko-KR" dirty="0"/>
-              <a:t>)</a:t>
-            </a:r>
-          </a:p>
-          <a:p>
-            <a:endParaRPr lang="en-US" altLang="ko-KR" dirty="0"/>
-          </a:p>
-          <a:p>
-            <a:r>
-              <a:rPr lang="ko-KR" altLang="en-US" dirty="0"/>
-              <a:t>방 구조</a:t>
-            </a:r>
-            <a:r>
-              <a:rPr lang="en-US" altLang="ko-KR" dirty="0"/>
-              <a:t>, </a:t>
-            </a:r>
-            <a:r>
-              <a:rPr lang="ko-KR" altLang="en-US" dirty="0"/>
-              <a:t>연결 가능한 방</a:t>
-            </a:r>
-            <a:r>
-              <a:rPr lang="en-US" altLang="ko-KR" dirty="0"/>
-              <a:t>, </a:t>
-            </a:r>
-            <a:r>
-              <a:rPr lang="ko-KR" altLang="en-US" dirty="0"/>
-              <a:t>방 내부에 있는 문</a:t>
-            </a:r>
-            <a:r>
-              <a:rPr lang="en-US" altLang="ko-KR" dirty="0"/>
-              <a:t> </a:t>
-            </a:r>
-            <a:r>
-              <a:rPr lang="ko-KR" altLang="en-US" dirty="0"/>
-              <a:t>개수</a:t>
-            </a:r>
-            <a:r>
-              <a:rPr lang="en-US" altLang="ko-KR" dirty="0"/>
-              <a:t>, </a:t>
-            </a:r>
-            <a:r>
-              <a:rPr lang="ko-KR" altLang="en-US" dirty="0"/>
-              <a:t>선반 등 특수한 오브젝트 개수 </a:t>
-            </a:r>
-            <a:r>
-              <a:rPr lang="ko-KR" altLang="en-US"/>
-              <a:t>등 기재</a:t>
-            </a:r>
-            <a:endParaRPr lang="en-US" altLang="ko-KR" dirty="0"/>
+            <a:fld id="{5413EFF4-4F73-4713-85F9-663DD6DC3937}" type="slidenum">
+              <a:rPr lang="ko-KR" altLang="en-US" smtClean="0"/>
+              <a:t>8</a:t>
+            </a:fld>
+            <a:endParaRPr lang="ko-KR" altLang="en-US"/>
           </a:p>
         </p:txBody>
       </p:sp>
+      <p:graphicFrame>
+        <p:nvGraphicFramePr>
+          <p:cNvPr id="6" name="표 5">
+            <a:extLst>
+              <a:ext uri="{FF2B5EF4-FFF2-40B4-BE49-F238E27FC236}">
+                <a16:creationId xmlns:a16="http://schemas.microsoft.com/office/drawing/2014/main" id="{D8AD620D-733C-884B-D536-9DAF37F78D39}"/>
+              </a:ext>
+            </a:extLst>
+          </p:cNvPr>
+          <p:cNvGraphicFramePr>
+            <a:graphicFrameLocks noGrp="1"/>
+          </p:cNvGraphicFramePr>
+          <p:nvPr>
+            <p:extLst>
+              <p:ext uri="{D42A27DB-BD31-4B8C-83A1-F6EECF244321}">
+                <p14:modId xmlns:p14="http://schemas.microsoft.com/office/powerpoint/2010/main" val="1011633118"/>
+              </p:ext>
+            </p:extLst>
+          </p:nvPr>
+        </p:nvGraphicFramePr>
+        <p:xfrm>
+          <a:off x="5504720" y="1372660"/>
+          <a:ext cx="6142168" cy="5400040"/>
+        </p:xfrm>
+        <a:graphic>
+          <a:graphicData uri="http://schemas.openxmlformats.org/drawingml/2006/table">
+            <a:tbl>
+              <a:tblPr firstRow="1" bandRow="1">
+                <a:tableStyleId>{5C22544A-7EE6-4342-B048-85BDC9FD1C3A}</a:tableStyleId>
+              </a:tblPr>
+              <a:tblGrid>
+                <a:gridCol w="2343016">
+                  <a:extLst>
+                    <a:ext uri="{9D8B030D-6E8A-4147-A177-3AD203B41FA5}">
+                      <a16:colId xmlns:a16="http://schemas.microsoft.com/office/drawing/2014/main" val="540027138"/>
+                    </a:ext>
+                  </a:extLst>
+                </a:gridCol>
+                <a:gridCol w="1616392">
+                  <a:extLst>
+                    <a:ext uri="{9D8B030D-6E8A-4147-A177-3AD203B41FA5}">
+                      <a16:colId xmlns:a16="http://schemas.microsoft.com/office/drawing/2014/main" val="1754040923"/>
+                    </a:ext>
+                  </a:extLst>
+                </a:gridCol>
+                <a:gridCol w="2182760">
+                  <a:extLst>
+                    <a:ext uri="{9D8B030D-6E8A-4147-A177-3AD203B41FA5}">
+                      <a16:colId xmlns:a16="http://schemas.microsoft.com/office/drawing/2014/main" val="2365954894"/>
+                    </a:ext>
+                  </a:extLst>
+                </a:gridCol>
+              </a:tblGrid>
+              <a:tr h="370840">
+                <a:tc>
+                  <a:txBody>
+                    <a:bodyPr/>
+                    <a:lstStyle/>
+                    <a:p>
+                      <a:pPr algn="ctr" latinLnBrk="0"/>
+                      <a:r>
+                        <a:rPr lang="ko-KR" altLang="en-US" sz="1600" b="1" dirty="0">
+                          <a:solidFill>
+                            <a:schemeClr val="tx1"/>
+                          </a:solidFill>
+                        </a:rPr>
+                        <a:t>상태</a:t>
+                      </a:r>
+                      <a:r>
+                        <a:rPr lang="en-US" altLang="ko-KR" sz="1600" b="1" dirty="0">
+                          <a:solidFill>
+                            <a:schemeClr val="tx1"/>
+                          </a:solidFill>
+                        </a:rPr>
+                        <a:t> (state)</a:t>
+                      </a:r>
+                      <a:endParaRPr lang="ko-KR" altLang="en-US" sz="1600" b="1" dirty="0">
+                        <a:solidFill>
+                          <a:schemeClr val="tx1"/>
+                        </a:solidFill>
+                      </a:endParaRPr>
+                    </a:p>
+                  </a:txBody>
+                  <a:tcPr anchor="ctr">
+                    <a:lnL w="12700" cap="flat" cmpd="sng" algn="ctr">
+                      <a:solidFill>
+                        <a:schemeClr val="tx1"/>
+                      </a:solidFill>
+                      <a:prstDash val="solid"/>
+                      <a:round/>
+                      <a:headEnd type="none" w="med" len="med"/>
+                      <a:tailEnd type="none" w="med" len="med"/>
+                    </a:lnL>
+                    <a:lnR w="12700" cap="flat" cmpd="sng" algn="ctr">
+                      <a:solidFill>
+                        <a:schemeClr val="tx1"/>
+                      </a:solidFill>
+                      <a:prstDash val="solid"/>
+                      <a:round/>
+                      <a:headEnd type="none" w="med" len="med"/>
+                      <a:tailEnd type="none" w="med" len="med"/>
+                    </a:lnR>
+                    <a:lnT w="12700" cap="flat" cmpd="sng" algn="ctr">
+                      <a:solidFill>
+                        <a:schemeClr val="tx1"/>
+                      </a:solidFill>
+                      <a:prstDash val="solid"/>
+                      <a:round/>
+                      <a:headEnd type="none" w="med" len="med"/>
+                      <a:tailEnd type="none" w="med" len="med"/>
+                    </a:lnT>
+                    <a:lnB w="12700" cap="flat" cmpd="sng" algn="ctr">
+                      <a:solidFill>
+                        <a:schemeClr val="tx1"/>
+                      </a:solidFill>
+                      <a:prstDash val="solid"/>
+                      <a:round/>
+                      <a:headEnd type="none" w="med" len="med"/>
+                      <a:tailEnd type="none" w="med" len="med"/>
+                    </a:lnB>
+                    <a:solidFill>
+                      <a:srgbClr val="AEAEAE"/>
+                    </a:solidFill>
+                  </a:tcPr>
+                </a:tc>
+                <a:tc>
+                  <a:txBody>
+                    <a:bodyPr/>
+                    <a:lstStyle/>
+                    <a:p>
+                      <a:pPr algn="ctr" latinLnBrk="0"/>
+                      <a:r>
+                        <a:rPr lang="ko-KR" altLang="en-US" sz="1600" b="1" dirty="0">
+                          <a:solidFill>
+                            <a:schemeClr val="tx1"/>
+                          </a:solidFill>
+                        </a:rPr>
+                        <a:t>상태</a:t>
+                      </a:r>
+                      <a:r>
+                        <a:rPr lang="en-US" altLang="ko-KR" sz="1600" b="1" dirty="0">
+                          <a:solidFill>
+                            <a:schemeClr val="tx1"/>
+                          </a:solidFill>
+                        </a:rPr>
+                        <a:t>_</a:t>
+                      </a:r>
+                      <a:r>
+                        <a:rPr lang="ko-KR" altLang="en-US" sz="1600" b="1" dirty="0" err="1">
+                          <a:solidFill>
+                            <a:schemeClr val="tx1"/>
+                          </a:solidFill>
+                        </a:rPr>
+                        <a:t>한글명</a:t>
+                      </a:r>
+                      <a:endParaRPr lang="ko-KR" altLang="en-US" sz="1600" b="1" dirty="0">
+                        <a:solidFill>
+                          <a:schemeClr val="tx1"/>
+                        </a:solidFill>
+                      </a:endParaRPr>
+                    </a:p>
+                  </a:txBody>
+                  <a:tcPr anchor="ctr">
+                    <a:lnL w="12700" cap="flat" cmpd="sng" algn="ctr">
+                      <a:solidFill>
+                        <a:schemeClr val="tx1"/>
+                      </a:solidFill>
+                      <a:prstDash val="solid"/>
+                      <a:round/>
+                      <a:headEnd type="none" w="med" len="med"/>
+                      <a:tailEnd type="none" w="med" len="med"/>
+                    </a:lnL>
+                    <a:lnR w="12700" cap="flat" cmpd="sng" algn="ctr">
+                      <a:solidFill>
+                        <a:schemeClr val="tx1"/>
+                      </a:solidFill>
+                      <a:prstDash val="solid"/>
+                      <a:round/>
+                      <a:headEnd type="none" w="med" len="med"/>
+                      <a:tailEnd type="none" w="med" len="med"/>
+                    </a:lnR>
+                    <a:lnT w="12700" cap="flat" cmpd="sng" algn="ctr">
+                      <a:solidFill>
+                        <a:schemeClr val="tx1"/>
+                      </a:solidFill>
+                      <a:prstDash val="solid"/>
+                      <a:round/>
+                      <a:headEnd type="none" w="med" len="med"/>
+                      <a:tailEnd type="none" w="med" len="med"/>
+                    </a:lnT>
+                    <a:lnB w="12700" cap="flat" cmpd="sng" algn="ctr">
+                      <a:solidFill>
+                        <a:schemeClr val="tx1"/>
+                      </a:solidFill>
+                      <a:prstDash val="solid"/>
+                      <a:round/>
+                      <a:headEnd type="none" w="med" len="med"/>
+                      <a:tailEnd type="none" w="med" len="med"/>
+                    </a:lnB>
+                    <a:solidFill>
+                      <a:srgbClr val="AEAEAE"/>
+                    </a:solidFill>
+                  </a:tcPr>
+                </a:tc>
+                <a:tc>
+                  <a:txBody>
+                    <a:bodyPr/>
+                    <a:lstStyle/>
+                    <a:p>
+                      <a:pPr algn="ctr" latinLnBrk="0"/>
+                      <a:r>
+                        <a:rPr lang="ko-KR" altLang="en-US" sz="1600" b="1" dirty="0">
+                          <a:solidFill>
+                            <a:schemeClr val="tx1"/>
+                          </a:solidFill>
+                        </a:rPr>
+                        <a:t>설명</a:t>
+                      </a:r>
+                    </a:p>
+                  </a:txBody>
+                  <a:tcPr anchor="ctr">
+                    <a:lnL w="12700" cap="flat" cmpd="sng" algn="ctr">
+                      <a:solidFill>
+                        <a:schemeClr val="tx1"/>
+                      </a:solidFill>
+                      <a:prstDash val="solid"/>
+                      <a:round/>
+                      <a:headEnd type="none" w="med" len="med"/>
+                      <a:tailEnd type="none" w="med" len="med"/>
+                    </a:lnL>
+                    <a:lnR w="12700" cap="flat" cmpd="sng" algn="ctr">
+                      <a:solidFill>
+                        <a:schemeClr val="tx1"/>
+                      </a:solidFill>
+                      <a:prstDash val="solid"/>
+                      <a:round/>
+                      <a:headEnd type="none" w="med" len="med"/>
+                      <a:tailEnd type="none" w="med" len="med"/>
+                    </a:lnR>
+                    <a:lnT w="12700" cap="flat" cmpd="sng" algn="ctr">
+                      <a:solidFill>
+                        <a:schemeClr val="tx1"/>
+                      </a:solidFill>
+                      <a:prstDash val="solid"/>
+                      <a:round/>
+                      <a:headEnd type="none" w="med" len="med"/>
+                      <a:tailEnd type="none" w="med" len="med"/>
+                    </a:lnT>
+                    <a:lnB w="12700" cap="flat" cmpd="sng" algn="ctr">
+                      <a:solidFill>
+                        <a:schemeClr val="tx1"/>
+                      </a:solidFill>
+                      <a:prstDash val="solid"/>
+                      <a:round/>
+                      <a:headEnd type="none" w="med" len="med"/>
+                      <a:tailEnd type="none" w="med" len="med"/>
+                    </a:lnB>
+                    <a:solidFill>
+                      <a:srgbClr val="AEAEAE"/>
+                    </a:solidFill>
+                  </a:tcPr>
+                </a:tc>
+                <a:extLst>
+                  <a:ext uri="{0D108BD9-81ED-4DB2-BD59-A6C34878D82A}">
+                    <a16:rowId xmlns:a16="http://schemas.microsoft.com/office/drawing/2014/main" val="3335730409"/>
+                  </a:ext>
+                </a:extLst>
+              </a:tr>
+              <a:tr h="370840">
+                <a:tc>
+                  <a:txBody>
+                    <a:bodyPr/>
+                    <a:lstStyle/>
+                    <a:p>
+                      <a:pPr algn="ctr" latinLnBrk="0"/>
+                      <a:r>
+                        <a:rPr lang="en-US" altLang="ko-KR" sz="1600" b="1" dirty="0">
+                          <a:solidFill>
+                            <a:schemeClr val="tx1"/>
+                          </a:solidFill>
+                        </a:rPr>
+                        <a:t>Idle</a:t>
+                      </a:r>
+                      <a:endParaRPr lang="ko-KR" altLang="en-US" sz="1600" b="1" dirty="0">
+                        <a:solidFill>
+                          <a:schemeClr val="tx1"/>
+                        </a:solidFill>
+                      </a:endParaRPr>
+                    </a:p>
+                  </a:txBody>
+                  <a:tcPr anchor="ctr">
+                    <a:lnL w="12700" cap="flat" cmpd="sng" algn="ctr">
+                      <a:solidFill>
+                        <a:schemeClr val="tx1"/>
+                      </a:solidFill>
+                      <a:prstDash val="solid"/>
+                      <a:round/>
+                      <a:headEnd type="none" w="med" len="med"/>
+                      <a:tailEnd type="none" w="med" len="med"/>
+                    </a:lnL>
+                    <a:lnR w="12700" cap="flat" cmpd="sng" algn="ctr">
+                      <a:solidFill>
+                        <a:schemeClr val="tx1"/>
+                      </a:solidFill>
+                      <a:prstDash val="solid"/>
+                      <a:round/>
+                      <a:headEnd type="none" w="med" len="med"/>
+                      <a:tailEnd type="none" w="med" len="med"/>
+                    </a:lnR>
+                    <a:lnT w="12700" cap="flat" cmpd="sng" algn="ctr">
+                      <a:solidFill>
+                        <a:schemeClr val="tx1"/>
+                      </a:solidFill>
+                      <a:prstDash val="solid"/>
+                      <a:round/>
+                      <a:headEnd type="none" w="med" len="med"/>
+                      <a:tailEnd type="none" w="med" len="med"/>
+                    </a:lnT>
+                    <a:lnB w="12700" cap="flat" cmpd="sng" algn="ctr">
+                      <a:solidFill>
+                        <a:schemeClr val="tx1"/>
+                      </a:solidFill>
+                      <a:prstDash val="solid"/>
+                      <a:round/>
+                      <a:headEnd type="none" w="med" len="med"/>
+                      <a:tailEnd type="none" w="med" len="med"/>
+                    </a:lnB>
+                    <a:solidFill>
+                      <a:srgbClr val="D1D1D1"/>
+                    </a:solidFill>
+                  </a:tcPr>
+                </a:tc>
+                <a:tc>
+                  <a:txBody>
+                    <a:bodyPr/>
+                    <a:lstStyle/>
+                    <a:p>
+                      <a:pPr algn="ctr" latinLnBrk="0"/>
+                      <a:r>
+                        <a:rPr lang="ko-KR" altLang="en-US" sz="1600" b="0" dirty="0">
+                          <a:solidFill>
+                            <a:schemeClr val="tx1"/>
+                          </a:solidFill>
+                        </a:rPr>
+                        <a:t>대기</a:t>
+                      </a:r>
+                    </a:p>
+                  </a:txBody>
+                  <a:tcPr anchor="ctr">
+                    <a:lnL w="12700" cap="flat" cmpd="sng" algn="ctr">
+                      <a:solidFill>
+                        <a:schemeClr val="tx1"/>
+                      </a:solidFill>
+                      <a:prstDash val="solid"/>
+                      <a:round/>
+                      <a:headEnd type="none" w="med" len="med"/>
+                      <a:tailEnd type="none" w="med" len="med"/>
+                    </a:lnL>
+                    <a:lnR w="12700" cap="flat" cmpd="sng" algn="ctr">
+                      <a:solidFill>
+                        <a:schemeClr val="tx1"/>
+                      </a:solidFill>
+                      <a:prstDash val="solid"/>
+                      <a:round/>
+                      <a:headEnd type="none" w="med" len="med"/>
+                      <a:tailEnd type="none" w="med" len="med"/>
+                    </a:lnR>
+                    <a:lnT w="12700" cap="flat" cmpd="sng" algn="ctr">
+                      <a:solidFill>
+                        <a:schemeClr val="tx1"/>
+                      </a:solidFill>
+                      <a:prstDash val="solid"/>
+                      <a:round/>
+                      <a:headEnd type="none" w="med" len="med"/>
+                      <a:tailEnd type="none" w="med" len="med"/>
+                    </a:lnT>
+                    <a:lnB w="12700" cap="flat" cmpd="sng" algn="ctr">
+                      <a:solidFill>
+                        <a:schemeClr val="tx1"/>
+                      </a:solidFill>
+                      <a:prstDash val="solid"/>
+                      <a:round/>
+                      <a:headEnd type="none" w="med" len="med"/>
+                      <a:tailEnd type="none" w="med" len="med"/>
+                    </a:lnB>
+                    <a:solidFill>
+                      <a:srgbClr val="D1D1D1"/>
+                    </a:solidFill>
+                  </a:tcPr>
+                </a:tc>
+                <a:tc>
+                  <a:txBody>
+                    <a:bodyPr/>
+                    <a:lstStyle/>
+                    <a:p>
+                      <a:pPr marL="0" marR="0" lvl="0" indent="0" algn="l" defTabSz="914400" rtl="0" eaLnBrk="1" fontAlgn="auto" latinLnBrk="0" hangingPunct="1">
+                        <a:lnSpc>
+                          <a:spcPct val="100000"/>
+                        </a:lnSpc>
+                        <a:spcBef>
+                          <a:spcPts val="0"/>
+                        </a:spcBef>
+                        <a:spcAft>
+                          <a:spcPts val="0"/>
+                        </a:spcAft>
+                        <a:buClrTx/>
+                        <a:buSzTx/>
+                        <a:buFontTx/>
+                        <a:buNone/>
+                        <a:tabLst/>
+                        <a:defRPr/>
+                      </a:pPr>
+                      <a:r>
+                        <a:rPr lang="ko-KR" altLang="en-US" sz="1600" b="0" dirty="0">
+                          <a:solidFill>
+                            <a:schemeClr val="tx1"/>
+                          </a:solidFill>
+                        </a:rPr>
+                        <a:t>키 입력 </a:t>
+                      </a:r>
+                      <a:r>
+                        <a:rPr lang="en-US" altLang="ko-KR" sz="1600" b="0" dirty="0">
+                          <a:solidFill>
+                            <a:schemeClr val="tx1"/>
+                          </a:solidFill>
+                        </a:rPr>
+                        <a:t>x</a:t>
+                      </a:r>
+                      <a:endParaRPr lang="ko-KR" altLang="en-US" sz="1600" b="0" dirty="0">
+                        <a:solidFill>
+                          <a:schemeClr val="tx1"/>
+                        </a:solidFill>
+                      </a:endParaRPr>
+                    </a:p>
+                  </a:txBody>
+                  <a:tcPr anchor="ctr">
+                    <a:lnL w="12700" cap="flat" cmpd="sng" algn="ctr">
+                      <a:solidFill>
+                        <a:schemeClr val="tx1"/>
+                      </a:solidFill>
+                      <a:prstDash val="solid"/>
+                      <a:round/>
+                      <a:headEnd type="none" w="med" len="med"/>
+                      <a:tailEnd type="none" w="med" len="med"/>
+                    </a:lnL>
+                    <a:lnR w="12700" cap="flat" cmpd="sng" algn="ctr">
+                      <a:solidFill>
+                        <a:schemeClr val="tx1"/>
+                      </a:solidFill>
+                      <a:prstDash val="solid"/>
+                      <a:round/>
+                      <a:headEnd type="none" w="med" len="med"/>
+                      <a:tailEnd type="none" w="med" len="med"/>
+                    </a:lnR>
+                    <a:lnT w="12700" cap="flat" cmpd="sng" algn="ctr">
+                      <a:solidFill>
+                        <a:schemeClr val="tx1"/>
+                      </a:solidFill>
+                      <a:prstDash val="solid"/>
+                      <a:round/>
+                      <a:headEnd type="none" w="med" len="med"/>
+                      <a:tailEnd type="none" w="med" len="med"/>
+                    </a:lnT>
+                    <a:lnB w="12700" cap="flat" cmpd="sng" algn="ctr">
+                      <a:solidFill>
+                        <a:schemeClr val="tx1"/>
+                      </a:solidFill>
+                      <a:prstDash val="solid"/>
+                      <a:round/>
+                      <a:headEnd type="none" w="med" len="med"/>
+                      <a:tailEnd type="none" w="med" len="med"/>
+                    </a:lnB>
+                    <a:solidFill>
+                      <a:schemeClr val="bg1"/>
+                    </a:solidFill>
+                  </a:tcPr>
+                </a:tc>
+                <a:extLst>
+                  <a:ext uri="{0D108BD9-81ED-4DB2-BD59-A6C34878D82A}">
+                    <a16:rowId xmlns:a16="http://schemas.microsoft.com/office/drawing/2014/main" val="1597518683"/>
+                  </a:ext>
+                </a:extLst>
+              </a:tr>
+              <a:tr h="370840">
+                <a:tc>
+                  <a:txBody>
+                    <a:bodyPr/>
+                    <a:lstStyle/>
+                    <a:p>
+                      <a:pPr algn="ctr" latinLnBrk="0"/>
+                      <a:r>
+                        <a:rPr lang="en-US" altLang="ko-KR" sz="1600" b="1" dirty="0">
+                          <a:solidFill>
+                            <a:schemeClr val="tx1"/>
+                          </a:solidFill>
+                        </a:rPr>
+                        <a:t>Move</a:t>
+                      </a:r>
+                    </a:p>
+                  </a:txBody>
+                  <a:tcPr anchor="ctr">
+                    <a:lnL w="12700" cap="flat" cmpd="sng" algn="ctr">
+                      <a:solidFill>
+                        <a:schemeClr val="tx1"/>
+                      </a:solidFill>
+                      <a:prstDash val="solid"/>
+                      <a:round/>
+                      <a:headEnd type="none" w="med" len="med"/>
+                      <a:tailEnd type="none" w="med" len="med"/>
+                    </a:lnL>
+                    <a:lnR w="12700" cap="flat" cmpd="sng" algn="ctr">
+                      <a:solidFill>
+                        <a:schemeClr val="tx1"/>
+                      </a:solidFill>
+                      <a:prstDash val="solid"/>
+                      <a:round/>
+                      <a:headEnd type="none" w="med" len="med"/>
+                      <a:tailEnd type="none" w="med" len="med"/>
+                    </a:lnR>
+                    <a:lnT w="12700" cap="flat" cmpd="sng" algn="ctr">
+                      <a:solidFill>
+                        <a:schemeClr val="tx1"/>
+                      </a:solidFill>
+                      <a:prstDash val="solid"/>
+                      <a:round/>
+                      <a:headEnd type="none" w="med" len="med"/>
+                      <a:tailEnd type="none" w="med" len="med"/>
+                    </a:lnT>
+                    <a:lnB w="12700" cap="flat" cmpd="sng" algn="ctr">
+                      <a:solidFill>
+                        <a:schemeClr val="tx1"/>
+                      </a:solidFill>
+                      <a:prstDash val="solid"/>
+                      <a:round/>
+                      <a:headEnd type="none" w="med" len="med"/>
+                      <a:tailEnd type="none" w="med" len="med"/>
+                    </a:lnB>
+                    <a:solidFill>
+                      <a:srgbClr val="D1D1D1"/>
+                    </a:solidFill>
+                  </a:tcPr>
+                </a:tc>
+                <a:tc>
+                  <a:txBody>
+                    <a:bodyPr/>
+                    <a:lstStyle/>
+                    <a:p>
+                      <a:pPr algn="ctr" latinLnBrk="0"/>
+                      <a:r>
+                        <a:rPr lang="ko-KR" altLang="en-US" sz="1600" b="0" dirty="0">
+                          <a:solidFill>
+                            <a:schemeClr val="tx1"/>
+                          </a:solidFill>
+                        </a:rPr>
+                        <a:t>걷기</a:t>
+                      </a:r>
+                      <a:endParaRPr lang="en-US" altLang="ko-KR" sz="1600" b="0" dirty="0">
+                        <a:solidFill>
+                          <a:schemeClr val="tx1"/>
+                        </a:solidFill>
+                      </a:endParaRPr>
+                    </a:p>
+                  </a:txBody>
+                  <a:tcPr anchor="ctr">
+                    <a:lnL w="12700" cap="flat" cmpd="sng" algn="ctr">
+                      <a:solidFill>
+                        <a:schemeClr val="tx1"/>
+                      </a:solidFill>
+                      <a:prstDash val="solid"/>
+                      <a:round/>
+                      <a:headEnd type="none" w="med" len="med"/>
+                      <a:tailEnd type="none" w="med" len="med"/>
+                    </a:lnL>
+                    <a:lnR w="12700" cap="flat" cmpd="sng" algn="ctr">
+                      <a:solidFill>
+                        <a:schemeClr val="tx1"/>
+                      </a:solidFill>
+                      <a:prstDash val="solid"/>
+                      <a:round/>
+                      <a:headEnd type="none" w="med" len="med"/>
+                      <a:tailEnd type="none" w="med" len="med"/>
+                    </a:lnR>
+                    <a:lnT w="12700" cap="flat" cmpd="sng" algn="ctr">
+                      <a:solidFill>
+                        <a:schemeClr val="tx1"/>
+                      </a:solidFill>
+                      <a:prstDash val="solid"/>
+                      <a:round/>
+                      <a:headEnd type="none" w="med" len="med"/>
+                      <a:tailEnd type="none" w="med" len="med"/>
+                    </a:lnT>
+                    <a:lnB w="12700" cap="flat" cmpd="sng" algn="ctr">
+                      <a:solidFill>
+                        <a:schemeClr val="tx1"/>
+                      </a:solidFill>
+                      <a:prstDash val="solid"/>
+                      <a:round/>
+                      <a:headEnd type="none" w="med" len="med"/>
+                      <a:tailEnd type="none" w="med" len="med"/>
+                    </a:lnB>
+                    <a:solidFill>
+                      <a:srgbClr val="D1D1D1"/>
+                    </a:solidFill>
+                  </a:tcPr>
+                </a:tc>
+                <a:tc>
+                  <a:txBody>
+                    <a:bodyPr/>
+                    <a:lstStyle/>
+                    <a:p>
+                      <a:pPr marL="0" indent="0" algn="l" latinLnBrk="0">
+                        <a:buFontTx/>
+                        <a:buNone/>
+                      </a:pPr>
+                      <a:endParaRPr lang="ko-KR" altLang="en-US" sz="1600" b="0" dirty="0">
+                        <a:solidFill>
+                          <a:schemeClr val="tx1"/>
+                        </a:solidFill>
+                      </a:endParaRPr>
+                    </a:p>
+                  </a:txBody>
+                  <a:tcPr anchor="ctr">
+                    <a:lnL w="12700" cap="flat" cmpd="sng" algn="ctr">
+                      <a:solidFill>
+                        <a:schemeClr val="tx1"/>
+                      </a:solidFill>
+                      <a:prstDash val="solid"/>
+                      <a:round/>
+                      <a:headEnd type="none" w="med" len="med"/>
+                      <a:tailEnd type="none" w="med" len="med"/>
+                    </a:lnL>
+                    <a:lnR w="12700" cap="flat" cmpd="sng" algn="ctr">
+                      <a:solidFill>
+                        <a:schemeClr val="tx1"/>
+                      </a:solidFill>
+                      <a:prstDash val="solid"/>
+                      <a:round/>
+                      <a:headEnd type="none" w="med" len="med"/>
+                      <a:tailEnd type="none" w="med" len="med"/>
+                    </a:lnR>
+                    <a:lnT w="12700" cap="flat" cmpd="sng" algn="ctr">
+                      <a:solidFill>
+                        <a:schemeClr val="tx1"/>
+                      </a:solidFill>
+                      <a:prstDash val="solid"/>
+                      <a:round/>
+                      <a:headEnd type="none" w="med" len="med"/>
+                      <a:tailEnd type="none" w="med" len="med"/>
+                    </a:lnT>
+                    <a:lnB w="12700" cap="flat" cmpd="sng" algn="ctr">
+                      <a:solidFill>
+                        <a:schemeClr val="tx1"/>
+                      </a:solidFill>
+                      <a:prstDash val="solid"/>
+                      <a:round/>
+                      <a:headEnd type="none" w="med" len="med"/>
+                      <a:tailEnd type="none" w="med" len="med"/>
+                    </a:lnB>
+                    <a:solidFill>
+                      <a:schemeClr val="bg1"/>
+                    </a:solidFill>
+                  </a:tcPr>
+                </a:tc>
+                <a:extLst>
+                  <a:ext uri="{0D108BD9-81ED-4DB2-BD59-A6C34878D82A}">
+                    <a16:rowId xmlns:a16="http://schemas.microsoft.com/office/drawing/2014/main" val="2546494209"/>
+                  </a:ext>
+                </a:extLst>
+              </a:tr>
+              <a:tr h="370840">
+                <a:tc>
+                  <a:txBody>
+                    <a:bodyPr/>
+                    <a:lstStyle/>
+                    <a:p>
+                      <a:pPr algn="ctr" latinLnBrk="0"/>
+                      <a:r>
+                        <a:rPr lang="en-US" altLang="ko-KR" sz="1600" b="1" dirty="0">
+                          <a:solidFill>
+                            <a:schemeClr val="tx1"/>
+                          </a:solidFill>
+                        </a:rPr>
+                        <a:t>Run</a:t>
+                      </a:r>
+                    </a:p>
+                  </a:txBody>
+                  <a:tcPr anchor="ctr">
+                    <a:lnL w="12700" cap="flat" cmpd="sng" algn="ctr">
+                      <a:solidFill>
+                        <a:schemeClr val="tx1"/>
+                      </a:solidFill>
+                      <a:prstDash val="solid"/>
+                      <a:round/>
+                      <a:headEnd type="none" w="med" len="med"/>
+                      <a:tailEnd type="none" w="med" len="med"/>
+                    </a:lnL>
+                    <a:lnR w="12700" cap="flat" cmpd="sng" algn="ctr">
+                      <a:solidFill>
+                        <a:schemeClr val="tx1"/>
+                      </a:solidFill>
+                      <a:prstDash val="solid"/>
+                      <a:round/>
+                      <a:headEnd type="none" w="med" len="med"/>
+                      <a:tailEnd type="none" w="med" len="med"/>
+                    </a:lnR>
+                    <a:lnT w="12700" cap="flat" cmpd="sng" algn="ctr">
+                      <a:solidFill>
+                        <a:schemeClr val="tx1"/>
+                      </a:solidFill>
+                      <a:prstDash val="solid"/>
+                      <a:round/>
+                      <a:headEnd type="none" w="med" len="med"/>
+                      <a:tailEnd type="none" w="med" len="med"/>
+                    </a:lnT>
+                    <a:lnB w="12700" cap="flat" cmpd="sng" algn="ctr">
+                      <a:solidFill>
+                        <a:schemeClr val="tx1"/>
+                      </a:solidFill>
+                      <a:prstDash val="solid"/>
+                      <a:round/>
+                      <a:headEnd type="none" w="med" len="med"/>
+                      <a:tailEnd type="none" w="med" len="med"/>
+                    </a:lnB>
+                    <a:solidFill>
+                      <a:srgbClr val="D1D1D1"/>
+                    </a:solidFill>
+                  </a:tcPr>
+                </a:tc>
+                <a:tc>
+                  <a:txBody>
+                    <a:bodyPr/>
+                    <a:lstStyle/>
+                    <a:p>
+                      <a:pPr algn="ctr" latinLnBrk="0"/>
+                      <a:r>
+                        <a:rPr lang="ko-KR" altLang="en-US" sz="1600" b="0" dirty="0">
+                          <a:solidFill>
+                            <a:schemeClr val="tx1"/>
+                          </a:solidFill>
+                        </a:rPr>
+                        <a:t>달리기</a:t>
+                      </a:r>
+                      <a:endParaRPr lang="en-US" altLang="ko-KR" sz="1600" b="0" dirty="0">
+                        <a:solidFill>
+                          <a:schemeClr val="tx1"/>
+                        </a:solidFill>
+                      </a:endParaRPr>
+                    </a:p>
+                  </a:txBody>
+                  <a:tcPr anchor="ctr">
+                    <a:lnL w="12700" cap="flat" cmpd="sng" algn="ctr">
+                      <a:solidFill>
+                        <a:schemeClr val="tx1"/>
+                      </a:solidFill>
+                      <a:prstDash val="solid"/>
+                      <a:round/>
+                      <a:headEnd type="none" w="med" len="med"/>
+                      <a:tailEnd type="none" w="med" len="med"/>
+                    </a:lnL>
+                    <a:lnR w="12700" cap="flat" cmpd="sng" algn="ctr">
+                      <a:solidFill>
+                        <a:schemeClr val="tx1"/>
+                      </a:solidFill>
+                      <a:prstDash val="solid"/>
+                      <a:round/>
+                      <a:headEnd type="none" w="med" len="med"/>
+                      <a:tailEnd type="none" w="med" len="med"/>
+                    </a:lnR>
+                    <a:lnT w="12700" cap="flat" cmpd="sng" algn="ctr">
+                      <a:solidFill>
+                        <a:schemeClr val="tx1"/>
+                      </a:solidFill>
+                      <a:prstDash val="solid"/>
+                      <a:round/>
+                      <a:headEnd type="none" w="med" len="med"/>
+                      <a:tailEnd type="none" w="med" len="med"/>
+                    </a:lnT>
+                    <a:lnB w="12700" cap="flat" cmpd="sng" algn="ctr">
+                      <a:solidFill>
+                        <a:schemeClr val="tx1"/>
+                      </a:solidFill>
+                      <a:prstDash val="solid"/>
+                      <a:round/>
+                      <a:headEnd type="none" w="med" len="med"/>
+                      <a:tailEnd type="none" w="med" len="med"/>
+                    </a:lnB>
+                    <a:solidFill>
+                      <a:srgbClr val="D1D1D1"/>
+                    </a:solidFill>
+                  </a:tcPr>
+                </a:tc>
+                <a:tc>
+                  <a:txBody>
+                    <a:bodyPr/>
+                    <a:lstStyle/>
+                    <a:p>
+                      <a:pPr marL="0" indent="0" algn="l" latinLnBrk="0">
+                        <a:buFontTx/>
+                        <a:buNone/>
+                      </a:pPr>
+                      <a:endParaRPr lang="ko-KR" altLang="en-US" sz="1600" b="0" dirty="0">
+                        <a:solidFill>
+                          <a:schemeClr val="tx1"/>
+                        </a:solidFill>
+                      </a:endParaRPr>
+                    </a:p>
+                  </a:txBody>
+                  <a:tcPr anchor="ctr">
+                    <a:lnL w="12700" cap="flat" cmpd="sng" algn="ctr">
+                      <a:solidFill>
+                        <a:schemeClr val="tx1"/>
+                      </a:solidFill>
+                      <a:prstDash val="solid"/>
+                      <a:round/>
+                      <a:headEnd type="none" w="med" len="med"/>
+                      <a:tailEnd type="none" w="med" len="med"/>
+                    </a:lnL>
+                    <a:lnR w="12700" cap="flat" cmpd="sng" algn="ctr">
+                      <a:solidFill>
+                        <a:schemeClr val="tx1"/>
+                      </a:solidFill>
+                      <a:prstDash val="solid"/>
+                      <a:round/>
+                      <a:headEnd type="none" w="med" len="med"/>
+                      <a:tailEnd type="none" w="med" len="med"/>
+                    </a:lnR>
+                    <a:lnT w="12700" cap="flat" cmpd="sng" algn="ctr">
+                      <a:solidFill>
+                        <a:schemeClr val="tx1"/>
+                      </a:solidFill>
+                      <a:prstDash val="solid"/>
+                      <a:round/>
+                      <a:headEnd type="none" w="med" len="med"/>
+                      <a:tailEnd type="none" w="med" len="med"/>
+                    </a:lnT>
+                    <a:lnB w="12700" cap="flat" cmpd="sng" algn="ctr">
+                      <a:solidFill>
+                        <a:schemeClr val="tx1"/>
+                      </a:solidFill>
+                      <a:prstDash val="solid"/>
+                      <a:round/>
+                      <a:headEnd type="none" w="med" len="med"/>
+                      <a:tailEnd type="none" w="med" len="med"/>
+                    </a:lnB>
+                    <a:solidFill>
+                      <a:schemeClr val="bg1"/>
+                    </a:solidFill>
+                  </a:tcPr>
+                </a:tc>
+                <a:extLst>
+                  <a:ext uri="{0D108BD9-81ED-4DB2-BD59-A6C34878D82A}">
+                    <a16:rowId xmlns:a16="http://schemas.microsoft.com/office/drawing/2014/main" val="4092385994"/>
+                  </a:ext>
+                </a:extLst>
+              </a:tr>
+              <a:tr h="370840">
+                <a:tc>
+                  <a:txBody>
+                    <a:bodyPr/>
+                    <a:lstStyle/>
+                    <a:p>
+                      <a:pPr algn="ctr" latinLnBrk="0"/>
+                      <a:r>
+                        <a:rPr lang="en-US" altLang="ko-KR" sz="1600" b="1" dirty="0">
+                          <a:solidFill>
+                            <a:schemeClr val="tx1"/>
+                          </a:solidFill>
+                        </a:rPr>
+                        <a:t>Jump</a:t>
+                      </a:r>
+                    </a:p>
+                  </a:txBody>
+                  <a:tcPr anchor="ctr">
+                    <a:lnL w="12700" cap="flat" cmpd="sng" algn="ctr">
+                      <a:solidFill>
+                        <a:schemeClr val="tx1"/>
+                      </a:solidFill>
+                      <a:prstDash val="solid"/>
+                      <a:round/>
+                      <a:headEnd type="none" w="med" len="med"/>
+                      <a:tailEnd type="none" w="med" len="med"/>
+                    </a:lnL>
+                    <a:lnR w="12700" cap="flat" cmpd="sng" algn="ctr">
+                      <a:solidFill>
+                        <a:schemeClr val="tx1"/>
+                      </a:solidFill>
+                      <a:prstDash val="solid"/>
+                      <a:round/>
+                      <a:headEnd type="none" w="med" len="med"/>
+                      <a:tailEnd type="none" w="med" len="med"/>
+                    </a:lnR>
+                    <a:lnT w="12700" cap="flat" cmpd="sng" algn="ctr">
+                      <a:solidFill>
+                        <a:schemeClr val="tx1"/>
+                      </a:solidFill>
+                      <a:prstDash val="solid"/>
+                      <a:round/>
+                      <a:headEnd type="none" w="med" len="med"/>
+                      <a:tailEnd type="none" w="med" len="med"/>
+                    </a:lnT>
+                    <a:lnB w="12700" cap="flat" cmpd="sng" algn="ctr">
+                      <a:solidFill>
+                        <a:schemeClr val="tx1"/>
+                      </a:solidFill>
+                      <a:prstDash val="solid"/>
+                      <a:round/>
+                      <a:headEnd type="none" w="med" len="med"/>
+                      <a:tailEnd type="none" w="med" len="med"/>
+                    </a:lnB>
+                    <a:solidFill>
+                      <a:srgbClr val="D1D1D1"/>
+                    </a:solidFill>
+                  </a:tcPr>
+                </a:tc>
+                <a:tc>
+                  <a:txBody>
+                    <a:bodyPr/>
+                    <a:lstStyle/>
+                    <a:p>
+                      <a:pPr algn="ctr" latinLnBrk="0"/>
+                      <a:r>
+                        <a:rPr lang="ko-KR" altLang="en-US" sz="1600" b="0" dirty="0">
+                          <a:solidFill>
+                            <a:schemeClr val="tx1"/>
+                          </a:solidFill>
+                        </a:rPr>
+                        <a:t>점프</a:t>
+                      </a:r>
+                      <a:endParaRPr lang="en-US" altLang="ko-KR" sz="1600" b="0" dirty="0">
+                        <a:solidFill>
+                          <a:schemeClr val="tx1"/>
+                        </a:solidFill>
+                      </a:endParaRPr>
+                    </a:p>
+                  </a:txBody>
+                  <a:tcPr anchor="ctr">
+                    <a:lnL w="12700" cap="flat" cmpd="sng" algn="ctr">
+                      <a:solidFill>
+                        <a:schemeClr val="tx1"/>
+                      </a:solidFill>
+                      <a:prstDash val="solid"/>
+                      <a:round/>
+                      <a:headEnd type="none" w="med" len="med"/>
+                      <a:tailEnd type="none" w="med" len="med"/>
+                    </a:lnL>
+                    <a:lnR w="12700" cap="flat" cmpd="sng" algn="ctr">
+                      <a:solidFill>
+                        <a:schemeClr val="tx1"/>
+                      </a:solidFill>
+                      <a:prstDash val="solid"/>
+                      <a:round/>
+                      <a:headEnd type="none" w="med" len="med"/>
+                      <a:tailEnd type="none" w="med" len="med"/>
+                    </a:lnR>
+                    <a:lnT w="12700" cap="flat" cmpd="sng" algn="ctr">
+                      <a:solidFill>
+                        <a:schemeClr val="tx1"/>
+                      </a:solidFill>
+                      <a:prstDash val="solid"/>
+                      <a:round/>
+                      <a:headEnd type="none" w="med" len="med"/>
+                      <a:tailEnd type="none" w="med" len="med"/>
+                    </a:lnT>
+                    <a:lnB w="12700" cap="flat" cmpd="sng" algn="ctr">
+                      <a:solidFill>
+                        <a:schemeClr val="tx1"/>
+                      </a:solidFill>
+                      <a:prstDash val="solid"/>
+                      <a:round/>
+                      <a:headEnd type="none" w="med" len="med"/>
+                      <a:tailEnd type="none" w="med" len="med"/>
+                    </a:lnB>
+                    <a:solidFill>
+                      <a:srgbClr val="D1D1D1"/>
+                    </a:solidFill>
+                  </a:tcPr>
+                </a:tc>
+                <a:tc>
+                  <a:txBody>
+                    <a:bodyPr/>
+                    <a:lstStyle/>
+                    <a:p>
+                      <a:pPr marL="0" indent="0" algn="l" latinLnBrk="0">
+                        <a:buFontTx/>
+                        <a:buNone/>
+                      </a:pPr>
+                      <a:endParaRPr lang="ko-KR" altLang="en-US" sz="1600" b="0" dirty="0">
+                        <a:solidFill>
+                          <a:schemeClr val="tx1"/>
+                        </a:solidFill>
+                      </a:endParaRPr>
+                    </a:p>
+                  </a:txBody>
+                  <a:tcPr anchor="ctr">
+                    <a:lnL w="12700" cap="flat" cmpd="sng" algn="ctr">
+                      <a:solidFill>
+                        <a:schemeClr val="tx1"/>
+                      </a:solidFill>
+                      <a:prstDash val="solid"/>
+                      <a:round/>
+                      <a:headEnd type="none" w="med" len="med"/>
+                      <a:tailEnd type="none" w="med" len="med"/>
+                    </a:lnL>
+                    <a:lnR w="12700" cap="flat" cmpd="sng" algn="ctr">
+                      <a:solidFill>
+                        <a:schemeClr val="tx1"/>
+                      </a:solidFill>
+                      <a:prstDash val="solid"/>
+                      <a:round/>
+                      <a:headEnd type="none" w="med" len="med"/>
+                      <a:tailEnd type="none" w="med" len="med"/>
+                    </a:lnR>
+                    <a:lnT w="12700" cap="flat" cmpd="sng" algn="ctr">
+                      <a:solidFill>
+                        <a:schemeClr val="tx1"/>
+                      </a:solidFill>
+                      <a:prstDash val="solid"/>
+                      <a:round/>
+                      <a:headEnd type="none" w="med" len="med"/>
+                      <a:tailEnd type="none" w="med" len="med"/>
+                    </a:lnT>
+                    <a:lnB w="12700" cap="flat" cmpd="sng" algn="ctr">
+                      <a:solidFill>
+                        <a:schemeClr val="tx1"/>
+                      </a:solidFill>
+                      <a:prstDash val="solid"/>
+                      <a:round/>
+                      <a:headEnd type="none" w="med" len="med"/>
+                      <a:tailEnd type="none" w="med" len="med"/>
+                    </a:lnB>
+                    <a:solidFill>
+                      <a:schemeClr val="bg1"/>
+                    </a:solidFill>
+                  </a:tcPr>
+                </a:tc>
+                <a:extLst>
+                  <a:ext uri="{0D108BD9-81ED-4DB2-BD59-A6C34878D82A}">
+                    <a16:rowId xmlns:a16="http://schemas.microsoft.com/office/drawing/2014/main" val="2016868011"/>
+                  </a:ext>
+                </a:extLst>
+              </a:tr>
+              <a:tr h="370840">
+                <a:tc>
+                  <a:txBody>
+                    <a:bodyPr/>
+                    <a:lstStyle/>
+                    <a:p>
+                      <a:pPr algn="ctr" latinLnBrk="0"/>
+                      <a:r>
+                        <a:rPr lang="en-US" altLang="ko-KR" sz="1600" b="1" dirty="0" err="1">
+                          <a:solidFill>
+                            <a:schemeClr val="tx1"/>
+                          </a:solidFill>
+                        </a:rPr>
+                        <a:t>DuckDown</a:t>
+                      </a:r>
+                      <a:endParaRPr lang="en-US" altLang="ko-KR" sz="1600" b="1" dirty="0">
+                        <a:solidFill>
+                          <a:schemeClr val="tx1"/>
+                        </a:solidFill>
+                      </a:endParaRPr>
+                    </a:p>
+                  </a:txBody>
+                  <a:tcPr anchor="ctr">
+                    <a:lnL w="12700" cap="flat" cmpd="sng" algn="ctr">
+                      <a:solidFill>
+                        <a:schemeClr val="tx1"/>
+                      </a:solidFill>
+                      <a:prstDash val="solid"/>
+                      <a:round/>
+                      <a:headEnd type="none" w="med" len="med"/>
+                      <a:tailEnd type="none" w="med" len="med"/>
+                    </a:lnL>
+                    <a:lnR w="12700" cap="flat" cmpd="sng" algn="ctr">
+                      <a:solidFill>
+                        <a:schemeClr val="tx1"/>
+                      </a:solidFill>
+                      <a:prstDash val="solid"/>
+                      <a:round/>
+                      <a:headEnd type="none" w="med" len="med"/>
+                      <a:tailEnd type="none" w="med" len="med"/>
+                    </a:lnR>
+                    <a:lnT w="12700" cap="flat" cmpd="sng" algn="ctr">
+                      <a:solidFill>
+                        <a:schemeClr val="tx1"/>
+                      </a:solidFill>
+                      <a:prstDash val="solid"/>
+                      <a:round/>
+                      <a:headEnd type="none" w="med" len="med"/>
+                      <a:tailEnd type="none" w="med" len="med"/>
+                    </a:lnT>
+                    <a:lnB w="12700" cap="flat" cmpd="sng" algn="ctr">
+                      <a:solidFill>
+                        <a:schemeClr val="tx1"/>
+                      </a:solidFill>
+                      <a:prstDash val="solid"/>
+                      <a:round/>
+                      <a:headEnd type="none" w="med" len="med"/>
+                      <a:tailEnd type="none" w="med" len="med"/>
+                    </a:lnB>
+                    <a:solidFill>
+                      <a:srgbClr val="D1D1D1"/>
+                    </a:solidFill>
+                  </a:tcPr>
+                </a:tc>
+                <a:tc>
+                  <a:txBody>
+                    <a:bodyPr/>
+                    <a:lstStyle/>
+                    <a:p>
+                      <a:pPr algn="ctr" latinLnBrk="0"/>
+                      <a:r>
+                        <a:rPr lang="ko-KR" altLang="en-US" sz="1600" b="0" dirty="0">
+                          <a:solidFill>
+                            <a:schemeClr val="tx1"/>
+                          </a:solidFill>
+                        </a:rPr>
+                        <a:t>웅크리기</a:t>
+                      </a:r>
+                      <a:endParaRPr lang="en-US" altLang="ko-KR" sz="1600" b="0" dirty="0">
+                        <a:solidFill>
+                          <a:schemeClr val="tx1"/>
+                        </a:solidFill>
+                      </a:endParaRPr>
+                    </a:p>
+                  </a:txBody>
+                  <a:tcPr anchor="ctr">
+                    <a:lnL w="12700" cap="flat" cmpd="sng" algn="ctr">
+                      <a:solidFill>
+                        <a:schemeClr val="tx1"/>
+                      </a:solidFill>
+                      <a:prstDash val="solid"/>
+                      <a:round/>
+                      <a:headEnd type="none" w="med" len="med"/>
+                      <a:tailEnd type="none" w="med" len="med"/>
+                    </a:lnL>
+                    <a:lnR w="12700" cap="flat" cmpd="sng" algn="ctr">
+                      <a:solidFill>
+                        <a:schemeClr val="tx1"/>
+                      </a:solidFill>
+                      <a:prstDash val="solid"/>
+                      <a:round/>
+                      <a:headEnd type="none" w="med" len="med"/>
+                      <a:tailEnd type="none" w="med" len="med"/>
+                    </a:lnR>
+                    <a:lnT w="12700" cap="flat" cmpd="sng" algn="ctr">
+                      <a:solidFill>
+                        <a:schemeClr val="tx1"/>
+                      </a:solidFill>
+                      <a:prstDash val="solid"/>
+                      <a:round/>
+                      <a:headEnd type="none" w="med" len="med"/>
+                      <a:tailEnd type="none" w="med" len="med"/>
+                    </a:lnT>
+                    <a:lnB w="12700" cap="flat" cmpd="sng" algn="ctr">
+                      <a:solidFill>
+                        <a:schemeClr val="tx1"/>
+                      </a:solidFill>
+                      <a:prstDash val="solid"/>
+                      <a:round/>
+                      <a:headEnd type="none" w="med" len="med"/>
+                      <a:tailEnd type="none" w="med" len="med"/>
+                    </a:lnB>
+                    <a:solidFill>
+                      <a:srgbClr val="D1D1D1"/>
+                    </a:solidFill>
+                  </a:tcPr>
+                </a:tc>
+                <a:tc>
+                  <a:txBody>
+                    <a:bodyPr/>
+                    <a:lstStyle/>
+                    <a:p>
+                      <a:pPr marL="0" indent="0" algn="l" latinLnBrk="0">
+                        <a:buFontTx/>
+                        <a:buNone/>
+                      </a:pPr>
+                      <a:endParaRPr lang="ko-KR" altLang="en-US" sz="1600" b="0" dirty="0">
+                        <a:solidFill>
+                          <a:schemeClr val="tx1"/>
+                        </a:solidFill>
+                      </a:endParaRPr>
+                    </a:p>
+                  </a:txBody>
+                  <a:tcPr anchor="ctr">
+                    <a:lnL w="12700" cap="flat" cmpd="sng" algn="ctr">
+                      <a:solidFill>
+                        <a:schemeClr val="tx1"/>
+                      </a:solidFill>
+                      <a:prstDash val="solid"/>
+                      <a:round/>
+                      <a:headEnd type="none" w="med" len="med"/>
+                      <a:tailEnd type="none" w="med" len="med"/>
+                    </a:lnL>
+                    <a:lnR w="12700" cap="flat" cmpd="sng" algn="ctr">
+                      <a:solidFill>
+                        <a:schemeClr val="tx1"/>
+                      </a:solidFill>
+                      <a:prstDash val="solid"/>
+                      <a:round/>
+                      <a:headEnd type="none" w="med" len="med"/>
+                      <a:tailEnd type="none" w="med" len="med"/>
+                    </a:lnR>
+                    <a:lnT w="12700" cap="flat" cmpd="sng" algn="ctr">
+                      <a:solidFill>
+                        <a:schemeClr val="tx1"/>
+                      </a:solidFill>
+                      <a:prstDash val="solid"/>
+                      <a:round/>
+                      <a:headEnd type="none" w="med" len="med"/>
+                      <a:tailEnd type="none" w="med" len="med"/>
+                    </a:lnT>
+                    <a:lnB w="12700" cap="flat" cmpd="sng" algn="ctr">
+                      <a:solidFill>
+                        <a:schemeClr val="tx1"/>
+                      </a:solidFill>
+                      <a:prstDash val="solid"/>
+                      <a:round/>
+                      <a:headEnd type="none" w="med" len="med"/>
+                      <a:tailEnd type="none" w="med" len="med"/>
+                    </a:lnB>
+                    <a:solidFill>
+                      <a:schemeClr val="bg1"/>
+                    </a:solidFill>
+                  </a:tcPr>
+                </a:tc>
+                <a:extLst>
+                  <a:ext uri="{0D108BD9-81ED-4DB2-BD59-A6C34878D82A}">
+                    <a16:rowId xmlns:a16="http://schemas.microsoft.com/office/drawing/2014/main" val="1662886925"/>
+                  </a:ext>
+                </a:extLst>
+              </a:tr>
+              <a:tr h="370840">
+                <a:tc>
+                  <a:txBody>
+                    <a:bodyPr/>
+                    <a:lstStyle/>
+                    <a:p>
+                      <a:pPr algn="ctr" latinLnBrk="0"/>
+                      <a:r>
+                        <a:rPr lang="en-US" altLang="ko-KR" sz="1600" b="1" dirty="0" err="1">
+                          <a:solidFill>
+                            <a:schemeClr val="tx1"/>
+                          </a:solidFill>
+                        </a:rPr>
+                        <a:t>DuckDownMove</a:t>
+                      </a:r>
+                      <a:endParaRPr lang="en-US" altLang="ko-KR" sz="1600" b="1" dirty="0">
+                        <a:solidFill>
+                          <a:schemeClr val="tx1"/>
+                        </a:solidFill>
+                      </a:endParaRPr>
+                    </a:p>
+                  </a:txBody>
+                  <a:tcPr anchor="ctr">
+                    <a:lnL w="12700" cap="flat" cmpd="sng" algn="ctr">
+                      <a:solidFill>
+                        <a:schemeClr val="tx1"/>
+                      </a:solidFill>
+                      <a:prstDash val="solid"/>
+                      <a:round/>
+                      <a:headEnd type="none" w="med" len="med"/>
+                      <a:tailEnd type="none" w="med" len="med"/>
+                    </a:lnL>
+                    <a:lnR w="12700" cap="flat" cmpd="sng" algn="ctr">
+                      <a:solidFill>
+                        <a:schemeClr val="tx1"/>
+                      </a:solidFill>
+                      <a:prstDash val="solid"/>
+                      <a:round/>
+                      <a:headEnd type="none" w="med" len="med"/>
+                      <a:tailEnd type="none" w="med" len="med"/>
+                    </a:lnR>
+                    <a:lnT w="12700" cap="flat" cmpd="sng" algn="ctr">
+                      <a:solidFill>
+                        <a:schemeClr val="tx1"/>
+                      </a:solidFill>
+                      <a:prstDash val="solid"/>
+                      <a:round/>
+                      <a:headEnd type="none" w="med" len="med"/>
+                      <a:tailEnd type="none" w="med" len="med"/>
+                    </a:lnT>
+                    <a:lnB w="12700" cap="flat" cmpd="sng" algn="ctr">
+                      <a:solidFill>
+                        <a:schemeClr val="tx1"/>
+                      </a:solidFill>
+                      <a:prstDash val="solid"/>
+                      <a:round/>
+                      <a:headEnd type="none" w="med" len="med"/>
+                      <a:tailEnd type="none" w="med" len="med"/>
+                    </a:lnB>
+                    <a:solidFill>
+                      <a:srgbClr val="D1D1D1"/>
+                    </a:solidFill>
+                  </a:tcPr>
+                </a:tc>
+                <a:tc>
+                  <a:txBody>
+                    <a:bodyPr/>
+                    <a:lstStyle/>
+                    <a:p>
+                      <a:pPr algn="ctr" latinLnBrk="0"/>
+                      <a:r>
+                        <a:rPr lang="ko-KR" altLang="en-US" sz="1600" b="0" dirty="0">
+                          <a:solidFill>
+                            <a:schemeClr val="tx1"/>
+                          </a:solidFill>
+                        </a:rPr>
+                        <a:t>웅크린 채 걷기</a:t>
+                      </a:r>
+                      <a:endParaRPr lang="en-US" altLang="ko-KR" sz="1600" b="0" dirty="0">
+                        <a:solidFill>
+                          <a:schemeClr val="tx1"/>
+                        </a:solidFill>
+                      </a:endParaRPr>
+                    </a:p>
+                  </a:txBody>
+                  <a:tcPr anchor="ctr">
+                    <a:lnL w="12700" cap="flat" cmpd="sng" algn="ctr">
+                      <a:solidFill>
+                        <a:schemeClr val="tx1"/>
+                      </a:solidFill>
+                      <a:prstDash val="solid"/>
+                      <a:round/>
+                      <a:headEnd type="none" w="med" len="med"/>
+                      <a:tailEnd type="none" w="med" len="med"/>
+                    </a:lnL>
+                    <a:lnR w="12700" cap="flat" cmpd="sng" algn="ctr">
+                      <a:solidFill>
+                        <a:schemeClr val="tx1"/>
+                      </a:solidFill>
+                      <a:prstDash val="solid"/>
+                      <a:round/>
+                      <a:headEnd type="none" w="med" len="med"/>
+                      <a:tailEnd type="none" w="med" len="med"/>
+                    </a:lnR>
+                    <a:lnT w="12700" cap="flat" cmpd="sng" algn="ctr">
+                      <a:solidFill>
+                        <a:schemeClr val="tx1"/>
+                      </a:solidFill>
+                      <a:prstDash val="solid"/>
+                      <a:round/>
+                      <a:headEnd type="none" w="med" len="med"/>
+                      <a:tailEnd type="none" w="med" len="med"/>
+                    </a:lnT>
+                    <a:lnB w="12700" cap="flat" cmpd="sng" algn="ctr">
+                      <a:solidFill>
+                        <a:schemeClr val="tx1"/>
+                      </a:solidFill>
+                      <a:prstDash val="solid"/>
+                      <a:round/>
+                      <a:headEnd type="none" w="med" len="med"/>
+                      <a:tailEnd type="none" w="med" len="med"/>
+                    </a:lnB>
+                    <a:solidFill>
+                      <a:srgbClr val="D1D1D1"/>
+                    </a:solidFill>
+                  </a:tcPr>
+                </a:tc>
+                <a:tc>
+                  <a:txBody>
+                    <a:bodyPr/>
+                    <a:lstStyle/>
+                    <a:p>
+                      <a:pPr marL="0" indent="0" algn="l" latinLnBrk="0">
+                        <a:buFontTx/>
+                        <a:buNone/>
+                      </a:pPr>
+                      <a:endParaRPr lang="ko-KR" altLang="en-US" sz="1600" b="0" dirty="0">
+                        <a:solidFill>
+                          <a:schemeClr val="tx1"/>
+                        </a:solidFill>
+                      </a:endParaRPr>
+                    </a:p>
+                  </a:txBody>
+                  <a:tcPr anchor="ctr">
+                    <a:lnL w="12700" cap="flat" cmpd="sng" algn="ctr">
+                      <a:solidFill>
+                        <a:schemeClr val="tx1"/>
+                      </a:solidFill>
+                      <a:prstDash val="solid"/>
+                      <a:round/>
+                      <a:headEnd type="none" w="med" len="med"/>
+                      <a:tailEnd type="none" w="med" len="med"/>
+                    </a:lnL>
+                    <a:lnR w="12700" cap="flat" cmpd="sng" algn="ctr">
+                      <a:solidFill>
+                        <a:schemeClr val="tx1"/>
+                      </a:solidFill>
+                      <a:prstDash val="solid"/>
+                      <a:round/>
+                      <a:headEnd type="none" w="med" len="med"/>
+                      <a:tailEnd type="none" w="med" len="med"/>
+                    </a:lnR>
+                    <a:lnT w="12700" cap="flat" cmpd="sng" algn="ctr">
+                      <a:solidFill>
+                        <a:schemeClr val="tx1"/>
+                      </a:solidFill>
+                      <a:prstDash val="solid"/>
+                      <a:round/>
+                      <a:headEnd type="none" w="med" len="med"/>
+                      <a:tailEnd type="none" w="med" len="med"/>
+                    </a:lnT>
+                    <a:lnB w="12700" cap="flat" cmpd="sng" algn="ctr">
+                      <a:solidFill>
+                        <a:schemeClr val="tx1"/>
+                      </a:solidFill>
+                      <a:prstDash val="solid"/>
+                      <a:round/>
+                      <a:headEnd type="none" w="med" len="med"/>
+                      <a:tailEnd type="none" w="med" len="med"/>
+                    </a:lnB>
+                    <a:solidFill>
+                      <a:schemeClr val="bg1"/>
+                    </a:solidFill>
+                  </a:tcPr>
+                </a:tc>
+                <a:extLst>
+                  <a:ext uri="{0D108BD9-81ED-4DB2-BD59-A6C34878D82A}">
+                    <a16:rowId xmlns:a16="http://schemas.microsoft.com/office/drawing/2014/main" val="1032036321"/>
+                  </a:ext>
+                </a:extLst>
+              </a:tr>
+              <a:tr h="370840">
+                <a:tc>
+                  <a:txBody>
+                    <a:bodyPr/>
+                    <a:lstStyle/>
+                    <a:p>
+                      <a:pPr algn="ctr" latinLnBrk="0"/>
+                      <a:r>
+                        <a:rPr lang="en-US" altLang="ko-KR" sz="1600" b="1" dirty="0">
+                          <a:solidFill>
+                            <a:schemeClr val="tx1"/>
+                          </a:solidFill>
+                        </a:rPr>
+                        <a:t>Stun</a:t>
+                      </a:r>
+                    </a:p>
+                  </a:txBody>
+                  <a:tcPr anchor="ctr">
+                    <a:lnL w="12700" cap="flat" cmpd="sng" algn="ctr">
+                      <a:solidFill>
+                        <a:schemeClr val="tx1"/>
+                      </a:solidFill>
+                      <a:prstDash val="solid"/>
+                      <a:round/>
+                      <a:headEnd type="none" w="med" len="med"/>
+                      <a:tailEnd type="none" w="med" len="med"/>
+                    </a:lnL>
+                    <a:lnR w="12700" cap="flat" cmpd="sng" algn="ctr">
+                      <a:solidFill>
+                        <a:schemeClr val="tx1"/>
+                      </a:solidFill>
+                      <a:prstDash val="solid"/>
+                      <a:round/>
+                      <a:headEnd type="none" w="med" len="med"/>
+                      <a:tailEnd type="none" w="med" len="med"/>
+                    </a:lnR>
+                    <a:lnT w="12700" cap="flat" cmpd="sng" algn="ctr">
+                      <a:solidFill>
+                        <a:schemeClr val="tx1"/>
+                      </a:solidFill>
+                      <a:prstDash val="solid"/>
+                      <a:round/>
+                      <a:headEnd type="none" w="med" len="med"/>
+                      <a:tailEnd type="none" w="med" len="med"/>
+                    </a:lnT>
+                    <a:lnB w="12700" cap="flat" cmpd="sng" algn="ctr">
+                      <a:solidFill>
+                        <a:schemeClr val="tx1"/>
+                      </a:solidFill>
+                      <a:prstDash val="solid"/>
+                      <a:round/>
+                      <a:headEnd type="none" w="med" len="med"/>
+                      <a:tailEnd type="none" w="med" len="med"/>
+                    </a:lnB>
+                    <a:solidFill>
+                      <a:srgbClr val="D1D1D1"/>
+                    </a:solidFill>
+                  </a:tcPr>
+                </a:tc>
+                <a:tc>
+                  <a:txBody>
+                    <a:bodyPr/>
+                    <a:lstStyle/>
+                    <a:p>
+                      <a:pPr algn="ctr" latinLnBrk="0"/>
+                      <a:r>
+                        <a:rPr lang="ko-KR" altLang="en-US" sz="1600" b="0" dirty="0">
+                          <a:solidFill>
+                            <a:schemeClr val="tx1"/>
+                          </a:solidFill>
+                        </a:rPr>
+                        <a:t>기절</a:t>
+                      </a:r>
+                      <a:endParaRPr lang="en-US" altLang="ko-KR" sz="1600" b="0" dirty="0">
+                        <a:solidFill>
+                          <a:schemeClr val="tx1"/>
+                        </a:solidFill>
+                      </a:endParaRPr>
+                    </a:p>
+                  </a:txBody>
+                  <a:tcPr anchor="ctr">
+                    <a:lnL w="12700" cap="flat" cmpd="sng" algn="ctr">
+                      <a:solidFill>
+                        <a:schemeClr val="tx1"/>
+                      </a:solidFill>
+                      <a:prstDash val="solid"/>
+                      <a:round/>
+                      <a:headEnd type="none" w="med" len="med"/>
+                      <a:tailEnd type="none" w="med" len="med"/>
+                    </a:lnL>
+                    <a:lnR w="12700" cap="flat" cmpd="sng" algn="ctr">
+                      <a:solidFill>
+                        <a:schemeClr val="tx1"/>
+                      </a:solidFill>
+                      <a:prstDash val="solid"/>
+                      <a:round/>
+                      <a:headEnd type="none" w="med" len="med"/>
+                      <a:tailEnd type="none" w="med" len="med"/>
+                    </a:lnR>
+                    <a:lnT w="12700" cap="flat" cmpd="sng" algn="ctr">
+                      <a:solidFill>
+                        <a:schemeClr val="tx1"/>
+                      </a:solidFill>
+                      <a:prstDash val="solid"/>
+                      <a:round/>
+                      <a:headEnd type="none" w="med" len="med"/>
+                      <a:tailEnd type="none" w="med" len="med"/>
+                    </a:lnT>
+                    <a:lnB w="12700" cap="flat" cmpd="sng" algn="ctr">
+                      <a:solidFill>
+                        <a:schemeClr val="tx1"/>
+                      </a:solidFill>
+                      <a:prstDash val="solid"/>
+                      <a:round/>
+                      <a:headEnd type="none" w="med" len="med"/>
+                      <a:tailEnd type="none" w="med" len="med"/>
+                    </a:lnB>
+                    <a:solidFill>
+                      <a:srgbClr val="D1D1D1"/>
+                    </a:solidFill>
+                  </a:tcPr>
+                </a:tc>
+                <a:tc>
+                  <a:txBody>
+                    <a:bodyPr/>
+                    <a:lstStyle/>
+                    <a:p>
+                      <a:pPr marL="0" indent="0" algn="l" latinLnBrk="0">
+                        <a:buFontTx/>
+                        <a:buNone/>
+                      </a:pPr>
+                      <a:endParaRPr lang="ko-KR" altLang="en-US" sz="1600" b="0" dirty="0">
+                        <a:solidFill>
+                          <a:schemeClr val="tx1"/>
+                        </a:solidFill>
+                      </a:endParaRPr>
+                    </a:p>
+                  </a:txBody>
+                  <a:tcPr anchor="ctr">
+                    <a:lnL w="12700" cap="flat" cmpd="sng" algn="ctr">
+                      <a:solidFill>
+                        <a:schemeClr val="tx1"/>
+                      </a:solidFill>
+                      <a:prstDash val="solid"/>
+                      <a:round/>
+                      <a:headEnd type="none" w="med" len="med"/>
+                      <a:tailEnd type="none" w="med" len="med"/>
+                    </a:lnL>
+                    <a:lnR w="12700" cap="flat" cmpd="sng" algn="ctr">
+                      <a:solidFill>
+                        <a:schemeClr val="tx1"/>
+                      </a:solidFill>
+                      <a:prstDash val="solid"/>
+                      <a:round/>
+                      <a:headEnd type="none" w="med" len="med"/>
+                      <a:tailEnd type="none" w="med" len="med"/>
+                    </a:lnR>
+                    <a:lnT w="12700" cap="flat" cmpd="sng" algn="ctr">
+                      <a:solidFill>
+                        <a:schemeClr val="tx1"/>
+                      </a:solidFill>
+                      <a:prstDash val="solid"/>
+                      <a:round/>
+                      <a:headEnd type="none" w="med" len="med"/>
+                      <a:tailEnd type="none" w="med" len="med"/>
+                    </a:lnT>
+                    <a:lnB w="12700" cap="flat" cmpd="sng" algn="ctr">
+                      <a:solidFill>
+                        <a:schemeClr val="tx1"/>
+                      </a:solidFill>
+                      <a:prstDash val="solid"/>
+                      <a:round/>
+                      <a:headEnd type="none" w="med" len="med"/>
+                      <a:tailEnd type="none" w="med" len="med"/>
+                    </a:lnB>
+                    <a:solidFill>
+                      <a:schemeClr val="bg1"/>
+                    </a:solidFill>
+                  </a:tcPr>
+                </a:tc>
+                <a:extLst>
+                  <a:ext uri="{0D108BD9-81ED-4DB2-BD59-A6C34878D82A}">
+                    <a16:rowId xmlns:a16="http://schemas.microsoft.com/office/drawing/2014/main" val="1249743452"/>
+                  </a:ext>
+                </a:extLst>
+              </a:tr>
+              <a:tr h="370840">
+                <a:tc>
+                  <a:txBody>
+                    <a:bodyPr/>
+                    <a:lstStyle/>
+                    <a:p>
+                      <a:pPr algn="ctr" latinLnBrk="0"/>
+                      <a:r>
+                        <a:rPr lang="en-US" altLang="ko-KR" sz="1600" b="1" dirty="0">
+                          <a:solidFill>
+                            <a:schemeClr val="tx1"/>
+                          </a:solidFill>
+                        </a:rPr>
+                        <a:t>Hit</a:t>
+                      </a:r>
+                    </a:p>
+                  </a:txBody>
+                  <a:tcPr anchor="ctr">
+                    <a:lnL w="12700" cap="flat" cmpd="sng" algn="ctr">
+                      <a:solidFill>
+                        <a:schemeClr val="tx1"/>
+                      </a:solidFill>
+                      <a:prstDash val="solid"/>
+                      <a:round/>
+                      <a:headEnd type="none" w="med" len="med"/>
+                      <a:tailEnd type="none" w="med" len="med"/>
+                    </a:lnL>
+                    <a:lnR w="12700" cap="flat" cmpd="sng" algn="ctr">
+                      <a:solidFill>
+                        <a:schemeClr val="tx1"/>
+                      </a:solidFill>
+                      <a:prstDash val="solid"/>
+                      <a:round/>
+                      <a:headEnd type="none" w="med" len="med"/>
+                      <a:tailEnd type="none" w="med" len="med"/>
+                    </a:lnR>
+                    <a:lnT w="12700" cap="flat" cmpd="sng" algn="ctr">
+                      <a:solidFill>
+                        <a:schemeClr val="tx1"/>
+                      </a:solidFill>
+                      <a:prstDash val="solid"/>
+                      <a:round/>
+                      <a:headEnd type="none" w="med" len="med"/>
+                      <a:tailEnd type="none" w="med" len="med"/>
+                    </a:lnT>
+                    <a:lnB w="12700" cap="flat" cmpd="sng" algn="ctr">
+                      <a:solidFill>
+                        <a:schemeClr val="tx1"/>
+                      </a:solidFill>
+                      <a:prstDash val="solid"/>
+                      <a:round/>
+                      <a:headEnd type="none" w="med" len="med"/>
+                      <a:tailEnd type="none" w="med" len="med"/>
+                    </a:lnB>
+                    <a:solidFill>
+                      <a:srgbClr val="D1D1D1"/>
+                    </a:solidFill>
+                  </a:tcPr>
+                </a:tc>
+                <a:tc>
+                  <a:txBody>
+                    <a:bodyPr/>
+                    <a:lstStyle/>
+                    <a:p>
+                      <a:pPr algn="ctr" latinLnBrk="0"/>
+                      <a:r>
+                        <a:rPr lang="ko-KR" altLang="en-US" sz="1600" b="0" dirty="0">
+                          <a:solidFill>
+                            <a:schemeClr val="tx1"/>
+                          </a:solidFill>
+                        </a:rPr>
+                        <a:t>피격</a:t>
+                      </a:r>
+                      <a:endParaRPr lang="en-US" altLang="ko-KR" sz="1600" b="0" dirty="0">
+                        <a:solidFill>
+                          <a:schemeClr val="tx1"/>
+                        </a:solidFill>
+                      </a:endParaRPr>
+                    </a:p>
+                  </a:txBody>
+                  <a:tcPr anchor="ctr">
+                    <a:lnL w="12700" cap="flat" cmpd="sng" algn="ctr">
+                      <a:solidFill>
+                        <a:schemeClr val="tx1"/>
+                      </a:solidFill>
+                      <a:prstDash val="solid"/>
+                      <a:round/>
+                      <a:headEnd type="none" w="med" len="med"/>
+                      <a:tailEnd type="none" w="med" len="med"/>
+                    </a:lnL>
+                    <a:lnR w="12700" cap="flat" cmpd="sng" algn="ctr">
+                      <a:solidFill>
+                        <a:schemeClr val="tx1"/>
+                      </a:solidFill>
+                      <a:prstDash val="solid"/>
+                      <a:round/>
+                      <a:headEnd type="none" w="med" len="med"/>
+                      <a:tailEnd type="none" w="med" len="med"/>
+                    </a:lnR>
+                    <a:lnT w="12700" cap="flat" cmpd="sng" algn="ctr">
+                      <a:solidFill>
+                        <a:schemeClr val="tx1"/>
+                      </a:solidFill>
+                      <a:prstDash val="solid"/>
+                      <a:round/>
+                      <a:headEnd type="none" w="med" len="med"/>
+                      <a:tailEnd type="none" w="med" len="med"/>
+                    </a:lnT>
+                    <a:lnB w="12700" cap="flat" cmpd="sng" algn="ctr">
+                      <a:solidFill>
+                        <a:schemeClr val="tx1"/>
+                      </a:solidFill>
+                      <a:prstDash val="solid"/>
+                      <a:round/>
+                      <a:headEnd type="none" w="med" len="med"/>
+                      <a:tailEnd type="none" w="med" len="med"/>
+                    </a:lnB>
+                    <a:solidFill>
+                      <a:srgbClr val="D1D1D1"/>
+                    </a:solidFill>
+                  </a:tcPr>
+                </a:tc>
+                <a:tc>
+                  <a:txBody>
+                    <a:bodyPr/>
+                    <a:lstStyle/>
+                    <a:p>
+                      <a:pPr marL="0" indent="0" algn="l" latinLnBrk="0">
+                        <a:buFontTx/>
+                        <a:buNone/>
+                      </a:pPr>
+                      <a:endParaRPr lang="ko-KR" altLang="en-US" sz="1600" b="0" dirty="0">
+                        <a:solidFill>
+                          <a:schemeClr val="tx1"/>
+                        </a:solidFill>
+                      </a:endParaRPr>
+                    </a:p>
+                  </a:txBody>
+                  <a:tcPr anchor="ctr">
+                    <a:lnL w="12700" cap="flat" cmpd="sng" algn="ctr">
+                      <a:solidFill>
+                        <a:schemeClr val="tx1"/>
+                      </a:solidFill>
+                      <a:prstDash val="solid"/>
+                      <a:round/>
+                      <a:headEnd type="none" w="med" len="med"/>
+                      <a:tailEnd type="none" w="med" len="med"/>
+                    </a:lnL>
+                    <a:lnR w="12700" cap="flat" cmpd="sng" algn="ctr">
+                      <a:solidFill>
+                        <a:schemeClr val="tx1"/>
+                      </a:solidFill>
+                      <a:prstDash val="solid"/>
+                      <a:round/>
+                      <a:headEnd type="none" w="med" len="med"/>
+                      <a:tailEnd type="none" w="med" len="med"/>
+                    </a:lnR>
+                    <a:lnT w="12700" cap="flat" cmpd="sng" algn="ctr">
+                      <a:solidFill>
+                        <a:schemeClr val="tx1"/>
+                      </a:solidFill>
+                      <a:prstDash val="solid"/>
+                      <a:round/>
+                      <a:headEnd type="none" w="med" len="med"/>
+                      <a:tailEnd type="none" w="med" len="med"/>
+                    </a:lnT>
+                    <a:lnB w="12700" cap="flat" cmpd="sng" algn="ctr">
+                      <a:solidFill>
+                        <a:schemeClr val="tx1"/>
+                      </a:solidFill>
+                      <a:prstDash val="solid"/>
+                      <a:round/>
+                      <a:headEnd type="none" w="med" len="med"/>
+                      <a:tailEnd type="none" w="med" len="med"/>
+                    </a:lnB>
+                    <a:solidFill>
+                      <a:schemeClr val="bg1"/>
+                    </a:solidFill>
+                  </a:tcPr>
+                </a:tc>
+                <a:extLst>
+                  <a:ext uri="{0D108BD9-81ED-4DB2-BD59-A6C34878D82A}">
+                    <a16:rowId xmlns:a16="http://schemas.microsoft.com/office/drawing/2014/main" val="2108574909"/>
+                  </a:ext>
+                </a:extLst>
+              </a:tr>
+              <a:tr h="370840">
+                <a:tc>
+                  <a:txBody>
+                    <a:bodyPr/>
+                    <a:lstStyle/>
+                    <a:p>
+                      <a:pPr algn="ctr" latinLnBrk="0"/>
+                      <a:r>
+                        <a:rPr lang="en-US" altLang="ko-KR" sz="1600" b="1" dirty="0">
+                          <a:solidFill>
+                            <a:schemeClr val="tx1"/>
+                          </a:solidFill>
+                        </a:rPr>
+                        <a:t>Dead</a:t>
+                      </a:r>
+                    </a:p>
+                  </a:txBody>
+                  <a:tcPr anchor="ctr">
+                    <a:lnL w="12700" cap="flat" cmpd="sng" algn="ctr">
+                      <a:solidFill>
+                        <a:schemeClr val="tx1"/>
+                      </a:solidFill>
+                      <a:prstDash val="solid"/>
+                      <a:round/>
+                      <a:headEnd type="none" w="med" len="med"/>
+                      <a:tailEnd type="none" w="med" len="med"/>
+                    </a:lnL>
+                    <a:lnR w="12700" cap="flat" cmpd="sng" algn="ctr">
+                      <a:solidFill>
+                        <a:schemeClr val="tx1"/>
+                      </a:solidFill>
+                      <a:prstDash val="solid"/>
+                      <a:round/>
+                      <a:headEnd type="none" w="med" len="med"/>
+                      <a:tailEnd type="none" w="med" len="med"/>
+                    </a:lnR>
+                    <a:lnT w="12700" cap="flat" cmpd="sng" algn="ctr">
+                      <a:solidFill>
+                        <a:schemeClr val="tx1"/>
+                      </a:solidFill>
+                      <a:prstDash val="solid"/>
+                      <a:round/>
+                      <a:headEnd type="none" w="med" len="med"/>
+                      <a:tailEnd type="none" w="med" len="med"/>
+                    </a:lnT>
+                    <a:lnB w="12700" cap="flat" cmpd="sng" algn="ctr">
+                      <a:solidFill>
+                        <a:schemeClr val="tx1"/>
+                      </a:solidFill>
+                      <a:prstDash val="solid"/>
+                      <a:round/>
+                      <a:headEnd type="none" w="med" len="med"/>
+                      <a:tailEnd type="none" w="med" len="med"/>
+                    </a:lnB>
+                    <a:solidFill>
+                      <a:srgbClr val="D1D1D1"/>
+                    </a:solidFill>
+                  </a:tcPr>
+                </a:tc>
+                <a:tc>
+                  <a:txBody>
+                    <a:bodyPr/>
+                    <a:lstStyle/>
+                    <a:p>
+                      <a:pPr algn="ctr" latinLnBrk="0"/>
+                      <a:r>
+                        <a:rPr lang="ko-KR" altLang="en-US" sz="1600" b="0" dirty="0">
+                          <a:solidFill>
+                            <a:schemeClr val="tx1"/>
+                          </a:solidFill>
+                        </a:rPr>
+                        <a:t>사망</a:t>
+                      </a:r>
+                      <a:endParaRPr lang="en-US" altLang="ko-KR" sz="1600" b="0" dirty="0">
+                        <a:solidFill>
+                          <a:schemeClr val="tx1"/>
+                        </a:solidFill>
+                      </a:endParaRPr>
+                    </a:p>
+                  </a:txBody>
+                  <a:tcPr anchor="ctr">
+                    <a:lnL w="12700" cap="flat" cmpd="sng" algn="ctr">
+                      <a:solidFill>
+                        <a:schemeClr val="tx1"/>
+                      </a:solidFill>
+                      <a:prstDash val="solid"/>
+                      <a:round/>
+                      <a:headEnd type="none" w="med" len="med"/>
+                      <a:tailEnd type="none" w="med" len="med"/>
+                    </a:lnL>
+                    <a:lnR w="12700" cap="flat" cmpd="sng" algn="ctr">
+                      <a:solidFill>
+                        <a:schemeClr val="tx1"/>
+                      </a:solidFill>
+                      <a:prstDash val="solid"/>
+                      <a:round/>
+                      <a:headEnd type="none" w="med" len="med"/>
+                      <a:tailEnd type="none" w="med" len="med"/>
+                    </a:lnR>
+                    <a:lnT w="12700" cap="flat" cmpd="sng" algn="ctr">
+                      <a:solidFill>
+                        <a:schemeClr val="tx1"/>
+                      </a:solidFill>
+                      <a:prstDash val="solid"/>
+                      <a:round/>
+                      <a:headEnd type="none" w="med" len="med"/>
+                      <a:tailEnd type="none" w="med" len="med"/>
+                    </a:lnT>
+                    <a:lnB w="12700" cap="flat" cmpd="sng" algn="ctr">
+                      <a:solidFill>
+                        <a:schemeClr val="tx1"/>
+                      </a:solidFill>
+                      <a:prstDash val="solid"/>
+                      <a:round/>
+                      <a:headEnd type="none" w="med" len="med"/>
+                      <a:tailEnd type="none" w="med" len="med"/>
+                    </a:lnB>
+                    <a:solidFill>
+                      <a:srgbClr val="D1D1D1"/>
+                    </a:solidFill>
+                  </a:tcPr>
+                </a:tc>
+                <a:tc>
+                  <a:txBody>
+                    <a:bodyPr/>
+                    <a:lstStyle/>
+                    <a:p>
+                      <a:pPr marL="0" indent="0" algn="l" latinLnBrk="0">
+                        <a:buFontTx/>
+                        <a:buNone/>
+                      </a:pPr>
+                      <a:endParaRPr lang="ko-KR" altLang="en-US" sz="1600" b="0" dirty="0">
+                        <a:solidFill>
+                          <a:schemeClr val="tx1"/>
+                        </a:solidFill>
+                      </a:endParaRPr>
+                    </a:p>
+                  </a:txBody>
+                  <a:tcPr anchor="ctr">
+                    <a:lnL w="12700" cap="flat" cmpd="sng" algn="ctr">
+                      <a:solidFill>
+                        <a:schemeClr val="tx1"/>
+                      </a:solidFill>
+                      <a:prstDash val="solid"/>
+                      <a:round/>
+                      <a:headEnd type="none" w="med" len="med"/>
+                      <a:tailEnd type="none" w="med" len="med"/>
+                    </a:lnL>
+                    <a:lnR w="12700" cap="flat" cmpd="sng" algn="ctr">
+                      <a:solidFill>
+                        <a:schemeClr val="tx1"/>
+                      </a:solidFill>
+                      <a:prstDash val="solid"/>
+                      <a:round/>
+                      <a:headEnd type="none" w="med" len="med"/>
+                      <a:tailEnd type="none" w="med" len="med"/>
+                    </a:lnR>
+                    <a:lnT w="12700" cap="flat" cmpd="sng" algn="ctr">
+                      <a:solidFill>
+                        <a:schemeClr val="tx1"/>
+                      </a:solidFill>
+                      <a:prstDash val="solid"/>
+                      <a:round/>
+                      <a:headEnd type="none" w="med" len="med"/>
+                      <a:tailEnd type="none" w="med" len="med"/>
+                    </a:lnT>
+                    <a:lnB w="12700" cap="flat" cmpd="sng" algn="ctr">
+                      <a:solidFill>
+                        <a:schemeClr val="tx1"/>
+                      </a:solidFill>
+                      <a:prstDash val="solid"/>
+                      <a:round/>
+                      <a:headEnd type="none" w="med" len="med"/>
+                      <a:tailEnd type="none" w="med" len="med"/>
+                    </a:lnB>
+                    <a:solidFill>
+                      <a:schemeClr val="bg1"/>
+                    </a:solidFill>
+                  </a:tcPr>
+                </a:tc>
+                <a:extLst>
+                  <a:ext uri="{0D108BD9-81ED-4DB2-BD59-A6C34878D82A}">
+                    <a16:rowId xmlns:a16="http://schemas.microsoft.com/office/drawing/2014/main" val="2716457867"/>
+                  </a:ext>
+                </a:extLst>
+              </a:tr>
+              <a:tr h="370840">
+                <a:tc>
+                  <a:txBody>
+                    <a:bodyPr/>
+                    <a:lstStyle/>
+                    <a:p>
+                      <a:pPr algn="ctr" latinLnBrk="0"/>
+                      <a:r>
+                        <a:rPr lang="en-US" altLang="ko-KR" sz="1600" b="1" dirty="0">
+                          <a:solidFill>
+                            <a:schemeClr val="tx1"/>
+                          </a:solidFill>
+                        </a:rPr>
+                        <a:t>Attack</a:t>
+                      </a:r>
+                    </a:p>
+                  </a:txBody>
+                  <a:tcPr anchor="ctr">
+                    <a:lnL w="12700" cap="flat" cmpd="sng" algn="ctr">
+                      <a:solidFill>
+                        <a:schemeClr val="tx1"/>
+                      </a:solidFill>
+                      <a:prstDash val="solid"/>
+                      <a:round/>
+                      <a:headEnd type="none" w="med" len="med"/>
+                      <a:tailEnd type="none" w="med" len="med"/>
+                    </a:lnL>
+                    <a:lnR w="12700" cap="flat" cmpd="sng" algn="ctr">
+                      <a:solidFill>
+                        <a:schemeClr val="tx1"/>
+                      </a:solidFill>
+                      <a:prstDash val="solid"/>
+                      <a:round/>
+                      <a:headEnd type="none" w="med" len="med"/>
+                      <a:tailEnd type="none" w="med" len="med"/>
+                    </a:lnR>
+                    <a:lnT w="12700" cap="flat" cmpd="sng" algn="ctr">
+                      <a:solidFill>
+                        <a:schemeClr val="tx1"/>
+                      </a:solidFill>
+                      <a:prstDash val="solid"/>
+                      <a:round/>
+                      <a:headEnd type="none" w="med" len="med"/>
+                      <a:tailEnd type="none" w="med" len="med"/>
+                    </a:lnT>
+                    <a:lnB w="12700" cap="flat" cmpd="sng" algn="ctr">
+                      <a:solidFill>
+                        <a:schemeClr val="tx1"/>
+                      </a:solidFill>
+                      <a:prstDash val="solid"/>
+                      <a:round/>
+                      <a:headEnd type="none" w="med" len="med"/>
+                      <a:tailEnd type="none" w="med" len="med"/>
+                    </a:lnB>
+                    <a:solidFill>
+                      <a:srgbClr val="D1D1D1"/>
+                    </a:solidFill>
+                  </a:tcPr>
+                </a:tc>
+                <a:tc>
+                  <a:txBody>
+                    <a:bodyPr/>
+                    <a:lstStyle/>
+                    <a:p>
+                      <a:pPr algn="ctr" latinLnBrk="0"/>
+                      <a:r>
+                        <a:rPr lang="ko-KR" altLang="en-US" sz="1600" b="0" dirty="0">
+                          <a:solidFill>
+                            <a:schemeClr val="tx1"/>
+                          </a:solidFill>
+                        </a:rPr>
+                        <a:t>공격</a:t>
+                      </a:r>
+                      <a:endParaRPr lang="en-US" altLang="ko-KR" sz="1600" b="0" dirty="0">
+                        <a:solidFill>
+                          <a:schemeClr val="tx1"/>
+                        </a:solidFill>
+                      </a:endParaRPr>
+                    </a:p>
+                  </a:txBody>
+                  <a:tcPr anchor="ctr">
+                    <a:lnL w="12700" cap="flat" cmpd="sng" algn="ctr">
+                      <a:solidFill>
+                        <a:schemeClr val="tx1"/>
+                      </a:solidFill>
+                      <a:prstDash val="solid"/>
+                      <a:round/>
+                      <a:headEnd type="none" w="med" len="med"/>
+                      <a:tailEnd type="none" w="med" len="med"/>
+                    </a:lnL>
+                    <a:lnR w="12700" cap="flat" cmpd="sng" algn="ctr">
+                      <a:solidFill>
+                        <a:schemeClr val="tx1"/>
+                      </a:solidFill>
+                      <a:prstDash val="solid"/>
+                      <a:round/>
+                      <a:headEnd type="none" w="med" len="med"/>
+                      <a:tailEnd type="none" w="med" len="med"/>
+                    </a:lnR>
+                    <a:lnT w="12700" cap="flat" cmpd="sng" algn="ctr">
+                      <a:solidFill>
+                        <a:schemeClr val="tx1"/>
+                      </a:solidFill>
+                      <a:prstDash val="solid"/>
+                      <a:round/>
+                      <a:headEnd type="none" w="med" len="med"/>
+                      <a:tailEnd type="none" w="med" len="med"/>
+                    </a:lnT>
+                    <a:lnB w="12700" cap="flat" cmpd="sng" algn="ctr">
+                      <a:solidFill>
+                        <a:schemeClr val="tx1"/>
+                      </a:solidFill>
+                      <a:prstDash val="solid"/>
+                      <a:round/>
+                      <a:headEnd type="none" w="med" len="med"/>
+                      <a:tailEnd type="none" w="med" len="med"/>
+                    </a:lnB>
+                    <a:solidFill>
+                      <a:srgbClr val="D1D1D1"/>
+                    </a:solidFill>
+                  </a:tcPr>
+                </a:tc>
+                <a:tc>
+                  <a:txBody>
+                    <a:bodyPr/>
+                    <a:lstStyle/>
+                    <a:p>
+                      <a:pPr marL="0" indent="0" algn="l" latinLnBrk="0">
+                        <a:buFontTx/>
+                        <a:buNone/>
+                      </a:pPr>
+                      <a:endParaRPr lang="ko-KR" altLang="en-US" sz="1600" b="0" dirty="0">
+                        <a:solidFill>
+                          <a:schemeClr val="tx1"/>
+                        </a:solidFill>
+                      </a:endParaRPr>
+                    </a:p>
+                  </a:txBody>
+                  <a:tcPr anchor="ctr">
+                    <a:lnL w="12700" cap="flat" cmpd="sng" algn="ctr">
+                      <a:solidFill>
+                        <a:schemeClr val="tx1"/>
+                      </a:solidFill>
+                      <a:prstDash val="solid"/>
+                      <a:round/>
+                      <a:headEnd type="none" w="med" len="med"/>
+                      <a:tailEnd type="none" w="med" len="med"/>
+                    </a:lnL>
+                    <a:lnR w="12700" cap="flat" cmpd="sng" algn="ctr">
+                      <a:solidFill>
+                        <a:schemeClr val="tx1"/>
+                      </a:solidFill>
+                      <a:prstDash val="solid"/>
+                      <a:round/>
+                      <a:headEnd type="none" w="med" len="med"/>
+                      <a:tailEnd type="none" w="med" len="med"/>
+                    </a:lnR>
+                    <a:lnT w="12700" cap="flat" cmpd="sng" algn="ctr">
+                      <a:solidFill>
+                        <a:schemeClr val="tx1"/>
+                      </a:solidFill>
+                      <a:prstDash val="solid"/>
+                      <a:round/>
+                      <a:headEnd type="none" w="med" len="med"/>
+                      <a:tailEnd type="none" w="med" len="med"/>
+                    </a:lnT>
+                    <a:lnB w="12700" cap="flat" cmpd="sng" algn="ctr">
+                      <a:solidFill>
+                        <a:schemeClr val="tx1"/>
+                      </a:solidFill>
+                      <a:prstDash val="solid"/>
+                      <a:round/>
+                      <a:headEnd type="none" w="med" len="med"/>
+                      <a:tailEnd type="none" w="med" len="med"/>
+                    </a:lnB>
+                    <a:solidFill>
+                      <a:schemeClr val="bg1"/>
+                    </a:solidFill>
+                  </a:tcPr>
+                </a:tc>
+                <a:extLst>
+                  <a:ext uri="{0D108BD9-81ED-4DB2-BD59-A6C34878D82A}">
+                    <a16:rowId xmlns:a16="http://schemas.microsoft.com/office/drawing/2014/main" val="832060851"/>
+                  </a:ext>
+                </a:extLst>
+              </a:tr>
+              <a:tr h="370840">
+                <a:tc>
+                  <a:txBody>
+                    <a:bodyPr/>
+                    <a:lstStyle/>
+                    <a:p>
+                      <a:pPr algn="ctr" latinLnBrk="0"/>
+                      <a:r>
+                        <a:rPr lang="en-US" altLang="ko-KR" sz="1600" b="1" dirty="0">
+                          <a:solidFill>
+                            <a:schemeClr val="tx1"/>
+                          </a:solidFill>
+                        </a:rPr>
+                        <a:t>Interaction</a:t>
+                      </a:r>
+                    </a:p>
+                  </a:txBody>
+                  <a:tcPr anchor="ctr">
+                    <a:lnL w="12700" cap="flat" cmpd="sng" algn="ctr">
+                      <a:solidFill>
+                        <a:schemeClr val="tx1"/>
+                      </a:solidFill>
+                      <a:prstDash val="solid"/>
+                      <a:round/>
+                      <a:headEnd type="none" w="med" len="med"/>
+                      <a:tailEnd type="none" w="med" len="med"/>
+                    </a:lnL>
+                    <a:lnR w="12700" cap="flat" cmpd="sng" algn="ctr">
+                      <a:solidFill>
+                        <a:schemeClr val="tx1"/>
+                      </a:solidFill>
+                      <a:prstDash val="solid"/>
+                      <a:round/>
+                      <a:headEnd type="none" w="med" len="med"/>
+                      <a:tailEnd type="none" w="med" len="med"/>
+                    </a:lnR>
+                    <a:lnT w="12700" cap="flat" cmpd="sng" algn="ctr">
+                      <a:solidFill>
+                        <a:schemeClr val="tx1"/>
+                      </a:solidFill>
+                      <a:prstDash val="solid"/>
+                      <a:round/>
+                      <a:headEnd type="none" w="med" len="med"/>
+                      <a:tailEnd type="none" w="med" len="med"/>
+                    </a:lnT>
+                    <a:lnB w="12700" cap="flat" cmpd="sng" algn="ctr">
+                      <a:solidFill>
+                        <a:schemeClr val="tx1"/>
+                      </a:solidFill>
+                      <a:prstDash val="solid"/>
+                      <a:round/>
+                      <a:headEnd type="none" w="med" len="med"/>
+                      <a:tailEnd type="none" w="med" len="med"/>
+                    </a:lnB>
+                    <a:solidFill>
+                      <a:srgbClr val="D1D1D1"/>
+                    </a:solidFill>
+                  </a:tcPr>
+                </a:tc>
+                <a:tc>
+                  <a:txBody>
+                    <a:bodyPr/>
+                    <a:lstStyle/>
+                    <a:p>
+                      <a:pPr algn="ctr" latinLnBrk="0"/>
+                      <a:r>
+                        <a:rPr lang="ko-KR" altLang="en-US" sz="1600" b="0" dirty="0">
+                          <a:solidFill>
+                            <a:schemeClr val="tx1"/>
+                          </a:solidFill>
+                        </a:rPr>
+                        <a:t>상호작용</a:t>
+                      </a:r>
+                      <a:endParaRPr lang="en-US" altLang="ko-KR" sz="1600" b="0" dirty="0">
+                        <a:solidFill>
+                          <a:schemeClr val="tx1"/>
+                        </a:solidFill>
+                      </a:endParaRPr>
+                    </a:p>
+                  </a:txBody>
+                  <a:tcPr anchor="ctr">
+                    <a:lnL w="12700" cap="flat" cmpd="sng" algn="ctr">
+                      <a:solidFill>
+                        <a:schemeClr val="tx1"/>
+                      </a:solidFill>
+                      <a:prstDash val="solid"/>
+                      <a:round/>
+                      <a:headEnd type="none" w="med" len="med"/>
+                      <a:tailEnd type="none" w="med" len="med"/>
+                    </a:lnL>
+                    <a:lnR w="12700" cap="flat" cmpd="sng" algn="ctr">
+                      <a:solidFill>
+                        <a:schemeClr val="tx1"/>
+                      </a:solidFill>
+                      <a:prstDash val="solid"/>
+                      <a:round/>
+                      <a:headEnd type="none" w="med" len="med"/>
+                      <a:tailEnd type="none" w="med" len="med"/>
+                    </a:lnR>
+                    <a:lnT w="12700" cap="flat" cmpd="sng" algn="ctr">
+                      <a:solidFill>
+                        <a:schemeClr val="tx1"/>
+                      </a:solidFill>
+                      <a:prstDash val="solid"/>
+                      <a:round/>
+                      <a:headEnd type="none" w="med" len="med"/>
+                      <a:tailEnd type="none" w="med" len="med"/>
+                    </a:lnT>
+                    <a:lnB w="12700" cap="flat" cmpd="sng" algn="ctr">
+                      <a:solidFill>
+                        <a:schemeClr val="tx1"/>
+                      </a:solidFill>
+                      <a:prstDash val="solid"/>
+                      <a:round/>
+                      <a:headEnd type="none" w="med" len="med"/>
+                      <a:tailEnd type="none" w="med" len="med"/>
+                    </a:lnB>
+                    <a:solidFill>
+                      <a:srgbClr val="D1D1D1"/>
+                    </a:solidFill>
+                  </a:tcPr>
+                </a:tc>
+                <a:tc>
+                  <a:txBody>
+                    <a:bodyPr/>
+                    <a:lstStyle/>
+                    <a:p>
+                      <a:pPr marL="0" indent="0" algn="l" latinLnBrk="0">
+                        <a:buFontTx/>
+                        <a:buNone/>
+                      </a:pPr>
+                      <a:endParaRPr lang="ko-KR" altLang="en-US" sz="1600" b="0" dirty="0">
+                        <a:solidFill>
+                          <a:schemeClr val="tx1"/>
+                        </a:solidFill>
+                      </a:endParaRPr>
+                    </a:p>
+                  </a:txBody>
+                  <a:tcPr anchor="ctr">
+                    <a:lnL w="12700" cap="flat" cmpd="sng" algn="ctr">
+                      <a:solidFill>
+                        <a:schemeClr val="tx1"/>
+                      </a:solidFill>
+                      <a:prstDash val="solid"/>
+                      <a:round/>
+                      <a:headEnd type="none" w="med" len="med"/>
+                      <a:tailEnd type="none" w="med" len="med"/>
+                    </a:lnL>
+                    <a:lnR w="12700" cap="flat" cmpd="sng" algn="ctr">
+                      <a:solidFill>
+                        <a:schemeClr val="tx1"/>
+                      </a:solidFill>
+                      <a:prstDash val="solid"/>
+                      <a:round/>
+                      <a:headEnd type="none" w="med" len="med"/>
+                      <a:tailEnd type="none" w="med" len="med"/>
+                    </a:lnR>
+                    <a:lnT w="12700" cap="flat" cmpd="sng" algn="ctr">
+                      <a:solidFill>
+                        <a:schemeClr val="tx1"/>
+                      </a:solidFill>
+                      <a:prstDash val="solid"/>
+                      <a:round/>
+                      <a:headEnd type="none" w="med" len="med"/>
+                      <a:tailEnd type="none" w="med" len="med"/>
+                    </a:lnT>
+                    <a:lnB w="12700" cap="flat" cmpd="sng" algn="ctr">
+                      <a:solidFill>
+                        <a:schemeClr val="tx1"/>
+                      </a:solidFill>
+                      <a:prstDash val="solid"/>
+                      <a:round/>
+                      <a:headEnd type="none" w="med" len="med"/>
+                      <a:tailEnd type="none" w="med" len="med"/>
+                    </a:lnB>
+                    <a:solidFill>
+                      <a:schemeClr val="bg1"/>
+                    </a:solidFill>
+                  </a:tcPr>
+                </a:tc>
+                <a:extLst>
+                  <a:ext uri="{0D108BD9-81ED-4DB2-BD59-A6C34878D82A}">
+                    <a16:rowId xmlns:a16="http://schemas.microsoft.com/office/drawing/2014/main" val="2837524034"/>
+                  </a:ext>
+                </a:extLst>
+              </a:tr>
+              <a:tr h="370840">
+                <a:tc>
+                  <a:txBody>
+                    <a:bodyPr/>
+                    <a:lstStyle/>
+                    <a:p>
+                      <a:pPr algn="ctr" latinLnBrk="0"/>
+                      <a:r>
+                        <a:rPr lang="en-US" altLang="ko-KR" sz="1600" b="1" dirty="0" err="1">
+                          <a:solidFill>
+                            <a:schemeClr val="tx1"/>
+                          </a:solidFill>
+                        </a:rPr>
+                        <a:t>PickUp</a:t>
+                      </a:r>
+                      <a:endParaRPr lang="en-US" altLang="ko-KR" sz="1600" b="1" dirty="0">
+                        <a:solidFill>
+                          <a:schemeClr val="tx1"/>
+                        </a:solidFill>
+                      </a:endParaRPr>
+                    </a:p>
+                  </a:txBody>
+                  <a:tcPr anchor="ctr">
+                    <a:lnL w="12700" cap="flat" cmpd="sng" algn="ctr">
+                      <a:solidFill>
+                        <a:schemeClr val="tx1"/>
+                      </a:solidFill>
+                      <a:prstDash val="solid"/>
+                      <a:round/>
+                      <a:headEnd type="none" w="med" len="med"/>
+                      <a:tailEnd type="none" w="med" len="med"/>
+                    </a:lnL>
+                    <a:lnR w="12700" cap="flat" cmpd="sng" algn="ctr">
+                      <a:solidFill>
+                        <a:schemeClr val="tx1"/>
+                      </a:solidFill>
+                      <a:prstDash val="solid"/>
+                      <a:round/>
+                      <a:headEnd type="none" w="med" len="med"/>
+                      <a:tailEnd type="none" w="med" len="med"/>
+                    </a:lnR>
+                    <a:lnT w="12700" cap="flat" cmpd="sng" algn="ctr">
+                      <a:solidFill>
+                        <a:schemeClr val="tx1"/>
+                      </a:solidFill>
+                      <a:prstDash val="solid"/>
+                      <a:round/>
+                      <a:headEnd type="none" w="med" len="med"/>
+                      <a:tailEnd type="none" w="med" len="med"/>
+                    </a:lnT>
+                    <a:lnB w="12700" cap="flat" cmpd="sng" algn="ctr">
+                      <a:solidFill>
+                        <a:schemeClr val="tx1"/>
+                      </a:solidFill>
+                      <a:prstDash val="solid"/>
+                      <a:round/>
+                      <a:headEnd type="none" w="med" len="med"/>
+                      <a:tailEnd type="none" w="med" len="med"/>
+                    </a:lnB>
+                    <a:solidFill>
+                      <a:srgbClr val="D1D1D1"/>
+                    </a:solidFill>
+                  </a:tcPr>
+                </a:tc>
+                <a:tc>
+                  <a:txBody>
+                    <a:bodyPr/>
+                    <a:lstStyle/>
+                    <a:p>
+                      <a:pPr algn="ctr" latinLnBrk="0"/>
+                      <a:r>
+                        <a:rPr lang="ko-KR" altLang="en-US" sz="1600" b="0" dirty="0">
+                          <a:solidFill>
+                            <a:schemeClr val="tx1"/>
+                          </a:solidFill>
+                        </a:rPr>
+                        <a:t>아이템 줍기</a:t>
+                      </a:r>
+                      <a:endParaRPr lang="en-US" altLang="ko-KR" sz="1600" b="0" dirty="0">
+                        <a:solidFill>
+                          <a:schemeClr val="tx1"/>
+                        </a:solidFill>
+                      </a:endParaRPr>
+                    </a:p>
+                  </a:txBody>
+                  <a:tcPr anchor="ctr">
+                    <a:lnL w="12700" cap="flat" cmpd="sng" algn="ctr">
+                      <a:solidFill>
+                        <a:schemeClr val="tx1"/>
+                      </a:solidFill>
+                      <a:prstDash val="solid"/>
+                      <a:round/>
+                      <a:headEnd type="none" w="med" len="med"/>
+                      <a:tailEnd type="none" w="med" len="med"/>
+                    </a:lnL>
+                    <a:lnR w="12700" cap="flat" cmpd="sng" algn="ctr">
+                      <a:solidFill>
+                        <a:schemeClr val="tx1"/>
+                      </a:solidFill>
+                      <a:prstDash val="solid"/>
+                      <a:round/>
+                      <a:headEnd type="none" w="med" len="med"/>
+                      <a:tailEnd type="none" w="med" len="med"/>
+                    </a:lnR>
+                    <a:lnT w="12700" cap="flat" cmpd="sng" algn="ctr">
+                      <a:solidFill>
+                        <a:schemeClr val="tx1"/>
+                      </a:solidFill>
+                      <a:prstDash val="solid"/>
+                      <a:round/>
+                      <a:headEnd type="none" w="med" len="med"/>
+                      <a:tailEnd type="none" w="med" len="med"/>
+                    </a:lnT>
+                    <a:lnB w="12700" cap="flat" cmpd="sng" algn="ctr">
+                      <a:solidFill>
+                        <a:schemeClr val="tx1"/>
+                      </a:solidFill>
+                      <a:prstDash val="solid"/>
+                      <a:round/>
+                      <a:headEnd type="none" w="med" len="med"/>
+                      <a:tailEnd type="none" w="med" len="med"/>
+                    </a:lnB>
+                    <a:solidFill>
+                      <a:srgbClr val="D1D1D1"/>
+                    </a:solidFill>
+                  </a:tcPr>
+                </a:tc>
+                <a:tc>
+                  <a:txBody>
+                    <a:bodyPr/>
+                    <a:lstStyle/>
+                    <a:p>
+                      <a:pPr marL="0" indent="0" algn="l" latinLnBrk="0">
+                        <a:buFontTx/>
+                        <a:buNone/>
+                      </a:pPr>
+                      <a:endParaRPr lang="ko-KR" altLang="en-US" sz="1600" b="0" dirty="0">
+                        <a:solidFill>
+                          <a:schemeClr val="tx1"/>
+                        </a:solidFill>
+                      </a:endParaRPr>
+                    </a:p>
+                  </a:txBody>
+                  <a:tcPr anchor="ctr">
+                    <a:lnL w="12700" cap="flat" cmpd="sng" algn="ctr">
+                      <a:solidFill>
+                        <a:schemeClr val="tx1"/>
+                      </a:solidFill>
+                      <a:prstDash val="solid"/>
+                      <a:round/>
+                      <a:headEnd type="none" w="med" len="med"/>
+                      <a:tailEnd type="none" w="med" len="med"/>
+                    </a:lnL>
+                    <a:lnR w="12700" cap="flat" cmpd="sng" algn="ctr">
+                      <a:solidFill>
+                        <a:schemeClr val="tx1"/>
+                      </a:solidFill>
+                      <a:prstDash val="solid"/>
+                      <a:round/>
+                      <a:headEnd type="none" w="med" len="med"/>
+                      <a:tailEnd type="none" w="med" len="med"/>
+                    </a:lnR>
+                    <a:lnT w="12700" cap="flat" cmpd="sng" algn="ctr">
+                      <a:solidFill>
+                        <a:schemeClr val="tx1"/>
+                      </a:solidFill>
+                      <a:prstDash val="solid"/>
+                      <a:round/>
+                      <a:headEnd type="none" w="med" len="med"/>
+                      <a:tailEnd type="none" w="med" len="med"/>
+                    </a:lnT>
+                    <a:lnB w="12700" cap="flat" cmpd="sng" algn="ctr">
+                      <a:solidFill>
+                        <a:schemeClr val="tx1"/>
+                      </a:solidFill>
+                      <a:prstDash val="solid"/>
+                      <a:round/>
+                      <a:headEnd type="none" w="med" len="med"/>
+                      <a:tailEnd type="none" w="med" len="med"/>
+                    </a:lnB>
+                    <a:solidFill>
+                      <a:schemeClr val="bg1"/>
+                    </a:solidFill>
+                  </a:tcPr>
+                </a:tc>
+                <a:extLst>
+                  <a:ext uri="{0D108BD9-81ED-4DB2-BD59-A6C34878D82A}">
+                    <a16:rowId xmlns:a16="http://schemas.microsoft.com/office/drawing/2014/main" val="3826874550"/>
+                  </a:ext>
+                </a:extLst>
+              </a:tr>
+              <a:tr h="370840">
+                <a:tc>
+                  <a:txBody>
+                    <a:bodyPr/>
+                    <a:lstStyle/>
+                    <a:p>
+                      <a:pPr algn="ctr" latinLnBrk="0"/>
+                      <a:r>
+                        <a:rPr lang="ko-KR" altLang="en-US" sz="1600" b="1" dirty="0">
+                          <a:solidFill>
+                            <a:schemeClr val="tx1"/>
+                          </a:solidFill>
+                        </a:rPr>
+                        <a:t>남의 가방 열기</a:t>
+                      </a:r>
+                      <a:endParaRPr lang="en-US" altLang="ko-KR" sz="1600" b="1" dirty="0">
+                        <a:solidFill>
+                          <a:schemeClr val="tx1"/>
+                        </a:solidFill>
+                      </a:endParaRPr>
+                    </a:p>
+                  </a:txBody>
+                  <a:tcPr anchor="ctr">
+                    <a:lnL w="12700" cap="flat" cmpd="sng" algn="ctr">
+                      <a:solidFill>
+                        <a:schemeClr val="tx1"/>
+                      </a:solidFill>
+                      <a:prstDash val="solid"/>
+                      <a:round/>
+                      <a:headEnd type="none" w="med" len="med"/>
+                      <a:tailEnd type="none" w="med" len="med"/>
+                    </a:lnL>
+                    <a:lnR w="12700" cap="flat" cmpd="sng" algn="ctr">
+                      <a:solidFill>
+                        <a:schemeClr val="tx1"/>
+                      </a:solidFill>
+                      <a:prstDash val="solid"/>
+                      <a:round/>
+                      <a:headEnd type="none" w="med" len="med"/>
+                      <a:tailEnd type="none" w="med" len="med"/>
+                    </a:lnR>
+                    <a:lnT w="12700" cap="flat" cmpd="sng" algn="ctr">
+                      <a:solidFill>
+                        <a:schemeClr val="tx1"/>
+                      </a:solidFill>
+                      <a:prstDash val="solid"/>
+                      <a:round/>
+                      <a:headEnd type="none" w="med" len="med"/>
+                      <a:tailEnd type="none" w="med" len="med"/>
+                    </a:lnT>
+                    <a:lnB w="12700" cap="flat" cmpd="sng" algn="ctr">
+                      <a:solidFill>
+                        <a:schemeClr val="tx1"/>
+                      </a:solidFill>
+                      <a:prstDash val="solid"/>
+                      <a:round/>
+                      <a:headEnd type="none" w="med" len="med"/>
+                      <a:tailEnd type="none" w="med" len="med"/>
+                    </a:lnB>
+                    <a:solidFill>
+                      <a:srgbClr val="D1D1D1"/>
+                    </a:solidFill>
+                  </a:tcPr>
+                </a:tc>
+                <a:tc>
+                  <a:txBody>
+                    <a:bodyPr/>
+                    <a:lstStyle/>
+                    <a:p>
+                      <a:pPr algn="ctr" latinLnBrk="0"/>
+                      <a:endParaRPr lang="en-US" altLang="ko-KR" sz="1600" b="0" dirty="0">
+                        <a:solidFill>
+                          <a:schemeClr val="tx1"/>
+                        </a:solidFill>
+                      </a:endParaRPr>
+                    </a:p>
+                  </a:txBody>
+                  <a:tcPr anchor="ctr">
+                    <a:lnL w="12700" cap="flat" cmpd="sng" algn="ctr">
+                      <a:solidFill>
+                        <a:schemeClr val="tx1"/>
+                      </a:solidFill>
+                      <a:prstDash val="solid"/>
+                      <a:round/>
+                      <a:headEnd type="none" w="med" len="med"/>
+                      <a:tailEnd type="none" w="med" len="med"/>
+                    </a:lnL>
+                    <a:lnR w="12700" cap="flat" cmpd="sng" algn="ctr">
+                      <a:solidFill>
+                        <a:schemeClr val="tx1"/>
+                      </a:solidFill>
+                      <a:prstDash val="solid"/>
+                      <a:round/>
+                      <a:headEnd type="none" w="med" len="med"/>
+                      <a:tailEnd type="none" w="med" len="med"/>
+                    </a:lnR>
+                    <a:lnT w="12700" cap="flat" cmpd="sng" algn="ctr">
+                      <a:solidFill>
+                        <a:schemeClr val="tx1"/>
+                      </a:solidFill>
+                      <a:prstDash val="solid"/>
+                      <a:round/>
+                      <a:headEnd type="none" w="med" len="med"/>
+                      <a:tailEnd type="none" w="med" len="med"/>
+                    </a:lnT>
+                    <a:lnB w="12700" cap="flat" cmpd="sng" algn="ctr">
+                      <a:solidFill>
+                        <a:schemeClr val="tx1"/>
+                      </a:solidFill>
+                      <a:prstDash val="solid"/>
+                      <a:round/>
+                      <a:headEnd type="none" w="med" len="med"/>
+                      <a:tailEnd type="none" w="med" len="med"/>
+                    </a:lnB>
+                    <a:solidFill>
+                      <a:srgbClr val="D1D1D1"/>
+                    </a:solidFill>
+                  </a:tcPr>
+                </a:tc>
+                <a:tc>
+                  <a:txBody>
+                    <a:bodyPr/>
+                    <a:lstStyle/>
+                    <a:p>
+                      <a:pPr marL="0" indent="0" algn="l" latinLnBrk="0">
+                        <a:buFontTx/>
+                        <a:buNone/>
+                      </a:pPr>
+                      <a:r>
+                        <a:rPr lang="en-US" altLang="ko-KR" sz="1600" b="0" dirty="0">
+                          <a:solidFill>
+                            <a:schemeClr val="tx1"/>
+                          </a:solidFill>
+                        </a:rPr>
+                        <a:t>(</a:t>
+                      </a:r>
+                      <a:r>
+                        <a:rPr lang="ko-KR" altLang="en-US" sz="1600" b="0" dirty="0">
+                          <a:solidFill>
+                            <a:schemeClr val="tx1"/>
+                          </a:solidFill>
+                        </a:rPr>
+                        <a:t>동료와 인벤토리 공유</a:t>
+                      </a:r>
+                      <a:r>
+                        <a:rPr lang="en-US" altLang="ko-KR" sz="1600" b="0" dirty="0">
+                          <a:solidFill>
+                            <a:schemeClr val="tx1"/>
+                          </a:solidFill>
+                        </a:rPr>
+                        <a:t>. </a:t>
+                      </a:r>
+                      <a:r>
+                        <a:rPr lang="ko-KR" altLang="en-US" sz="1600" b="0" dirty="0">
+                          <a:solidFill>
+                            <a:schemeClr val="tx1"/>
+                          </a:solidFill>
+                        </a:rPr>
+                        <a:t>추후 기재</a:t>
+                      </a:r>
+                      <a:r>
+                        <a:rPr lang="en-US" altLang="ko-KR" sz="1600" b="0" dirty="0">
+                          <a:solidFill>
+                            <a:schemeClr val="tx1"/>
+                          </a:solidFill>
+                        </a:rPr>
+                        <a:t>)</a:t>
+                      </a:r>
+                      <a:endParaRPr lang="ko-KR" altLang="en-US" sz="1600" b="0" dirty="0">
+                        <a:solidFill>
+                          <a:schemeClr val="tx1"/>
+                        </a:solidFill>
+                      </a:endParaRPr>
+                    </a:p>
+                  </a:txBody>
+                  <a:tcPr anchor="ctr">
+                    <a:lnL w="12700" cap="flat" cmpd="sng" algn="ctr">
+                      <a:solidFill>
+                        <a:schemeClr val="tx1"/>
+                      </a:solidFill>
+                      <a:prstDash val="solid"/>
+                      <a:round/>
+                      <a:headEnd type="none" w="med" len="med"/>
+                      <a:tailEnd type="none" w="med" len="med"/>
+                    </a:lnL>
+                    <a:lnR w="12700" cap="flat" cmpd="sng" algn="ctr">
+                      <a:solidFill>
+                        <a:schemeClr val="tx1"/>
+                      </a:solidFill>
+                      <a:prstDash val="solid"/>
+                      <a:round/>
+                      <a:headEnd type="none" w="med" len="med"/>
+                      <a:tailEnd type="none" w="med" len="med"/>
+                    </a:lnR>
+                    <a:lnT w="12700" cap="flat" cmpd="sng" algn="ctr">
+                      <a:solidFill>
+                        <a:schemeClr val="tx1"/>
+                      </a:solidFill>
+                      <a:prstDash val="solid"/>
+                      <a:round/>
+                      <a:headEnd type="none" w="med" len="med"/>
+                      <a:tailEnd type="none" w="med" len="med"/>
+                    </a:lnT>
+                    <a:lnB w="12700" cap="flat" cmpd="sng" algn="ctr">
+                      <a:solidFill>
+                        <a:schemeClr val="tx1"/>
+                      </a:solidFill>
+                      <a:prstDash val="solid"/>
+                      <a:round/>
+                      <a:headEnd type="none" w="med" len="med"/>
+                      <a:tailEnd type="none" w="med" len="med"/>
+                    </a:lnB>
+                    <a:solidFill>
+                      <a:schemeClr val="bg1"/>
+                    </a:solidFill>
+                  </a:tcPr>
+                </a:tc>
+                <a:extLst>
+                  <a:ext uri="{0D108BD9-81ED-4DB2-BD59-A6C34878D82A}">
+                    <a16:rowId xmlns:a16="http://schemas.microsoft.com/office/drawing/2014/main" val="2758531492"/>
+                  </a:ext>
+                </a:extLst>
+              </a:tr>
+            </a:tbl>
+          </a:graphicData>
+        </a:graphic>
+      </p:graphicFrame>
     </p:spTree>
     <p:extLst>
       <p:ext uri="{BB962C8B-B14F-4D97-AF65-F5344CB8AC3E}">
-        <p14:creationId xmlns:p14="http://schemas.microsoft.com/office/powerpoint/2010/main" val="1600899775"/>
+        <p14:creationId xmlns:p14="http://schemas.microsoft.com/office/powerpoint/2010/main" val="1188156224"/>
       </p:ext>
     </p:extLst>
   </p:cSld>
@@ -12847,13 +18660,7 @@
   <p:cSld>
     <p:spTree>
       <p:nvGrpSpPr>
-        <p:cNvPr id="1" name="">
-          <a:extLst>
-            <a:ext uri="{FF2B5EF4-FFF2-40B4-BE49-F238E27FC236}">
-              <a16:creationId xmlns:a16="http://schemas.microsoft.com/office/drawing/2014/main" id="{845BA530-2F7B-CE13-976C-74C179E84083}"/>
-            </a:ext>
-          </a:extLst>
-        </p:cNvPr>
+        <p:cNvPr id="1" name=""/>
         <p:cNvGrpSpPr/>
         <p:nvPr/>
       </p:nvGrpSpPr>
@@ -12870,7 +18677,7 @@
           <p:cNvPr id="2" name="제목 1">
             <a:extLst>
               <a:ext uri="{FF2B5EF4-FFF2-40B4-BE49-F238E27FC236}">
-                <a16:creationId xmlns:a16="http://schemas.microsoft.com/office/drawing/2014/main" id="{125735C3-7D66-E446-1EFD-6B86904D8694}"/>
+                <a16:creationId xmlns:a16="http://schemas.microsoft.com/office/drawing/2014/main" id="{2AF5AFFC-D638-726C-653B-442AB95AF15A}"/>
               </a:ext>
             </a:extLst>
           </p:cNvPr>
@@ -12888,7 +18695,7 @@
           <a:p>
             <a:r>
               <a:rPr lang="ko-KR" altLang="en-US" dirty="0"/>
-              <a:t>자원 배치 규칙</a:t>
+              <a:t>인벤토리</a:t>
             </a:r>
           </a:p>
         </p:txBody>
@@ -12898,7 +18705,7 @@
           <p:cNvPr id="3" name="내용 개체 틀 2">
             <a:extLst>
               <a:ext uri="{FF2B5EF4-FFF2-40B4-BE49-F238E27FC236}">
-                <a16:creationId xmlns:a16="http://schemas.microsoft.com/office/drawing/2014/main" id="{77FE5B80-9288-E492-19F5-2D4C2C0B9699}"/>
+                <a16:creationId xmlns:a16="http://schemas.microsoft.com/office/drawing/2014/main" id="{19E0E9B2-ADAB-2DA0-862E-0E4427843235}"/>
               </a:ext>
             </a:extLst>
           </p:cNvPr>
@@ -12914,71 +18721,7 @@
           <a:bodyPr/>
           <a:lstStyle/>
           <a:p>
-            <a:r>
-              <a:rPr lang="ko-KR" altLang="en-US" dirty="0"/>
-              <a:t>맵 종류</a:t>
-            </a:r>
-            <a:r>
-              <a:rPr lang="en-US" altLang="ko-KR" dirty="0"/>
-              <a:t>(</a:t>
-            </a:r>
-            <a:r>
-              <a:rPr lang="ko-KR" altLang="en-US" dirty="0"/>
-              <a:t>공장</a:t>
-            </a:r>
-            <a:r>
-              <a:rPr lang="en-US" altLang="ko-KR" dirty="0"/>
-              <a:t>/</a:t>
-            </a:r>
-            <a:r>
-              <a:rPr lang="ko-KR" altLang="en-US" dirty="0"/>
-              <a:t>임시</a:t>
-            </a:r>
-            <a:r>
-              <a:rPr lang="en-US" altLang="ko-KR" dirty="0"/>
-              <a:t>)</a:t>
-            </a:r>
-            <a:r>
-              <a:rPr lang="ko-KR" altLang="en-US" dirty="0"/>
-              <a:t>별 자원 배치 규칙</a:t>
-            </a:r>
-            <a:endParaRPr lang="en-US" altLang="ko-KR" dirty="0"/>
-          </a:p>
-          <a:p>
-            <a:pPr marL="0" indent="0">
-              <a:buNone/>
-            </a:pPr>
-            <a:endParaRPr lang="en-US" altLang="ko-KR" dirty="0"/>
-          </a:p>
-          <a:p>
-            <a:r>
-              <a:rPr lang="ko-KR" altLang="en-US" dirty="0"/>
-              <a:t>자원</a:t>
-            </a:r>
-            <a:r>
-              <a:rPr lang="en-US" altLang="ko-KR" dirty="0"/>
-              <a:t>(</a:t>
-            </a:r>
-            <a:r>
-              <a:rPr lang="ko-KR" altLang="en-US" dirty="0"/>
-              <a:t>아이템</a:t>
-            </a:r>
-            <a:r>
-              <a:rPr lang="en-US" altLang="ko-KR" dirty="0"/>
-              <a:t>)</a:t>
-            </a:r>
-            <a:r>
-              <a:rPr lang="ko-KR" altLang="en-US" dirty="0"/>
-              <a:t>이 배치될 수 있는 위치</a:t>
-            </a:r>
-            <a:r>
-              <a:rPr lang="en-US" altLang="ko-KR" dirty="0"/>
-              <a:t>, </a:t>
-            </a:r>
-            <a:r>
-              <a:rPr lang="ko-KR" altLang="en-US" dirty="0"/>
-              <a:t>난이도에 따른 차이를 느낄 수 있게끔 작성</a:t>
-            </a:r>
+            <a:endParaRPr lang="ko-KR" altLang="en-US"/>
           </a:p>
         </p:txBody>
       </p:sp>
@@ -12987,7 +18730,7 @@
           <p:cNvPr id="4" name="슬라이드 번호 개체 틀 3">
             <a:extLst>
               <a:ext uri="{FF2B5EF4-FFF2-40B4-BE49-F238E27FC236}">
-                <a16:creationId xmlns:a16="http://schemas.microsoft.com/office/drawing/2014/main" id="{FE076476-714C-9D4A-081F-549F125D3A5E}"/>
+                <a16:creationId xmlns:a16="http://schemas.microsoft.com/office/drawing/2014/main" id="{31E23533-1530-724B-F64D-F2A36BBF143F}"/>
               </a:ext>
             </a:extLst>
           </p:cNvPr>
@@ -13014,7 +18757,7 @@
     </p:spTree>
     <p:extLst>
       <p:ext uri="{BB962C8B-B14F-4D97-AF65-F5344CB8AC3E}">
-        <p14:creationId xmlns:p14="http://schemas.microsoft.com/office/powerpoint/2010/main" val="1612175918"/>
+        <p14:creationId xmlns:p14="http://schemas.microsoft.com/office/powerpoint/2010/main" val="600039487"/>
       </p:ext>
     </p:extLst>
   </p:cSld>
